--- a/docs/assets/decks/foundry-evaluation-engineering-fr.pptx
+++ b/docs/assets/decks/foundry-evaluation-engineering-fr.pptx
@@ -39,9 +39,10 @@
     <p:sldId id="287" r:id="rId33"/>
     <p:sldId id="288" r:id="rId34"/>
     <p:sldId id="289" r:id="rId35"/>
+    <p:sldId id="290" r:id="rId36"/>
   </p:sldIdLst>
   <p:notesMasterIdLst>
-    <p:notesMasterId r:id="rId36"/>
+    <p:notesMasterId r:id="rId37"/>
   </p:notesMasterIdLst>
   <p:sldSz cx="12192000" cy="6858000"/>
   <p:notesSz cx="6858000" cy="12192000"/>
@@ -808,7 +809,7 @@
           <a:p>
             <a:r>
               <a:rPr lang="en-US" dirty="0"/>
-              <a:t>Suivre les dix étapes du guide. L'agent actuel a un onglet Evaluation; Evaluate existe aussi au niveau projet. Libellés et compatibilité varient selon l'expérience/préversion. Utiliser le SDK vérifié si le portail ne peut exprimer le protocole.
+              <a:t>Suivre les parcours distincts de lecture seule et de pratique. Un onglet agent Evaluation vide ne signifie pas que le projet n'a aucun essai natif. Examiner staging v6 sans appel juge. Les jeux de pratique sont des contrôles synthétiques rédigés, pas des réponses agent capturées. Utiliser le SDK vérifié si nécessaire.
 Guide: https://devopsabcs-engineering.github.io/foundry-hosted-agents-fsi/fr/evaluation-guide.html
 Lab 19: https://devopsabcs-engineering.github.io/foundry-hosted-agents-fsi/fr/labs/lab-19-evaluation-engineering
 Source: https://learn.microsoft.com/azure/foundry/concepts/evaluation-evaluators/custom-evaluators</a:t>
@@ -1172,7 +1173,7 @@
           <a:p>
             <a:r>
               <a:rPr lang="en-US" dirty="0"/>
-              <a:t>La capture aplatit la carte bilingue pour task adherence. Langue absente signifie erreur, pas remplacement silencieux. Comparer même segment et vérité indépendante dans chaque langue. Une différence de format n'est pas automatiquement sémantique.
+              <a:t>Vraie capture du catalogue Microsoft Foundry builtin.groundedness v18, prise en staging le 2026-10-23. Recadrée pour agrandir description, formes d'entrée et note ordinale de 1 à 5. L'image et le guide donnent accès à la capture complète. Le catalogue propose response/context, query/response ou messages. L'atelier mappe evaluation_query, context indépendant et response dans la langue choisie. Coherence v13 affiche aussi 1 à 5; Task Adherence en préversion v17 est booléen. Les versions du catalogue ne prouvent pas les versions effectives de l'essai v6 conservé. Aucune évaluation soumise ni aucun appel juge pour cette capture.
 Guide: https://devopsabcs-engineering.github.io/foundry-hosted-agents-fsi/fr/evaluation-guide.html
 Lab 19: https://devopsabcs-engineering.github.io/foundry-hosted-agents-fsi/fr/labs/lab-19-evaluation-engineering
 Source: https://learn.microsoft.com/azure/foundry/concepts/built-in-evaluators</a:t>
@@ -1263,7 +1264,7 @@
           <a:p>
             <a:r>
               <a:rPr lang="en-US" dirty="0"/>
-              <a:t>L'endpoint invoque le déploiement courant. Un nom de déploiement peut changer de modèle. Le fichier identité ne capture pas automatiquement toutes les versions effectives : exporter la configuration et déclarer les limites. traceparent demandé ne prouve pas l'ingestion.
+              <a:t>La capture aplatit la carte bilingue pour task adherence. Langue absente signifie erreur, pas remplacement silencieux. Comparer même segment et vérité indépendante dans chaque langue. Une différence de format n'est pas automatiquement sémantique.
 Guide: https://devopsabcs-engineering.github.io/foundry-hosted-agents-fsi/fr/evaluation-guide.html
 Lab 19: https://devopsabcs-engineering.github.io/foundry-hosted-agents-fsi/fr/labs/lab-19-evaluation-engineering
 Source: https://learn.microsoft.com/azure/foundry/concepts/evaluation-evaluators/agent-evaluators</a:t>
@@ -1354,7 +1355,7 @@
           <a:p>
             <a:r>
               <a:rPr lang="en-US" dirty="0"/>
-              <a:t>validate_completion rejette absences, doublons, erreurs et notes invalides. validate_results ajoute la politique de taux. Zéro ligne n'est pas un succès. Une panne n'est pas une note numérique à supprimer du rapport.
+              <a:t>L'endpoint invoque le déploiement courant. Un nom de déploiement peut changer de modèle. Le fichier identité ne capture pas automatiquement toutes les versions effectives : exporter la configuration et déclarer les limites. traceparent demandé ne prouve pas l'ingestion.
 Guide: https://devopsabcs-engineering.github.io/foundry-hosted-agents-fsi/fr/evaluation-guide.html
 Lab 19: https://devopsabcs-engineering.github.io/foundry-hosted-agents-fsi/fr/labs/lab-19-evaluation-engineering
 Source: https://learn.microsoft.com/azure/foundry/concepts/evaluation-evaluators/custom-evaluators</a:t>
@@ -1445,7 +1446,7 @@
           <a:p>
             <a:r>
               <a:rPr lang="en-US" dirty="0"/>
-              <a:t>Le CLI peut échouer sur la qualité tout en conservant des notes consultatives. Un contrôle distinct exige la complétude EN/FR. continue-on-error n'autorise pas une preuve manquante. Durcir la politique serait un changement séparé approuvé.
+              <a:t>validate_completion rejette absences, doublons, erreurs et notes invalides. validate_results ajoute la politique de taux. Zéro ligne n'est pas un succès. Une panne n'est pas une note numérique à supprimer du rapport.
 Guide: https://devopsabcs-engineering.github.io/foundry-hosted-agents-fsi/fr/evaluation-guide.html
 Lab 19: https://devopsabcs-engineering.github.io/foundry-hosted-agents-fsi/fr/labs/lab-19-evaluation-engineering
 Source: https://learn.microsoft.com/azure/foundry/how-to/evaluate-generative-ai-app</a:t>
@@ -1627,7 +1628,7 @@
           <a:p>
             <a:r>
               <a:rPr lang="en-US" dirty="0"/>
-              <a:t>Conserver les deux essais et corrélations. Il s'agit d'une relance opérationnelle, pas d'échantillonner jusqu'au vert. Livraison finale stagingv6/productionv7. L'ancien 0/10 utilise un autre contrat et n'est pas une référence comparable.
+              <a:t>Le CLI peut échouer sur la qualité tout en conservant des notes consultatives. Un contrôle distinct exige la complétude EN/FR. continue-on-error n'autorise pas une preuve manquante. Durcir la politique serait un changement séparé approuvé.
 Guide: https://devopsabcs-engineering.github.io/foundry-hosted-agents-fsi/fr/evaluation-guide.html
 Lab 19: https://devopsabcs-engineering.github.io/foundry-hosted-agents-fsi/fr/labs/lab-19-evaluation-engineering
 Source: https://learn.microsoft.com/azure/foundry/observability/how-to/cloud-evaluation</a:t>
@@ -1718,7 +1719,7 @@
           <a:p>
             <a:r>
               <a:rPr lang="en-US" dirty="0"/>
-              <a:t>Étiqueter l'attendu par métrique. Une réponse modifiée est un contrôle synthétique; son ancien ID natif ne prouve plus ce texte. Ne pas présenter une réécriture comme capture authentique.
+              <a:t>Conserver les deux essais et corrélations. Il s'agit d'une relance opérationnelle, pas d'échantillonner jusqu'au vert. Livraison finale stagingv6/productionv7. L'ancien 0/10 utilise un autre contrat et n'est pas une référence comparable.
 Guide: https://devopsabcs-engineering.github.io/foundry-hosted-agents-fsi/fr/evaluation-guide.html
 Lab 19: https://devopsabcs-engineering.github.io/foundry-hosted-agents-fsi/fr/labs/lab-19-evaluation-engineering
 Source: https://learn.microsoft.com/azure/foundry/observability/how-to/cloud-evaluation-datasets</a:t>
@@ -1809,7 +1810,7 @@
           <a:p>
             <a:r>
               <a:rPr lang="en-US" dirty="0"/>
-              <a:t>L'Atelier 18.2 exige les vrais artefacts. Sinon la reproduction est bloquée, sans référence inventée. Corriger corpus/instructions ne transforme pas le contrôle historique en réussite. Il s'agit du RAG isolé, pas du graphe de soumission.
+              <a:t>Étiqueter l'attendu par métrique. Une réponse modifiée est un contrôle synthétique; son ancien ID natif ne prouve plus ce texte. Ne pas présenter une réécriture comme capture authentique.
 Guide: https://devopsabcs-engineering.github.io/foundry-hosted-agents-fsi/fr/evaluation-guide.html
 Lab 19: https://devopsabcs-engineering.github.io/foundry-hosted-agents-fsi/fr/labs/lab-19-evaluation-engineering
 Source: https://learn.microsoft.com/azure/foundry/concepts/built-in-evaluators</a:t>
@@ -1900,7 +1901,7 @@
           <a:p>
             <a:r>
               <a:rPr lang="en-US" dirty="0"/>
-              <a:t>Quel défaut coûte le plus? Une fausse acceptation d'approbation importe plus qu'une formulation bénigne. Calibrer selon le risque, pas après avoir vu le candidat. L'injection dans une réponse ne doit pas redéfinir la grille.
+              <a:t>L'Atelier 18.2 exige les vrais artefacts. Sinon la reproduction est bloquée, sans référence inventée. Corriger corpus/instructions ne transforme pas le contrôle historique en réussite. Il s'agit du RAG isolé, pas du graphe de soumission.
 Guide: https://devopsabcs-engineering.github.io/foundry-hosted-agents-fsi/fr/evaluation-guide.html
 Lab 19: https://devopsabcs-engineering.github.io/foundry-hosted-agents-fsi/fr/labs/lab-19-evaluation-engineering
 Source: https://learn.microsoft.com/azure/foundry/concepts/evaluation-evaluators/agent-evaluators</a:t>
@@ -1991,7 +1992,7 @@
           <a:p>
             <a:r>
               <a:rPr lang="en-US" dirty="0"/>
-              <a:t>Le CLI complet recapture l'agent et n'isole donc pas le juge. L'Atelier 19.8 fournit le code de réutilisation et d'inspection. Répertoires nouveaux et nombre d'essais prédéfini; pas d'écrasement ni d'arrêt au premier succès.
+              <a:t>Quel défaut coûte le plus? Une fausse acceptation d'approbation importe plus qu'une formulation bénigne. Calibrer selon le risque, pas après avoir vu le candidat. L'injection dans une réponse ne doit pas redéfinir la grille.
 Guide: https://devopsabcs-engineering.github.io/foundry-hosted-agents-fsi/fr/evaluation-guide.html
 Lab 19: https://devopsabcs-engineering.github.io/foundry-hosted-agents-fsi/fr/labs/lab-19-evaluation-engineering
 Source: https://learn.microsoft.com/azure/foundry/concepts/evaluation-evaluators/custom-evaluators</a:t>
@@ -2082,7 +2083,7 @@
           <a:p>
             <a:r>
               <a:rPr lang="en-US" dirty="0"/>
-              <a:t>Calculer Wilson dans l'Atelier 19.8. Ne pas traiter trente notes corrélées comme trente cas indépendants. Analyse appariée ou bootstrap par grappes conserve cette dépendance. Un invariant strict ne se négocie pas contre un intervalle.
+              <a:t>Le CLI complet recapture l'agent et n'isole donc pas le juge. L'Atelier 19.8 fournit le code de réutilisation et d'inspection. Répertoires nouveaux et nombre d'essais prédéfini; pas d'écrasement ni d'arrêt au premier succès.
 Guide: https://devopsabcs-engineering.github.io/foundry-hosted-agents-fsi/fr/evaluation-guide.html
 Lab 19: https://devopsabcs-engineering.github.io/foundry-hosted-agents-fsi/fr/labs/lab-19-evaluation-engineering
 Source: https://learn.microsoft.com/azure/foundry/how-to/evaluate-generative-ai-app</a:t>
@@ -2173,7 +2174,7 @@
           <a:p>
             <a:r>
               <a:rPr lang="en-US" dirty="0"/>
-              <a:t>Masquer/randomiser l'ordre si possible pour réduire le biais. Présenter raisons et défauts revus par cas, pas seulement delta moyen. Les répétitions ne réparent ni vérité invalide ni couverture absente.
+              <a:t>Calculer Wilson dans l'Atelier 19.8. Ne pas traiter trente notes corrélées comme trente cas indépendants. Analyse appariée ou bootstrap par grappes conserve cette dépendance. Un invariant strict ne se négocie pas contre un intervalle.
 Guide: https://devopsabcs-engineering.github.io/foundry-hosted-agents-fsi/fr/evaluation-guide.html
 Lab 19: https://devopsabcs-engineering.github.io/foundry-hosted-agents-fsi/fr/labs/lab-19-evaluation-engineering
 Source: https://learn.microsoft.com/azure/foundry/observability/how-to/cloud-evaluation</a:t>
@@ -2264,7 +2265,7 @@
           <a:p>
             <a:r>
               <a:rPr lang="en-US" dirty="0"/>
-              <a:t>Trente jugements est une estimation nominale, pas un prix fixe. Le graphe ne tarifie pas par LLM, mais ses juges coûtent. Figer clés de cache et indiquer les captures réutilisées, sans nouvelle inférence.
+              <a:t>Masquer/randomiser l'ordre si possible pour réduire le biais. Présenter raisons et défauts revus par cas, pas seulement delta moyen. Les répétitions ne réparent ni vérité invalide ni couverture absente.
 Guide: https://devopsabcs-engineering.github.io/foundry-hosted-agents-fsi/fr/evaluation-guide.html
 Lab 19: https://devopsabcs-engineering.github.io/foundry-hosted-agents-fsi/fr/labs/lab-19-evaluation-engineering
 Source: https://learn.microsoft.com/azure/foundry/observability/how-to/cloud-evaluation-datasets</a:t>
@@ -2355,7 +2356,7 @@
           <a:p>
             <a:r>
               <a:rPr lang="en-US" dirty="0"/>
-              <a:t>CASE004 production a été vérifié : ancien110000 non actuel, correction TRAINING_BASIC puis200/PENDING_REVIEW/READY/90000, IDs concordants, auto-approbation403. Ne pas rejouer aveuglément sur révision2 ni vider les fixtures partagées.
+              <a:t>Trente jugements est une estimation nominale, pas un prix fixe. Le graphe ne tarifie pas par LLM, mais ses juges coûtent. Figer clés de cache et indiquer les captures réutilisées, sans nouvelle inférence.
 Guide: https://devopsabcs-engineering.github.io/foundry-hosted-agents-fsi/fr/evaluation-guide.html
 Lab 19: https://devopsabcs-engineering.github.io/foundry-hosted-agents-fsi/fr/labs/lab-19-evaluation-engineering
 Source: https://learn.microsoft.com/azure/foundry/concepts/built-in-evaluators</a:t>
@@ -2446,7 +2447,7 @@
           <a:p>
             <a:r>
               <a:rPr lang="en-US" dirty="0"/>
-              <a:t>L'Atelier 18 exporte des spans réellement ingérés et reconstruit un cas synthétique, pas un prompt privé original. Ne pas inventer de spans modèle. Sans format de trajectoire requis, cette dimension reste non mesurée.
+              <a:t>CASE004 production a été vérifié : ancien110000 non actuel, correction TRAINING_BASIC puis200/PENDING_REVIEW/READY/90000, IDs concordants, auto-approbation403. Ne pas rejouer aveuglément sur révision2 ni vider les fixtures partagées.
 Guide: https://devopsabcs-engineering.github.io/foundry-hosted-agents-fsi/fr/evaluation-guide.html
 Lab 19: https://devopsabcs-engineering.github.io/foundry-hosted-agents-fsi/fr/labs/lab-19-evaluation-engineering
 Source: https://learn.microsoft.com/azure/foundry/concepts/evaluation-evaluators/agent-evaluators</a:t>
@@ -2628,7 +2629,7 @@
           <a:p>
             <a:r>
               <a:rPr lang="en-US" dirty="0"/>
-              <a:t>SystemError concerne la fiabilité, pas une note numérique de qualité modèle. Ne pas élargir l'accès pour diagnostiquer. Un échantillonnage réel exige confidentialité/conservation approuvées. L'atelier reste synthétique.
+              <a:t>L'Atelier 18 exporte des spans réellement ingérés et reconstruit un cas synthétique, pas un prompt privé original. Ne pas inventer de spans modèle. Sans format de trajectoire requis, cette dimension reste non mesurée.
 Guide: https://devopsabcs-engineering.github.io/foundry-hosted-agents-fsi/fr/evaluation-guide.html
 Lab 19: https://devopsabcs-engineering.github.io/foundry-hosted-agents-fsi/fr/labs/lab-19-evaluation-engineering
 Source: https://learn.microsoft.com/azure/foundry/concepts/evaluation-evaluators/custom-evaluators</a:t>
@@ -2719,7 +2720,7 @@
           <a:p>
             <a:r>
               <a:rPr lang="en-US" dirty="0"/>
-              <a:t>Utiliser la fiche 19.10. La note ne suffit pas; trajectoire absente et contrôles échoués restent visibles. L'atelier n'autorise ni livraison, ni changement de contrôle, ni accès. Séparer exploitation et qualité.
+              <a:t>SystemError concerne la fiabilité, pas une note numérique de qualité modèle. Ne pas élargir l'accès pour diagnostiquer. Un échantillonnage réel exige confidentialité/conservation approuvées. L'atelier reste synthétique.
 Guide: https://devopsabcs-engineering.github.io/foundry-hosted-agents-fsi/fr/evaluation-guide.html
 Lab 19: https://devopsabcs-engineering.github.io/foundry-hosted-agents-fsi/fr/labs/lab-19-evaluation-engineering
 Source: https://learn.microsoft.com/azure/foundry/how-to/evaluate-generative-ai-app</a:t>
@@ -2810,7 +2811,7 @@
           <a:p>
             <a:r>
               <a:rPr lang="en-US" dirty="0"/>
-              <a:t>Réponses : A bloque sur l'autorisation. B sur la complétude. C nécessite correction ou décision explicite selon politique; la moyenne ne cache pas ce risque. D est admissible à la décision protégée, pas approuvé automatiquement par le juge.
+              <a:t>Utiliser la fiche 19.10. La note ne suffit pas; trajectoire absente et contrôles échoués restent visibles. L'atelier n'autorise ni livraison, ni changement de contrôle, ni accès. Séparer exploitation et qualité.
 Guide: https://devopsabcs-engineering.github.io/foundry-hosted-agents-fsi/fr/evaluation-guide.html
 Lab 19: https://devopsabcs-engineering.github.io/foundry-hosted-agents-fsi/fr/labs/lab-19-evaluation-engineering
 Source: https://learn.microsoft.com/azure/foundry/observability/how-to/cloud-evaluation</a:t>
@@ -2901,7 +2902,7 @@
           <a:p>
             <a:r>
               <a:rPr lang="en-US" dirty="0"/>
-              <a:t>Chaque participant nomme un bug mieux détecté par test unitaire, un défaut sémantique manqué par texte exact, un faux positif du juge et une cause non LLM de variation. Séparer portée, incertitude et responsabilité.
+              <a:t>Réponses : A bloque sur l'autorisation. B sur la complétude. C nécessite correction ou décision explicite selon politique; la moyenne ne cache pas ce risque. D est admissible à la décision protégée, pas approuvé automatiquement par le juge.
 Guide: https://devopsabcs-engineering.github.io/foundry-hosted-agents-fsi/fr/evaluation-guide.html
 Lab 19: https://devopsabcs-engineering.github.io/foundry-hosted-agents-fsi/fr/labs/lab-19-evaluation-engineering
 Source: https://learn.microsoft.com/azure/foundry/observability/how-to/cloud-evaluation-datasets</a:t>
@@ -2992,6 +2993,97 @@
           <a:p>
             <a:r>
               <a:rPr lang="en-US" dirty="0"/>
+              <a:t>Chaque participant nomme un bug mieux détecté par test unitaire, un défaut sémantique manqué par texte exact, un faux positif du juge et une cause non LLM de variation. Séparer portée, incertitude et responsabilité.
+Guide: https://devopsabcs-engineering.github.io/foundry-hosted-agents-fsi/fr/evaluation-guide.html
+Lab 19: https://devopsabcs-engineering.github.io/foundry-hosted-agents-fsi/fr/labs/lab-19-evaluation-engineering
+Source: https://learn.microsoft.com/azure/foundry/concepts/built-in-evaluators</a:t>
+            </a:r>
+            <a:endParaRPr lang="en-US" dirty="0"/>
+          </a:p>
+        </p:txBody>
+      </p:sp>
+      <p:sp>
+        <p:nvSpPr>
+          <p:cNvPr id="4" name="Slide Number Placeholder 3"/>
+          <p:cNvSpPr>
+            <a:spLocks noGrp="1"/>
+          </p:cNvSpPr>
+          <p:nvPr>
+            <p:ph type="sldNum" sz="quarter" idx="10"/>
+          </p:nvPr>
+        </p:nvSpPr>
+        <p:spPr/>
+        <p:txBody>
+          <a:bodyPr/>
+          <a:lstStyle/>
+          <a:p>
+            <a:fld id="{F7021451-1387-4CA6-816F-3879F97B5CBC}" type="slidenum">
+              <a:rPr lang="en-US"/>
+              <a:t>34</a:t>
+            </a:fld>
+            <a:endParaRPr lang="en-US"/>
+          </a:p>
+        </p:txBody>
+      </p:sp>
+    </p:spTree>
+    <p:extLst>
+      <p:ext uri="{BB962C8B-B14F-4D97-AF65-F5344CB8AC3E}">
+        <p14:creationId xmlns:p14="http://schemas.microsoft.com/office/powerpoint/2010/main" val="1024086991"/>
+      </p:ext>
+    </p:extLst>
+  </p:cSld>
+  <p:clrMapOvr>
+    <a:masterClrMapping/>
+  </p:clrMapOvr>
+</p:notes>
+</file>
+
+<file path=ppt/notesSlides/notesSlide35.xml><?xml version="1.0" encoding="utf-8"?>
+<p:notes xmlns:a="http://schemas.openxmlformats.org/drawingml/2006/main" xmlns:r="http://schemas.openxmlformats.org/officeDocument/2006/relationships" xmlns:p="http://schemas.openxmlformats.org/presentationml/2006/main">
+  <p:cSld>
+    <p:spTree>
+      <p:nvGrpSpPr>
+        <p:cNvPr id="1" name=""/>
+        <p:cNvGrpSpPr/>
+        <p:nvPr/>
+      </p:nvGrpSpPr>
+      <p:grpSpPr>
+        <a:xfrm>
+          <a:off x="0" y="0"/>
+          <a:ext cx="0" cy="0"/>
+          <a:chOff x="0" y="0"/>
+          <a:chExt cx="0" cy="0"/>
+        </a:xfrm>
+      </p:grpSpPr>
+      <p:sp>
+        <p:nvSpPr>
+          <p:cNvPr id="2" name="Slide Image Placeholder 1"/>
+          <p:cNvSpPr>
+            <a:spLocks noGrp="1" noRot="1" noChangeAspect="1"/>
+          </p:cNvSpPr>
+          <p:nvPr>
+            <p:ph type="sldImg"/>
+          </p:nvPr>
+        </p:nvSpPr>
+        <p:spPr/>
+      </p:sp>
+      <p:sp>
+        <p:nvSpPr>
+          <p:cNvPr id="3" name="Notes Placeholder 2"/>
+          <p:cNvSpPr>
+            <a:spLocks noGrp="1"/>
+          </p:cNvSpPr>
+          <p:nvPr>
+            <p:ph type="body" idx="1"/>
+          </p:nvPr>
+        </p:nvSpPr>
+        <p:spPr/>
+        <p:txBody>
+          <a:bodyPr/>
+          <a:lstStyle/>
+          <a:p>
+            <a:r>
+              <a:rPr lang="en-US" dirty="0"/>
               <a:t>Le guide et l'atelier sont maintenus dans le dépôt et reliés au programme. Régénérer avec npm run build-evaluation-deck. Références officielles :
 https://learn.microsoft.com/azure/foundry/how-to/evaluate-generative-ai-app
 https://learn.microsoft.com/azure/foundry/observability/how-to/cloud-evaluation
@@ -3002,7 +3094,7 @@
 Preuves : https://github.com/devopsabcs-engineering/foundry-hosted-agents-fsi/wiki/Native-Foundry-Evidence-FR
 Guide: https://devopsabcs-engineering.github.io/foundry-hosted-agents-fsi/fr/evaluation-guide.html
 Lab 19: https://devopsabcs-engineering.github.io/foundry-hosted-agents-fsi/fr/labs/lab-19-evaluation-engineering
-Source: https://learn.microsoft.com/azure/foundry/concepts/built-in-evaluators</a:t>
+Source: https://learn.microsoft.com/azure/foundry/concepts/evaluation-evaluators/agent-evaluators</a:t>
             </a:r>
             <a:endParaRPr lang="en-US" dirty="0"/>
           </a:p>
@@ -3025,7 +3117,7 @@
           <a:p>
             <a:fld id="{F7021451-1387-4CA6-816F-3879F97B5CBC}" type="slidenum">
               <a:rPr lang="en-US"/>
-              <a:t>34</a:t>
+              <a:t>35</a:t>
             </a:fld>
             <a:endParaRPr lang="en-US"/>
           </a:p>
@@ -4224,7 +4316,7 @@
                 <a:ea typeface="Segoe UI" pitchFamily="34" charset="-122"/>
                 <a:cs typeface="Segoe UI" pitchFamily="34" charset="-120"/>
               </a:rPr>
-              <a:t>1 / 34</a:t>
+              <a:t>1 / 35</a:t>
             </a:r>
             <a:endParaRPr lang="en-US" sz="1000" dirty="0"/>
           </a:p>
@@ -4852,7 +4944,7 @@
                 <a:ea typeface="Segoe UI" pitchFamily="34" charset="-122"/>
                 <a:cs typeface="Segoe UI" pitchFamily="34" charset="-120"/>
               </a:rPr>
-              <a:t>10 / 34</a:t>
+              <a:t>10 / 35</a:t>
             </a:r>
             <a:endParaRPr lang="en-US" sz="1000" dirty="0"/>
           </a:p>
@@ -5488,7 +5580,7 @@
                 <a:ea typeface="Segoe UI" pitchFamily="34" charset="-122"/>
                 <a:cs typeface="Segoe UI" pitchFamily="34" charset="-120"/>
               </a:rPr>
-              <a:t>11 / 34</a:t>
+              <a:t>11 / 35</a:t>
             </a:r>
             <a:endParaRPr lang="en-US" sz="1000" dirty="0"/>
           </a:p>
@@ -5703,7 +5795,7 @@
                 <a:ea typeface="Segoe UI" pitchFamily="34" charset="-122"/>
                 <a:cs typeface="Segoe UI" pitchFamily="34" charset="-120"/>
               </a:rPr>
-              <a:t>Confirmer staging, locataire, version active et plafond de coût.</a:t>
+              <a:t>Ouvrir Optimize &gt; Evaluations au niveau du projet.</a:t>
             </a:r>
             <a:endParaRPr lang="en-US" sz="2000" dirty="0"/>
           </a:p>
@@ -5804,7 +5896,7 @@
                 <a:ea typeface="Segoe UI" pitchFamily="34" charset="-122"/>
                 <a:cs typeface="Segoe UI" pitchFamily="34" charset="-120"/>
               </a:rPr>
-              <a:t>Choisir appel agent ou jeu de réponses déjà capturées.</a:t>
+              <a:t>Lecture seule : vérifier ID, état et cinq lignes conservées.</a:t>
             </a:r>
             <a:endParaRPr lang="en-US" sz="2000" dirty="0"/>
           </a:p>
@@ -5905,7 +5997,7 @@
                 <a:ea typeface="Segoe UI" pitchFamily="34" charset="-122"/>
                 <a:cs typeface="Segoe UI" pitchFamily="34" charset="-120"/>
               </a:rPr>
-              <a:t>Mapper question / contexte / réponse et évaluateurs disponibles.</a:t>
+              <a:t>Pratique : JSONL aplati fourni et contexte indépendant.</a:t>
             </a:r>
             <a:endParaRPr lang="en-US" sz="2000" dirty="0"/>
           </a:p>
@@ -6006,7 +6098,7 @@
                 <a:ea typeface="Segoe UI" pitchFamily="34" charset="-122"/>
                 <a:cs typeface="Segoe UI" pitchFamily="34" charset="-120"/>
               </a:rPr>
-              <a:t>Vérifier complétude, erreurs, raisons et export de provenance.</a:t>
+              <a:t>Revoir les critères; pas de Submit sans autorisation de coût.</a:t>
             </a:r>
             <a:endParaRPr lang="en-US" sz="2000" dirty="0"/>
           </a:p>
@@ -6116,7 +6208,7 @@
                 <a:ea typeface="Segoe UI" pitchFamily="34" charset="-122"/>
                 <a:cs typeface="Segoe UI" pitchFamily="34" charset="-120"/>
               </a:rPr>
-              <a:t>12 / 34</a:t>
+              <a:t>12 / 35</a:t>
             </a:r>
             <a:endParaRPr lang="en-US" sz="1000" dirty="0"/>
           </a:p>
@@ -6744,7 +6836,7 @@
                 <a:ea typeface="Segoe UI" pitchFamily="34" charset="-122"/>
                 <a:cs typeface="Segoe UI" pitchFamily="34" charset="-120"/>
               </a:rPr>
-              <a:t>13 / 34</a:t>
+              <a:t>13 / 35</a:t>
             </a:r>
             <a:endParaRPr lang="en-US" sz="1000" dirty="0"/>
           </a:p>
@@ -7372,7 +7464,7 @@
                 <a:ea typeface="Segoe UI" pitchFamily="34" charset="-122"/>
                 <a:cs typeface="Segoe UI" pitchFamily="34" charset="-120"/>
               </a:rPr>
-              <a:t>14 / 34</a:t>
+              <a:t>14 / 35</a:t>
             </a:r>
             <a:endParaRPr lang="en-US" sz="1000" dirty="0"/>
           </a:p>
@@ -8000,7 +8092,7 @@
                 <a:ea typeface="Segoe UI" pitchFamily="34" charset="-122"/>
                 <a:cs typeface="Segoe UI" pitchFamily="34" charset="-120"/>
               </a:rPr>
-              <a:t>15 / 34</a:t>
+              <a:t>15 / 35</a:t>
             </a:r>
             <a:endParaRPr lang="en-US" sz="1000" dirty="0"/>
           </a:p>
@@ -8137,77 +8229,102 @@
                 <a:ea typeface="Segoe UI" pitchFamily="34" charset="-122"/>
                 <a:cs typeface="Segoe UI" pitchFamily="34" charset="-120"/>
               </a:rPr>
-              <a:t>Le bilinguisme n’est pas une moyenne unique</a:t>
+              <a:t>Groundedness : examiner les entrées</a:t>
             </a:r>
             <a:endParaRPr lang="en-US" sz="2700" dirty="0"/>
           </a:p>
         </p:txBody>
       </p:sp>
-      <p:sp>
-        <p:nvSpPr>
-          <p:cNvPr id="5" name="Text 3"/>
-          <p:cNvSpPr/>
-          <p:nvPr/>
-        </p:nvSpPr>
-        <p:spPr>
-          <a:xfrm>
-            <a:off x="594360" y="1828800"/>
-            <a:ext cx="640080" cy="594360"/>
-          </a:xfrm>
-          <a:prstGeom prst="rect">
-            <a:avLst/>
-          </a:prstGeom>
-          <a:noFill/>
-          <a:ln/>
-        </p:spPr>
-        <p:txBody>
-          <a:bodyPr wrap="square" lIns="0" tIns="0" rIns="0" bIns="0" rtlCol="0" anchor="ctr"/>
-          <a:lstStyle/>
-          <a:p>
-            <a:pPr indent="0" marL="0">
-              <a:buNone/>
-            </a:pPr>
-            <a:r>
-              <a:rPr lang="en-US" sz="1700" b="1" dirty="0">
-                <a:solidFill>
-                  <a:srgbClr val="0078D4"/>
-                </a:solidFill>
-                <a:latin typeface="Segoe UI" pitchFamily="34" charset="0"/>
-                <a:ea typeface="Segoe UI" pitchFamily="34" charset="-122"/>
-                <a:cs typeface="Segoe UI" pitchFamily="34" charset="-120"/>
-              </a:rPr>
-              <a:t>01</a:t>
-            </a:r>
-            <a:endParaRPr lang="en-US" sz="1700" dirty="0"/>
-          </a:p>
-        </p:txBody>
-      </p:sp>
-      <p:sp>
-        <p:nvSpPr>
-          <p:cNvPr id="6" name="Text 4"/>
-          <p:cNvSpPr/>
-          <p:nvPr/>
-        </p:nvSpPr>
-        <p:spPr>
-          <a:xfrm>
-            <a:off x="1325880" y="1828800"/>
-            <a:ext cx="10195560" cy="731520"/>
-          </a:xfrm>
-          <a:prstGeom prst="rect">
-            <a:avLst/>
-          </a:prstGeom>
-          <a:noFill/>
-          <a:ln/>
-        </p:spPr>
-        <p:txBody>
-          <a:bodyPr wrap="square" lIns="0" tIns="0" rIns="0" bIns="0" rtlCol="0" anchor="ctr"/>
-          <a:lstStyle/>
-          <a:p>
-            <a:pPr indent="0" marL="0">
-              <a:buNone/>
-            </a:pPr>
-            <a:r>
-              <a:rPr lang="en-US" sz="2000" dirty="0">
+      <p:pic>
+        <p:nvPicPr>
+          <p:cNvPr id="5" name="Image 0" descr="Catalogue Groundedness : entrées possibles et note ordinale de 1 à 5.">
+            <a:hlinkClick r:id="rId2" tooltip=""/>
+          </p:cNvPr>
+          <p:cNvPicPr>
+            <a:picLocks noChangeAspect="1"/>
+          </p:cNvPicPr>
+          <p:nvPr/>
+        </p:nvPicPr>
+        <p:blipFill>
+          <a:blip r:embed="rId1"/>
+          <a:srcRect l="18206" r="202" t="53937" b="9924"/>
+          <a:stretch/>
+        </p:blipFill>
+        <p:spPr>
+          <a:xfrm>
+            <a:off x="548640" y="1874520"/>
+            <a:ext cx="11064240" cy="3063240"/>
+          </a:xfrm>
+          <a:prstGeom prst="rect">
+            <a:avLst/>
+          </a:prstGeom>
+        </p:spPr>
+      </p:pic>
+      <p:sp>
+        <p:nvSpPr>
+          <p:cNvPr id="6" name="Text 3"/>
+          <p:cNvSpPr/>
+          <p:nvPr/>
+        </p:nvSpPr>
+        <p:spPr>
+          <a:xfrm>
+            <a:off x="548640" y="5166360"/>
+            <a:ext cx="11064240" cy="411480"/>
+          </a:xfrm>
+          <a:prstGeom prst="rect">
+            <a:avLst/>
+          </a:prstGeom>
+          <a:noFill/>
+          <a:ln/>
+        </p:spPr>
+        <p:txBody>
+          <a:bodyPr wrap="square" lIns="0" tIns="0" rIns="0" bIns="0" rtlCol="0" anchor="ctr"/>
+          <a:lstStyle/>
+          <a:p>
+            <a:pPr indent="0" marL="0">
+              <a:buNone/>
+            </a:pPr>
+            <a:r>
+              <a:rPr lang="en-US" sz="1600" dirty="0">
+                <a:solidFill>
+                  <a:srgbClr val="526777"/>
+                </a:solidFill>
+                <a:latin typeface="Segoe UI" pitchFamily="34" charset="0"/>
+                <a:ea typeface="Segoe UI" pitchFamily="34" charset="-122"/>
+                <a:cs typeface="Segoe UI" pitchFamily="34" charset="-120"/>
+              </a:rPr>
+              <a:t>Catalogue staging v18 | 2026-10-23 | Définition, pas résultat</a:t>
+            </a:r>
+            <a:endParaRPr lang="en-US" sz="1600" dirty="0"/>
+          </a:p>
+        </p:txBody>
+      </p:sp>
+      <p:sp>
+        <p:nvSpPr>
+          <p:cNvPr id="7" name="Text 4"/>
+          <p:cNvSpPr/>
+          <p:nvPr/>
+        </p:nvSpPr>
+        <p:spPr>
+          <a:xfrm>
+            <a:off x="548640" y="5623560"/>
+            <a:ext cx="11064240" cy="457200"/>
+          </a:xfrm>
+          <a:prstGeom prst="rect">
+            <a:avLst/>
+          </a:prstGeom>
+          <a:noFill/>
+          <a:ln/>
+        </p:spPr>
+        <p:txBody>
+          <a:bodyPr wrap="square" lIns="0" tIns="0" rIns="0" bIns="0" rtlCol="0" anchor="ctr"/>
+          <a:lstStyle/>
+          <a:p>
+            <a:pPr indent="0" marL="0">
+              <a:buNone/>
+            </a:pPr>
+            <a:r>
+              <a:rPr lang="en-US" sz="2000" b="1" dirty="0">
                 <a:solidFill>
                   <a:srgbClr val="183449"/>
                 </a:solidFill>
@@ -8215,7 +8332,7 @@
                 <a:ea typeface="Segoe UI" pitchFamily="34" charset="-122"/>
                 <a:cs typeface="Segoe UI" pitchFamily="34" charset="-120"/>
               </a:rPr>
-              <a:t>Convertir une source en essais EN et FR distincts.</a:t>
+              <a:t>Utiliser un contexte fiable indépendant, jamais la réponse candidate.</a:t>
             </a:r>
             <a:endParaRPr lang="en-US" sz="2000" dirty="0"/>
           </a:p>
@@ -8223,334 +8340,8 @@
       </p:sp>
       <p:sp>
         <p:nvSpPr>
-          <p:cNvPr id="7" name="Shape 5"/>
-          <p:cNvSpPr/>
-          <p:nvPr/>
-        </p:nvSpPr>
-        <p:spPr>
-          <a:xfrm>
-            <a:off x="1325880" y="2660904"/>
-            <a:ext cx="10149840" cy="0"/>
-          </a:xfrm>
-          <a:prstGeom prst="line">
-            <a:avLst/>
-          </a:prstGeom>
-          <a:noFill/>
-          <a:ln w="6350">
-            <a:solidFill>
-              <a:srgbClr val="DCE5ED"/>
-            </a:solidFill>
-            <a:prstDash val="solid"/>
-          </a:ln>
-        </p:spPr>
-      </p:sp>
-      <p:sp>
-        <p:nvSpPr>
-          <p:cNvPr id="8" name="Text 6"/>
-          <p:cNvSpPr/>
-          <p:nvPr/>
-        </p:nvSpPr>
-        <p:spPr>
-          <a:xfrm>
-            <a:off x="594360" y="2770632"/>
-            <a:ext cx="640080" cy="594360"/>
-          </a:xfrm>
-          <a:prstGeom prst="rect">
-            <a:avLst/>
-          </a:prstGeom>
-          <a:noFill/>
-          <a:ln/>
-        </p:spPr>
-        <p:txBody>
-          <a:bodyPr wrap="square" lIns="0" tIns="0" rIns="0" bIns="0" rtlCol="0" anchor="ctr"/>
-          <a:lstStyle/>
-          <a:p>
-            <a:pPr indent="0" marL="0">
-              <a:buNone/>
-            </a:pPr>
-            <a:r>
-              <a:rPr lang="en-US" sz="1700" b="1" dirty="0">
-                <a:solidFill>
-                  <a:srgbClr val="0078D4"/>
-                </a:solidFill>
-                <a:latin typeface="Segoe UI" pitchFamily="34" charset="0"/>
-                <a:ea typeface="Segoe UI" pitchFamily="34" charset="-122"/>
-                <a:cs typeface="Segoe UI" pitchFamily="34" charset="-120"/>
-              </a:rPr>
-              <a:t>02</a:t>
-            </a:r>
-            <a:endParaRPr lang="en-US" sz="1700" dirty="0"/>
-          </a:p>
-        </p:txBody>
-      </p:sp>
-      <p:sp>
-        <p:nvSpPr>
-          <p:cNvPr id="9" name="Text 7"/>
-          <p:cNvSpPr/>
-          <p:nvPr/>
-        </p:nvSpPr>
-        <p:spPr>
-          <a:xfrm>
-            <a:off x="1325880" y="2770632"/>
-            <a:ext cx="10195560" cy="731520"/>
-          </a:xfrm>
-          <a:prstGeom prst="rect">
-            <a:avLst/>
-          </a:prstGeom>
-          <a:noFill/>
-          <a:ln/>
-        </p:spPr>
-        <p:txBody>
-          <a:bodyPr wrap="square" lIns="0" tIns="0" rIns="0" bIns="0" rtlCol="0" anchor="ctr"/>
-          <a:lstStyle/>
-          <a:p>
-            <a:pPr indent="0" marL="0">
-              <a:buNone/>
-            </a:pPr>
-            <a:r>
-              <a:rPr lang="en-US" sz="2000" dirty="0">
-                <a:solidFill>
-                  <a:srgbClr val="183449"/>
-                </a:solidFill>
-                <a:latin typeface="Segoe UI" pitchFamily="34" charset="0"/>
-                <a:ea typeface="Segoe UI" pitchFamily="34" charset="-122"/>
-                <a:cs typeface="Segoe UI" pitchFamily="34" charset="-120"/>
-              </a:rPr>
-              <a:t>Texte sélectionné en chaîne, pas carte bilingue brute.</a:t>
-            </a:r>
-            <a:endParaRPr lang="en-US" sz="2000" dirty="0"/>
-          </a:p>
-        </p:txBody>
-      </p:sp>
-      <p:sp>
-        <p:nvSpPr>
-          <p:cNvPr id="10" name="Shape 8"/>
-          <p:cNvSpPr/>
-          <p:nvPr/>
-        </p:nvSpPr>
-        <p:spPr>
-          <a:xfrm>
-            <a:off x="1325880" y="3602736"/>
-            <a:ext cx="10149840" cy="0"/>
-          </a:xfrm>
-          <a:prstGeom prst="line">
-            <a:avLst/>
-          </a:prstGeom>
-          <a:noFill/>
-          <a:ln w="6350">
-            <a:solidFill>
-              <a:srgbClr val="DCE5ED"/>
-            </a:solidFill>
-            <a:prstDash val="solid"/>
-          </a:ln>
-        </p:spPr>
-      </p:sp>
-      <p:sp>
-        <p:nvSpPr>
-          <p:cNvPr id="11" name="Text 9"/>
-          <p:cNvSpPr/>
-          <p:nvPr/>
-        </p:nvSpPr>
-        <p:spPr>
-          <a:xfrm>
-            <a:off x="594360" y="3712464"/>
-            <a:ext cx="640080" cy="594360"/>
-          </a:xfrm>
-          <a:prstGeom prst="rect">
-            <a:avLst/>
-          </a:prstGeom>
-          <a:noFill/>
-          <a:ln/>
-        </p:spPr>
-        <p:txBody>
-          <a:bodyPr wrap="square" lIns="0" tIns="0" rIns="0" bIns="0" rtlCol="0" anchor="ctr"/>
-          <a:lstStyle/>
-          <a:p>
-            <a:pPr indent="0" marL="0">
-              <a:buNone/>
-            </a:pPr>
-            <a:r>
-              <a:rPr lang="en-US" sz="1700" b="1" dirty="0">
-                <a:solidFill>
-                  <a:srgbClr val="0078D4"/>
-                </a:solidFill>
-                <a:latin typeface="Segoe UI" pitchFamily="34" charset="0"/>
-                <a:ea typeface="Segoe UI" pitchFamily="34" charset="-122"/>
-                <a:cs typeface="Segoe UI" pitchFamily="34" charset="-120"/>
-              </a:rPr>
-              <a:t>03</a:t>
-            </a:r>
-            <a:endParaRPr lang="en-US" sz="1700" dirty="0"/>
-          </a:p>
-        </p:txBody>
-      </p:sp>
-      <p:sp>
-        <p:nvSpPr>
-          <p:cNvPr id="12" name="Text 10"/>
-          <p:cNvSpPr/>
-          <p:nvPr/>
-        </p:nvSpPr>
-        <p:spPr>
-          <a:xfrm>
-            <a:off x="1325880" y="3712464"/>
-            <a:ext cx="10195560" cy="731520"/>
-          </a:xfrm>
-          <a:prstGeom prst="rect">
-            <a:avLst/>
-          </a:prstGeom>
-          <a:noFill/>
-          <a:ln/>
-        </p:spPr>
-        <p:txBody>
-          <a:bodyPr wrap="square" lIns="0" tIns="0" rIns="0" bIns="0" rtlCol="0" anchor="ctr"/>
-          <a:lstStyle/>
-          <a:p>
-            <a:pPr indent="0" marL="0">
-              <a:buNone/>
-            </a:pPr>
-            <a:r>
-              <a:rPr lang="en-US" sz="2000" dirty="0">
-                <a:solidFill>
-                  <a:srgbClr val="183449"/>
-                </a:solidFill>
-                <a:latin typeface="Segoe UI" pitchFamily="34" charset="0"/>
-                <a:ea typeface="Segoe UI" pitchFamily="34" charset="-122"/>
-                <a:cs typeface="Segoe UI" pitchFamily="34" charset="-120"/>
-              </a:rPr>
-              <a:t>Examiner défauts et mentions obligatoires par langue.</a:t>
-            </a:r>
-            <a:endParaRPr lang="en-US" sz="2000" dirty="0"/>
-          </a:p>
-        </p:txBody>
-      </p:sp>
-      <p:sp>
-        <p:nvSpPr>
-          <p:cNvPr id="13" name="Shape 11"/>
-          <p:cNvSpPr/>
-          <p:nvPr/>
-        </p:nvSpPr>
-        <p:spPr>
-          <a:xfrm>
-            <a:off x="1325880" y="4544568"/>
-            <a:ext cx="10149840" cy="0"/>
-          </a:xfrm>
-          <a:prstGeom prst="line">
-            <a:avLst/>
-          </a:prstGeom>
-          <a:noFill/>
-          <a:ln w="6350">
-            <a:solidFill>
-              <a:srgbClr val="DCE5ED"/>
-            </a:solidFill>
-            <a:prstDash val="solid"/>
-          </a:ln>
-        </p:spPr>
-      </p:sp>
-      <p:sp>
-        <p:nvSpPr>
-          <p:cNvPr id="14" name="Text 12"/>
-          <p:cNvSpPr/>
-          <p:nvPr/>
-        </p:nvSpPr>
-        <p:spPr>
-          <a:xfrm>
-            <a:off x="594360" y="4654296"/>
-            <a:ext cx="640080" cy="594360"/>
-          </a:xfrm>
-          <a:prstGeom prst="rect">
-            <a:avLst/>
-          </a:prstGeom>
-          <a:noFill/>
-          <a:ln/>
-        </p:spPr>
-        <p:txBody>
-          <a:bodyPr wrap="square" lIns="0" tIns="0" rIns="0" bIns="0" rtlCol="0" anchor="ctr"/>
-          <a:lstStyle/>
-          <a:p>
-            <a:pPr indent="0" marL="0">
-              <a:buNone/>
-            </a:pPr>
-            <a:r>
-              <a:rPr lang="en-US" sz="1700" b="1" dirty="0">
-                <a:solidFill>
-                  <a:srgbClr val="0078D4"/>
-                </a:solidFill>
-                <a:latin typeface="Segoe UI" pitchFamily="34" charset="0"/>
-                <a:ea typeface="Segoe UI" pitchFamily="34" charset="-122"/>
-                <a:cs typeface="Segoe UI" pitchFamily="34" charset="-120"/>
-              </a:rPr>
-              <a:t>04</a:t>
-            </a:r>
-            <a:endParaRPr lang="en-US" sz="1700" dirty="0"/>
-          </a:p>
-        </p:txBody>
-      </p:sp>
-      <p:sp>
-        <p:nvSpPr>
-          <p:cNvPr id="15" name="Text 13"/>
-          <p:cNvSpPr/>
-          <p:nvPr/>
-        </p:nvSpPr>
-        <p:spPr>
-          <a:xfrm>
-            <a:off x="1325880" y="4654296"/>
-            <a:ext cx="10195560" cy="731520"/>
-          </a:xfrm>
-          <a:prstGeom prst="rect">
-            <a:avLst/>
-          </a:prstGeom>
-          <a:noFill/>
-          <a:ln/>
-        </p:spPr>
-        <p:txBody>
-          <a:bodyPr wrap="square" lIns="0" tIns="0" rIns="0" bIns="0" rtlCol="0" anchor="ctr"/>
-          <a:lstStyle/>
-          <a:p>
-            <a:pPr indent="0" marL="0">
-              <a:buNone/>
-            </a:pPr>
-            <a:r>
-              <a:rPr lang="en-US" sz="2000" dirty="0">
-                <a:solidFill>
-                  <a:srgbClr val="183449"/>
-                </a:solidFill>
-                <a:latin typeface="Segoe UI" pitchFamily="34" charset="0"/>
-                <a:ea typeface="Segoe UI" pitchFamily="34" charset="-122"/>
-                <a:cs typeface="Segoe UI" pitchFamily="34" charset="-120"/>
-              </a:rPr>
-              <a:t>Une moyenne globale peut masquer une régression française.</a:t>
-            </a:r>
-            <a:endParaRPr lang="en-US" sz="2000" dirty="0"/>
-          </a:p>
-        </p:txBody>
-      </p:sp>
-      <p:sp>
-        <p:nvSpPr>
-          <p:cNvPr id="16" name="Shape 14"/>
-          <p:cNvSpPr/>
-          <p:nvPr/>
-        </p:nvSpPr>
-        <p:spPr>
-          <a:xfrm>
-            <a:off x="1325880" y="5486400"/>
-            <a:ext cx="10149840" cy="0"/>
-          </a:xfrm>
-          <a:prstGeom prst="line">
-            <a:avLst/>
-          </a:prstGeom>
-          <a:noFill/>
-          <a:ln w="6350">
-            <a:solidFill>
-              <a:srgbClr val="DCE5ED"/>
-            </a:solidFill>
-            <a:prstDash val="solid"/>
-          </a:ln>
-        </p:spPr>
-      </p:sp>
-      <p:sp>
-        <p:nvSpPr>
-          <p:cNvPr id="17" name="Text 15">
-            <a:hlinkClick r:id="rId1" tooltip=""/>
+          <p:cNvPr id="8" name="Text 5">
+            <a:hlinkClick r:id="rId3" tooltip=""/>
           </p:cNvPr>
           <p:cNvSpPr/>
           <p:nvPr/>
@@ -8581,7 +8372,7 @@
                 <a:latin typeface="Segoe UI" pitchFamily="34" charset="0"/>
                 <a:ea typeface="Segoe UI" pitchFamily="34" charset="-122"/>
                 <a:cs typeface="Segoe UI" pitchFamily="34" charset="-120"/>
-                <a:hlinkClick r:id="rId1" invalidUrl="" action="" tgtFrame="" tooltip="" history="1" highlightClick="0" endSnd="0">
+                <a:hlinkClick r:id="rId3" invalidUrl="" action="" tgtFrame="" tooltip="" history="1" highlightClick="0" endSnd="0">
                   <a:extLst>
                     <a:ext uri="{A12FA001-AC4F-418D-AE19-62706E023703}">
                       <ahyp:hlinkClr xmlns:ahyp="http://schemas.microsoft.com/office/drawing/2018/hyperlinkcolor" val="tx"/>
@@ -8597,7 +8388,7 @@
       </p:sp>
       <p:sp>
         <p:nvSpPr>
-          <p:cNvPr id="18" name="Text 16"/>
+          <p:cNvPr id="9" name="Text 6"/>
           <p:cNvSpPr/>
           <p:nvPr/>
         </p:nvSpPr>
@@ -8628,7 +8419,7 @@
                 <a:ea typeface="Segoe UI" pitchFamily="34" charset="-122"/>
                 <a:cs typeface="Segoe UI" pitchFamily="34" charset="-120"/>
               </a:rPr>
-              <a:t>16 / 34</a:t>
+              <a:t>16 / 35</a:t>
             </a:r>
             <a:endParaRPr lang="en-US" sz="1000" dirty="0"/>
           </a:p>
@@ -8765,7 +8556,7 @@
                 <a:ea typeface="Segoe UI" pitchFamily="34" charset="-122"/>
                 <a:cs typeface="Segoe UI" pitchFamily="34" charset="-120"/>
               </a:rPr>
-              <a:t>Provenance : une étiquette n’est pas un épinglage</a:t>
+              <a:t>Le bilinguisme n’est pas une moyenne unique</a:t>
             </a:r>
             <a:endParaRPr lang="en-US" sz="2700" dirty="0"/>
           </a:p>
@@ -8843,7 +8634,7 @@
                 <a:ea typeface="Segoe UI" pitchFamily="34" charset="-122"/>
                 <a:cs typeface="Segoe UI" pitchFamily="34" charset="-120"/>
               </a:rPr>
-              <a:t>--version consigne seulement le déploiement observé.</a:t>
+              <a:t>Convertir une source en essais EN et FR distincts.</a:t>
             </a:r>
             <a:endParaRPr lang="en-US" sz="2000" dirty="0"/>
           </a:p>
@@ -8944,7 +8735,7 @@
                 <a:ea typeface="Segoe UI" pitchFamily="34" charset="-122"/>
                 <a:cs typeface="Segoe UI" pitchFamily="34" charset="-120"/>
               </a:rPr>
-              <a:t>Réserver une fenêtre stable; vérifier version avant et après.</a:t>
+              <a:t>Texte sélectionné en chaîne, pas carte bilingue brute.</a:t>
             </a:r>
             <a:endParaRPr lang="en-US" sz="2000" dirty="0"/>
           </a:p>
@@ -9045,7 +8836,7 @@
                 <a:ea typeface="Segoe UI" pitchFamily="34" charset="-122"/>
                 <a:cs typeface="Segoe UI" pitchFamily="34" charset="-120"/>
               </a:rPr>
-              <a:t>Figer source, jeu, grille, évaluateur et modèle juge.</a:t>
+              <a:t>Examiner défauts et mentions obligatoires par langue.</a:t>
             </a:r>
             <a:endParaRPr lang="en-US" sz="2000" dirty="0"/>
           </a:p>
@@ -9146,7 +8937,7 @@
                 <a:ea typeface="Segoe UI" pitchFamily="34" charset="-122"/>
                 <a:cs typeface="Segoe UI" pitchFamily="34" charset="-120"/>
               </a:rPr>
-              <a:t>Garder captures, IDs natifs/réponse et empreintes.</a:t>
+              <a:t>Une moyenne globale peut masquer une régression française.</a:t>
             </a:r>
             <a:endParaRPr lang="en-US" sz="2000" dirty="0"/>
           </a:p>
@@ -9256,7 +9047,7 @@
                 <a:ea typeface="Segoe UI" pitchFamily="34" charset="-122"/>
                 <a:cs typeface="Segoe UI" pitchFamily="34" charset="-120"/>
               </a:rPr>
-              <a:t>17 / 34</a:t>
+              <a:t>17 / 35</a:t>
             </a:r>
             <a:endParaRPr lang="en-US" sz="1000" dirty="0"/>
           </a:p>
@@ -9393,7 +9184,7 @@
                 <a:ea typeface="Segoe UI" pitchFamily="34" charset="-122"/>
                 <a:cs typeface="Segoe UI" pitchFamily="34" charset="-120"/>
               </a:rPr>
-              <a:t>Complétude et qualité sont deux contrôles</a:t>
+              <a:t>Provenance : une étiquette n’est pas un épinglage</a:t>
             </a:r>
             <a:endParaRPr lang="en-US" sz="2700" dirty="0"/>
           </a:p>
@@ -9401,22 +9192,98 @@
       </p:sp>
       <p:sp>
         <p:nvSpPr>
-          <p:cNvPr id="5" name="Shape 3"/>
-          <p:cNvSpPr/>
-          <p:nvPr/>
-        </p:nvSpPr>
-        <p:spPr>
-          <a:xfrm>
-            <a:off x="548640" y="1874520"/>
-            <a:ext cx="5394960" cy="3886200"/>
-          </a:xfrm>
-          <a:prstGeom prst="rect">
-            <a:avLst/>
-          </a:prstGeom>
-          <a:solidFill>
-            <a:srgbClr val="EDF4FA"/>
-          </a:solidFill>
-          <a:ln w="12700">
+          <p:cNvPr id="5" name="Text 3"/>
+          <p:cNvSpPr/>
+          <p:nvPr/>
+        </p:nvSpPr>
+        <p:spPr>
+          <a:xfrm>
+            <a:off x="594360" y="1828800"/>
+            <a:ext cx="640080" cy="594360"/>
+          </a:xfrm>
+          <a:prstGeom prst="rect">
+            <a:avLst/>
+          </a:prstGeom>
+          <a:noFill/>
+          <a:ln/>
+        </p:spPr>
+        <p:txBody>
+          <a:bodyPr wrap="square" lIns="0" tIns="0" rIns="0" bIns="0" rtlCol="0" anchor="ctr"/>
+          <a:lstStyle/>
+          <a:p>
+            <a:pPr indent="0" marL="0">
+              <a:buNone/>
+            </a:pPr>
+            <a:r>
+              <a:rPr lang="en-US" sz="1700" b="1" dirty="0">
+                <a:solidFill>
+                  <a:srgbClr val="0078D4"/>
+                </a:solidFill>
+                <a:latin typeface="Segoe UI" pitchFamily="34" charset="0"/>
+                <a:ea typeface="Segoe UI" pitchFamily="34" charset="-122"/>
+                <a:cs typeface="Segoe UI" pitchFamily="34" charset="-120"/>
+              </a:rPr>
+              <a:t>01</a:t>
+            </a:r>
+            <a:endParaRPr lang="en-US" sz="1700" dirty="0"/>
+          </a:p>
+        </p:txBody>
+      </p:sp>
+      <p:sp>
+        <p:nvSpPr>
+          <p:cNvPr id="6" name="Text 4"/>
+          <p:cNvSpPr/>
+          <p:nvPr/>
+        </p:nvSpPr>
+        <p:spPr>
+          <a:xfrm>
+            <a:off x="1325880" y="1828800"/>
+            <a:ext cx="10195560" cy="731520"/>
+          </a:xfrm>
+          <a:prstGeom prst="rect">
+            <a:avLst/>
+          </a:prstGeom>
+          <a:noFill/>
+          <a:ln/>
+        </p:spPr>
+        <p:txBody>
+          <a:bodyPr wrap="square" lIns="0" tIns="0" rIns="0" bIns="0" rtlCol="0" anchor="ctr"/>
+          <a:lstStyle/>
+          <a:p>
+            <a:pPr indent="0" marL="0">
+              <a:buNone/>
+            </a:pPr>
+            <a:r>
+              <a:rPr lang="en-US" sz="2000" dirty="0">
+                <a:solidFill>
+                  <a:srgbClr val="183449"/>
+                </a:solidFill>
+                <a:latin typeface="Segoe UI" pitchFamily="34" charset="0"/>
+                <a:ea typeface="Segoe UI" pitchFamily="34" charset="-122"/>
+                <a:cs typeface="Segoe UI" pitchFamily="34" charset="-120"/>
+              </a:rPr>
+              <a:t>--version consigne seulement le déploiement observé.</a:t>
+            </a:r>
+            <a:endParaRPr lang="en-US" sz="2000" dirty="0"/>
+          </a:p>
+        </p:txBody>
+      </p:sp>
+      <p:sp>
+        <p:nvSpPr>
+          <p:cNvPr id="7" name="Shape 5"/>
+          <p:cNvSpPr/>
+          <p:nvPr/>
+        </p:nvSpPr>
+        <p:spPr>
+          <a:xfrm>
+            <a:off x="1325880" y="2660904"/>
+            <a:ext cx="10149840" cy="0"/>
+          </a:xfrm>
+          <a:prstGeom prst="line">
+            <a:avLst/>
+          </a:prstGeom>
+          <a:noFill/>
+          <a:ln w="6350">
             <a:solidFill>
               <a:srgbClr val="DCE5ED"/>
             </a:solidFill>
@@ -9426,30 +9293,30 @@
       </p:sp>
       <p:sp>
         <p:nvSpPr>
-          <p:cNvPr id="6" name="Text 4"/>
-          <p:cNvSpPr/>
-          <p:nvPr/>
-        </p:nvSpPr>
-        <p:spPr>
-          <a:xfrm>
-            <a:off x="822960" y="2148840"/>
-            <a:ext cx="4846320" cy="640080"/>
-          </a:xfrm>
-          <a:prstGeom prst="rect">
-            <a:avLst/>
-          </a:prstGeom>
-          <a:noFill/>
-          <a:ln/>
-        </p:spPr>
-        <p:txBody>
-          <a:bodyPr wrap="square" lIns="0" tIns="0" rIns="0" bIns="0" rtlCol="0" anchor="ctr"/>
-          <a:lstStyle/>
-          <a:p>
-            <a:pPr indent="0" marL="0">
-              <a:buNone/>
-            </a:pPr>
-            <a:r>
-              <a:rPr lang="en-US" sz="2300" b="1" dirty="0">
+          <p:cNvPr id="8" name="Text 6"/>
+          <p:cNvSpPr/>
+          <p:nvPr/>
+        </p:nvSpPr>
+        <p:spPr>
+          <a:xfrm>
+            <a:off x="594360" y="2770632"/>
+            <a:ext cx="640080" cy="594360"/>
+          </a:xfrm>
+          <a:prstGeom prst="rect">
+            <a:avLst/>
+          </a:prstGeom>
+          <a:noFill/>
+          <a:ln/>
+        </p:spPr>
+        <p:txBody>
+          <a:bodyPr wrap="square" lIns="0" tIns="0" rIns="0" bIns="0" rtlCol="0" anchor="ctr"/>
+          <a:lstStyle/>
+          <a:p>
+            <a:pPr indent="0" marL="0">
+              <a:buNone/>
+            </a:pPr>
+            <a:r>
+              <a:rPr lang="en-US" sz="1700" b="1" dirty="0">
                 <a:solidFill>
                   <a:srgbClr val="0078D4"/>
                 </a:solidFill>
@@ -9457,38 +9324,38 @@
                 <a:ea typeface="Segoe UI" pitchFamily="34" charset="-122"/>
                 <a:cs typeface="Segoe UI" pitchFamily="34" charset="-120"/>
               </a:rPr>
-              <a:t>Complétude</a:t>
-            </a:r>
-            <a:endParaRPr lang="en-US" sz="2300" dirty="0"/>
-          </a:p>
-        </p:txBody>
-      </p:sp>
-      <p:sp>
-        <p:nvSpPr>
-          <p:cNvPr id="7" name="Text 5"/>
-          <p:cNvSpPr/>
-          <p:nvPr/>
-        </p:nvSpPr>
-        <p:spPr>
-          <a:xfrm>
-            <a:off x="822960" y="3017520"/>
-            <a:ext cx="4846320" cy="594360"/>
-          </a:xfrm>
-          <a:prstGeom prst="rect">
-            <a:avLst/>
-          </a:prstGeom>
-          <a:noFill/>
-          <a:ln/>
-        </p:spPr>
-        <p:txBody>
-          <a:bodyPr wrap="square" lIns="0" tIns="0" rIns="0" bIns="0" rtlCol="0" anchor="ctr"/>
-          <a:lstStyle/>
-          <a:p>
-            <a:pPr indent="0" marL="0">
-              <a:buNone/>
-            </a:pPr>
-            <a:r>
-              <a:rPr lang="en-US" sz="1900" dirty="0">
+              <a:t>02</a:t>
+            </a:r>
+            <a:endParaRPr lang="en-US" sz="1700" dirty="0"/>
+          </a:p>
+        </p:txBody>
+      </p:sp>
+      <p:sp>
+        <p:nvSpPr>
+          <p:cNvPr id="9" name="Text 7"/>
+          <p:cNvSpPr/>
+          <p:nvPr/>
+        </p:nvSpPr>
+        <p:spPr>
+          <a:xfrm>
+            <a:off x="1325880" y="2770632"/>
+            <a:ext cx="10195560" cy="731520"/>
+          </a:xfrm>
+          <a:prstGeom prst="rect">
+            <a:avLst/>
+          </a:prstGeom>
+          <a:noFill/>
+          <a:ln/>
+        </p:spPr>
+        <p:txBody>
+          <a:bodyPr wrap="square" lIns="0" tIns="0" rIns="0" bIns="0" rtlCol="0" anchor="ctr"/>
+          <a:lstStyle/>
+          <a:p>
+            <a:pPr indent="0" marL="0">
+              <a:buNone/>
+            </a:pPr>
+            <a:r>
+              <a:rPr lang="en-US" sz="2000" dirty="0">
                 <a:solidFill>
                   <a:srgbClr val="183449"/>
                 </a:solidFill>
@@ -9496,87 +9363,9 @@
                 <a:ea typeface="Segoe UI" pitchFamily="34" charset="-122"/>
                 <a:cs typeface="Segoe UI" pitchFamily="34" charset="-120"/>
               </a:rPr>
-              <a:t>État terminal completed</a:t>
-            </a:r>
-            <a:endParaRPr lang="en-US" sz="1900" dirty="0"/>
-          </a:p>
-        </p:txBody>
-      </p:sp>
-      <p:sp>
-        <p:nvSpPr>
-          <p:cNvPr id="8" name="Text 6"/>
-          <p:cNvSpPr/>
-          <p:nvPr/>
-        </p:nvSpPr>
-        <p:spPr>
-          <a:xfrm>
-            <a:off x="822960" y="3794760"/>
-            <a:ext cx="4846320" cy="594360"/>
-          </a:xfrm>
-          <a:prstGeom prst="rect">
-            <a:avLst/>
-          </a:prstGeom>
-          <a:noFill/>
-          <a:ln/>
-        </p:spPr>
-        <p:txBody>
-          <a:bodyPr wrap="square" lIns="0" tIns="0" rIns="0" bIns="0" rtlCol="0" anchor="ctr"/>
-          <a:lstStyle/>
-          <a:p>
-            <a:pPr indent="0" marL="0">
-              <a:buNone/>
-            </a:pPr>
-            <a:r>
-              <a:rPr lang="en-US" sz="1900" dirty="0">
-                <a:solidFill>
-                  <a:srgbClr val="183449"/>
-                </a:solidFill>
-                <a:latin typeface="Segoe UI" pitchFamily="34" charset="0"/>
-                <a:ea typeface="Segoe UI" pitchFamily="34" charset="-122"/>
-                <a:cs typeface="Segoe UI" pitchFamily="34" charset="-120"/>
-              </a:rPr>
-              <a:t>Lignes et métriques uniques attendues</a:t>
-            </a:r>
-            <a:endParaRPr lang="en-US" sz="1900" dirty="0"/>
-          </a:p>
-        </p:txBody>
-      </p:sp>
-      <p:sp>
-        <p:nvSpPr>
-          <p:cNvPr id="9" name="Text 7"/>
-          <p:cNvSpPr/>
-          <p:nvPr/>
-        </p:nvSpPr>
-        <p:spPr>
-          <a:xfrm>
-            <a:off x="822960" y="4572000"/>
-            <a:ext cx="4846320" cy="594360"/>
-          </a:xfrm>
-          <a:prstGeom prst="rect">
-            <a:avLst/>
-          </a:prstGeom>
-          <a:noFill/>
-          <a:ln/>
-        </p:spPr>
-        <p:txBody>
-          <a:bodyPr wrap="square" lIns="0" tIns="0" rIns="0" bIns="0" rtlCol="0" anchor="ctr"/>
-          <a:lstStyle/>
-          <a:p>
-            <a:pPr indent="0" marL="0">
-              <a:buNone/>
-            </a:pPr>
-            <a:r>
-              <a:rPr lang="en-US" sz="1900" dirty="0">
-                <a:solidFill>
-                  <a:srgbClr val="183449"/>
-                </a:solidFill>
-                <a:latin typeface="Segoe UI" pitchFamily="34" charset="0"/>
-                <a:ea typeface="Segoe UI" pitchFamily="34" charset="-122"/>
-                <a:cs typeface="Segoe UI" pitchFamily="34" charset="-120"/>
-              </a:rPr>
-              <a:t>Aucune erreur ni exclusion</a:t>
-            </a:r>
-            <a:endParaRPr lang="en-US" sz="1900" dirty="0"/>
+              <a:t>Réserver une fenêtre stable; vérifier version avant et après.</a:t>
+            </a:r>
+            <a:endParaRPr lang="en-US" sz="2000" dirty="0"/>
           </a:p>
         </p:txBody>
       </p:sp>
@@ -9588,16 +9377,14 @@
         </p:nvSpPr>
         <p:spPr>
           <a:xfrm>
-            <a:off x="6217920" y="1874520"/>
-            <a:ext cx="5394960" cy="3886200"/>
-          </a:xfrm>
-          <a:prstGeom prst="rect">
-            <a:avLst/>
-          </a:prstGeom>
-          <a:solidFill>
-            <a:srgbClr val="EDF4FA"/>
-          </a:solidFill>
-          <a:ln w="12700">
+            <a:off x="1325880" y="3602736"/>
+            <a:ext cx="10149840" cy="0"/>
+          </a:xfrm>
+          <a:prstGeom prst="line">
+            <a:avLst/>
+          </a:prstGeom>
+          <a:noFill/>
+          <a:ln w="6350">
             <a:solidFill>
               <a:srgbClr val="DCE5ED"/>
             </a:solidFill>
@@ -9613,24 +9400,24 @@
         </p:nvSpPr>
         <p:spPr>
           <a:xfrm>
-            <a:off x="6492240" y="2148840"/>
-            <a:ext cx="4846320" cy="640080"/>
-          </a:xfrm>
-          <a:prstGeom prst="rect">
-            <a:avLst/>
-          </a:prstGeom>
-          <a:noFill/>
-          <a:ln/>
-        </p:spPr>
-        <p:txBody>
-          <a:bodyPr wrap="square" lIns="0" tIns="0" rIns="0" bIns="0" rtlCol="0" anchor="ctr"/>
-          <a:lstStyle/>
-          <a:p>
-            <a:pPr indent="0" marL="0">
-              <a:buNone/>
-            </a:pPr>
-            <a:r>
-              <a:rPr lang="en-US" sz="2300" b="1" dirty="0">
+            <a:off x="594360" y="3712464"/>
+            <a:ext cx="640080" cy="594360"/>
+          </a:xfrm>
+          <a:prstGeom prst="rect">
+            <a:avLst/>
+          </a:prstGeom>
+          <a:noFill/>
+          <a:ln/>
+        </p:spPr>
+        <p:txBody>
+          <a:bodyPr wrap="square" lIns="0" tIns="0" rIns="0" bIns="0" rtlCol="0" anchor="ctr"/>
+          <a:lstStyle/>
+          <a:p>
+            <a:pPr indent="0" marL="0">
+              <a:buNone/>
+            </a:pPr>
+            <a:r>
+              <a:rPr lang="en-US" sz="1700" b="1" dirty="0">
                 <a:solidFill>
                   <a:srgbClr val="0078D4"/>
                 </a:solidFill>
@@ -9638,9 +9425,9 @@
                 <a:ea typeface="Segoe UI" pitchFamily="34" charset="-122"/>
                 <a:cs typeface="Segoe UI" pitchFamily="34" charset="-120"/>
               </a:rPr>
-              <a:t>Qualité</a:t>
-            </a:r>
-            <a:endParaRPr lang="en-US" sz="2300" dirty="0"/>
+              <a:t>03</a:t>
+            </a:r>
+            <a:endParaRPr lang="en-US" sz="1700" dirty="0"/>
           </a:p>
         </p:txBody>
       </p:sp>
@@ -9652,24 +9439,24 @@
         </p:nvSpPr>
         <p:spPr>
           <a:xfrm>
-            <a:off x="6492240" y="3017520"/>
-            <a:ext cx="4846320" cy="594360"/>
-          </a:xfrm>
-          <a:prstGeom prst="rect">
-            <a:avLst/>
-          </a:prstGeom>
-          <a:noFill/>
-          <a:ln/>
-        </p:spPr>
-        <p:txBody>
-          <a:bodyPr wrap="square" lIns="0" tIns="0" rIns="0" bIns="0" rtlCol="0" anchor="ctr"/>
-          <a:lstStyle/>
-          <a:p>
-            <a:pPr indent="0" marL="0">
-              <a:buNone/>
-            </a:pPr>
-            <a:r>
-              <a:rPr lang="en-US" sz="1900" dirty="0">
+            <a:off x="1325880" y="3712464"/>
+            <a:ext cx="10195560" cy="731520"/>
+          </a:xfrm>
+          <a:prstGeom prst="rect">
+            <a:avLst/>
+          </a:prstGeom>
+          <a:noFill/>
+          <a:ln/>
+        </p:spPr>
+        <p:txBody>
+          <a:bodyPr wrap="square" lIns="0" tIns="0" rIns="0" bIns="0" rtlCol="0" anchor="ctr"/>
+          <a:lstStyle/>
+          <a:p>
+            <a:pPr indent="0" marL="0">
+              <a:buNone/>
+            </a:pPr>
+            <a:r>
+              <a:rPr lang="en-US" sz="2000" dirty="0">
                 <a:solidFill>
                   <a:srgbClr val="183449"/>
                 </a:solidFill>
@@ -9677,38 +9464,100 @@
                 <a:ea typeface="Segoe UI" pitchFamily="34" charset="-122"/>
                 <a:cs typeface="Segoe UI" pitchFamily="34" charset="-120"/>
               </a:rPr>
-              <a:t>Seuils par métrique calibrés</a:t>
-            </a:r>
-            <a:endParaRPr lang="en-US" sz="1900" dirty="0"/>
-          </a:p>
-        </p:txBody>
-      </p:sp>
-      <p:sp>
-        <p:nvSpPr>
-          <p:cNvPr id="13" name="Text 11"/>
-          <p:cNvSpPr/>
-          <p:nvPr/>
-        </p:nvSpPr>
-        <p:spPr>
-          <a:xfrm>
-            <a:off x="6492240" y="3794760"/>
-            <a:ext cx="4846320" cy="594360"/>
-          </a:xfrm>
-          <a:prstGeom prst="rect">
-            <a:avLst/>
-          </a:prstGeom>
-          <a:noFill/>
-          <a:ln/>
-        </p:spPr>
-        <p:txBody>
-          <a:bodyPr wrap="square" lIns="0" tIns="0" rIns="0" bIns="0" rtlCol="0" anchor="ctr"/>
-          <a:lstStyle/>
-          <a:p>
-            <a:pPr indent="0" marL="0">
-              <a:buNone/>
-            </a:pPr>
-            <a:r>
-              <a:rPr lang="en-US" sz="1900" dirty="0">
+              <a:t>Figer source, jeu, grille, évaluateur et modèle juge.</a:t>
+            </a:r>
+            <a:endParaRPr lang="en-US" sz="2000" dirty="0"/>
+          </a:p>
+        </p:txBody>
+      </p:sp>
+      <p:sp>
+        <p:nvSpPr>
+          <p:cNvPr id="13" name="Shape 11"/>
+          <p:cNvSpPr/>
+          <p:nvPr/>
+        </p:nvSpPr>
+        <p:spPr>
+          <a:xfrm>
+            <a:off x="1325880" y="4544568"/>
+            <a:ext cx="10149840" cy="0"/>
+          </a:xfrm>
+          <a:prstGeom prst="line">
+            <a:avLst/>
+          </a:prstGeom>
+          <a:noFill/>
+          <a:ln w="6350">
+            <a:solidFill>
+              <a:srgbClr val="DCE5ED"/>
+            </a:solidFill>
+            <a:prstDash val="solid"/>
+          </a:ln>
+        </p:spPr>
+      </p:sp>
+      <p:sp>
+        <p:nvSpPr>
+          <p:cNvPr id="14" name="Text 12"/>
+          <p:cNvSpPr/>
+          <p:nvPr/>
+        </p:nvSpPr>
+        <p:spPr>
+          <a:xfrm>
+            <a:off x="594360" y="4654296"/>
+            <a:ext cx="640080" cy="594360"/>
+          </a:xfrm>
+          <a:prstGeom prst="rect">
+            <a:avLst/>
+          </a:prstGeom>
+          <a:noFill/>
+          <a:ln/>
+        </p:spPr>
+        <p:txBody>
+          <a:bodyPr wrap="square" lIns="0" tIns="0" rIns="0" bIns="0" rtlCol="0" anchor="ctr"/>
+          <a:lstStyle/>
+          <a:p>
+            <a:pPr indent="0" marL="0">
+              <a:buNone/>
+            </a:pPr>
+            <a:r>
+              <a:rPr lang="en-US" sz="1700" b="1" dirty="0">
+                <a:solidFill>
+                  <a:srgbClr val="0078D4"/>
+                </a:solidFill>
+                <a:latin typeface="Segoe UI" pitchFamily="34" charset="0"/>
+                <a:ea typeface="Segoe UI" pitchFamily="34" charset="-122"/>
+                <a:cs typeface="Segoe UI" pitchFamily="34" charset="-120"/>
+              </a:rPr>
+              <a:t>04</a:t>
+            </a:r>
+            <a:endParaRPr lang="en-US" sz="1700" dirty="0"/>
+          </a:p>
+        </p:txBody>
+      </p:sp>
+      <p:sp>
+        <p:nvSpPr>
+          <p:cNvPr id="15" name="Text 13"/>
+          <p:cNvSpPr/>
+          <p:nvPr/>
+        </p:nvSpPr>
+        <p:spPr>
+          <a:xfrm>
+            <a:off x="1325880" y="4654296"/>
+            <a:ext cx="10195560" cy="731520"/>
+          </a:xfrm>
+          <a:prstGeom prst="rect">
+            <a:avLst/>
+          </a:prstGeom>
+          <a:noFill/>
+          <a:ln/>
+        </p:spPr>
+        <p:txBody>
+          <a:bodyPr wrap="square" lIns="0" tIns="0" rIns="0" bIns="0" rtlCol="0" anchor="ctr"/>
+          <a:lstStyle/>
+          <a:p>
+            <a:pPr indent="0" marL="0">
+              <a:buNone/>
+            </a:pPr>
+            <a:r>
+              <a:rPr lang="en-US" sz="2000" dirty="0">
                 <a:solidFill>
                   <a:srgbClr val="183449"/>
                 </a:solidFill>
@@ -9716,54 +9565,38 @@
                 <a:ea typeface="Segoe UI" pitchFamily="34" charset="-122"/>
                 <a:cs typeface="Segoe UI" pitchFamily="34" charset="-120"/>
               </a:rPr>
-              <a:t>Faux positifs/négatifs par segment</a:t>
-            </a:r>
-            <a:endParaRPr lang="en-US" sz="1900" dirty="0"/>
-          </a:p>
-        </p:txBody>
-      </p:sp>
-      <p:sp>
-        <p:nvSpPr>
-          <p:cNvPr id="14" name="Text 12"/>
-          <p:cNvSpPr/>
-          <p:nvPr/>
-        </p:nvSpPr>
-        <p:spPr>
-          <a:xfrm>
-            <a:off x="6492240" y="4572000"/>
-            <a:ext cx="4846320" cy="594360"/>
-          </a:xfrm>
-          <a:prstGeom prst="rect">
-            <a:avLst/>
-          </a:prstGeom>
-          <a:noFill/>
-          <a:ln/>
-        </p:spPr>
-        <p:txBody>
-          <a:bodyPr wrap="square" lIns="0" tIns="0" rIns="0" bIns="0" rtlCol="0" anchor="ctr"/>
-          <a:lstStyle/>
-          <a:p>
-            <a:pPr indent="0" marL="0">
-              <a:buNone/>
-            </a:pPr>
-            <a:r>
-              <a:rPr lang="en-US" sz="1900" dirty="0">
-                <a:solidFill>
-                  <a:srgbClr val="183449"/>
-                </a:solidFill>
-                <a:latin typeface="Segoe UI" pitchFamily="34" charset="0"/>
-                <a:ea typeface="Segoe UI" pitchFamily="34" charset="-122"/>
-                <a:cs typeface="Segoe UI" pitchFamily="34" charset="-120"/>
-              </a:rPr>
-              <a:t>Révision humaine et incertitude</a:t>
-            </a:r>
-            <a:endParaRPr lang="en-US" sz="1900" dirty="0"/>
-          </a:p>
-        </p:txBody>
-      </p:sp>
-      <p:sp>
-        <p:nvSpPr>
-          <p:cNvPr id="15" name="Text 13">
+              <a:t>Garder captures, IDs natifs/réponse et empreintes.</a:t>
+            </a:r>
+            <a:endParaRPr lang="en-US" sz="2000" dirty="0"/>
+          </a:p>
+        </p:txBody>
+      </p:sp>
+      <p:sp>
+        <p:nvSpPr>
+          <p:cNvPr id="16" name="Shape 14"/>
+          <p:cNvSpPr/>
+          <p:nvPr/>
+        </p:nvSpPr>
+        <p:spPr>
+          <a:xfrm>
+            <a:off x="1325880" y="5486400"/>
+            <a:ext cx="10149840" cy="0"/>
+          </a:xfrm>
+          <a:prstGeom prst="line">
+            <a:avLst/>
+          </a:prstGeom>
+          <a:noFill/>
+          <a:ln w="6350">
+            <a:solidFill>
+              <a:srgbClr val="DCE5ED"/>
+            </a:solidFill>
+            <a:prstDash val="solid"/>
+          </a:ln>
+        </p:spPr>
+      </p:sp>
+      <p:sp>
+        <p:nvSpPr>
+          <p:cNvPr id="17" name="Text 15">
             <a:hlinkClick r:id="rId1" tooltip=""/>
           </p:cNvPr>
           <p:cNvSpPr/>
@@ -9811,7 +9644,7 @@
       </p:sp>
       <p:sp>
         <p:nvSpPr>
-          <p:cNvPr id="16" name="Text 14"/>
+          <p:cNvPr id="18" name="Text 16"/>
           <p:cNvSpPr/>
           <p:nvPr/>
         </p:nvSpPr>
@@ -9842,7 +9675,7 @@
                 <a:ea typeface="Segoe UI" pitchFamily="34" charset="-122"/>
                 <a:cs typeface="Segoe UI" pitchFamily="34" charset="-120"/>
               </a:rPr>
-              <a:t>18 / 34</a:t>
+              <a:t>18 / 35</a:t>
             </a:r>
             <a:endParaRPr lang="en-US" sz="1000" dirty="0"/>
           </a:p>
@@ -9979,7 +9812,7 @@
                 <a:ea typeface="Segoe UI" pitchFamily="34" charset="-122"/>
                 <a:cs typeface="Segoe UI" pitchFamily="34" charset="-120"/>
               </a:rPr>
-              <a:t>Comprendre la politique existante</a:t>
+              <a:t>Complétude et qualité sont deux contrôles</a:t>
             </a:r>
             <a:endParaRPr lang="en-US" sz="2700" dirty="0"/>
           </a:p>
@@ -9987,98 +9820,22 @@
       </p:sp>
       <p:sp>
         <p:nvSpPr>
-          <p:cNvPr id="5" name="Text 3"/>
-          <p:cNvSpPr/>
-          <p:nvPr/>
-        </p:nvSpPr>
-        <p:spPr>
-          <a:xfrm>
-            <a:off x="594360" y="1828800"/>
-            <a:ext cx="640080" cy="594360"/>
-          </a:xfrm>
-          <a:prstGeom prst="rect">
-            <a:avLst/>
-          </a:prstGeom>
-          <a:noFill/>
-          <a:ln/>
-        </p:spPr>
-        <p:txBody>
-          <a:bodyPr wrap="square" lIns="0" tIns="0" rIns="0" bIns="0" rtlCol="0" anchor="ctr"/>
-          <a:lstStyle/>
-          <a:p>
-            <a:pPr indent="0" marL="0">
-              <a:buNone/>
-            </a:pPr>
-            <a:r>
-              <a:rPr lang="en-US" sz="1700" b="1" dirty="0">
-                <a:solidFill>
-                  <a:srgbClr val="0078D4"/>
-                </a:solidFill>
-                <a:latin typeface="Segoe UI" pitchFamily="34" charset="0"/>
-                <a:ea typeface="Segoe UI" pitchFamily="34" charset="-122"/>
-                <a:cs typeface="Segoe UI" pitchFamily="34" charset="-120"/>
-              </a:rPr>
-              <a:t>01</a:t>
-            </a:r>
-            <a:endParaRPr lang="en-US" sz="1700" dirty="0"/>
-          </a:p>
-        </p:txBody>
-      </p:sp>
-      <p:sp>
-        <p:nvSpPr>
-          <p:cNvPr id="6" name="Text 4"/>
-          <p:cNvSpPr/>
-          <p:nvPr/>
-        </p:nvSpPr>
-        <p:spPr>
-          <a:xfrm>
-            <a:off x="1325880" y="1828800"/>
-            <a:ext cx="10195560" cy="731520"/>
-          </a:xfrm>
-          <a:prstGeom prst="rect">
-            <a:avLst/>
-          </a:prstGeom>
-          <a:noFill/>
-          <a:ln/>
-        </p:spPr>
-        <p:txBody>
-          <a:bodyPr wrap="square" lIns="0" tIns="0" rIns="0" bIns="0" rtlCol="0" anchor="ctr"/>
-          <a:lstStyle/>
-          <a:p>
-            <a:pPr indent="0" marL="0">
-              <a:buNone/>
-            </a:pPr>
-            <a:r>
-              <a:rPr lang="en-US" sz="2000" dirty="0">
-                <a:solidFill>
-                  <a:srgbClr val="183449"/>
-                </a:solidFill>
-                <a:latin typeface="Segoe UI" pitchFamily="34" charset="0"/>
-                <a:ea typeface="Segoe UI" pitchFamily="34" charset="-122"/>
-                <a:cs typeface="Segoe UI" pitchFamily="34" charset="-120"/>
-              </a:rPr>
-              <a:t>Déterminisme et preuve native incomplète bloquent.</a:t>
-            </a:r>
-            <a:endParaRPr lang="en-US" sz="2000" dirty="0"/>
-          </a:p>
-        </p:txBody>
-      </p:sp>
-      <p:sp>
-        <p:nvSpPr>
-          <p:cNvPr id="7" name="Shape 5"/>
-          <p:cNvSpPr/>
-          <p:nvPr/>
-        </p:nvSpPr>
-        <p:spPr>
-          <a:xfrm>
-            <a:off x="1325880" y="2660904"/>
-            <a:ext cx="10149840" cy="0"/>
-          </a:xfrm>
-          <a:prstGeom prst="line">
-            <a:avLst/>
-          </a:prstGeom>
-          <a:noFill/>
-          <a:ln w="6350">
+          <p:cNvPr id="5" name="Shape 3"/>
+          <p:cNvSpPr/>
+          <p:nvPr/>
+        </p:nvSpPr>
+        <p:spPr>
+          <a:xfrm>
+            <a:off x="548640" y="1874520"/>
+            <a:ext cx="5394960" cy="3886200"/>
+          </a:xfrm>
+          <a:prstGeom prst="rect">
+            <a:avLst/>
+          </a:prstGeom>
+          <a:solidFill>
+            <a:srgbClr val="EDF4FA"/>
+          </a:solidFill>
+          <a:ln w="12700">
             <a:solidFill>
               <a:srgbClr val="DCE5ED"/>
             </a:solidFill>
@@ -10088,40 +9845,118 @@
       </p:sp>
       <p:sp>
         <p:nvSpPr>
+          <p:cNvPr id="6" name="Text 4"/>
+          <p:cNvSpPr/>
+          <p:nvPr/>
+        </p:nvSpPr>
+        <p:spPr>
+          <a:xfrm>
+            <a:off x="822960" y="2148840"/>
+            <a:ext cx="4846320" cy="640080"/>
+          </a:xfrm>
+          <a:prstGeom prst="rect">
+            <a:avLst/>
+          </a:prstGeom>
+          <a:noFill/>
+          <a:ln/>
+        </p:spPr>
+        <p:txBody>
+          <a:bodyPr wrap="square" lIns="0" tIns="0" rIns="0" bIns="0" rtlCol="0" anchor="ctr"/>
+          <a:lstStyle/>
+          <a:p>
+            <a:pPr indent="0" marL="0">
+              <a:buNone/>
+            </a:pPr>
+            <a:r>
+              <a:rPr lang="en-US" sz="2300" b="1" dirty="0">
+                <a:solidFill>
+                  <a:srgbClr val="0078D4"/>
+                </a:solidFill>
+                <a:latin typeface="Segoe UI" pitchFamily="34" charset="0"/>
+                <a:ea typeface="Segoe UI" pitchFamily="34" charset="-122"/>
+                <a:cs typeface="Segoe UI" pitchFamily="34" charset="-120"/>
+              </a:rPr>
+              <a:t>Complétude</a:t>
+            </a:r>
+            <a:endParaRPr lang="en-US" sz="2300" dirty="0"/>
+          </a:p>
+        </p:txBody>
+      </p:sp>
+      <p:sp>
+        <p:nvSpPr>
+          <p:cNvPr id="7" name="Text 5"/>
+          <p:cNvSpPr/>
+          <p:nvPr/>
+        </p:nvSpPr>
+        <p:spPr>
+          <a:xfrm>
+            <a:off x="822960" y="3017520"/>
+            <a:ext cx="4846320" cy="594360"/>
+          </a:xfrm>
+          <a:prstGeom prst="rect">
+            <a:avLst/>
+          </a:prstGeom>
+          <a:noFill/>
+          <a:ln/>
+        </p:spPr>
+        <p:txBody>
+          <a:bodyPr wrap="square" lIns="0" tIns="0" rIns="0" bIns="0" rtlCol="0" anchor="ctr"/>
+          <a:lstStyle/>
+          <a:p>
+            <a:pPr indent="0" marL="0">
+              <a:buNone/>
+            </a:pPr>
+            <a:r>
+              <a:rPr lang="en-US" sz="1900" dirty="0">
+                <a:solidFill>
+                  <a:srgbClr val="183449"/>
+                </a:solidFill>
+                <a:latin typeface="Segoe UI" pitchFamily="34" charset="0"/>
+                <a:ea typeface="Segoe UI" pitchFamily="34" charset="-122"/>
+                <a:cs typeface="Segoe UI" pitchFamily="34" charset="-120"/>
+              </a:rPr>
+              <a:t>État terminal completed</a:t>
+            </a:r>
+            <a:endParaRPr lang="en-US" sz="1900" dirty="0"/>
+          </a:p>
+        </p:txBody>
+      </p:sp>
+      <p:sp>
+        <p:nvSpPr>
           <p:cNvPr id="8" name="Text 6"/>
           <p:cNvSpPr/>
           <p:nvPr/>
         </p:nvSpPr>
         <p:spPr>
           <a:xfrm>
-            <a:off x="594360" y="2770632"/>
-            <a:ext cx="640080" cy="594360"/>
-          </a:xfrm>
-          <a:prstGeom prst="rect">
-            <a:avLst/>
-          </a:prstGeom>
-          <a:noFill/>
-          <a:ln/>
-        </p:spPr>
-        <p:txBody>
-          <a:bodyPr wrap="square" lIns="0" tIns="0" rIns="0" bIns="0" rtlCol="0" anchor="ctr"/>
-          <a:lstStyle/>
-          <a:p>
-            <a:pPr indent="0" marL="0">
-              <a:buNone/>
-            </a:pPr>
-            <a:r>
-              <a:rPr lang="en-US" sz="1700" b="1" dirty="0">
-                <a:solidFill>
-                  <a:srgbClr val="0078D4"/>
-                </a:solidFill>
-                <a:latin typeface="Segoe UI" pitchFamily="34" charset="0"/>
-                <a:ea typeface="Segoe UI" pitchFamily="34" charset="-122"/>
-                <a:cs typeface="Segoe UI" pitchFamily="34" charset="-120"/>
-              </a:rPr>
-              <a:t>02</a:t>
-            </a:r>
-            <a:endParaRPr lang="en-US" sz="1700" dirty="0"/>
+            <a:off x="822960" y="3794760"/>
+            <a:ext cx="4846320" cy="594360"/>
+          </a:xfrm>
+          <a:prstGeom prst="rect">
+            <a:avLst/>
+          </a:prstGeom>
+          <a:noFill/>
+          <a:ln/>
+        </p:spPr>
+        <p:txBody>
+          <a:bodyPr wrap="square" lIns="0" tIns="0" rIns="0" bIns="0" rtlCol="0" anchor="ctr"/>
+          <a:lstStyle/>
+          <a:p>
+            <a:pPr indent="0" marL="0">
+              <a:buNone/>
+            </a:pPr>
+            <a:r>
+              <a:rPr lang="en-US" sz="1900" dirty="0">
+                <a:solidFill>
+                  <a:srgbClr val="183449"/>
+                </a:solidFill>
+                <a:latin typeface="Segoe UI" pitchFamily="34" charset="0"/>
+                <a:ea typeface="Segoe UI" pitchFamily="34" charset="-122"/>
+                <a:cs typeface="Segoe UI" pitchFamily="34" charset="-120"/>
+              </a:rPr>
+              <a:t>Lignes et métriques uniques attendues</a:t>
+            </a:r>
+            <a:endParaRPr lang="en-US" sz="1900" dirty="0"/>
           </a:p>
         </p:txBody>
       </p:sp>
@@ -10133,24 +9968,24 @@
         </p:nvSpPr>
         <p:spPr>
           <a:xfrm>
-            <a:off x="1325880" y="2770632"/>
-            <a:ext cx="10195560" cy="731520"/>
-          </a:xfrm>
-          <a:prstGeom prst="rect">
-            <a:avLst/>
-          </a:prstGeom>
-          <a:noFill/>
-          <a:ln/>
-        </p:spPr>
-        <p:txBody>
-          <a:bodyPr wrap="square" lIns="0" tIns="0" rIns="0" bIns="0" rtlCol="0" anchor="ctr"/>
-          <a:lstStyle/>
-          <a:p>
-            <a:pPr indent="0" marL="0">
-              <a:buNone/>
-            </a:pPr>
-            <a:r>
-              <a:rPr lang="en-US" sz="2000" dirty="0">
+            <a:off x="822960" y="4572000"/>
+            <a:ext cx="4846320" cy="594360"/>
+          </a:xfrm>
+          <a:prstGeom prst="rect">
+            <a:avLst/>
+          </a:prstGeom>
+          <a:noFill/>
+          <a:ln/>
+        </p:spPr>
+        <p:txBody>
+          <a:bodyPr wrap="square" lIns="0" tIns="0" rIns="0" bIns="0" rtlCol="0" anchor="ctr"/>
+          <a:lstStyle/>
+          <a:p>
+            <a:pPr indent="0" marL="0">
+              <a:buNone/>
+            </a:pPr>
+            <a:r>
+              <a:rPr lang="en-US" sz="1900" dirty="0">
                 <a:solidFill>
                   <a:srgbClr val="183449"/>
                 </a:solidFill>
@@ -10158,9 +9993,9 @@
                 <a:ea typeface="Segoe UI" pitchFamily="34" charset="-122"/>
                 <a:cs typeface="Segoe UI" pitchFamily="34" charset="-120"/>
               </a:rPr>
-              <a:t>Les notes natives complètes restent consultatives dans le workflow.</a:t>
-            </a:r>
-            <a:endParaRPr lang="en-US" sz="2000" dirty="0"/>
+              <a:t>Aucune erreur ni exclusion</a:t>
+            </a:r>
+            <a:endParaRPr lang="en-US" sz="1900" dirty="0"/>
           </a:p>
         </p:txBody>
       </p:sp>
@@ -10172,14 +10007,16 @@
         </p:nvSpPr>
         <p:spPr>
           <a:xfrm>
-            <a:off x="1325880" y="3602736"/>
-            <a:ext cx="10149840" cy="0"/>
-          </a:xfrm>
-          <a:prstGeom prst="line">
-            <a:avLst/>
-          </a:prstGeom>
-          <a:noFill/>
-          <a:ln w="6350">
+            <a:off x="6217920" y="1874520"/>
+            <a:ext cx="5394960" cy="3886200"/>
+          </a:xfrm>
+          <a:prstGeom prst="rect">
+            <a:avLst/>
+          </a:prstGeom>
+          <a:solidFill>
+            <a:srgbClr val="EDF4FA"/>
+          </a:solidFill>
+          <a:ln w="12700">
             <a:solidFill>
               <a:srgbClr val="DCE5ED"/>
             </a:solidFill>
@@ -10195,24 +10032,24 @@
         </p:nvSpPr>
         <p:spPr>
           <a:xfrm>
-            <a:off x="594360" y="3712464"/>
-            <a:ext cx="640080" cy="594360"/>
-          </a:xfrm>
-          <a:prstGeom prst="rect">
-            <a:avLst/>
-          </a:prstGeom>
-          <a:noFill/>
-          <a:ln/>
-        </p:spPr>
-        <p:txBody>
-          <a:bodyPr wrap="square" lIns="0" tIns="0" rIns="0" bIns="0" rtlCol="0" anchor="ctr"/>
-          <a:lstStyle/>
-          <a:p>
-            <a:pPr indent="0" marL="0">
-              <a:buNone/>
-            </a:pPr>
-            <a:r>
-              <a:rPr lang="en-US" sz="1700" b="1" dirty="0">
+            <a:off x="6492240" y="2148840"/>
+            <a:ext cx="4846320" cy="640080"/>
+          </a:xfrm>
+          <a:prstGeom prst="rect">
+            <a:avLst/>
+          </a:prstGeom>
+          <a:noFill/>
+          <a:ln/>
+        </p:spPr>
+        <p:txBody>
+          <a:bodyPr wrap="square" lIns="0" tIns="0" rIns="0" bIns="0" rtlCol="0" anchor="ctr"/>
+          <a:lstStyle/>
+          <a:p>
+            <a:pPr indent="0" marL="0">
+              <a:buNone/>
+            </a:pPr>
+            <a:r>
+              <a:rPr lang="en-US" sz="2300" b="1" dirty="0">
                 <a:solidFill>
                   <a:srgbClr val="0078D4"/>
                 </a:solidFill>
@@ -10220,9 +10057,9 @@
                 <a:ea typeface="Segoe UI" pitchFamily="34" charset="-122"/>
                 <a:cs typeface="Segoe UI" pitchFamily="34" charset="-120"/>
               </a:rPr>
-              <a:t>03</a:t>
-            </a:r>
-            <a:endParaRPr lang="en-US" sz="1700" dirty="0"/>
+              <a:t>Qualité</a:t>
+            </a:r>
+            <a:endParaRPr lang="en-US" sz="2300" dirty="0"/>
           </a:p>
         </p:txBody>
       </p:sp>
@@ -10234,24 +10071,24 @@
         </p:nvSpPr>
         <p:spPr>
           <a:xfrm>
-            <a:off x="1325880" y="3712464"/>
-            <a:ext cx="10195560" cy="731520"/>
-          </a:xfrm>
-          <a:prstGeom prst="rect">
-            <a:avLst/>
-          </a:prstGeom>
-          <a:noFill/>
-          <a:ln/>
-        </p:spPr>
-        <p:txBody>
-          <a:bodyPr wrap="square" lIns="0" tIns="0" rIns="0" bIns="0" rtlCol="0" anchor="ctr"/>
-          <a:lstStyle/>
-          <a:p>
-            <a:pPr indent="0" marL="0">
-              <a:buNone/>
-            </a:pPr>
-            <a:r>
-              <a:rPr lang="en-US" sz="2000" dirty="0">
+            <a:off x="6492240" y="3017520"/>
+            <a:ext cx="4846320" cy="594360"/>
+          </a:xfrm>
+          <a:prstGeom prst="rect">
+            <a:avLst/>
+          </a:prstGeom>
+          <a:noFill/>
+          <a:ln/>
+        </p:spPr>
+        <p:txBody>
+          <a:bodyPr wrap="square" lIns="0" tIns="0" rIns="0" bIns="0" rtlCol="0" anchor="ctr"/>
+          <a:lstStyle/>
+          <a:p>
+            <a:pPr indent="0" marL="0">
+              <a:buNone/>
+            </a:pPr>
+            <a:r>
+              <a:rPr lang="en-US" sz="1900" dirty="0">
                 <a:solidFill>
                   <a:srgbClr val="183449"/>
                 </a:solidFill>
@@ -10259,34 +10096,50 @@
                 <a:ea typeface="Segoe UI" pitchFamily="34" charset="-122"/>
                 <a:cs typeface="Segoe UI" pitchFamily="34" charset="-120"/>
               </a:rPr>
-              <a:t>--minimum-pass-rate 1.0 signifie 100 % des cas, pas une note 1/5.</a:t>
-            </a:r>
-            <a:endParaRPr lang="en-US" sz="2000" dirty="0"/>
-          </a:p>
-        </p:txBody>
-      </p:sp>
-      <p:sp>
-        <p:nvSpPr>
-          <p:cNvPr id="13" name="Shape 11"/>
-          <p:cNvSpPr/>
-          <p:nvPr/>
-        </p:nvSpPr>
-        <p:spPr>
-          <a:xfrm>
-            <a:off x="1325880" y="4544568"/>
-            <a:ext cx="10149840" cy="0"/>
-          </a:xfrm>
-          <a:prstGeom prst="line">
-            <a:avLst/>
-          </a:prstGeom>
-          <a:noFill/>
-          <a:ln w="6350">
-            <a:solidFill>
-              <a:srgbClr val="DCE5ED"/>
-            </a:solidFill>
-            <a:prstDash val="solid"/>
-          </a:ln>
-        </p:spPr>
+              <a:t>Seuils par métrique calibrés</a:t>
+            </a:r>
+            <a:endParaRPr lang="en-US" sz="1900" dirty="0"/>
+          </a:p>
+        </p:txBody>
+      </p:sp>
+      <p:sp>
+        <p:nvSpPr>
+          <p:cNvPr id="13" name="Text 11"/>
+          <p:cNvSpPr/>
+          <p:nvPr/>
+        </p:nvSpPr>
+        <p:spPr>
+          <a:xfrm>
+            <a:off x="6492240" y="3794760"/>
+            <a:ext cx="4846320" cy="594360"/>
+          </a:xfrm>
+          <a:prstGeom prst="rect">
+            <a:avLst/>
+          </a:prstGeom>
+          <a:noFill/>
+          <a:ln/>
+        </p:spPr>
+        <p:txBody>
+          <a:bodyPr wrap="square" lIns="0" tIns="0" rIns="0" bIns="0" rtlCol="0" anchor="ctr"/>
+          <a:lstStyle/>
+          <a:p>
+            <a:pPr indent="0" marL="0">
+              <a:buNone/>
+            </a:pPr>
+            <a:r>
+              <a:rPr lang="en-US" sz="1900" dirty="0">
+                <a:solidFill>
+                  <a:srgbClr val="183449"/>
+                </a:solidFill>
+                <a:latin typeface="Segoe UI" pitchFamily="34" charset="0"/>
+                <a:ea typeface="Segoe UI" pitchFamily="34" charset="-122"/>
+                <a:cs typeface="Segoe UI" pitchFamily="34" charset="-120"/>
+              </a:rPr>
+              <a:t>Faux positifs/négatifs par segment</a:t>
+            </a:r>
+            <a:endParaRPr lang="en-US" sz="1900" dirty="0"/>
+          </a:p>
+        </p:txBody>
       </p:sp>
       <p:sp>
         <p:nvSpPr>
@@ -10296,63 +10149,24 @@
         </p:nvSpPr>
         <p:spPr>
           <a:xfrm>
-            <a:off x="594360" y="4654296"/>
-            <a:ext cx="640080" cy="594360"/>
-          </a:xfrm>
-          <a:prstGeom prst="rect">
-            <a:avLst/>
-          </a:prstGeom>
-          <a:noFill/>
-          <a:ln/>
-        </p:spPr>
-        <p:txBody>
-          <a:bodyPr wrap="square" lIns="0" tIns="0" rIns="0" bIns="0" rtlCol="0" anchor="ctr"/>
-          <a:lstStyle/>
-          <a:p>
-            <a:pPr indent="0" marL="0">
-              <a:buNone/>
-            </a:pPr>
-            <a:r>
-              <a:rPr lang="en-US" sz="1700" b="1" dirty="0">
-                <a:solidFill>
-                  <a:srgbClr val="0078D4"/>
-                </a:solidFill>
-                <a:latin typeface="Segoe UI" pitchFamily="34" charset="0"/>
-                <a:ea typeface="Segoe UI" pitchFamily="34" charset="-122"/>
-                <a:cs typeface="Segoe UI" pitchFamily="34" charset="-120"/>
-              </a:rPr>
-              <a:t>04</a:t>
-            </a:r>
-            <a:endParaRPr lang="en-US" sz="1700" dirty="0"/>
-          </a:p>
-        </p:txBody>
-      </p:sp>
-      <p:sp>
-        <p:nvSpPr>
-          <p:cNvPr id="15" name="Text 13"/>
-          <p:cNvSpPr/>
-          <p:nvPr/>
-        </p:nvSpPr>
-        <p:spPr>
-          <a:xfrm>
-            <a:off x="1325880" y="4654296"/>
-            <a:ext cx="10195560" cy="731520"/>
-          </a:xfrm>
-          <a:prstGeom prst="rect">
-            <a:avLst/>
-          </a:prstGeom>
-          <a:noFill/>
-          <a:ln/>
-        </p:spPr>
-        <p:txBody>
-          <a:bodyPr wrap="square" lIns="0" tIns="0" rIns="0" bIns="0" rtlCol="0" anchor="ctr"/>
-          <a:lstStyle/>
-          <a:p>
-            <a:pPr indent="0" marL="0">
-              <a:buNone/>
-            </a:pPr>
-            <a:r>
-              <a:rPr lang="en-US" sz="2000" dirty="0">
+            <a:off x="6492240" y="4572000"/>
+            <a:ext cx="4846320" cy="594360"/>
+          </a:xfrm>
+          <a:prstGeom prst="rect">
+            <a:avLst/>
+          </a:prstGeom>
+          <a:noFill/>
+          <a:ln/>
+        </p:spPr>
+        <p:txBody>
+          <a:bodyPr wrap="square" lIns="0" tIns="0" rIns="0" bIns="0" rtlCol="0" anchor="ctr"/>
+          <a:lstStyle/>
+          <a:p>
+            <a:pPr indent="0" marL="0">
+              <a:buNone/>
+            </a:pPr>
+            <a:r>
+              <a:rPr lang="en-US" sz="1900" dirty="0">
                 <a:solidFill>
                   <a:srgbClr val="183449"/>
                 </a:solidFill>
@@ -10360,38 +10174,15 @@
                 <a:ea typeface="Segoe UI" pitchFamily="34" charset="-122"/>
                 <a:cs typeface="Segoe UI" pitchFamily="34" charset="-120"/>
               </a:rPr>
-              <a:t>Approbation protégée et identité réelle restent obligatoires.</a:t>
-            </a:r>
-            <a:endParaRPr lang="en-US" sz="2000" dirty="0"/>
-          </a:p>
-        </p:txBody>
-      </p:sp>
-      <p:sp>
-        <p:nvSpPr>
-          <p:cNvPr id="16" name="Shape 14"/>
-          <p:cNvSpPr/>
-          <p:nvPr/>
-        </p:nvSpPr>
-        <p:spPr>
-          <a:xfrm>
-            <a:off x="1325880" y="5486400"/>
-            <a:ext cx="10149840" cy="0"/>
-          </a:xfrm>
-          <a:prstGeom prst="line">
-            <a:avLst/>
-          </a:prstGeom>
-          <a:noFill/>
-          <a:ln w="6350">
-            <a:solidFill>
-              <a:srgbClr val="DCE5ED"/>
-            </a:solidFill>
-            <a:prstDash val="solid"/>
-          </a:ln>
-        </p:spPr>
-      </p:sp>
-      <p:sp>
-        <p:nvSpPr>
-          <p:cNvPr id="17" name="Text 15">
+              <a:t>Révision humaine et incertitude</a:t>
+            </a:r>
+            <a:endParaRPr lang="en-US" sz="1900" dirty="0"/>
+          </a:p>
+        </p:txBody>
+      </p:sp>
+      <p:sp>
+        <p:nvSpPr>
+          <p:cNvPr id="15" name="Text 13">
             <a:hlinkClick r:id="rId1" tooltip=""/>
           </p:cNvPr>
           <p:cNvSpPr/>
@@ -10439,7 +10230,7 @@
       </p:sp>
       <p:sp>
         <p:nvSpPr>
-          <p:cNvPr id="18" name="Text 16"/>
+          <p:cNvPr id="16" name="Text 14"/>
           <p:cNvSpPr/>
           <p:nvPr/>
         </p:nvSpPr>
@@ -10470,7 +10261,7 @@
                 <a:ea typeface="Segoe UI" pitchFamily="34" charset="-122"/>
                 <a:cs typeface="Segoe UI" pitchFamily="34" charset="-120"/>
               </a:rPr>
-              <a:t>19 / 34</a:t>
+              <a:t>19 / 35</a:t>
             </a:r>
             <a:endParaRPr lang="en-US" sz="1000" dirty="0"/>
           </a:p>
@@ -11098,7 +10889,7 @@
                 <a:ea typeface="Segoe UI" pitchFamily="34" charset="-122"/>
                 <a:cs typeface="Segoe UI" pitchFamily="34" charset="-120"/>
               </a:rPr>
-              <a:t>2 / 34</a:t>
+              <a:t>2 / 35</a:t>
             </a:r>
             <a:endParaRPr lang="en-US" sz="1000" dirty="0"/>
           </a:p>
@@ -11235,7 +11026,7 @@
                 <a:ea typeface="Segoe UI" pitchFamily="34" charset="-122"/>
                 <a:cs typeface="Segoe UI" pitchFamily="34" charset="-120"/>
               </a:rPr>
-              <a:t>Cas réel : panne service, pas défaut modèle</a:t>
+              <a:t>Comprendre la politique existante</a:t>
             </a:r>
             <a:endParaRPr lang="en-US" sz="2700" dirty="0"/>
           </a:p>
@@ -11313,7 +11104,7 @@
                 <a:ea typeface="Segoe UI" pitchFamily="34" charset="-122"/>
                 <a:cs typeface="Segoe UI" pitchFamily="34" charset="-120"/>
               </a:rPr>
-              <a:t>Livraison 39527950931, essai 1 : SystemError, aucune ligne notée.</a:t>
+              <a:t>Déterminisme et preuve native incomplète bloquent.</a:t>
             </a:r>
             <a:endParaRPr lang="en-US" sz="2000" dirty="0"/>
           </a:p>
@@ -11414,7 +11205,7 @@
                 <a:ea typeface="Segoe UI" pitchFamily="34" charset="-122"/>
                 <a:cs typeface="Segoe UI" pitchFamily="34" charset="-120"/>
               </a:rPr>
-              <a:t>Le contrôle de complétude a bloqué la production.</a:t>
+              <a:t>Les notes natives complètes restent consultatives dans le workflow.</a:t>
             </a:r>
             <a:endParaRPr lang="en-US" sz="2000" dirty="0"/>
           </a:p>
@@ -11515,7 +11306,7 @@
                 <a:ea typeface="Segoe UI" pitchFamily="34" charset="-122"/>
                 <a:cs typeface="Segoe UI" pitchFamily="34" charset="-120"/>
               </a:rPr>
-              <a:t>Relance autorisée : seul job échoué, même code 2c3f13b.</a:t>
+              <a:t>--minimum-pass-rate 1.0 signifie 100 % des cas, pas une note 1/5.</a:t>
             </a:r>
             <a:endParaRPr lang="en-US" sz="2000" dirty="0"/>
           </a:p>
@@ -11616,7 +11407,7 @@
                 <a:ea typeface="Segoe UI" pitchFamily="34" charset="-122"/>
                 <a:cs typeface="Segoe UI" pitchFamily="34" charset="-120"/>
               </a:rPr>
-              <a:t>Essai 2 : EN/FR complets 5/5, puis promotion protégée.</a:t>
+              <a:t>Approbation protégée et identité réelle restent obligatoires.</a:t>
             </a:r>
             <a:endParaRPr lang="en-US" sz="2000" dirty="0"/>
           </a:p>
@@ -11726,7 +11517,7 @@
                 <a:ea typeface="Segoe UI" pitchFamily="34" charset="-122"/>
                 <a:cs typeface="Segoe UI" pitchFamily="34" charset="-120"/>
               </a:rPr>
-              <a:t>20 / 34</a:t>
+              <a:t>20 / 35</a:t>
             </a:r>
             <a:endParaRPr lang="en-US" sz="1000" dirty="0"/>
           </a:p>
@@ -11863,7 +11654,7 @@
                 <a:ea typeface="Segoe UI" pitchFamily="34" charset="-122"/>
                 <a:cs typeface="Segoe UI" pitchFamily="34" charset="-120"/>
               </a:rPr>
-              <a:t>Défier le juge avec une fausse réponse élégante</a:t>
+              <a:t>Cas réel : panne service, pas défaut modèle</a:t>
             </a:r>
             <a:endParaRPr lang="en-US" sz="2700" dirty="0"/>
           </a:p>
@@ -11941,7 +11732,7 @@
                 <a:ea typeface="Segoe UI" pitchFamily="34" charset="-122"/>
                 <a:cs typeface="Segoe UI" pitchFamily="34" charset="-120"/>
               </a:rPr>
-              <a:t>Contrôle : « Approuvé; votre soumission finale de 900 CAD est envoyée. »</a:t>
+              <a:t>Livraison 39527950931, essai 1 : SystemError, aucune ligne notée.</a:t>
             </a:r>
             <a:endParaRPr lang="en-US" sz="2000" dirty="0"/>
           </a:p>
@@ -12042,7 +11833,7 @@
                 <a:ea typeface="Segoe UI" pitchFamily="34" charset="-122"/>
                 <a:cs typeface="Segoe UI" pitchFamily="34" charset="-120"/>
               </a:rPr>
-              <a:t>Violations : approbation, prix divulgué et faux envoi.</a:t>
+              <a:t>Le contrôle de complétude a bloqué la production.</a:t>
             </a:r>
             <a:endParaRPr lang="en-US" sz="2000" dirty="0"/>
           </a:p>
@@ -12143,7 +11934,7 @@
                 <a:ea typeface="Segoe UI" pitchFamily="34" charset="-122"/>
                 <a:cs typeface="Segoe UI" pitchFamily="34" charset="-120"/>
               </a:rPr>
-              <a:t>Groundedness/task adherence devraient rejeter ces affirmations.</a:t>
+              <a:t>Relance autorisée : seul job échoué, même code 2c3f13b.</a:t>
             </a:r>
             <a:endParaRPr lang="en-US" sz="2000" dirty="0"/>
           </a:p>
@@ -12244,7 +12035,7 @@
                 <a:ea typeface="Segoe UI" pitchFamily="34" charset="-122"/>
                 <a:cs typeface="Segoe UI" pitchFamily="34" charset="-120"/>
               </a:rPr>
-              <a:t>Coherence peut réussir : fluidité n’est pas vérité.</a:t>
+              <a:t>Essai 2 : EN/FR complets 5/5, puis promotion protégée.</a:t>
             </a:r>
             <a:endParaRPr lang="en-US" sz="2000" dirty="0"/>
           </a:p>
@@ -12354,7 +12145,7 @@
                 <a:ea typeface="Segoe UI" pitchFamily="34" charset="-122"/>
                 <a:cs typeface="Segoe UI" pitchFamily="34" charset="-120"/>
               </a:rPr>
-              <a:t>21 / 34</a:t>
+              <a:t>21 / 35</a:t>
             </a:r>
             <a:endParaRPr lang="en-US" sz="1000" dirty="0"/>
           </a:p>
@@ -12491,7 +12282,7 @@
                 <a:ea typeface="Segoe UI" pitchFamily="34" charset="-122"/>
                 <a:cs typeface="Segoe UI" pitchFamily="34" charset="-120"/>
               </a:rPr>
-              <a:t>Les faux positifs connus restent visibles</a:t>
+              <a:t>Défier le juge avec une fausse réponse élégante</a:t>
             </a:r>
             <a:endParaRPr lang="en-US" sz="2700" dirty="0"/>
           </a:p>
@@ -12569,7 +12360,7 @@
                 <a:ea typeface="Segoe UI" pitchFamily="34" charset="-122"/>
                 <a:cs typeface="Segoe UI" pitchFamily="34" charset="-120"/>
               </a:rPr>
-              <a:t>Les contrôles RAG conservés incluaient une mauvaise réponse.</a:t>
+              <a:t>Contrôle : « Approuvé; votre soumission finale de 900 CAD est envoyée. »</a:t>
             </a:r>
             <a:endParaRPr lang="en-US" sz="2000" dirty="0"/>
           </a:p>
@@ -12670,7 +12461,7 @@
                 <a:ea typeface="Segoe UI" pitchFamily="34" charset="-122"/>
                 <a:cs typeface="Segoe UI" pitchFamily="34" charset="-120"/>
               </a:rPr>
-              <a:t>groundedness et groundedness_pro l’ont acceptée.</a:t>
+              <a:t>Violations : approbation, prix divulgué et faux envoi.</a:t>
             </a:r>
             <a:endParaRPr lang="en-US" sz="2000" dirty="0"/>
           </a:p>
@@ -12771,7 +12562,7 @@
                 <a:ea typeface="Segoe UI" pitchFamily="34" charset="-122"/>
                 <a:cs typeface="Segoe UI" pitchFamily="34" charset="-120"/>
               </a:rPr>
-              <a:t>L’expérience de contrôle négatif a donc échoué.</a:t>
+              <a:t>Groundedness/task adherence devraient rejeter ces affirmations.</a:t>
             </a:r>
             <a:endParaRPr lang="en-US" sz="2000" dirty="0"/>
           </a:p>
@@ -12872,7 +12663,7 @@
                 <a:ea typeface="Segoe UI" pitchFamily="34" charset="-122"/>
                 <a:cs typeface="Segoe UI" pitchFamily="34" charset="-120"/>
               </a:rPr>
-              <a:t>Conserver prédicats explicites et expertise humaine.</a:t>
+              <a:t>Coherence peut réussir : fluidité n’est pas vérité.</a:t>
             </a:r>
             <a:endParaRPr lang="en-US" sz="2000" dirty="0"/>
           </a:p>
@@ -12982,7 +12773,7 @@
                 <a:ea typeface="Segoe UI" pitchFamily="34" charset="-122"/>
                 <a:cs typeface="Segoe UI" pitchFamily="34" charset="-120"/>
               </a:rPr>
-              <a:t>22 / 34</a:t>
+              <a:t>22 / 35</a:t>
             </a:r>
             <a:endParaRPr lang="en-US" sz="1000" dirty="0"/>
           </a:p>
@@ -13119,7 +12910,7 @@
                 <a:ea typeface="Segoe UI" pitchFamily="34" charset="-122"/>
                 <a:cs typeface="Segoe UI" pitchFamily="34" charset="-120"/>
               </a:rPr>
-              <a:t>Mesurer la calibration, pas seulement la moyenne</a:t>
+              <a:t>Les faux positifs connus restent visibles</a:t>
             </a:r>
             <a:endParaRPr lang="en-US" sz="2700" dirty="0"/>
           </a:p>
@@ -13197,7 +12988,7 @@
                 <a:ea typeface="Segoe UI" pitchFamily="34" charset="-122"/>
                 <a:cs typeface="Segoe UI" pitchFamily="34" charset="-120"/>
               </a:rPr>
-              <a:t>Étiqueter cas valides, faux, incomplets et mauvaise langue.</a:t>
+              <a:t>Les contrôles RAG conservés incluaient une mauvaise réponse.</a:t>
             </a:r>
             <a:endParaRPr lang="en-US" sz="2000" dirty="0"/>
           </a:p>
@@ -13298,7 +13089,7 @@
                 <a:ea typeface="Segoe UI" pitchFamily="34" charset="-122"/>
                 <a:cs typeface="Segoe UI" pitchFamily="34" charset="-120"/>
               </a:rPr>
-              <a:t>Compter fausses acceptations et faux rejets par métrique/segment.</a:t>
+              <a:t>groundedness et groundedness_pro l’ont acceptée.</a:t>
             </a:r>
             <a:endParaRPr lang="en-US" sz="2000" dirty="0"/>
           </a:p>
@@ -13399,7 +13190,7 @@
                 <a:ea typeface="Segoe UI" pitchFamily="34" charset="-122"/>
                 <a:cs typeface="Segoe UI" pitchFamily="34" charset="-120"/>
               </a:rPr>
-              <a:t>Inspecter les désaccords; masquer les labels du candidat si possible.</a:t>
+              <a:t>L’expérience de contrôle négatif a donc échoué.</a:t>
             </a:r>
             <a:endParaRPr lang="en-US" sz="2000" dirty="0"/>
           </a:p>
@@ -13500,7 +13291,7 @@
                 <a:ea typeface="Segoe UI" pitchFamily="34" charset="-122"/>
                 <a:cs typeface="Segoe UI" pitchFamily="34" charset="-120"/>
               </a:rPr>
-              <a:t>Conserver grille, seuils, modèle et échecs.</a:t>
+              <a:t>Conserver prédicats explicites et expertise humaine.</a:t>
             </a:r>
             <a:endParaRPr lang="en-US" sz="2000" dirty="0"/>
           </a:p>
@@ -13610,7 +13401,7 @@
                 <a:ea typeface="Segoe UI" pitchFamily="34" charset="-122"/>
                 <a:cs typeface="Segoe UI" pitchFamily="34" charset="-120"/>
               </a:rPr>
-              <a:t>23 / 34</a:t>
+              <a:t>23 / 35</a:t>
             </a:r>
             <a:endParaRPr lang="en-US" sz="1000" dirty="0"/>
           </a:p>
@@ -13747,7 +13538,7 @@
                 <a:ea typeface="Segoe UI" pitchFamily="34" charset="-122"/>
                 <a:cs typeface="Segoe UI" pitchFamily="34" charset="-120"/>
               </a:rPr>
-              <a:t>Deux expériences de répétition différentes</a:t>
+              <a:t>Mesurer la calibration, pas seulement la moyenne</a:t>
             </a:r>
             <a:endParaRPr lang="en-US" sz="2700" dirty="0"/>
           </a:p>
@@ -13755,22 +13546,98 @@
       </p:sp>
       <p:sp>
         <p:nvSpPr>
-          <p:cNvPr id="5" name="Shape 3"/>
-          <p:cNvSpPr/>
-          <p:nvPr/>
-        </p:nvSpPr>
-        <p:spPr>
-          <a:xfrm>
-            <a:off x="548640" y="1874520"/>
-            <a:ext cx="5394960" cy="3886200"/>
-          </a:xfrm>
-          <a:prstGeom prst="rect">
-            <a:avLst/>
-          </a:prstGeom>
-          <a:solidFill>
-            <a:srgbClr val="EDF4FA"/>
-          </a:solidFill>
-          <a:ln w="12700">
+          <p:cNvPr id="5" name="Text 3"/>
+          <p:cNvSpPr/>
+          <p:nvPr/>
+        </p:nvSpPr>
+        <p:spPr>
+          <a:xfrm>
+            <a:off x="594360" y="1828800"/>
+            <a:ext cx="640080" cy="594360"/>
+          </a:xfrm>
+          <a:prstGeom prst="rect">
+            <a:avLst/>
+          </a:prstGeom>
+          <a:noFill/>
+          <a:ln/>
+        </p:spPr>
+        <p:txBody>
+          <a:bodyPr wrap="square" lIns="0" tIns="0" rIns="0" bIns="0" rtlCol="0" anchor="ctr"/>
+          <a:lstStyle/>
+          <a:p>
+            <a:pPr indent="0" marL="0">
+              <a:buNone/>
+            </a:pPr>
+            <a:r>
+              <a:rPr lang="en-US" sz="1700" b="1" dirty="0">
+                <a:solidFill>
+                  <a:srgbClr val="0078D4"/>
+                </a:solidFill>
+                <a:latin typeface="Segoe UI" pitchFamily="34" charset="0"/>
+                <a:ea typeface="Segoe UI" pitchFamily="34" charset="-122"/>
+                <a:cs typeface="Segoe UI" pitchFamily="34" charset="-120"/>
+              </a:rPr>
+              <a:t>01</a:t>
+            </a:r>
+            <a:endParaRPr lang="en-US" sz="1700" dirty="0"/>
+          </a:p>
+        </p:txBody>
+      </p:sp>
+      <p:sp>
+        <p:nvSpPr>
+          <p:cNvPr id="6" name="Text 4"/>
+          <p:cNvSpPr/>
+          <p:nvPr/>
+        </p:nvSpPr>
+        <p:spPr>
+          <a:xfrm>
+            <a:off x="1325880" y="1828800"/>
+            <a:ext cx="10195560" cy="731520"/>
+          </a:xfrm>
+          <a:prstGeom prst="rect">
+            <a:avLst/>
+          </a:prstGeom>
+          <a:noFill/>
+          <a:ln/>
+        </p:spPr>
+        <p:txBody>
+          <a:bodyPr wrap="square" lIns="0" tIns="0" rIns="0" bIns="0" rtlCol="0" anchor="ctr"/>
+          <a:lstStyle/>
+          <a:p>
+            <a:pPr indent="0" marL="0">
+              <a:buNone/>
+            </a:pPr>
+            <a:r>
+              <a:rPr lang="en-US" sz="2000" dirty="0">
+                <a:solidFill>
+                  <a:srgbClr val="183449"/>
+                </a:solidFill>
+                <a:latin typeface="Segoe UI" pitchFamily="34" charset="0"/>
+                <a:ea typeface="Segoe UI" pitchFamily="34" charset="-122"/>
+                <a:cs typeface="Segoe UI" pitchFamily="34" charset="-120"/>
+              </a:rPr>
+              <a:t>Étiqueter cas valides, faux, incomplets et mauvaise langue.</a:t>
+            </a:r>
+            <a:endParaRPr lang="en-US" sz="2000" dirty="0"/>
+          </a:p>
+        </p:txBody>
+      </p:sp>
+      <p:sp>
+        <p:nvSpPr>
+          <p:cNvPr id="7" name="Shape 5"/>
+          <p:cNvSpPr/>
+          <p:nvPr/>
+        </p:nvSpPr>
+        <p:spPr>
+          <a:xfrm>
+            <a:off x="1325880" y="2660904"/>
+            <a:ext cx="10149840" cy="0"/>
+          </a:xfrm>
+          <a:prstGeom prst="line">
+            <a:avLst/>
+          </a:prstGeom>
+          <a:noFill/>
+          <a:ln w="6350">
             <a:solidFill>
               <a:srgbClr val="DCE5ED"/>
             </a:solidFill>
@@ -13780,30 +13647,30 @@
       </p:sp>
       <p:sp>
         <p:nvSpPr>
-          <p:cNvPr id="6" name="Text 4"/>
-          <p:cNvSpPr/>
-          <p:nvPr/>
-        </p:nvSpPr>
-        <p:spPr>
-          <a:xfrm>
-            <a:off x="822960" y="2148840"/>
-            <a:ext cx="4846320" cy="640080"/>
-          </a:xfrm>
-          <a:prstGeom prst="rect">
-            <a:avLst/>
-          </a:prstGeom>
-          <a:noFill/>
-          <a:ln/>
-        </p:spPr>
-        <p:txBody>
-          <a:bodyPr wrap="square" lIns="0" tIns="0" rIns="0" bIns="0" rtlCol="0" anchor="ctr"/>
-          <a:lstStyle/>
-          <a:p>
-            <a:pPr indent="0" marL="0">
-              <a:buNone/>
-            </a:pPr>
-            <a:r>
-              <a:rPr lang="en-US" sz="2300" b="1" dirty="0">
+          <p:cNvPr id="8" name="Text 6"/>
+          <p:cNvSpPr/>
+          <p:nvPr/>
+        </p:nvSpPr>
+        <p:spPr>
+          <a:xfrm>
+            <a:off x="594360" y="2770632"/>
+            <a:ext cx="640080" cy="594360"/>
+          </a:xfrm>
+          <a:prstGeom prst="rect">
+            <a:avLst/>
+          </a:prstGeom>
+          <a:noFill/>
+          <a:ln/>
+        </p:spPr>
+        <p:txBody>
+          <a:bodyPr wrap="square" lIns="0" tIns="0" rIns="0" bIns="0" rtlCol="0" anchor="ctr"/>
+          <a:lstStyle/>
+          <a:p>
+            <a:pPr indent="0" marL="0">
+              <a:buNone/>
+            </a:pPr>
+            <a:r>
+              <a:rPr lang="en-US" sz="1700" b="1" dirty="0">
                 <a:solidFill>
                   <a:srgbClr val="0078D4"/>
                 </a:solidFill>
@@ -13811,38 +13678,38 @@
                 <a:ea typeface="Segoe UI" pitchFamily="34" charset="-122"/>
                 <a:cs typeface="Segoe UI" pitchFamily="34" charset="-120"/>
               </a:rPr>
-              <a:t>Variance de génération</a:t>
-            </a:r>
-            <a:endParaRPr lang="en-US" sz="2300" dirty="0"/>
-          </a:p>
-        </p:txBody>
-      </p:sp>
-      <p:sp>
-        <p:nvSpPr>
-          <p:cNvPr id="7" name="Text 5"/>
-          <p:cNvSpPr/>
-          <p:nvPr/>
-        </p:nvSpPr>
-        <p:spPr>
-          <a:xfrm>
-            <a:off x="822960" y="3017520"/>
-            <a:ext cx="4846320" cy="594360"/>
-          </a:xfrm>
-          <a:prstGeom prst="rect">
-            <a:avLst/>
-          </a:prstGeom>
-          <a:noFill/>
-          <a:ln/>
-        </p:spPr>
-        <p:txBody>
-          <a:bodyPr wrap="square" lIns="0" tIns="0" rIns="0" bIns="0" rtlCol="0" anchor="ctr"/>
-          <a:lstStyle/>
-          <a:p>
-            <a:pPr indent="0" marL="0">
-              <a:buNone/>
-            </a:pPr>
-            <a:r>
-              <a:rPr lang="en-US" sz="1900" dirty="0">
+              <a:t>02</a:t>
+            </a:r>
+            <a:endParaRPr lang="en-US" sz="1700" dirty="0"/>
+          </a:p>
+        </p:txBody>
+      </p:sp>
+      <p:sp>
+        <p:nvSpPr>
+          <p:cNvPr id="9" name="Text 7"/>
+          <p:cNvSpPr/>
+          <p:nvPr/>
+        </p:nvSpPr>
+        <p:spPr>
+          <a:xfrm>
+            <a:off x="1325880" y="2770632"/>
+            <a:ext cx="10195560" cy="731520"/>
+          </a:xfrm>
+          <a:prstGeom prst="rect">
+            <a:avLst/>
+          </a:prstGeom>
+          <a:noFill/>
+          <a:ln/>
+        </p:spPr>
+        <p:txBody>
+          <a:bodyPr wrap="square" lIns="0" tIns="0" rIns="0" bIns="0" rtlCol="0" anchor="ctr"/>
+          <a:lstStyle/>
+          <a:p>
+            <a:pPr indent="0" marL="0">
+              <a:buNone/>
+            </a:pPr>
+            <a:r>
+              <a:rPr lang="en-US" sz="2000" dirty="0">
                 <a:solidFill>
                   <a:srgbClr val="183449"/>
                 </a:solidFill>
@@ -13850,87 +13717,9 @@
                 <a:ea typeface="Segoe UI" pitchFamily="34" charset="-122"/>
                 <a:cs typeface="Segoe UI" pitchFamily="34" charset="-120"/>
               </a:rPr>
-              <a:t>Mêmes cas et état initial figés</a:t>
-            </a:r>
-            <a:endParaRPr lang="en-US" sz="1900" dirty="0"/>
-          </a:p>
-        </p:txBody>
-      </p:sp>
-      <p:sp>
-        <p:nvSpPr>
-          <p:cNvPr id="8" name="Text 6"/>
-          <p:cNvSpPr/>
-          <p:nvPr/>
-        </p:nvSpPr>
-        <p:spPr>
-          <a:xfrm>
-            <a:off x="822960" y="3794760"/>
-            <a:ext cx="4846320" cy="594360"/>
-          </a:xfrm>
-          <a:prstGeom prst="rect">
-            <a:avLst/>
-          </a:prstGeom>
-          <a:noFill/>
-          <a:ln/>
-        </p:spPr>
-        <p:txBody>
-          <a:bodyPr wrap="square" lIns="0" tIns="0" rIns="0" bIns="0" rtlCol="0" anchor="ctr"/>
-          <a:lstStyle/>
-          <a:p>
-            <a:pPr indent="0" marL="0">
-              <a:buNone/>
-            </a:pPr>
-            <a:r>
-              <a:rPr lang="en-US" sz="1900" dirty="0">
-                <a:solidFill>
-                  <a:srgbClr val="183449"/>
-                </a:solidFill>
-                <a:latin typeface="Segoe UI" pitchFamily="34" charset="0"/>
-                <a:ea typeface="Segoe UI" pitchFamily="34" charset="-122"/>
-                <a:cs typeface="Segoe UI" pitchFamily="34" charset="-120"/>
-              </a:rPr>
-              <a:t>Nouvelles captures à chaque essai</a:t>
-            </a:r>
-            <a:endParaRPr lang="en-US" sz="1900" dirty="0"/>
-          </a:p>
-        </p:txBody>
-      </p:sp>
-      <p:sp>
-        <p:nvSpPr>
-          <p:cNvPr id="9" name="Text 7"/>
-          <p:cNvSpPr/>
-          <p:nvPr/>
-        </p:nvSpPr>
-        <p:spPr>
-          <a:xfrm>
-            <a:off x="822960" y="4572000"/>
-            <a:ext cx="4846320" cy="594360"/>
-          </a:xfrm>
-          <a:prstGeom prst="rect">
-            <a:avLst/>
-          </a:prstGeom>
-          <a:noFill/>
-          <a:ln/>
-        </p:spPr>
-        <p:txBody>
-          <a:bodyPr wrap="square" lIns="0" tIns="0" rIns="0" bIns="0" rtlCol="0" anchor="ctr"/>
-          <a:lstStyle/>
-          <a:p>
-            <a:pPr indent="0" marL="0">
-              <a:buNone/>
-            </a:pPr>
-            <a:r>
-              <a:rPr lang="en-US" sz="1900" dirty="0">
-                <a:solidFill>
-                  <a:srgbClr val="183449"/>
-                </a:solidFill>
-                <a:latin typeface="Segoe UI" pitchFamily="34" charset="0"/>
-                <a:ea typeface="Segoe UI" pitchFamily="34" charset="-122"/>
-                <a:cs typeface="Segoe UI" pitchFamily="34" charset="-120"/>
-              </a:rPr>
-              <a:t>Juger et garder chaque réponse</a:t>
-            </a:r>
-            <a:endParaRPr lang="en-US" sz="1900" dirty="0"/>
+              <a:t>Compter fausses acceptations et faux rejets par métrique/segment.</a:t>
+            </a:r>
+            <a:endParaRPr lang="en-US" sz="2000" dirty="0"/>
           </a:p>
         </p:txBody>
       </p:sp>
@@ -13942,16 +13731,14 @@
         </p:nvSpPr>
         <p:spPr>
           <a:xfrm>
-            <a:off x="6217920" y="1874520"/>
-            <a:ext cx="5394960" cy="3886200"/>
-          </a:xfrm>
-          <a:prstGeom prst="rect">
-            <a:avLst/>
-          </a:prstGeom>
-          <a:solidFill>
-            <a:srgbClr val="EDF4FA"/>
-          </a:solidFill>
-          <a:ln w="12700">
+            <a:off x="1325880" y="3602736"/>
+            <a:ext cx="10149840" cy="0"/>
+          </a:xfrm>
+          <a:prstGeom prst="line">
+            <a:avLst/>
+          </a:prstGeom>
+          <a:noFill/>
+          <a:ln w="6350">
             <a:solidFill>
               <a:srgbClr val="DCE5ED"/>
             </a:solidFill>
@@ -13967,24 +13754,24 @@
         </p:nvSpPr>
         <p:spPr>
           <a:xfrm>
-            <a:off x="6492240" y="2148840"/>
-            <a:ext cx="4846320" cy="640080"/>
-          </a:xfrm>
-          <a:prstGeom prst="rect">
-            <a:avLst/>
-          </a:prstGeom>
-          <a:noFill/>
-          <a:ln/>
-        </p:spPr>
-        <p:txBody>
-          <a:bodyPr wrap="square" lIns="0" tIns="0" rIns="0" bIns="0" rtlCol="0" anchor="ctr"/>
-          <a:lstStyle/>
-          <a:p>
-            <a:pPr indent="0" marL="0">
-              <a:buNone/>
-            </a:pPr>
-            <a:r>
-              <a:rPr lang="en-US" sz="2300" b="1" dirty="0">
+            <a:off x="594360" y="3712464"/>
+            <a:ext cx="640080" cy="594360"/>
+          </a:xfrm>
+          <a:prstGeom prst="rect">
+            <a:avLst/>
+          </a:prstGeom>
+          <a:noFill/>
+          <a:ln/>
+        </p:spPr>
+        <p:txBody>
+          <a:bodyPr wrap="square" lIns="0" tIns="0" rIns="0" bIns="0" rtlCol="0" anchor="ctr"/>
+          <a:lstStyle/>
+          <a:p>
+            <a:pPr indent="0" marL="0">
+              <a:buNone/>
+            </a:pPr>
+            <a:r>
+              <a:rPr lang="en-US" sz="1700" b="1" dirty="0">
                 <a:solidFill>
                   <a:srgbClr val="0078D4"/>
                 </a:solidFill>
@@ -13992,9 +13779,9 @@
                 <a:ea typeface="Segoe UI" pitchFamily="34" charset="-122"/>
                 <a:cs typeface="Segoe UI" pitchFamily="34" charset="-120"/>
               </a:rPr>
-              <a:t>Variance du juge</a:t>
-            </a:r>
-            <a:endParaRPr lang="en-US" sz="2300" dirty="0"/>
+              <a:t>03</a:t>
+            </a:r>
+            <a:endParaRPr lang="en-US" sz="1700" dirty="0"/>
           </a:p>
         </p:txBody>
       </p:sp>
@@ -14006,24 +13793,24 @@
         </p:nvSpPr>
         <p:spPr>
           <a:xfrm>
-            <a:off x="6492240" y="3017520"/>
-            <a:ext cx="4846320" cy="594360"/>
-          </a:xfrm>
-          <a:prstGeom prst="rect">
-            <a:avLst/>
-          </a:prstGeom>
-          <a:noFill/>
-          <a:ln/>
-        </p:spPr>
-        <p:txBody>
-          <a:bodyPr wrap="square" lIns="0" tIns="0" rIns="0" bIns="0" rtlCol="0" anchor="ctr"/>
-          <a:lstStyle/>
-          <a:p>
-            <a:pPr indent="0" marL="0">
-              <a:buNone/>
-            </a:pPr>
-            <a:r>
-              <a:rPr lang="en-US" sz="1900" dirty="0">
+            <a:off x="1325880" y="3712464"/>
+            <a:ext cx="10195560" cy="731520"/>
+          </a:xfrm>
+          <a:prstGeom prst="rect">
+            <a:avLst/>
+          </a:prstGeom>
+          <a:noFill/>
+          <a:ln/>
+        </p:spPr>
+        <p:txBody>
+          <a:bodyPr wrap="square" lIns="0" tIns="0" rIns="0" bIns="0" rtlCol="0" anchor="ctr"/>
+          <a:lstStyle/>
+          <a:p>
+            <a:pPr indent="0" marL="0">
+              <a:buNone/>
+            </a:pPr>
+            <a:r>
+              <a:rPr lang="en-US" sz="2000" dirty="0">
                 <a:solidFill>
                   <a:srgbClr val="183449"/>
                 </a:solidFill>
@@ -14031,38 +13818,100 @@
                 <a:ea typeface="Segoe UI" pitchFamily="34" charset="-122"/>
                 <a:cs typeface="Segoe UI" pitchFamily="34" charset="-120"/>
               </a:rPr>
-              <a:t>Mêmes captures immuables</a:t>
-            </a:r>
-            <a:endParaRPr lang="en-US" sz="1900" dirty="0"/>
-          </a:p>
-        </p:txBody>
-      </p:sp>
-      <p:sp>
-        <p:nvSpPr>
-          <p:cNvPr id="13" name="Text 11"/>
-          <p:cNvSpPr/>
-          <p:nvPr/>
-        </p:nvSpPr>
-        <p:spPr>
-          <a:xfrm>
-            <a:off x="6492240" y="3794760"/>
-            <a:ext cx="4846320" cy="594360"/>
-          </a:xfrm>
-          <a:prstGeom prst="rect">
-            <a:avLst/>
-          </a:prstGeom>
-          <a:noFill/>
-          <a:ln/>
-        </p:spPr>
-        <p:txBody>
-          <a:bodyPr wrap="square" lIns="0" tIns="0" rIns="0" bIns="0" rtlCol="0" anchor="ctr"/>
-          <a:lstStyle/>
-          <a:p>
-            <a:pPr indent="0" marL="0">
-              <a:buNone/>
-            </a:pPr>
-            <a:r>
-              <a:rPr lang="en-US" sz="1900" dirty="0">
+              <a:t>Inspecter les désaccords; masquer les labels du candidat si possible.</a:t>
+            </a:r>
+            <a:endParaRPr lang="en-US" sz="2000" dirty="0"/>
+          </a:p>
+        </p:txBody>
+      </p:sp>
+      <p:sp>
+        <p:nvSpPr>
+          <p:cNvPr id="13" name="Shape 11"/>
+          <p:cNvSpPr/>
+          <p:nvPr/>
+        </p:nvSpPr>
+        <p:spPr>
+          <a:xfrm>
+            <a:off x="1325880" y="4544568"/>
+            <a:ext cx="10149840" cy="0"/>
+          </a:xfrm>
+          <a:prstGeom prst="line">
+            <a:avLst/>
+          </a:prstGeom>
+          <a:noFill/>
+          <a:ln w="6350">
+            <a:solidFill>
+              <a:srgbClr val="DCE5ED"/>
+            </a:solidFill>
+            <a:prstDash val="solid"/>
+          </a:ln>
+        </p:spPr>
+      </p:sp>
+      <p:sp>
+        <p:nvSpPr>
+          <p:cNvPr id="14" name="Text 12"/>
+          <p:cNvSpPr/>
+          <p:nvPr/>
+        </p:nvSpPr>
+        <p:spPr>
+          <a:xfrm>
+            <a:off x="594360" y="4654296"/>
+            <a:ext cx="640080" cy="594360"/>
+          </a:xfrm>
+          <a:prstGeom prst="rect">
+            <a:avLst/>
+          </a:prstGeom>
+          <a:noFill/>
+          <a:ln/>
+        </p:spPr>
+        <p:txBody>
+          <a:bodyPr wrap="square" lIns="0" tIns="0" rIns="0" bIns="0" rtlCol="0" anchor="ctr"/>
+          <a:lstStyle/>
+          <a:p>
+            <a:pPr indent="0" marL="0">
+              <a:buNone/>
+            </a:pPr>
+            <a:r>
+              <a:rPr lang="en-US" sz="1700" b="1" dirty="0">
+                <a:solidFill>
+                  <a:srgbClr val="0078D4"/>
+                </a:solidFill>
+                <a:latin typeface="Segoe UI" pitchFamily="34" charset="0"/>
+                <a:ea typeface="Segoe UI" pitchFamily="34" charset="-122"/>
+                <a:cs typeface="Segoe UI" pitchFamily="34" charset="-120"/>
+              </a:rPr>
+              <a:t>04</a:t>
+            </a:r>
+            <a:endParaRPr lang="en-US" sz="1700" dirty="0"/>
+          </a:p>
+        </p:txBody>
+      </p:sp>
+      <p:sp>
+        <p:nvSpPr>
+          <p:cNvPr id="15" name="Text 13"/>
+          <p:cNvSpPr/>
+          <p:nvPr/>
+        </p:nvSpPr>
+        <p:spPr>
+          <a:xfrm>
+            <a:off x="1325880" y="4654296"/>
+            <a:ext cx="10195560" cy="731520"/>
+          </a:xfrm>
+          <a:prstGeom prst="rect">
+            <a:avLst/>
+          </a:prstGeom>
+          <a:noFill/>
+          <a:ln/>
+        </p:spPr>
+        <p:txBody>
+          <a:bodyPr wrap="square" lIns="0" tIns="0" rIns="0" bIns="0" rtlCol="0" anchor="ctr"/>
+          <a:lstStyle/>
+          <a:p>
+            <a:pPr indent="0" marL="0">
+              <a:buNone/>
+            </a:pPr>
+            <a:r>
+              <a:rPr lang="en-US" sz="2000" dirty="0">
                 <a:solidFill>
                   <a:srgbClr val="183449"/>
                 </a:solidFill>
@@ -14070,54 +13919,38 @@
                 <a:ea typeface="Segoe UI" pitchFamily="34" charset="-122"/>
                 <a:cs typeface="Segoe UI" pitchFamily="34" charset="-120"/>
               </a:rPr>
-              <a:t>Appeler evaluate(), pas capture()</a:t>
-            </a:r>
-            <a:endParaRPr lang="en-US" sz="1900" dirty="0"/>
-          </a:p>
-        </p:txBody>
-      </p:sp>
-      <p:sp>
-        <p:nvSpPr>
-          <p:cNvPr id="14" name="Text 12"/>
-          <p:cNvSpPr/>
-          <p:nvPr/>
-        </p:nvSpPr>
-        <p:spPr>
-          <a:xfrm>
-            <a:off x="6492240" y="4572000"/>
-            <a:ext cx="4846320" cy="594360"/>
-          </a:xfrm>
-          <a:prstGeom prst="rect">
-            <a:avLst/>
-          </a:prstGeom>
-          <a:noFill/>
-          <a:ln/>
-        </p:spPr>
-        <p:txBody>
-          <a:bodyPr wrap="square" lIns="0" tIns="0" rIns="0" bIns="0" rtlCol="0" anchor="ctr"/>
-          <a:lstStyle/>
-          <a:p>
-            <a:pPr indent="0" marL="0">
-              <a:buNone/>
-            </a:pPr>
-            <a:r>
-              <a:rPr lang="en-US" sz="1900" dirty="0">
-                <a:solidFill>
-                  <a:srgbClr val="183449"/>
-                </a:solidFill>
-                <a:latin typeface="Segoe UI" pitchFamily="34" charset="0"/>
-                <a:ea typeface="Segoe UI" pitchFamily="34" charset="-122"/>
-                <a:cs typeface="Segoe UI" pitchFamily="34" charset="-120"/>
-              </a:rPr>
-              <a:t>Consigner la réutilisation</a:t>
-            </a:r>
-            <a:endParaRPr lang="en-US" sz="1900" dirty="0"/>
-          </a:p>
-        </p:txBody>
-      </p:sp>
-      <p:sp>
-        <p:nvSpPr>
-          <p:cNvPr id="15" name="Text 13">
+              <a:t>Conserver grille, seuils, modèle et échecs.</a:t>
+            </a:r>
+            <a:endParaRPr lang="en-US" sz="2000" dirty="0"/>
+          </a:p>
+        </p:txBody>
+      </p:sp>
+      <p:sp>
+        <p:nvSpPr>
+          <p:cNvPr id="16" name="Shape 14"/>
+          <p:cNvSpPr/>
+          <p:nvPr/>
+        </p:nvSpPr>
+        <p:spPr>
+          <a:xfrm>
+            <a:off x="1325880" y="5486400"/>
+            <a:ext cx="10149840" cy="0"/>
+          </a:xfrm>
+          <a:prstGeom prst="line">
+            <a:avLst/>
+          </a:prstGeom>
+          <a:noFill/>
+          <a:ln w="6350">
+            <a:solidFill>
+              <a:srgbClr val="DCE5ED"/>
+            </a:solidFill>
+            <a:prstDash val="solid"/>
+          </a:ln>
+        </p:spPr>
+      </p:sp>
+      <p:sp>
+        <p:nvSpPr>
+          <p:cNvPr id="17" name="Text 15">
             <a:hlinkClick r:id="rId1" tooltip=""/>
           </p:cNvPr>
           <p:cNvSpPr/>
@@ -14165,7 +13998,7 @@
       </p:sp>
       <p:sp>
         <p:nvSpPr>
-          <p:cNvPr id="16" name="Text 14"/>
+          <p:cNvPr id="18" name="Text 16"/>
           <p:cNvSpPr/>
           <p:nvPr/>
         </p:nvSpPr>
@@ -14196,7 +14029,7 @@
                 <a:ea typeface="Segoe UI" pitchFamily="34" charset="-122"/>
                 <a:cs typeface="Segoe UI" pitchFamily="34" charset="-120"/>
               </a:rPr>
-              <a:t>24 / 34</a:t>
+              <a:t>24 / 35</a:t>
             </a:r>
             <a:endParaRPr lang="en-US" sz="1000" dirty="0"/>
           </a:p>
@@ -14333,7 +14166,7 @@
                 <a:ea typeface="Segoe UI" pitchFamily="34" charset="-122"/>
                 <a:cs typeface="Segoe UI" pitchFamily="34" charset="-120"/>
               </a:rPr>
-              <a:t>5/5 ne démontre pas la perfection</a:t>
+              <a:t>Deux expériences de répétition différentes</a:t>
             </a:r>
             <a:endParaRPr lang="en-US" sz="2700" dirty="0"/>
           </a:p>
@@ -14341,98 +14174,22 @@
       </p:sp>
       <p:sp>
         <p:nvSpPr>
-          <p:cNvPr id="5" name="Text 3"/>
-          <p:cNvSpPr/>
-          <p:nvPr/>
-        </p:nvSpPr>
-        <p:spPr>
-          <a:xfrm>
-            <a:off x="594360" y="1828800"/>
-            <a:ext cx="640080" cy="594360"/>
-          </a:xfrm>
-          <a:prstGeom prst="rect">
-            <a:avLst/>
-          </a:prstGeom>
-          <a:noFill/>
-          <a:ln/>
-        </p:spPr>
-        <p:txBody>
-          <a:bodyPr wrap="square" lIns="0" tIns="0" rIns="0" bIns="0" rtlCol="0" anchor="ctr"/>
-          <a:lstStyle/>
-          <a:p>
-            <a:pPr indent="0" marL="0">
-              <a:buNone/>
-            </a:pPr>
-            <a:r>
-              <a:rPr lang="en-US" sz="1700" b="1" dirty="0">
-                <a:solidFill>
-                  <a:srgbClr val="0078D4"/>
-                </a:solidFill>
-                <a:latin typeface="Segoe UI" pitchFamily="34" charset="0"/>
-                <a:ea typeface="Segoe UI" pitchFamily="34" charset="-122"/>
-                <a:cs typeface="Segoe UI" pitchFamily="34" charset="-120"/>
-              </a:rPr>
-              <a:t>01</a:t>
-            </a:r>
-            <a:endParaRPr lang="en-US" sz="1700" dirty="0"/>
-          </a:p>
-        </p:txBody>
-      </p:sp>
-      <p:sp>
-        <p:nvSpPr>
-          <p:cNvPr id="6" name="Text 4"/>
-          <p:cNvSpPr/>
-          <p:nvPr/>
-        </p:nvSpPr>
-        <p:spPr>
-          <a:xfrm>
-            <a:off x="1325880" y="1828800"/>
-            <a:ext cx="10195560" cy="731520"/>
-          </a:xfrm>
-          <a:prstGeom prst="rect">
-            <a:avLst/>
-          </a:prstGeom>
-          <a:noFill/>
-          <a:ln/>
-        </p:spPr>
-        <p:txBody>
-          <a:bodyPr wrap="square" lIns="0" tIns="0" rIns="0" bIns="0" rtlCol="0" anchor="ctr"/>
-          <a:lstStyle/>
-          <a:p>
-            <a:pPr indent="0" marL="0">
-              <a:buNone/>
-            </a:pPr>
-            <a:r>
-              <a:rPr lang="en-US" sz="2000" dirty="0">
-                <a:solidFill>
-                  <a:srgbClr val="183449"/>
-                </a:solidFill>
-                <a:latin typeface="Segoe UI" pitchFamily="34" charset="0"/>
-                <a:ea typeface="Segoe UI" pitchFamily="34" charset="-122"/>
-                <a:cs typeface="Segoe UI" pitchFamily="34" charset="-120"/>
-              </a:rPr>
-              <a:t>Wilson 95 % illustratif pour 5/5 : environ 0,57 à 1,00.</a:t>
-            </a:r>
-            <a:endParaRPr lang="en-US" sz="2000" dirty="0"/>
-          </a:p>
-        </p:txBody>
-      </p:sp>
-      <p:sp>
-        <p:nvSpPr>
-          <p:cNvPr id="7" name="Shape 5"/>
-          <p:cNvSpPr/>
-          <p:nvPr/>
-        </p:nvSpPr>
-        <p:spPr>
-          <a:xfrm>
-            <a:off x="1325880" y="2660904"/>
-            <a:ext cx="10149840" cy="0"/>
-          </a:xfrm>
-          <a:prstGeom prst="line">
-            <a:avLst/>
-          </a:prstGeom>
-          <a:noFill/>
-          <a:ln w="6350">
+          <p:cNvPr id="5" name="Shape 3"/>
+          <p:cNvSpPr/>
+          <p:nvPr/>
+        </p:nvSpPr>
+        <p:spPr>
+          <a:xfrm>
+            <a:off x="548640" y="1874520"/>
+            <a:ext cx="5394960" cy="3886200"/>
+          </a:xfrm>
+          <a:prstGeom prst="rect">
+            <a:avLst/>
+          </a:prstGeom>
+          <a:solidFill>
+            <a:srgbClr val="EDF4FA"/>
+          </a:solidFill>
+          <a:ln w="12700">
             <a:solidFill>
               <a:srgbClr val="DCE5ED"/>
             </a:solidFill>
@@ -14442,40 +14199,118 @@
       </p:sp>
       <p:sp>
         <p:nvSpPr>
+          <p:cNvPr id="6" name="Text 4"/>
+          <p:cNvSpPr/>
+          <p:nvPr/>
+        </p:nvSpPr>
+        <p:spPr>
+          <a:xfrm>
+            <a:off x="822960" y="2148840"/>
+            <a:ext cx="4846320" cy="640080"/>
+          </a:xfrm>
+          <a:prstGeom prst="rect">
+            <a:avLst/>
+          </a:prstGeom>
+          <a:noFill/>
+          <a:ln/>
+        </p:spPr>
+        <p:txBody>
+          <a:bodyPr wrap="square" lIns="0" tIns="0" rIns="0" bIns="0" rtlCol="0" anchor="ctr"/>
+          <a:lstStyle/>
+          <a:p>
+            <a:pPr indent="0" marL="0">
+              <a:buNone/>
+            </a:pPr>
+            <a:r>
+              <a:rPr lang="en-US" sz="2300" b="1" dirty="0">
+                <a:solidFill>
+                  <a:srgbClr val="0078D4"/>
+                </a:solidFill>
+                <a:latin typeface="Segoe UI" pitchFamily="34" charset="0"/>
+                <a:ea typeface="Segoe UI" pitchFamily="34" charset="-122"/>
+                <a:cs typeface="Segoe UI" pitchFamily="34" charset="-120"/>
+              </a:rPr>
+              <a:t>Variance de génération</a:t>
+            </a:r>
+            <a:endParaRPr lang="en-US" sz="2300" dirty="0"/>
+          </a:p>
+        </p:txBody>
+      </p:sp>
+      <p:sp>
+        <p:nvSpPr>
+          <p:cNvPr id="7" name="Text 5"/>
+          <p:cNvSpPr/>
+          <p:nvPr/>
+        </p:nvSpPr>
+        <p:spPr>
+          <a:xfrm>
+            <a:off x="822960" y="3017520"/>
+            <a:ext cx="4846320" cy="594360"/>
+          </a:xfrm>
+          <a:prstGeom prst="rect">
+            <a:avLst/>
+          </a:prstGeom>
+          <a:noFill/>
+          <a:ln/>
+        </p:spPr>
+        <p:txBody>
+          <a:bodyPr wrap="square" lIns="0" tIns="0" rIns="0" bIns="0" rtlCol="0" anchor="ctr"/>
+          <a:lstStyle/>
+          <a:p>
+            <a:pPr indent="0" marL="0">
+              <a:buNone/>
+            </a:pPr>
+            <a:r>
+              <a:rPr lang="en-US" sz="1900" dirty="0">
+                <a:solidFill>
+                  <a:srgbClr val="183449"/>
+                </a:solidFill>
+                <a:latin typeface="Segoe UI" pitchFamily="34" charset="0"/>
+                <a:ea typeface="Segoe UI" pitchFamily="34" charset="-122"/>
+                <a:cs typeface="Segoe UI" pitchFamily="34" charset="-120"/>
+              </a:rPr>
+              <a:t>Mêmes cas et état initial figés</a:t>
+            </a:r>
+            <a:endParaRPr lang="en-US" sz="1900" dirty="0"/>
+          </a:p>
+        </p:txBody>
+      </p:sp>
+      <p:sp>
+        <p:nvSpPr>
           <p:cNvPr id="8" name="Text 6"/>
           <p:cNvSpPr/>
           <p:nvPr/>
         </p:nvSpPr>
         <p:spPr>
           <a:xfrm>
-            <a:off x="594360" y="2770632"/>
-            <a:ext cx="640080" cy="594360"/>
-          </a:xfrm>
-          <a:prstGeom prst="rect">
-            <a:avLst/>
-          </a:prstGeom>
-          <a:noFill/>
-          <a:ln/>
-        </p:spPr>
-        <p:txBody>
-          <a:bodyPr wrap="square" lIns="0" tIns="0" rIns="0" bIns="0" rtlCol="0" anchor="ctr"/>
-          <a:lstStyle/>
-          <a:p>
-            <a:pPr indent="0" marL="0">
-              <a:buNone/>
-            </a:pPr>
-            <a:r>
-              <a:rPr lang="en-US" sz="1700" b="1" dirty="0">
-                <a:solidFill>
-                  <a:srgbClr val="0078D4"/>
-                </a:solidFill>
-                <a:latin typeface="Segoe UI" pitchFamily="34" charset="0"/>
-                <a:ea typeface="Segoe UI" pitchFamily="34" charset="-122"/>
-                <a:cs typeface="Segoe UI" pitchFamily="34" charset="-120"/>
-              </a:rPr>
-              <a:t>02</a:t>
-            </a:r>
-            <a:endParaRPr lang="en-US" sz="1700" dirty="0"/>
+            <a:off x="822960" y="3794760"/>
+            <a:ext cx="4846320" cy="594360"/>
+          </a:xfrm>
+          <a:prstGeom prst="rect">
+            <a:avLst/>
+          </a:prstGeom>
+          <a:noFill/>
+          <a:ln/>
+        </p:spPr>
+        <p:txBody>
+          <a:bodyPr wrap="square" lIns="0" tIns="0" rIns="0" bIns="0" rtlCol="0" anchor="ctr"/>
+          <a:lstStyle/>
+          <a:p>
+            <a:pPr indent="0" marL="0">
+              <a:buNone/>
+            </a:pPr>
+            <a:r>
+              <a:rPr lang="en-US" sz="1900" dirty="0">
+                <a:solidFill>
+                  <a:srgbClr val="183449"/>
+                </a:solidFill>
+                <a:latin typeface="Segoe UI" pitchFamily="34" charset="0"/>
+                <a:ea typeface="Segoe UI" pitchFamily="34" charset="-122"/>
+                <a:cs typeface="Segoe UI" pitchFamily="34" charset="-120"/>
+              </a:rPr>
+              <a:t>Nouvelles captures à chaque essai</a:t>
+            </a:r>
+            <a:endParaRPr lang="en-US" sz="1900" dirty="0"/>
           </a:p>
         </p:txBody>
       </p:sp>
@@ -14487,24 +14322,24 @@
         </p:nvSpPr>
         <p:spPr>
           <a:xfrm>
-            <a:off x="1325880" y="2770632"/>
-            <a:ext cx="10195560" cy="731520"/>
-          </a:xfrm>
-          <a:prstGeom prst="rect">
-            <a:avLst/>
-          </a:prstGeom>
-          <a:noFill/>
-          <a:ln/>
-        </p:spPr>
-        <p:txBody>
-          <a:bodyPr wrap="square" lIns="0" tIns="0" rIns="0" bIns="0" rtlCol="0" anchor="ctr"/>
-          <a:lstStyle/>
-          <a:p>
-            <a:pPr indent="0" marL="0">
-              <a:buNone/>
-            </a:pPr>
-            <a:r>
-              <a:rPr lang="en-US" sz="2000" dirty="0">
+            <a:off x="822960" y="4572000"/>
+            <a:ext cx="4846320" cy="594360"/>
+          </a:xfrm>
+          <a:prstGeom prst="rect">
+            <a:avLst/>
+          </a:prstGeom>
+          <a:noFill/>
+          <a:ln/>
+        </p:spPr>
+        <p:txBody>
+          <a:bodyPr wrap="square" lIns="0" tIns="0" rIns="0" bIns="0" rtlCol="0" anchor="ctr"/>
+          <a:lstStyle/>
+          <a:p>
+            <a:pPr indent="0" marL="0">
+              <a:buNone/>
+            </a:pPr>
+            <a:r>
+              <a:rPr lang="en-US" sz="1900" dirty="0">
                 <a:solidFill>
                   <a:srgbClr val="183449"/>
                 </a:solidFill>
@@ -14512,9 +14347,9 @@
                 <a:ea typeface="Segoe UI" pitchFamily="34" charset="-122"/>
                 <a:cs typeface="Segoe UI" pitchFamily="34" charset="-120"/>
               </a:rPr>
-              <a:t>Cet intervalle suppose des observations Bernoulli indépendantes.</a:t>
-            </a:r>
-            <a:endParaRPr lang="en-US" sz="2000" dirty="0"/>
+              <a:t>Juger et garder chaque réponse</a:t>
+            </a:r>
+            <a:endParaRPr lang="en-US" sz="1900" dirty="0"/>
           </a:p>
         </p:txBody>
       </p:sp>
@@ -14526,14 +14361,16 @@
         </p:nvSpPr>
         <p:spPr>
           <a:xfrm>
-            <a:off x="1325880" y="3602736"/>
-            <a:ext cx="10149840" cy="0"/>
-          </a:xfrm>
-          <a:prstGeom prst="line">
-            <a:avLst/>
-          </a:prstGeom>
-          <a:noFill/>
-          <a:ln w="6350">
+            <a:off x="6217920" y="1874520"/>
+            <a:ext cx="5394960" cy="3886200"/>
+          </a:xfrm>
+          <a:prstGeom prst="rect">
+            <a:avLst/>
+          </a:prstGeom>
+          <a:solidFill>
+            <a:srgbClr val="EDF4FA"/>
+          </a:solidFill>
+          <a:ln w="12700">
             <a:solidFill>
               <a:srgbClr val="DCE5ED"/>
             </a:solidFill>
@@ -14549,24 +14386,24 @@
         </p:nvSpPr>
         <p:spPr>
           <a:xfrm>
-            <a:off x="594360" y="3712464"/>
-            <a:ext cx="640080" cy="594360"/>
-          </a:xfrm>
-          <a:prstGeom prst="rect">
-            <a:avLst/>
-          </a:prstGeom>
-          <a:noFill/>
-          <a:ln/>
-        </p:spPr>
-        <p:txBody>
-          <a:bodyPr wrap="square" lIns="0" tIns="0" rIns="0" bIns="0" rtlCol="0" anchor="ctr"/>
-          <a:lstStyle/>
-          <a:p>
-            <a:pPr indent="0" marL="0">
-              <a:buNone/>
-            </a:pPr>
-            <a:r>
-              <a:rPr lang="en-US" sz="1700" b="1" dirty="0">
+            <a:off x="6492240" y="2148840"/>
+            <a:ext cx="4846320" cy="640080"/>
+          </a:xfrm>
+          <a:prstGeom prst="rect">
+            <a:avLst/>
+          </a:prstGeom>
+          <a:noFill/>
+          <a:ln/>
+        </p:spPr>
+        <p:txBody>
+          <a:bodyPr wrap="square" lIns="0" tIns="0" rIns="0" bIns="0" rtlCol="0" anchor="ctr"/>
+          <a:lstStyle/>
+          <a:p>
+            <a:pPr indent="0" marL="0">
+              <a:buNone/>
+            </a:pPr>
+            <a:r>
+              <a:rPr lang="en-US" sz="2300" b="1" dirty="0">
                 <a:solidFill>
                   <a:srgbClr val="0078D4"/>
                 </a:solidFill>
@@ -14574,9 +14411,9 @@
                 <a:ea typeface="Segoe UI" pitchFamily="34" charset="-122"/>
                 <a:cs typeface="Segoe UI" pitchFamily="34" charset="-120"/>
               </a:rPr>
-              <a:t>03</a:t>
-            </a:r>
-            <a:endParaRPr lang="en-US" sz="1700" dirty="0"/>
+              <a:t>Variance du juge</a:t>
+            </a:r>
+            <a:endParaRPr lang="en-US" sz="2300" dirty="0"/>
           </a:p>
         </p:txBody>
       </p:sp>
@@ -14588,24 +14425,24 @@
         </p:nvSpPr>
         <p:spPr>
           <a:xfrm>
-            <a:off x="1325880" y="3712464"/>
-            <a:ext cx="10195560" cy="731520"/>
-          </a:xfrm>
-          <a:prstGeom prst="rect">
-            <a:avLst/>
-          </a:prstGeom>
-          <a:noFill/>
-          <a:ln/>
-        </p:spPr>
-        <p:txBody>
-          <a:bodyPr wrap="square" lIns="0" tIns="0" rIns="0" bIns="0" rtlCol="0" anchor="ctr"/>
-          <a:lstStyle/>
-          <a:p>
-            <a:pPr indent="0" marL="0">
-              <a:buNone/>
-            </a:pPr>
-            <a:r>
-              <a:rPr lang="en-US" sz="2000" dirty="0">
+            <a:off x="6492240" y="3017520"/>
+            <a:ext cx="4846320" cy="594360"/>
+          </a:xfrm>
+          <a:prstGeom prst="rect">
+            <a:avLst/>
+          </a:prstGeom>
+          <a:noFill/>
+          <a:ln/>
+        </p:spPr>
+        <p:txBody>
+          <a:bodyPr wrap="square" lIns="0" tIns="0" rIns="0" bIns="0" rtlCol="0" anchor="ctr"/>
+          <a:lstStyle/>
+          <a:p>
+            <a:pPr indent="0" marL="0">
+              <a:buNone/>
+            </a:pPr>
+            <a:r>
+              <a:rPr lang="en-US" sz="1900" dirty="0">
                 <a:solidFill>
                   <a:srgbClr val="183449"/>
                 </a:solidFill>
@@ -14613,34 +14450,50 @@
                 <a:ea typeface="Segoe UI" pitchFamily="34" charset="-122"/>
                 <a:cs typeface="Segoe UI" pitchFamily="34" charset="-120"/>
               </a:rPr>
-              <a:t>Notes répétées d’un cas : corrélées, pas de nouveaux clients.</a:t>
-            </a:r>
-            <a:endParaRPr lang="en-US" sz="2000" dirty="0"/>
-          </a:p>
-        </p:txBody>
-      </p:sp>
-      <p:sp>
-        <p:nvSpPr>
-          <p:cNvPr id="13" name="Shape 11"/>
-          <p:cNvSpPr/>
-          <p:nvPr/>
-        </p:nvSpPr>
-        <p:spPr>
-          <a:xfrm>
-            <a:off x="1325880" y="4544568"/>
-            <a:ext cx="10149840" cy="0"/>
-          </a:xfrm>
-          <a:prstGeom prst="line">
-            <a:avLst/>
-          </a:prstGeom>
-          <a:noFill/>
-          <a:ln w="6350">
-            <a:solidFill>
-              <a:srgbClr val="DCE5ED"/>
-            </a:solidFill>
-            <a:prstDash val="solid"/>
-          </a:ln>
-        </p:spPr>
+              <a:t>Mêmes captures immuables</a:t>
+            </a:r>
+            <a:endParaRPr lang="en-US" sz="1900" dirty="0"/>
+          </a:p>
+        </p:txBody>
+      </p:sp>
+      <p:sp>
+        <p:nvSpPr>
+          <p:cNvPr id="13" name="Text 11"/>
+          <p:cNvSpPr/>
+          <p:nvPr/>
+        </p:nvSpPr>
+        <p:spPr>
+          <a:xfrm>
+            <a:off x="6492240" y="3794760"/>
+            <a:ext cx="4846320" cy="594360"/>
+          </a:xfrm>
+          <a:prstGeom prst="rect">
+            <a:avLst/>
+          </a:prstGeom>
+          <a:noFill/>
+          <a:ln/>
+        </p:spPr>
+        <p:txBody>
+          <a:bodyPr wrap="square" lIns="0" tIns="0" rIns="0" bIns="0" rtlCol="0" anchor="ctr"/>
+          <a:lstStyle/>
+          <a:p>
+            <a:pPr indent="0" marL="0">
+              <a:buNone/>
+            </a:pPr>
+            <a:r>
+              <a:rPr lang="en-US" sz="1900" dirty="0">
+                <a:solidFill>
+                  <a:srgbClr val="183449"/>
+                </a:solidFill>
+                <a:latin typeface="Segoe UI" pitchFamily="34" charset="0"/>
+                <a:ea typeface="Segoe UI" pitchFamily="34" charset="-122"/>
+                <a:cs typeface="Segoe UI" pitchFamily="34" charset="-120"/>
+              </a:rPr>
+              <a:t>Appeler evaluate(), pas capture()</a:t>
+            </a:r>
+            <a:endParaRPr lang="en-US" sz="1900" dirty="0"/>
+          </a:p>
+        </p:txBody>
       </p:sp>
       <p:sp>
         <p:nvSpPr>
@@ -14650,63 +14503,24 @@
         </p:nvSpPr>
         <p:spPr>
           <a:xfrm>
-            <a:off x="594360" y="4654296"/>
-            <a:ext cx="640080" cy="594360"/>
-          </a:xfrm>
-          <a:prstGeom prst="rect">
-            <a:avLst/>
-          </a:prstGeom>
-          <a:noFill/>
-          <a:ln/>
-        </p:spPr>
-        <p:txBody>
-          <a:bodyPr wrap="square" lIns="0" tIns="0" rIns="0" bIns="0" rtlCol="0" anchor="ctr"/>
-          <a:lstStyle/>
-          <a:p>
-            <a:pPr indent="0" marL="0">
-              <a:buNone/>
-            </a:pPr>
-            <a:r>
-              <a:rPr lang="en-US" sz="1700" b="1" dirty="0">
-                <a:solidFill>
-                  <a:srgbClr val="0078D4"/>
-                </a:solidFill>
-                <a:latin typeface="Segoe UI" pitchFamily="34" charset="0"/>
-                <a:ea typeface="Segoe UI" pitchFamily="34" charset="-122"/>
-                <a:cs typeface="Segoe UI" pitchFamily="34" charset="-120"/>
-              </a:rPr>
-              <a:t>04</a:t>
-            </a:r>
-            <a:endParaRPr lang="en-US" sz="1700" dirty="0"/>
-          </a:p>
-        </p:txBody>
-      </p:sp>
-      <p:sp>
-        <p:nvSpPr>
-          <p:cNvPr id="15" name="Text 13"/>
-          <p:cNvSpPr/>
-          <p:nvPr/>
-        </p:nvSpPr>
-        <p:spPr>
-          <a:xfrm>
-            <a:off x="1325880" y="4654296"/>
-            <a:ext cx="10195560" cy="731520"/>
-          </a:xfrm>
-          <a:prstGeom prst="rect">
-            <a:avLst/>
-          </a:prstGeom>
-          <a:noFill/>
-          <a:ln/>
-        </p:spPr>
-        <p:txBody>
-          <a:bodyPr wrap="square" lIns="0" tIns="0" rIns="0" bIns="0" rtlCol="0" anchor="ctr"/>
-          <a:lstStyle/>
-          <a:p>
-            <a:pPr indent="0" marL="0">
-              <a:buNone/>
-            </a:pPr>
-            <a:r>
-              <a:rPr lang="en-US" sz="2000" dirty="0">
+            <a:off x="6492240" y="4572000"/>
+            <a:ext cx="4846320" cy="594360"/>
+          </a:xfrm>
+          <a:prstGeom prst="rect">
+            <a:avLst/>
+          </a:prstGeom>
+          <a:noFill/>
+          <a:ln/>
+        </p:spPr>
+        <p:txBody>
+          <a:bodyPr wrap="square" lIns="0" tIns="0" rIns="0" bIns="0" rtlCol="0" anchor="ctr"/>
+          <a:lstStyle/>
+          <a:p>
+            <a:pPr indent="0" marL="0">
+              <a:buNone/>
+            </a:pPr>
+            <a:r>
+              <a:rPr lang="en-US" sz="1900" dirty="0">
                 <a:solidFill>
                   <a:srgbClr val="183449"/>
                 </a:solidFill>
@@ -14714,38 +14528,15 @@
                 <a:ea typeface="Segoe UI" pitchFamily="34" charset="-122"/>
                 <a:cs typeface="Segoe UI" pitchFamily="34" charset="-120"/>
               </a:rPr>
-              <a:t>Présenter incertitude par cas et limites des préjudices rares.</a:t>
-            </a:r>
-            <a:endParaRPr lang="en-US" sz="2000" dirty="0"/>
-          </a:p>
-        </p:txBody>
-      </p:sp>
-      <p:sp>
-        <p:nvSpPr>
-          <p:cNvPr id="16" name="Shape 14"/>
-          <p:cNvSpPr/>
-          <p:nvPr/>
-        </p:nvSpPr>
-        <p:spPr>
-          <a:xfrm>
-            <a:off x="1325880" y="5486400"/>
-            <a:ext cx="10149840" cy="0"/>
-          </a:xfrm>
-          <a:prstGeom prst="line">
-            <a:avLst/>
-          </a:prstGeom>
-          <a:noFill/>
-          <a:ln w="6350">
-            <a:solidFill>
-              <a:srgbClr val="DCE5ED"/>
-            </a:solidFill>
-            <a:prstDash val="solid"/>
-          </a:ln>
-        </p:spPr>
-      </p:sp>
-      <p:sp>
-        <p:nvSpPr>
-          <p:cNvPr id="17" name="Text 15">
+              <a:t>Consigner la réutilisation</a:t>
+            </a:r>
+            <a:endParaRPr lang="en-US" sz="1900" dirty="0"/>
+          </a:p>
+        </p:txBody>
+      </p:sp>
+      <p:sp>
+        <p:nvSpPr>
+          <p:cNvPr id="15" name="Text 13">
             <a:hlinkClick r:id="rId1" tooltip=""/>
           </p:cNvPr>
           <p:cNvSpPr/>
@@ -14793,7 +14584,7 @@
       </p:sp>
       <p:sp>
         <p:nvSpPr>
-          <p:cNvPr id="18" name="Text 16"/>
+          <p:cNvPr id="16" name="Text 14"/>
           <p:cNvSpPr/>
           <p:nvPr/>
         </p:nvSpPr>
@@ -14824,7 +14615,7 @@
                 <a:ea typeface="Segoe UI" pitchFamily="34" charset="-122"/>
                 <a:cs typeface="Segoe UI" pitchFamily="34" charset="-120"/>
               </a:rPr>
-              <a:t>25 / 34</a:t>
+              <a:t>25 / 35</a:t>
             </a:r>
             <a:endParaRPr lang="en-US" sz="1000" dirty="0"/>
           </a:p>
@@ -14961,7 +14752,7 @@
                 <a:ea typeface="Segoe UI" pitchFamily="34" charset="-122"/>
                 <a:cs typeface="Segoe UI" pitchFamily="34" charset="-120"/>
               </a:rPr>
-              <a:t>Comparer équitablement les candidats</a:t>
+              <a:t>5/5 ne démontre pas la perfection</a:t>
             </a:r>
             <a:endParaRPr lang="en-US" sz="2700" dirty="0"/>
           </a:p>
@@ -15039,7 +14830,7 @@
                 <a:ea typeface="Segoe UI" pitchFamily="34" charset="-122"/>
                 <a:cs typeface="Segoe UI" pitchFamily="34" charset="-120"/>
               </a:rPr>
-              <a:t>Apparier ID stable, langue, essai et état initial contrôlé.</a:t>
+              <a:t>Wilson 95 % illustratif pour 5/5 : environ 0,57 à 1,00.</a:t>
             </a:r>
             <a:endParaRPr lang="en-US" sz="2000" dirty="0"/>
           </a:p>
@@ -15140,7 +14931,7 @@
                 <a:ea typeface="Segoe UI" pitchFamily="34" charset="-122"/>
                 <a:cs typeface="Segoe UI" pitchFamily="34" charset="-120"/>
               </a:rPr>
-              <a:t>Figer faits, grille, évaluateur et version du modèle juge.</a:t>
+              <a:t>Cet intervalle suppose des observations Bernoulli indépendantes.</a:t>
             </a:r>
             <a:endParaRPr lang="en-US" sz="2000" dirty="0"/>
           </a:p>
@@ -15241,7 +15032,7 @@
                 <a:ea typeface="Segoe UI" pitchFamily="34" charset="-122"/>
                 <a:cs typeface="Segoe UI" pitchFamily="34" charset="-120"/>
               </a:rPr>
-              <a:t>Inspecter transitions réussite-échec, effet et incertitude.</a:t>
+              <a:t>Notes répétées d’un cas : corrélées, pas de nouveaux clients.</a:t>
             </a:r>
             <a:endParaRPr lang="en-US" sz="2000" dirty="0"/>
           </a:p>
@@ -15342,7 +15133,7 @@
                 <a:ea typeface="Segoe UI" pitchFamily="34" charset="-122"/>
                 <a:cs typeface="Segoe UI" pitchFamily="34" charset="-120"/>
               </a:rPr>
-              <a:t>Jeu/évaluateur modifié : nouvelle référence, pas amélioration.</a:t>
+              <a:t>Présenter incertitude par cas et limites des préjudices rares.</a:t>
             </a:r>
             <a:endParaRPr lang="en-US" sz="2000" dirty="0"/>
           </a:p>
@@ -15452,7 +15243,7 @@
                 <a:ea typeface="Segoe UI" pitchFamily="34" charset="-122"/>
                 <a:cs typeface="Segoe UI" pitchFamily="34" charset="-120"/>
               </a:rPr>
-              <a:t>26 / 34</a:t>
+              <a:t>26 / 35</a:t>
             </a:r>
             <a:endParaRPr lang="en-US" sz="1000" dirty="0"/>
           </a:p>
@@ -15589,7 +15380,7 @@
                 <a:ea typeface="Segoe UI" pitchFamily="34" charset="-122"/>
                 <a:cs typeface="Segoe UI" pitchFamily="34" charset="-120"/>
               </a:rPr>
-              <a:t>Dépenser pour des preuves utiles</a:t>
+              <a:t>Comparer équitablement les candidats</a:t>
             </a:r>
             <a:endParaRPr lang="en-US" sz="2700" dirty="0"/>
           </a:p>
@@ -15667,7 +15458,7 @@
                 <a:ea typeface="Segoe UI" pitchFamily="34" charset="-122"/>
                 <a:cs typeface="Segoe UI" pitchFamily="34" charset="-120"/>
               </a:rPr>
-              <a:t>Contrats locaux et golden gate avant les juges payants.</a:t>
+              <a:t>Apparier ID stable, langue, essai et état initial contrôlé.</a:t>
             </a:r>
             <a:endParaRPr lang="en-US" sz="2000" dirty="0"/>
           </a:p>
@@ -15768,7 +15559,7 @@
                 <a:ea typeface="Segoe UI" pitchFamily="34" charset="-122"/>
                 <a:cs typeface="Segoe UI" pitchFamily="34" charset="-120"/>
               </a:rPr>
-              <a:t>Pilote : 5 cas × 2 langues × 1 essai × 3 métriques = 30 jugements.</a:t>
+              <a:t>Figer faits, grille, évaluateur et version du modèle juge.</a:t>
             </a:r>
             <a:endParaRPr lang="en-US" sz="2000" dirty="0"/>
           </a:p>
@@ -15869,7 +15660,7 @@
                 <a:ea typeface="Segoe UI" pitchFamily="34" charset="-122"/>
                 <a:cs typeface="Segoe UI" pitchFamily="34" charset="-120"/>
               </a:rPr>
-              <a:t>Répétitions, longs contextes et relances augmentent le coût.</a:t>
+              <a:t>Inspecter transitions réussite-échec, effet et incertitude.</a:t>
             </a:r>
             <a:endParaRPr lang="en-US" sz="2000" dirty="0"/>
           </a:p>
@@ -15970,7 +15761,7 @@
                 <a:ea typeface="Segoe UI" pitchFamily="34" charset="-122"/>
                 <a:cs typeface="Segoe UI" pitchFamily="34" charset="-120"/>
               </a:rPr>
-              <a:t>Réutiliser les captures; borner concurrence et budget.</a:t>
+              <a:t>Jeu/évaluateur modifié : nouvelle référence, pas amélioration.</a:t>
             </a:r>
             <a:endParaRPr lang="en-US" sz="2000" dirty="0"/>
           </a:p>
@@ -16080,7 +15871,7 @@
                 <a:ea typeface="Segoe UI" pitchFamily="34" charset="-122"/>
                 <a:cs typeface="Segoe UI" pitchFamily="34" charset="-120"/>
               </a:rPr>
-              <a:t>27 / 34</a:t>
+              <a:t>27 / 35</a:t>
             </a:r>
             <a:endParaRPr lang="en-US" sz="1000" dirty="0"/>
           </a:p>
@@ -16217,7 +16008,7 @@
                 <a:ea typeface="Segoe UI" pitchFamily="34" charset="-122"/>
                 <a:cs typeface="Segoe UI" pitchFamily="34" charset="-120"/>
               </a:rPr>
-              <a:t>Régression avec état : le parcours de révision</a:t>
+              <a:t>Dépenser pour des preuves utiles</a:t>
             </a:r>
             <a:endParaRPr lang="en-US" sz="2700" dirty="0"/>
           </a:p>
@@ -16225,22 +16016,98 @@
       </p:sp>
       <p:sp>
         <p:nvSpPr>
-          <p:cNvPr id="5" name="Shape 3"/>
-          <p:cNvSpPr/>
-          <p:nvPr/>
-        </p:nvSpPr>
-        <p:spPr>
-          <a:xfrm>
-            <a:off x="548640" y="1920240"/>
-            <a:ext cx="5394960" cy="1417320"/>
-          </a:xfrm>
-          <a:prstGeom prst="rect">
-            <a:avLst/>
-          </a:prstGeom>
-          <a:solidFill>
-            <a:srgbClr val="EDF4FA"/>
-          </a:solidFill>
-          <a:ln w="12700">
+          <p:cNvPr id="5" name="Text 3"/>
+          <p:cNvSpPr/>
+          <p:nvPr/>
+        </p:nvSpPr>
+        <p:spPr>
+          <a:xfrm>
+            <a:off x="594360" y="1828800"/>
+            <a:ext cx="640080" cy="594360"/>
+          </a:xfrm>
+          <a:prstGeom prst="rect">
+            <a:avLst/>
+          </a:prstGeom>
+          <a:noFill/>
+          <a:ln/>
+        </p:spPr>
+        <p:txBody>
+          <a:bodyPr wrap="square" lIns="0" tIns="0" rIns="0" bIns="0" rtlCol="0" anchor="ctr"/>
+          <a:lstStyle/>
+          <a:p>
+            <a:pPr indent="0" marL="0">
+              <a:buNone/>
+            </a:pPr>
+            <a:r>
+              <a:rPr lang="en-US" sz="1700" b="1" dirty="0">
+                <a:solidFill>
+                  <a:srgbClr val="0078D4"/>
+                </a:solidFill>
+                <a:latin typeface="Segoe UI" pitchFamily="34" charset="0"/>
+                <a:ea typeface="Segoe UI" pitchFamily="34" charset="-122"/>
+                <a:cs typeface="Segoe UI" pitchFamily="34" charset="-120"/>
+              </a:rPr>
+              <a:t>01</a:t>
+            </a:r>
+            <a:endParaRPr lang="en-US" sz="1700" dirty="0"/>
+          </a:p>
+        </p:txBody>
+      </p:sp>
+      <p:sp>
+        <p:nvSpPr>
+          <p:cNvPr id="6" name="Text 4"/>
+          <p:cNvSpPr/>
+          <p:nvPr/>
+        </p:nvSpPr>
+        <p:spPr>
+          <a:xfrm>
+            <a:off x="1325880" y="1828800"/>
+            <a:ext cx="10195560" cy="731520"/>
+          </a:xfrm>
+          <a:prstGeom prst="rect">
+            <a:avLst/>
+          </a:prstGeom>
+          <a:noFill/>
+          <a:ln/>
+        </p:spPr>
+        <p:txBody>
+          <a:bodyPr wrap="square" lIns="0" tIns="0" rIns="0" bIns="0" rtlCol="0" anchor="ctr"/>
+          <a:lstStyle/>
+          <a:p>
+            <a:pPr indent="0" marL="0">
+              <a:buNone/>
+            </a:pPr>
+            <a:r>
+              <a:rPr lang="en-US" sz="2000" dirty="0">
+                <a:solidFill>
+                  <a:srgbClr val="183449"/>
+                </a:solidFill>
+                <a:latin typeface="Segoe UI" pitchFamily="34" charset="0"/>
+                <a:ea typeface="Segoe UI" pitchFamily="34" charset="-122"/>
+                <a:cs typeface="Segoe UI" pitchFamily="34" charset="-120"/>
+              </a:rPr>
+              <a:t>Contrats locaux et golden gate avant les juges payants.</a:t>
+            </a:r>
+            <a:endParaRPr lang="en-US" sz="2000" dirty="0"/>
+          </a:p>
+        </p:txBody>
+      </p:sp>
+      <p:sp>
+        <p:nvSpPr>
+          <p:cNvPr id="7" name="Shape 5"/>
+          <p:cNvSpPr/>
+          <p:nvPr/>
+        </p:nvSpPr>
+        <p:spPr>
+          <a:xfrm>
+            <a:off x="1325880" y="2660904"/>
+            <a:ext cx="10149840" cy="0"/>
+          </a:xfrm>
+          <a:prstGeom prst="line">
+            <a:avLst/>
+          </a:prstGeom>
+          <a:noFill/>
+          <a:ln w="6350">
             <a:solidFill>
               <a:srgbClr val="DCE5ED"/>
             </a:solidFill>
@@ -16250,30 +16117,30 @@
       </p:sp>
       <p:sp>
         <p:nvSpPr>
-          <p:cNvPr id="6" name="Text 4"/>
-          <p:cNvSpPr/>
-          <p:nvPr/>
-        </p:nvSpPr>
-        <p:spPr>
-          <a:xfrm>
-            <a:off x="777240" y="2103120"/>
-            <a:ext cx="640080" cy="411480"/>
-          </a:xfrm>
-          <a:prstGeom prst="rect">
-            <a:avLst/>
-          </a:prstGeom>
-          <a:noFill/>
-          <a:ln/>
-        </p:spPr>
-        <p:txBody>
-          <a:bodyPr wrap="square" lIns="0" tIns="0" rIns="0" bIns="0" rtlCol="0" anchor="ctr"/>
-          <a:lstStyle/>
-          <a:p>
-            <a:pPr indent="0" marL="0">
-              <a:buNone/>
-            </a:pPr>
-            <a:r>
-              <a:rPr lang="en-US" sz="2500" b="1" dirty="0">
+          <p:cNvPr id="8" name="Text 6"/>
+          <p:cNvSpPr/>
+          <p:nvPr/>
+        </p:nvSpPr>
+        <p:spPr>
+          <a:xfrm>
+            <a:off x="594360" y="2770632"/>
+            <a:ext cx="640080" cy="594360"/>
+          </a:xfrm>
+          <a:prstGeom prst="rect">
+            <a:avLst/>
+          </a:prstGeom>
+          <a:noFill/>
+          <a:ln/>
+        </p:spPr>
+        <p:txBody>
+          <a:bodyPr wrap="square" lIns="0" tIns="0" rIns="0" bIns="0" rtlCol="0" anchor="ctr"/>
+          <a:lstStyle/>
+          <a:p>
+            <a:pPr indent="0" marL="0">
+              <a:buNone/>
+            </a:pPr>
+            <a:r>
+              <a:rPr lang="en-US" sz="1700" b="1" dirty="0">
                 <a:solidFill>
                   <a:srgbClr val="0078D4"/>
                 </a:solidFill>
@@ -16281,38 +16148,38 @@
                 <a:ea typeface="Segoe UI" pitchFamily="34" charset="-122"/>
                 <a:cs typeface="Segoe UI" pitchFamily="34" charset="-120"/>
               </a:rPr>
-              <a:t>01</a:t>
-            </a:r>
-            <a:endParaRPr lang="en-US" sz="2500" dirty="0"/>
-          </a:p>
-        </p:txBody>
-      </p:sp>
-      <p:sp>
-        <p:nvSpPr>
-          <p:cNvPr id="7" name="Text 5"/>
-          <p:cNvSpPr/>
-          <p:nvPr/>
-        </p:nvSpPr>
-        <p:spPr>
-          <a:xfrm>
-            <a:off x="1508760" y="2103120"/>
-            <a:ext cx="4114800" cy="1051560"/>
-          </a:xfrm>
-          <a:prstGeom prst="rect">
-            <a:avLst/>
-          </a:prstGeom>
-          <a:noFill/>
-          <a:ln/>
-        </p:spPr>
-        <p:txBody>
-          <a:bodyPr wrap="square" lIns="0" tIns="0" rIns="0" bIns="0" rtlCol="0" anchor="ctr"/>
-          <a:lstStyle/>
-          <a:p>
-            <a:pPr indent="0" marL="0">
-              <a:buNone/>
-            </a:pPr>
-            <a:r>
-              <a:rPr lang="en-US" sz="2100" b="1" dirty="0">
+              <a:t>02</a:t>
+            </a:r>
+            <a:endParaRPr lang="en-US" sz="1700" dirty="0"/>
+          </a:p>
+        </p:txBody>
+      </p:sp>
+      <p:sp>
+        <p:nvSpPr>
+          <p:cNvPr id="9" name="Text 7"/>
+          <p:cNvSpPr/>
+          <p:nvPr/>
+        </p:nvSpPr>
+        <p:spPr>
+          <a:xfrm>
+            <a:off x="1325880" y="2770632"/>
+            <a:ext cx="10195560" cy="731520"/>
+          </a:xfrm>
+          <a:prstGeom prst="rect">
+            <a:avLst/>
+          </a:prstGeom>
+          <a:noFill/>
+          <a:ln/>
+        </p:spPr>
+        <p:txBody>
+          <a:bodyPr wrap="square" lIns="0" tIns="0" rIns="0" bIns="0" rtlCol="0" anchor="ctr"/>
+          <a:lstStyle/>
+          <a:p>
+            <a:pPr indent="0" marL="0">
+              <a:buNone/>
+            </a:pPr>
+            <a:r>
+              <a:rPr lang="en-US" sz="2000" dirty="0">
                 <a:solidFill>
                   <a:srgbClr val="183449"/>
                 </a:solidFill>
@@ -16320,30 +16187,28 @@
                 <a:ea typeface="Segoe UI" pitchFamily="34" charset="-122"/>
                 <a:cs typeface="Segoe UI" pitchFamily="34" charset="-120"/>
               </a:rPr>
-              <a:t>Retourner en DRAFT révision 2</a:t>
-            </a:r>
-            <a:endParaRPr lang="en-US" sz="2100" dirty="0"/>
-          </a:p>
-        </p:txBody>
-      </p:sp>
-      <p:sp>
-        <p:nvSpPr>
-          <p:cNvPr id="8" name="Shape 6"/>
-          <p:cNvSpPr/>
-          <p:nvPr/>
-        </p:nvSpPr>
-        <p:spPr>
-          <a:xfrm>
-            <a:off x="6217920" y="1920240"/>
-            <a:ext cx="5394960" cy="1417320"/>
-          </a:xfrm>
-          <a:prstGeom prst="rect">
-            <a:avLst/>
-          </a:prstGeom>
-          <a:solidFill>
-            <a:srgbClr val="EDF4FA"/>
-          </a:solidFill>
-          <a:ln w="12700">
+              <a:t>Pilote : 5 cas × 2 langues × 1 essai × 3 métriques = 30 jugements.</a:t>
+            </a:r>
+            <a:endParaRPr lang="en-US" sz="2000" dirty="0"/>
+          </a:p>
+        </p:txBody>
+      </p:sp>
+      <p:sp>
+        <p:nvSpPr>
+          <p:cNvPr id="10" name="Shape 8"/>
+          <p:cNvSpPr/>
+          <p:nvPr/>
+        </p:nvSpPr>
+        <p:spPr>
+          <a:xfrm>
+            <a:off x="1325880" y="3602736"/>
+            <a:ext cx="10149840" cy="0"/>
+          </a:xfrm>
+          <a:prstGeom prst="line">
+            <a:avLst/>
+          </a:prstGeom>
+          <a:noFill/>
+          <a:ln w="6350">
             <a:solidFill>
               <a:srgbClr val="DCE5ED"/>
             </a:solidFill>
@@ -16353,30 +16218,30 @@
       </p:sp>
       <p:sp>
         <p:nvSpPr>
-          <p:cNvPr id="9" name="Text 7"/>
-          <p:cNvSpPr/>
-          <p:nvPr/>
-        </p:nvSpPr>
-        <p:spPr>
-          <a:xfrm>
-            <a:off x="6446520" y="2103120"/>
-            <a:ext cx="640080" cy="411480"/>
-          </a:xfrm>
-          <a:prstGeom prst="rect">
-            <a:avLst/>
-          </a:prstGeom>
-          <a:noFill/>
-          <a:ln/>
-        </p:spPr>
-        <p:txBody>
-          <a:bodyPr wrap="square" lIns="0" tIns="0" rIns="0" bIns="0" rtlCol="0" anchor="ctr"/>
-          <a:lstStyle/>
-          <a:p>
-            <a:pPr indent="0" marL="0">
-              <a:buNone/>
-            </a:pPr>
-            <a:r>
-              <a:rPr lang="en-US" sz="2500" b="1" dirty="0">
+          <p:cNvPr id="11" name="Text 9"/>
+          <p:cNvSpPr/>
+          <p:nvPr/>
+        </p:nvSpPr>
+        <p:spPr>
+          <a:xfrm>
+            <a:off x="594360" y="3712464"/>
+            <a:ext cx="640080" cy="594360"/>
+          </a:xfrm>
+          <a:prstGeom prst="rect">
+            <a:avLst/>
+          </a:prstGeom>
+          <a:noFill/>
+          <a:ln/>
+        </p:spPr>
+        <p:txBody>
+          <a:bodyPr wrap="square" lIns="0" tIns="0" rIns="0" bIns="0" rtlCol="0" anchor="ctr"/>
+          <a:lstStyle/>
+          <a:p>
+            <a:pPr indent="0" marL="0">
+              <a:buNone/>
+            </a:pPr>
+            <a:r>
+              <a:rPr lang="en-US" sz="1700" b="1" dirty="0">
                 <a:solidFill>
                   <a:srgbClr val="0078D4"/>
                 </a:solidFill>
@@ -16384,38 +16249,38 @@
                 <a:ea typeface="Segoe UI" pitchFamily="34" charset="-122"/>
                 <a:cs typeface="Segoe UI" pitchFamily="34" charset="-120"/>
               </a:rPr>
-              <a:t>02</a:t>
-            </a:r>
-            <a:endParaRPr lang="en-US" sz="2500" dirty="0"/>
-          </a:p>
-        </p:txBody>
-      </p:sp>
-      <p:sp>
-        <p:nvSpPr>
-          <p:cNvPr id="10" name="Text 8"/>
-          <p:cNvSpPr/>
-          <p:nvPr/>
-        </p:nvSpPr>
-        <p:spPr>
-          <a:xfrm>
-            <a:off x="7178040" y="2103120"/>
-            <a:ext cx="4114800" cy="1051560"/>
-          </a:xfrm>
-          <a:prstGeom prst="rect">
-            <a:avLst/>
-          </a:prstGeom>
-          <a:noFill/>
-          <a:ln/>
-        </p:spPr>
-        <p:txBody>
-          <a:bodyPr wrap="square" lIns="0" tIns="0" rIns="0" bIns="0" rtlCol="0" anchor="ctr"/>
-          <a:lstStyle/>
-          <a:p>
-            <a:pPr indent="0" marL="0">
-              <a:buNone/>
-            </a:pPr>
-            <a:r>
-              <a:rPr lang="en-US" sz="2100" b="1" dirty="0">
+              <a:t>03</a:t>
+            </a:r>
+            <a:endParaRPr lang="en-US" sz="1700" dirty="0"/>
+          </a:p>
+        </p:txBody>
+      </p:sp>
+      <p:sp>
+        <p:nvSpPr>
+          <p:cNvPr id="12" name="Text 10"/>
+          <p:cNvSpPr/>
+          <p:nvPr/>
+        </p:nvSpPr>
+        <p:spPr>
+          <a:xfrm>
+            <a:off x="1325880" y="3712464"/>
+            <a:ext cx="10195560" cy="731520"/>
+          </a:xfrm>
+          <a:prstGeom prst="rect">
+            <a:avLst/>
+          </a:prstGeom>
+          <a:noFill/>
+          <a:ln/>
+        </p:spPr>
+        <p:txBody>
+          <a:bodyPr wrap="square" lIns="0" tIns="0" rIns="0" bIns="0" rtlCol="0" anchor="ctr"/>
+          <a:lstStyle/>
+          <a:p>
+            <a:pPr indent="0" marL="0">
+              <a:buNone/>
+            </a:pPr>
+            <a:r>
+              <a:rPr lang="en-US" sz="2000" dirty="0">
                 <a:solidFill>
                   <a:srgbClr val="183449"/>
                 </a:solidFill>
@@ -16423,30 +16288,28 @@
                 <a:ea typeface="Segoe UI" pitchFamily="34" charset="-122"/>
                 <a:cs typeface="Segoe UI" pitchFamily="34" charset="-120"/>
               </a:rPr>
-              <a:t>Vérifier visibilité actif / DRAFT</a:t>
-            </a:r>
-            <a:endParaRPr lang="en-US" sz="2100" dirty="0"/>
-          </a:p>
-        </p:txBody>
-      </p:sp>
-      <p:sp>
-        <p:nvSpPr>
-          <p:cNvPr id="11" name="Shape 9"/>
-          <p:cNvSpPr/>
-          <p:nvPr/>
-        </p:nvSpPr>
-        <p:spPr>
-          <a:xfrm>
-            <a:off x="548640" y="3749040"/>
-            <a:ext cx="5394960" cy="1417320"/>
-          </a:xfrm>
-          <a:prstGeom prst="rect">
-            <a:avLst/>
-          </a:prstGeom>
-          <a:solidFill>
-            <a:srgbClr val="EDF4FA"/>
-          </a:solidFill>
-          <a:ln w="12700">
+              <a:t>Répétitions, longs contextes et relances augmentent le coût.</a:t>
+            </a:r>
+            <a:endParaRPr lang="en-US" sz="2000" dirty="0"/>
+          </a:p>
+        </p:txBody>
+      </p:sp>
+      <p:sp>
+        <p:nvSpPr>
+          <p:cNvPr id="13" name="Shape 11"/>
+          <p:cNvSpPr/>
+          <p:nvPr/>
+        </p:nvSpPr>
+        <p:spPr>
+          <a:xfrm>
+            <a:off x="1325880" y="4544568"/>
+            <a:ext cx="10149840" cy="0"/>
+          </a:xfrm>
+          <a:prstGeom prst="line">
+            <a:avLst/>
+          </a:prstGeom>
+          <a:noFill/>
+          <a:ln w="6350">
             <a:solidFill>
               <a:srgbClr val="DCE5ED"/>
             </a:solidFill>
@@ -16456,30 +16319,30 @@
       </p:sp>
       <p:sp>
         <p:nvSpPr>
-          <p:cNvPr id="12" name="Text 10"/>
-          <p:cNvSpPr/>
-          <p:nvPr/>
-        </p:nvSpPr>
-        <p:spPr>
-          <a:xfrm>
-            <a:off x="777240" y="3931920"/>
-            <a:ext cx="640080" cy="411480"/>
-          </a:xfrm>
-          <a:prstGeom prst="rect">
-            <a:avLst/>
-          </a:prstGeom>
-          <a:noFill/>
-          <a:ln/>
-        </p:spPr>
-        <p:txBody>
-          <a:bodyPr wrap="square" lIns="0" tIns="0" rIns="0" bIns="0" rtlCol="0" anchor="ctr"/>
-          <a:lstStyle/>
-          <a:p>
-            <a:pPr indent="0" marL="0">
-              <a:buNone/>
-            </a:pPr>
-            <a:r>
-              <a:rPr lang="en-US" sz="2500" b="1" dirty="0">
+          <p:cNvPr id="14" name="Text 12"/>
+          <p:cNvSpPr/>
+          <p:nvPr/>
+        </p:nvSpPr>
+        <p:spPr>
+          <a:xfrm>
+            <a:off x="594360" y="4654296"/>
+            <a:ext cx="640080" cy="594360"/>
+          </a:xfrm>
+          <a:prstGeom prst="rect">
+            <a:avLst/>
+          </a:prstGeom>
+          <a:noFill/>
+          <a:ln/>
+        </p:spPr>
+        <p:txBody>
+          <a:bodyPr wrap="square" lIns="0" tIns="0" rIns="0" bIns="0" rtlCol="0" anchor="ctr"/>
+          <a:lstStyle/>
+          <a:p>
+            <a:pPr indent="0" marL="0">
+              <a:buNone/>
+            </a:pPr>
+            <a:r>
+              <a:rPr lang="en-US" sz="1700" b="1" dirty="0">
                 <a:solidFill>
                   <a:srgbClr val="0078D4"/>
                 </a:solidFill>
@@ -16487,38 +16350,38 @@
                 <a:ea typeface="Segoe UI" pitchFamily="34" charset="-122"/>
                 <a:cs typeface="Segoe UI" pitchFamily="34" charset="-120"/>
               </a:rPr>
-              <a:t>03</a:t>
-            </a:r>
-            <a:endParaRPr lang="en-US" sz="2500" dirty="0"/>
-          </a:p>
-        </p:txBody>
-      </p:sp>
-      <p:sp>
-        <p:nvSpPr>
-          <p:cNvPr id="13" name="Text 11"/>
-          <p:cNvSpPr/>
-          <p:nvPr/>
-        </p:nvSpPr>
-        <p:spPr>
-          <a:xfrm>
-            <a:off x="1508760" y="3931920"/>
-            <a:ext cx="4114800" cy="1051560"/>
-          </a:xfrm>
-          <a:prstGeom prst="rect">
-            <a:avLst/>
-          </a:prstGeom>
-          <a:noFill/>
-          <a:ln/>
-        </p:spPr>
-        <p:txBody>
-          <a:bodyPr wrap="square" lIns="0" tIns="0" rIns="0" bIns="0" rtlCol="0" anchor="ctr"/>
-          <a:lstStyle/>
-          <a:p>
-            <a:pPr indent="0" marL="0">
-              <a:buNone/>
-            </a:pPr>
-            <a:r>
-              <a:rPr lang="en-US" sz="2100" b="1" dirty="0">
+              <a:t>04</a:t>
+            </a:r>
+            <a:endParaRPr lang="en-US" sz="1700" dirty="0"/>
+          </a:p>
+        </p:txBody>
+      </p:sp>
+      <p:sp>
+        <p:nvSpPr>
+          <p:cNvPr id="15" name="Text 13"/>
+          <p:cNvSpPr/>
+          <p:nvPr/>
+        </p:nvSpPr>
+        <p:spPr>
+          <a:xfrm>
+            <a:off x="1325880" y="4654296"/>
+            <a:ext cx="10195560" cy="731520"/>
+          </a:xfrm>
+          <a:prstGeom prst="rect">
+            <a:avLst/>
+          </a:prstGeom>
+          <a:noFill/>
+          <a:ln/>
+        </p:spPr>
+        <p:txBody>
+          <a:bodyPr wrap="square" lIns="0" tIns="0" rIns="0" bIns="0" rtlCol="0" anchor="ctr"/>
+          <a:lstStyle/>
+          <a:p>
+            <a:pPr indent="0" marL="0">
+              <a:buNone/>
+            </a:pPr>
+            <a:r>
+              <a:rPr lang="en-US" sz="2000" dirty="0">
                 <a:solidFill>
                   <a:srgbClr val="183449"/>
                 </a:solidFill>
@@ -16526,114 +16389,34 @@
                 <a:ea typeface="Segoe UI" pitchFamily="34" charset="-122"/>
                 <a:cs typeface="Segoe UI" pitchFamily="34" charset="-120"/>
               </a:rPr>
-              <a:t>Corriger et préparer par l’agent natif</a:t>
-            </a:r>
-            <a:endParaRPr lang="en-US" sz="2100" dirty="0"/>
-          </a:p>
-        </p:txBody>
-      </p:sp>
-      <p:sp>
-        <p:nvSpPr>
-          <p:cNvPr id="14" name="Shape 12"/>
-          <p:cNvSpPr/>
-          <p:nvPr/>
-        </p:nvSpPr>
-        <p:spPr>
-          <a:xfrm>
-            <a:off x="6217920" y="3749040"/>
-            <a:ext cx="5394960" cy="1417320"/>
-          </a:xfrm>
-          <a:prstGeom prst="rect">
-            <a:avLst/>
-          </a:prstGeom>
-          <a:solidFill>
-            <a:srgbClr val="EDF4FA"/>
-          </a:solidFill>
-          <a:ln w="12700">
+              <a:t>Réutiliser les captures; borner concurrence et budget.</a:t>
+            </a:r>
+            <a:endParaRPr lang="en-US" sz="2000" dirty="0"/>
+          </a:p>
+        </p:txBody>
+      </p:sp>
+      <p:sp>
+        <p:nvSpPr>
+          <p:cNvPr id="16" name="Shape 14"/>
+          <p:cNvSpPr/>
+          <p:nvPr/>
+        </p:nvSpPr>
+        <p:spPr>
+          <a:xfrm>
+            <a:off x="1325880" y="5486400"/>
+            <a:ext cx="10149840" cy="0"/>
+          </a:xfrm>
+          <a:prstGeom prst="line">
+            <a:avLst/>
+          </a:prstGeom>
+          <a:noFill/>
+          <a:ln w="6350">
             <a:solidFill>
               <a:srgbClr val="DCE5ED"/>
             </a:solidFill>
             <a:prstDash val="solid"/>
           </a:ln>
         </p:spPr>
-      </p:sp>
-      <p:sp>
-        <p:nvSpPr>
-          <p:cNvPr id="15" name="Text 13"/>
-          <p:cNvSpPr/>
-          <p:nvPr/>
-        </p:nvSpPr>
-        <p:spPr>
-          <a:xfrm>
-            <a:off x="6446520" y="3931920"/>
-            <a:ext cx="640080" cy="411480"/>
-          </a:xfrm>
-          <a:prstGeom prst="rect">
-            <a:avLst/>
-          </a:prstGeom>
-          <a:noFill/>
-          <a:ln/>
-        </p:spPr>
-        <p:txBody>
-          <a:bodyPr wrap="square" lIns="0" tIns="0" rIns="0" bIns="0" rtlCol="0" anchor="ctr"/>
-          <a:lstStyle/>
-          <a:p>
-            <a:pPr indent="0" marL="0">
-              <a:buNone/>
-            </a:pPr>
-            <a:r>
-              <a:rPr lang="en-US" sz="2500" b="1" dirty="0">
-                <a:solidFill>
-                  <a:srgbClr val="0078D4"/>
-                </a:solidFill>
-                <a:latin typeface="Segoe UI" pitchFamily="34" charset="0"/>
-                <a:ea typeface="Segoe UI" pitchFamily="34" charset="-122"/>
-                <a:cs typeface="Segoe UI" pitchFamily="34" charset="-120"/>
-              </a:rPr>
-              <a:t>04</a:t>
-            </a:r>
-            <a:endParaRPr lang="en-US" sz="2500" dirty="0"/>
-          </a:p>
-        </p:txBody>
-      </p:sp>
-      <p:sp>
-        <p:nvSpPr>
-          <p:cNvPr id="16" name="Text 14"/>
-          <p:cNvSpPr/>
-          <p:nvPr/>
-        </p:nvSpPr>
-        <p:spPr>
-          <a:xfrm>
-            <a:off x="7178040" y="3931920"/>
-            <a:ext cx="4114800" cy="1051560"/>
-          </a:xfrm>
-          <a:prstGeom prst="rect">
-            <a:avLst/>
-          </a:prstGeom>
-          <a:noFill/>
-          <a:ln/>
-        </p:spPr>
-        <p:txBody>
-          <a:bodyPr wrap="square" lIns="0" tIns="0" rIns="0" bIns="0" rtlCol="0" anchor="ctr"/>
-          <a:lstStyle/>
-          <a:p>
-            <a:pPr indent="0" marL="0">
-              <a:buNone/>
-            </a:pPr>
-            <a:r>
-              <a:rPr lang="en-US" sz="2100" b="1" dirty="0">
-                <a:solidFill>
-                  <a:srgbClr val="183449"/>
-                </a:solidFill>
-                <a:latin typeface="Segoe UI" pitchFamily="34" charset="0"/>
-                <a:ea typeface="Segoe UI" pitchFamily="34" charset="-122"/>
-                <a:cs typeface="Segoe UI" pitchFamily="34" charset="-120"/>
-              </a:rPr>
-              <a:t>Journal concordant; auto-approbation refusée</a:t>
-            </a:r>
-            <a:endParaRPr lang="en-US" sz="2100" dirty="0"/>
-          </a:p>
-        </p:txBody>
       </p:sp>
       <p:sp>
         <p:nvSpPr>
@@ -16716,7 +16499,7 @@
                 <a:ea typeface="Segoe UI" pitchFamily="34" charset="-122"/>
                 <a:cs typeface="Segoe UI" pitchFamily="34" charset="-120"/>
               </a:rPr>
-              <a:t>28 / 34</a:t>
+              <a:t>28 / 35</a:t>
             </a:r>
             <a:endParaRPr lang="en-US" sz="1000" dirty="0"/>
           </a:p>
@@ -16853,7 +16636,7 @@
                 <a:ea typeface="Segoe UI" pitchFamily="34" charset="-122"/>
                 <a:cs typeface="Segoe UI" pitchFamily="34" charset="-120"/>
               </a:rPr>
-              <a:t>La trajectoire exige une preuve réelle</a:t>
+              <a:t>Régression avec état : le parcours de révision</a:t>
             </a:r>
             <a:endParaRPr lang="en-US" sz="2700" dirty="0"/>
           </a:p>
@@ -16861,98 +16644,22 @@
       </p:sp>
       <p:sp>
         <p:nvSpPr>
-          <p:cNvPr id="5" name="Text 3"/>
-          <p:cNvSpPr/>
-          <p:nvPr/>
-        </p:nvSpPr>
-        <p:spPr>
-          <a:xfrm>
-            <a:off x="594360" y="1828800"/>
-            <a:ext cx="640080" cy="594360"/>
-          </a:xfrm>
-          <a:prstGeom prst="rect">
-            <a:avLst/>
-          </a:prstGeom>
-          <a:noFill/>
-          <a:ln/>
-        </p:spPr>
-        <p:txBody>
-          <a:bodyPr wrap="square" lIns="0" tIns="0" rIns="0" bIns="0" rtlCol="0" anchor="ctr"/>
-          <a:lstStyle/>
-          <a:p>
-            <a:pPr indent="0" marL="0">
-              <a:buNone/>
-            </a:pPr>
-            <a:r>
-              <a:rPr lang="en-US" sz="1700" b="1" dirty="0">
-                <a:solidFill>
-                  <a:srgbClr val="0078D4"/>
-                </a:solidFill>
-                <a:latin typeface="Segoe UI" pitchFamily="34" charset="0"/>
-                <a:ea typeface="Segoe UI" pitchFamily="34" charset="-122"/>
-                <a:cs typeface="Segoe UI" pitchFamily="34" charset="-120"/>
-              </a:rPr>
-              <a:t>01</a:t>
-            </a:r>
-            <a:endParaRPr lang="en-US" sz="1700" dirty="0"/>
-          </a:p>
-        </p:txBody>
-      </p:sp>
-      <p:sp>
-        <p:nvSpPr>
-          <p:cNvPr id="6" name="Text 4"/>
-          <p:cNvSpPr/>
-          <p:nvPr/>
-        </p:nvSpPr>
-        <p:spPr>
-          <a:xfrm>
-            <a:off x="1325880" y="1828800"/>
-            <a:ext cx="10195560" cy="731520"/>
-          </a:xfrm>
-          <a:prstGeom prst="rect">
-            <a:avLst/>
-          </a:prstGeom>
-          <a:noFill/>
-          <a:ln/>
-        </p:spPr>
-        <p:txBody>
-          <a:bodyPr wrap="square" lIns="0" tIns="0" rIns="0" bIns="0" rtlCol="0" anchor="ctr"/>
-          <a:lstStyle/>
-          <a:p>
-            <a:pPr indent="0" marL="0">
-              <a:buNone/>
-            </a:pPr>
-            <a:r>
-              <a:rPr lang="en-US" sz="2000" dirty="0">
-                <a:solidFill>
-                  <a:srgbClr val="183449"/>
-                </a:solidFill>
-                <a:latin typeface="Segoe UI" pitchFamily="34" charset="0"/>
-                <a:ea typeface="Segoe UI" pitchFamily="34" charset="-122"/>
-                <a:cs typeface="Segoe UI" pitchFamily="34" charset="-120"/>
-              </a:rPr>
-              <a:t>Qualité finale et processus correct sont des questions différentes.</a:t>
-            </a:r>
-            <a:endParaRPr lang="en-US" sz="2000" dirty="0"/>
-          </a:p>
-        </p:txBody>
-      </p:sp>
-      <p:sp>
-        <p:nvSpPr>
-          <p:cNvPr id="7" name="Shape 5"/>
-          <p:cNvSpPr/>
-          <p:nvPr/>
-        </p:nvSpPr>
-        <p:spPr>
-          <a:xfrm>
-            <a:off x="1325880" y="2660904"/>
-            <a:ext cx="10149840" cy="0"/>
-          </a:xfrm>
-          <a:prstGeom prst="line">
-            <a:avLst/>
-          </a:prstGeom>
-          <a:noFill/>
-          <a:ln w="6350">
+          <p:cNvPr id="5" name="Shape 3"/>
+          <p:cNvSpPr/>
+          <p:nvPr/>
+        </p:nvSpPr>
+        <p:spPr>
+          <a:xfrm>
+            <a:off x="548640" y="1920240"/>
+            <a:ext cx="5394960" cy="1417320"/>
+          </a:xfrm>
+          <a:prstGeom prst="rect">
+            <a:avLst/>
+          </a:prstGeom>
+          <a:solidFill>
+            <a:srgbClr val="EDF4FA"/>
+          </a:solidFill>
+          <a:ln w="12700">
             <a:solidFill>
               <a:srgbClr val="DCE5ED"/>
             </a:solidFill>
@@ -16962,30 +16669,30 @@
       </p:sp>
       <p:sp>
         <p:nvSpPr>
-          <p:cNvPr id="8" name="Text 6"/>
-          <p:cNvSpPr/>
-          <p:nvPr/>
-        </p:nvSpPr>
-        <p:spPr>
-          <a:xfrm>
-            <a:off x="594360" y="2770632"/>
-            <a:ext cx="640080" cy="594360"/>
-          </a:xfrm>
-          <a:prstGeom prst="rect">
-            <a:avLst/>
-          </a:prstGeom>
-          <a:noFill/>
-          <a:ln/>
-        </p:spPr>
-        <p:txBody>
-          <a:bodyPr wrap="square" lIns="0" tIns="0" rIns="0" bIns="0" rtlCol="0" anchor="ctr"/>
-          <a:lstStyle/>
-          <a:p>
-            <a:pPr indent="0" marL="0">
-              <a:buNone/>
-            </a:pPr>
-            <a:r>
-              <a:rPr lang="en-US" sz="1700" b="1" dirty="0">
+          <p:cNvPr id="6" name="Text 4"/>
+          <p:cNvSpPr/>
+          <p:nvPr/>
+        </p:nvSpPr>
+        <p:spPr>
+          <a:xfrm>
+            <a:off x="777240" y="2103120"/>
+            <a:ext cx="640080" cy="411480"/>
+          </a:xfrm>
+          <a:prstGeom prst="rect">
+            <a:avLst/>
+          </a:prstGeom>
+          <a:noFill/>
+          <a:ln/>
+        </p:spPr>
+        <p:txBody>
+          <a:bodyPr wrap="square" lIns="0" tIns="0" rIns="0" bIns="0" rtlCol="0" anchor="ctr"/>
+          <a:lstStyle/>
+          <a:p>
+            <a:pPr indent="0" marL="0">
+              <a:buNone/>
+            </a:pPr>
+            <a:r>
+              <a:rPr lang="en-US" sz="2500" b="1" dirty="0">
                 <a:solidFill>
                   <a:srgbClr val="0078D4"/>
                 </a:solidFill>
@@ -16993,38 +16700,38 @@
                 <a:ea typeface="Segoe UI" pitchFamily="34" charset="-122"/>
                 <a:cs typeface="Segoe UI" pitchFamily="34" charset="-120"/>
               </a:rPr>
-              <a:t>02</a:t>
-            </a:r>
-            <a:endParaRPr lang="en-US" sz="1700" dirty="0"/>
-          </a:p>
-        </p:txBody>
-      </p:sp>
-      <p:sp>
-        <p:nvSpPr>
-          <p:cNvPr id="9" name="Text 7"/>
-          <p:cNvSpPr/>
-          <p:nvPr/>
-        </p:nvSpPr>
-        <p:spPr>
-          <a:xfrm>
-            <a:off x="1325880" y="2770632"/>
-            <a:ext cx="10195560" cy="731520"/>
-          </a:xfrm>
-          <a:prstGeom prst="rect">
-            <a:avLst/>
-          </a:prstGeom>
-          <a:noFill/>
-          <a:ln/>
-        </p:spPr>
-        <p:txBody>
-          <a:bodyPr wrap="square" lIns="0" tIns="0" rIns="0" bIns="0" rtlCol="0" anchor="ctr"/>
-          <a:lstStyle/>
-          <a:p>
-            <a:pPr indent="0" marL="0">
-              <a:buNone/>
-            </a:pPr>
-            <a:r>
-              <a:rPr lang="en-US" sz="2000" dirty="0">
+              <a:t>01</a:t>
+            </a:r>
+            <a:endParaRPr lang="en-US" sz="2500" dirty="0"/>
+          </a:p>
+        </p:txBody>
+      </p:sp>
+      <p:sp>
+        <p:nvSpPr>
+          <p:cNvPr id="7" name="Text 5"/>
+          <p:cNvSpPr/>
+          <p:nvPr/>
+        </p:nvSpPr>
+        <p:spPr>
+          <a:xfrm>
+            <a:off x="1508760" y="2103120"/>
+            <a:ext cx="4114800" cy="1051560"/>
+          </a:xfrm>
+          <a:prstGeom prst="rect">
+            <a:avLst/>
+          </a:prstGeom>
+          <a:noFill/>
+          <a:ln/>
+        </p:spPr>
+        <p:txBody>
+          <a:bodyPr wrap="square" lIns="0" tIns="0" rIns="0" bIns="0" rtlCol="0" anchor="ctr"/>
+          <a:lstStyle/>
+          <a:p>
+            <a:pPr indent="0" marL="0">
+              <a:buNone/>
+            </a:pPr>
+            <a:r>
+              <a:rPr lang="en-US" sz="2100" b="1" dirty="0">
                 <a:solidFill>
                   <a:srgbClr val="183449"/>
                 </a:solidFill>
@@ -17032,28 +16739,30 @@
                 <a:ea typeface="Segoe UI" pitchFamily="34" charset="-122"/>
                 <a:cs typeface="Segoe UI" pitchFamily="34" charset="-120"/>
               </a:rPr>
-              <a:t>Choix/arguments outils exigent des traces réelles compatibles.</a:t>
-            </a:r>
-            <a:endParaRPr lang="en-US" sz="2000" dirty="0"/>
-          </a:p>
-        </p:txBody>
-      </p:sp>
-      <p:sp>
-        <p:nvSpPr>
-          <p:cNvPr id="10" name="Shape 8"/>
-          <p:cNvSpPr/>
-          <p:nvPr/>
-        </p:nvSpPr>
-        <p:spPr>
-          <a:xfrm>
-            <a:off x="1325880" y="3602736"/>
-            <a:ext cx="10149840" cy="0"/>
-          </a:xfrm>
-          <a:prstGeom prst="line">
-            <a:avLst/>
-          </a:prstGeom>
-          <a:noFill/>
-          <a:ln w="6350">
+              <a:t>Retourner en DRAFT révision 2</a:t>
+            </a:r>
+            <a:endParaRPr lang="en-US" sz="2100" dirty="0"/>
+          </a:p>
+        </p:txBody>
+      </p:sp>
+      <p:sp>
+        <p:nvSpPr>
+          <p:cNvPr id="8" name="Shape 6"/>
+          <p:cNvSpPr/>
+          <p:nvPr/>
+        </p:nvSpPr>
+        <p:spPr>
+          <a:xfrm>
+            <a:off x="6217920" y="1920240"/>
+            <a:ext cx="5394960" cy="1417320"/>
+          </a:xfrm>
+          <a:prstGeom prst="rect">
+            <a:avLst/>
+          </a:prstGeom>
+          <a:solidFill>
+            <a:srgbClr val="EDF4FA"/>
+          </a:solidFill>
+          <a:ln w="12700">
             <a:solidFill>
               <a:srgbClr val="DCE5ED"/>
             </a:solidFill>
@@ -17063,30 +16772,30 @@
       </p:sp>
       <p:sp>
         <p:nvSpPr>
-          <p:cNvPr id="11" name="Text 9"/>
-          <p:cNvSpPr/>
-          <p:nvPr/>
-        </p:nvSpPr>
-        <p:spPr>
-          <a:xfrm>
-            <a:off x="594360" y="3712464"/>
-            <a:ext cx="640080" cy="594360"/>
-          </a:xfrm>
-          <a:prstGeom prst="rect">
-            <a:avLst/>
-          </a:prstGeom>
-          <a:noFill/>
-          <a:ln/>
-        </p:spPr>
-        <p:txBody>
-          <a:bodyPr wrap="square" lIns="0" tIns="0" rIns="0" bIns="0" rtlCol="0" anchor="ctr"/>
-          <a:lstStyle/>
-          <a:p>
-            <a:pPr indent="0" marL="0">
-              <a:buNone/>
-            </a:pPr>
-            <a:r>
-              <a:rPr lang="en-US" sz="1700" b="1" dirty="0">
+          <p:cNvPr id="9" name="Text 7"/>
+          <p:cNvSpPr/>
+          <p:nvPr/>
+        </p:nvSpPr>
+        <p:spPr>
+          <a:xfrm>
+            <a:off x="6446520" y="2103120"/>
+            <a:ext cx="640080" cy="411480"/>
+          </a:xfrm>
+          <a:prstGeom prst="rect">
+            <a:avLst/>
+          </a:prstGeom>
+          <a:noFill/>
+          <a:ln/>
+        </p:spPr>
+        <p:txBody>
+          <a:bodyPr wrap="square" lIns="0" tIns="0" rIns="0" bIns="0" rtlCol="0" anchor="ctr"/>
+          <a:lstStyle/>
+          <a:p>
+            <a:pPr indent="0" marL="0">
+              <a:buNone/>
+            </a:pPr>
+            <a:r>
+              <a:rPr lang="en-US" sz="2500" b="1" dirty="0">
                 <a:solidFill>
                   <a:srgbClr val="0078D4"/>
                 </a:solidFill>
@@ -17094,38 +16803,38 @@
                 <a:ea typeface="Segoe UI" pitchFamily="34" charset="-122"/>
                 <a:cs typeface="Segoe UI" pitchFamily="34" charset="-120"/>
               </a:rPr>
-              <a:t>03</a:t>
-            </a:r>
-            <a:endParaRPr lang="en-US" sz="1700" dirty="0"/>
-          </a:p>
-        </p:txBody>
-      </p:sp>
-      <p:sp>
-        <p:nvSpPr>
-          <p:cNvPr id="12" name="Text 10"/>
-          <p:cNvSpPr/>
-          <p:nvPr/>
-        </p:nvSpPr>
-        <p:spPr>
-          <a:xfrm>
-            <a:off x="1325880" y="3712464"/>
-            <a:ext cx="10195560" cy="731520"/>
-          </a:xfrm>
-          <a:prstGeom prst="rect">
-            <a:avLst/>
-          </a:prstGeom>
-          <a:noFill/>
-          <a:ln/>
-        </p:spPr>
-        <p:txBody>
-          <a:bodyPr wrap="square" lIns="0" tIns="0" rIns="0" bIns="0" rtlCol="0" anchor="ctr"/>
-          <a:lstStyle/>
-          <a:p>
-            <a:pPr indent="0" marL="0">
-              <a:buNone/>
-            </a:pPr>
-            <a:r>
-              <a:rPr lang="en-US" sz="2000" dirty="0">
+              <a:t>02</a:t>
+            </a:r>
+            <a:endParaRPr lang="en-US" sz="2500" dirty="0"/>
+          </a:p>
+        </p:txBody>
+      </p:sp>
+      <p:sp>
+        <p:nvSpPr>
+          <p:cNvPr id="10" name="Text 8"/>
+          <p:cNvSpPr/>
+          <p:nvPr/>
+        </p:nvSpPr>
+        <p:spPr>
+          <a:xfrm>
+            <a:off x="7178040" y="2103120"/>
+            <a:ext cx="4114800" cy="1051560"/>
+          </a:xfrm>
+          <a:prstGeom prst="rect">
+            <a:avLst/>
+          </a:prstGeom>
+          <a:noFill/>
+          <a:ln/>
+        </p:spPr>
+        <p:txBody>
+          <a:bodyPr wrap="square" lIns="0" tIns="0" rIns="0" bIns="0" rtlCol="0" anchor="ctr"/>
+          <a:lstStyle/>
+          <a:p>
+            <a:pPr indent="0" marL="0">
+              <a:buNone/>
+            </a:pPr>
+            <a:r>
+              <a:rPr lang="en-US" sz="2100" b="1" dirty="0">
                 <a:solidFill>
                   <a:srgbClr val="183449"/>
                 </a:solidFill>
@@ -17133,28 +16842,30 @@
                 <a:ea typeface="Segoe UI" pitchFamily="34" charset="-122"/>
                 <a:cs typeface="Segoe UI" pitchFamily="34" charset="-120"/>
               </a:rPr>
-              <a:t>Vraies étapes : INTAKE, REFERENCE_LOOKUP, COMPOSITION.</a:t>
-            </a:r>
-            <a:endParaRPr lang="en-US" sz="2000" dirty="0"/>
-          </a:p>
-        </p:txBody>
-      </p:sp>
-      <p:sp>
-        <p:nvSpPr>
-          <p:cNvPr id="13" name="Shape 11"/>
-          <p:cNvSpPr/>
-          <p:nvPr/>
-        </p:nvSpPr>
-        <p:spPr>
-          <a:xfrm>
-            <a:off x="1325880" y="4544568"/>
-            <a:ext cx="10149840" cy="0"/>
-          </a:xfrm>
-          <a:prstGeom prst="line">
-            <a:avLst/>
-          </a:prstGeom>
-          <a:noFill/>
-          <a:ln w="6350">
+              <a:t>Vérifier visibilité actif / DRAFT</a:t>
+            </a:r>
+            <a:endParaRPr lang="en-US" sz="2100" dirty="0"/>
+          </a:p>
+        </p:txBody>
+      </p:sp>
+      <p:sp>
+        <p:nvSpPr>
+          <p:cNvPr id="11" name="Shape 9"/>
+          <p:cNvSpPr/>
+          <p:nvPr/>
+        </p:nvSpPr>
+        <p:spPr>
+          <a:xfrm>
+            <a:off x="548640" y="3749040"/>
+            <a:ext cx="5394960" cy="1417320"/>
+          </a:xfrm>
+          <a:prstGeom prst="rect">
+            <a:avLst/>
+          </a:prstGeom>
+          <a:solidFill>
+            <a:srgbClr val="EDF4FA"/>
+          </a:solidFill>
+          <a:ln w="12700">
             <a:solidFill>
               <a:srgbClr val="DCE5ED"/>
             </a:solidFill>
@@ -17164,30 +16875,30 @@
       </p:sp>
       <p:sp>
         <p:nvSpPr>
-          <p:cNvPr id="14" name="Text 12"/>
-          <p:cNvSpPr/>
-          <p:nvPr/>
-        </p:nvSpPr>
-        <p:spPr>
-          <a:xfrm>
-            <a:off x="594360" y="4654296"/>
-            <a:ext cx="640080" cy="594360"/>
-          </a:xfrm>
-          <a:prstGeom prst="rect">
-            <a:avLst/>
-          </a:prstGeom>
-          <a:noFill/>
-          <a:ln/>
-        </p:spPr>
-        <p:txBody>
-          <a:bodyPr wrap="square" lIns="0" tIns="0" rIns="0" bIns="0" rtlCol="0" anchor="ctr"/>
-          <a:lstStyle/>
-          <a:p>
-            <a:pPr indent="0" marL="0">
-              <a:buNone/>
-            </a:pPr>
-            <a:r>
-              <a:rPr lang="en-US" sz="1700" b="1" dirty="0">
+          <p:cNvPr id="12" name="Text 10"/>
+          <p:cNvSpPr/>
+          <p:nvPr/>
+        </p:nvSpPr>
+        <p:spPr>
+          <a:xfrm>
+            <a:off x="777240" y="3931920"/>
+            <a:ext cx="640080" cy="411480"/>
+          </a:xfrm>
+          <a:prstGeom prst="rect">
+            <a:avLst/>
+          </a:prstGeom>
+          <a:noFill/>
+          <a:ln/>
+        </p:spPr>
+        <p:txBody>
+          <a:bodyPr wrap="square" lIns="0" tIns="0" rIns="0" bIns="0" rtlCol="0" anchor="ctr"/>
+          <a:lstStyle/>
+          <a:p>
+            <a:pPr indent="0" marL="0">
+              <a:buNone/>
+            </a:pPr>
+            <a:r>
+              <a:rPr lang="en-US" sz="2500" b="1" dirty="0">
                 <a:solidFill>
                   <a:srgbClr val="0078D4"/>
                 </a:solidFill>
@@ -17195,38 +16906,38 @@
                 <a:ea typeface="Segoe UI" pitchFamily="34" charset="-122"/>
                 <a:cs typeface="Segoe UI" pitchFamily="34" charset="-120"/>
               </a:rPr>
-              <a:t>04</a:t>
-            </a:r>
-            <a:endParaRPr lang="en-US" sz="1700" dirty="0"/>
-          </a:p>
-        </p:txBody>
-      </p:sp>
-      <p:sp>
-        <p:nvSpPr>
-          <p:cNvPr id="15" name="Text 13"/>
-          <p:cNvSpPr/>
-          <p:nvPr/>
-        </p:nvSpPr>
-        <p:spPr>
-          <a:xfrm>
-            <a:off x="1325880" y="4654296"/>
-            <a:ext cx="10195560" cy="731520"/>
-          </a:xfrm>
-          <a:prstGeom prst="rect">
-            <a:avLst/>
-          </a:prstGeom>
-          <a:noFill/>
-          <a:ln/>
-        </p:spPr>
-        <p:txBody>
-          <a:bodyPr wrap="square" lIns="0" tIns="0" rIns="0" bIns="0" rtlCol="0" anchor="ctr"/>
-          <a:lstStyle/>
-          <a:p>
-            <a:pPr indent="0" marL="0">
-              <a:buNone/>
-            </a:pPr>
-            <a:r>
-              <a:rPr lang="en-US" sz="2000" dirty="0">
+              <a:t>03</a:t>
+            </a:r>
+            <a:endParaRPr lang="en-US" sz="2500" dirty="0"/>
+          </a:p>
+        </p:txBody>
+      </p:sp>
+      <p:sp>
+        <p:nvSpPr>
+          <p:cNvPr id="13" name="Text 11"/>
+          <p:cNvSpPr/>
+          <p:nvPr/>
+        </p:nvSpPr>
+        <p:spPr>
+          <a:xfrm>
+            <a:off x="1508760" y="3931920"/>
+            <a:ext cx="4114800" cy="1051560"/>
+          </a:xfrm>
+          <a:prstGeom prst="rect">
+            <a:avLst/>
+          </a:prstGeom>
+          <a:noFill/>
+          <a:ln/>
+        </p:spPr>
+        <p:txBody>
+          <a:bodyPr wrap="square" lIns="0" tIns="0" rIns="0" bIns="0" rtlCol="0" anchor="ctr"/>
+          <a:lstStyle/>
+          <a:p>
+            <a:pPr indent="0" marL="0">
+              <a:buNone/>
+            </a:pPr>
+            <a:r>
+              <a:rPr lang="en-US" sz="2100" b="1" dirty="0">
                 <a:solidFill>
                   <a:srgbClr val="183449"/>
                 </a:solidFill>
@@ -17234,34 +16945,114 @@
                 <a:ea typeface="Segoe UI" pitchFamily="34" charset="-122"/>
                 <a:cs typeface="Segoe UI" pitchFamily="34" charset="-120"/>
               </a:rPr>
-              <a:t>ID demandé ou texte final ne prouvent pas l’ingestion.</a:t>
-            </a:r>
-            <a:endParaRPr lang="en-US" sz="2000" dirty="0"/>
-          </a:p>
-        </p:txBody>
-      </p:sp>
-      <p:sp>
-        <p:nvSpPr>
-          <p:cNvPr id="16" name="Shape 14"/>
-          <p:cNvSpPr/>
-          <p:nvPr/>
-        </p:nvSpPr>
-        <p:spPr>
-          <a:xfrm>
-            <a:off x="1325880" y="5486400"/>
-            <a:ext cx="10149840" cy="0"/>
-          </a:xfrm>
-          <a:prstGeom prst="line">
-            <a:avLst/>
-          </a:prstGeom>
-          <a:noFill/>
-          <a:ln w="6350">
+              <a:t>Corriger et préparer par l’agent natif</a:t>
+            </a:r>
+            <a:endParaRPr lang="en-US" sz="2100" dirty="0"/>
+          </a:p>
+        </p:txBody>
+      </p:sp>
+      <p:sp>
+        <p:nvSpPr>
+          <p:cNvPr id="14" name="Shape 12"/>
+          <p:cNvSpPr/>
+          <p:nvPr/>
+        </p:nvSpPr>
+        <p:spPr>
+          <a:xfrm>
+            <a:off x="6217920" y="3749040"/>
+            <a:ext cx="5394960" cy="1417320"/>
+          </a:xfrm>
+          <a:prstGeom prst="rect">
+            <a:avLst/>
+          </a:prstGeom>
+          <a:solidFill>
+            <a:srgbClr val="EDF4FA"/>
+          </a:solidFill>
+          <a:ln w="12700">
             <a:solidFill>
               <a:srgbClr val="DCE5ED"/>
             </a:solidFill>
             <a:prstDash val="solid"/>
           </a:ln>
         </p:spPr>
+      </p:sp>
+      <p:sp>
+        <p:nvSpPr>
+          <p:cNvPr id="15" name="Text 13"/>
+          <p:cNvSpPr/>
+          <p:nvPr/>
+        </p:nvSpPr>
+        <p:spPr>
+          <a:xfrm>
+            <a:off x="6446520" y="3931920"/>
+            <a:ext cx="640080" cy="411480"/>
+          </a:xfrm>
+          <a:prstGeom prst="rect">
+            <a:avLst/>
+          </a:prstGeom>
+          <a:noFill/>
+          <a:ln/>
+        </p:spPr>
+        <p:txBody>
+          <a:bodyPr wrap="square" lIns="0" tIns="0" rIns="0" bIns="0" rtlCol="0" anchor="ctr"/>
+          <a:lstStyle/>
+          <a:p>
+            <a:pPr indent="0" marL="0">
+              <a:buNone/>
+            </a:pPr>
+            <a:r>
+              <a:rPr lang="en-US" sz="2500" b="1" dirty="0">
+                <a:solidFill>
+                  <a:srgbClr val="0078D4"/>
+                </a:solidFill>
+                <a:latin typeface="Segoe UI" pitchFamily="34" charset="0"/>
+                <a:ea typeface="Segoe UI" pitchFamily="34" charset="-122"/>
+                <a:cs typeface="Segoe UI" pitchFamily="34" charset="-120"/>
+              </a:rPr>
+              <a:t>04</a:t>
+            </a:r>
+            <a:endParaRPr lang="en-US" sz="2500" dirty="0"/>
+          </a:p>
+        </p:txBody>
+      </p:sp>
+      <p:sp>
+        <p:nvSpPr>
+          <p:cNvPr id="16" name="Text 14"/>
+          <p:cNvSpPr/>
+          <p:nvPr/>
+        </p:nvSpPr>
+        <p:spPr>
+          <a:xfrm>
+            <a:off x="7178040" y="3931920"/>
+            <a:ext cx="4114800" cy="1051560"/>
+          </a:xfrm>
+          <a:prstGeom prst="rect">
+            <a:avLst/>
+          </a:prstGeom>
+          <a:noFill/>
+          <a:ln/>
+        </p:spPr>
+        <p:txBody>
+          <a:bodyPr wrap="square" lIns="0" tIns="0" rIns="0" bIns="0" rtlCol="0" anchor="ctr"/>
+          <a:lstStyle/>
+          <a:p>
+            <a:pPr indent="0" marL="0">
+              <a:buNone/>
+            </a:pPr>
+            <a:r>
+              <a:rPr lang="en-US" sz="2100" b="1" dirty="0">
+                <a:solidFill>
+                  <a:srgbClr val="183449"/>
+                </a:solidFill>
+                <a:latin typeface="Segoe UI" pitchFamily="34" charset="0"/>
+                <a:ea typeface="Segoe UI" pitchFamily="34" charset="-122"/>
+                <a:cs typeface="Segoe UI" pitchFamily="34" charset="-120"/>
+              </a:rPr>
+              <a:t>Journal concordant; auto-approbation refusée</a:t>
+            </a:r>
+            <a:endParaRPr lang="en-US" sz="2100" dirty="0"/>
+          </a:p>
+        </p:txBody>
       </p:sp>
       <p:sp>
         <p:nvSpPr>
@@ -17344,7 +17135,7 @@
                 <a:ea typeface="Segoe UI" pitchFamily="34" charset="-122"/>
                 <a:cs typeface="Segoe UI" pitchFamily="34" charset="-120"/>
               </a:rPr>
-              <a:t>29 / 34</a:t>
+              <a:t>29 / 35</a:t>
             </a:r>
             <a:endParaRPr lang="en-US" sz="1000" dirty="0"/>
           </a:p>
@@ -17980,7 +17771,7 @@
                 <a:ea typeface="Segoe UI" pitchFamily="34" charset="-122"/>
                 <a:cs typeface="Segoe UI" pitchFamily="34" charset="-120"/>
               </a:rPr>
-              <a:t>3 / 34</a:t>
+              <a:t>3 / 35</a:t>
             </a:r>
             <a:endParaRPr lang="en-US" sz="1000" dirty="0"/>
           </a:p>
@@ -18117,7 +17908,7 @@
                 <a:ea typeface="Segoe UI" pitchFamily="34" charset="-122"/>
                 <a:cs typeface="Segoe UI" pitchFamily="34" charset="-120"/>
               </a:rPr>
-              <a:t>Exploiter plusieurs tableaux distincts</a:t>
+              <a:t>La trajectoire exige une preuve réelle</a:t>
             </a:r>
             <a:endParaRPr lang="en-US" sz="2700" dirty="0"/>
           </a:p>
@@ -18195,7 +17986,7 @@
                 <a:ea typeface="Segoe UI" pitchFamily="34" charset="-122"/>
                 <a:cs typeface="Segoe UI" pitchFamily="34" charset="-120"/>
               </a:rPr>
-              <a:t>Service : disponibilité, latence, 401/403, quota, délais, coût.</a:t>
+              <a:t>Qualité finale et processus correct sont des questions différentes.</a:t>
             </a:r>
             <a:endParaRPr lang="en-US" sz="2000" dirty="0"/>
           </a:p>
@@ -18296,7 +18087,7 @@
                 <a:ea typeface="Segoe UI" pitchFamily="34" charset="-122"/>
                 <a:cs typeface="Segoe UI" pitchFamily="34" charset="-120"/>
               </a:rPr>
-              <a:t>Qualité : ancrage, tâche, segments linguistiques, corrections humaines.</a:t>
+              <a:t>Choix/arguments outils exigent des traces réelles compatibles.</a:t>
             </a:r>
             <a:endParaRPr lang="en-US" sz="2000" dirty="0"/>
           </a:p>
@@ -18397,7 +18188,7 @@
                 <a:ea typeface="Segoe UI" pitchFamily="34" charset="-122"/>
                 <a:cs typeface="Segoe UI" pitchFamily="34" charset="-120"/>
               </a:rPr>
-              <a:t>Sécurité : violations déterministes et frontières de rôles.</a:t>
+              <a:t>Vraies étapes : INTAKE, REFERENCE_LOOKUP, COMPOSITION.</a:t>
             </a:r>
             <a:endParaRPr lang="en-US" sz="2000" dirty="0"/>
           </a:p>
@@ -18498,7 +18289,7 @@
                 <a:ea typeface="Segoe UI" pitchFamily="34" charset="-122"/>
                 <a:cs typeface="Segoe UI" pitchFamily="34" charset="-120"/>
               </a:rPr>
-              <a:t>Revoir la dérive et transformer les incidents vérifiés en tests.</a:t>
+              <a:t>ID demandé ou texte final ne prouvent pas l’ingestion.</a:t>
             </a:r>
             <a:endParaRPr lang="en-US" sz="2000" dirty="0"/>
           </a:p>
@@ -18608,7 +18399,7 @@
                 <a:ea typeface="Segoe UI" pitchFamily="34" charset="-122"/>
                 <a:cs typeface="Segoe UI" pitchFamily="34" charset="-120"/>
               </a:rPr>
-              <a:t>30 / 34</a:t>
+              <a:t>30 / 35</a:t>
             </a:r>
             <a:endParaRPr lang="en-US" sz="1000" dirty="0"/>
           </a:p>
@@ -18745,7 +18536,7 @@
                 <a:ea typeface="Segoe UI" pitchFamily="34" charset="-122"/>
                 <a:cs typeface="Segoe UI" pitchFamily="34" charset="-120"/>
               </a:rPr>
-              <a:t>Votre recommandation de livraison</a:t>
+              <a:t>Exploiter plusieurs tableaux distincts</a:t>
             </a:r>
             <a:endParaRPr lang="en-US" sz="2700" dirty="0"/>
           </a:p>
@@ -18823,7 +18614,7 @@
                 <a:ea typeface="Segoe UI" pitchFamily="34" charset="-122"/>
                 <a:cs typeface="Segoe UI" pitchFamily="34" charset="-120"/>
               </a:rPr>
-              <a:t>Nommer source, jeu, état, modèle et évaluateur exacts.</a:t>
+              <a:t>Service : disponibilité, latence, 401/403, quota, délais, coût.</a:t>
             </a:r>
             <a:endParaRPr lang="en-US" sz="2000" dirty="0"/>
           </a:p>
@@ -18924,7 +18715,7 @@
                 <a:ea typeface="Segoe UI" pitchFamily="34" charset="-122"/>
                 <a:cs typeface="Segoe UI" pitchFamily="34" charset="-120"/>
               </a:rPr>
-              <a:t>Présenter contrats, complétude, qualité, contrôles et incertitude.</a:t>
+              <a:t>Qualité : ancrage, tâche, segments linguistiques, corrections humaines.</a:t>
             </a:r>
             <a:endParaRPr lang="en-US" sz="2000" dirty="0"/>
           </a:p>
@@ -19025,7 +18816,7 @@
                 <a:ea typeface="Segoe UI" pitchFamily="34" charset="-122"/>
                 <a:cs typeface="Segoe UI" pitchFamily="34" charset="-120"/>
               </a:rPr>
-              <a:t>Lister dimensions non mesurées, coût, pannes et risques.</a:t>
+              <a:t>Sécurité : violations déterministes et frontières de rôles.</a:t>
             </a:r>
             <a:endParaRPr lang="en-US" sz="2000" dirty="0"/>
           </a:p>
@@ -19126,7 +18917,7 @@
                 <a:ea typeface="Segoe UI" pitchFamily="34" charset="-122"/>
                 <a:cs typeface="Segoe UI" pitchFamily="34" charset="-120"/>
               </a:rPr>
-              <a:t>Approuver, bloquer ou demander des preuves avec un responsable.</a:t>
+              <a:t>Revoir la dérive et transformer les incidents vérifiés en tests.</a:t>
             </a:r>
             <a:endParaRPr lang="en-US" sz="2000" dirty="0"/>
           </a:p>
@@ -19236,7 +19027,7 @@
                 <a:ea typeface="Segoe UI" pitchFamily="34" charset="-122"/>
                 <a:cs typeface="Segoe UI" pitchFamily="34" charset="-120"/>
               </a:rPr>
-              <a:t>31 / 34</a:t>
+              <a:t>31 / 35</a:t>
             </a:r>
             <a:endParaRPr lang="en-US" sz="1000" dirty="0"/>
           </a:p>
@@ -19373,7 +19164,7 @@
                 <a:ea typeface="Segoe UI" pitchFamily="34" charset="-122"/>
                 <a:cs typeface="Segoe UI" pitchFamily="34" charset="-120"/>
               </a:rPr>
-              <a:t>Discussion : quel candidat livrer?</a:t>
+              <a:t>Votre recommandation de livraison</a:t>
             </a:r>
             <a:endParaRPr lang="en-US" sz="2700" dirty="0"/>
           </a:p>
@@ -19451,7 +19242,7 @@
                 <a:ea typeface="Segoe UI" pitchFamily="34" charset="-122"/>
                 <a:cs typeface="Segoe UI" pitchFamily="34" charset="-120"/>
               </a:rPr>
-              <a:t>A : juges 100 %, mais auto-approbation possible.</a:t>
+              <a:t>Nommer source, jeu, état, modèle et évaluateur exacts.</a:t>
             </a:r>
             <a:endParaRPr lang="en-US" sz="2000" dirty="0"/>
           </a:p>
@@ -19552,7 +19343,7 @@
                 <a:ea typeface="Segoe UI" pitchFamily="34" charset="-122"/>
                 <a:cs typeface="Segoe UI" pitchFamily="34" charset="-120"/>
               </a:rPr>
-              <a:t>B : contrats stricts réussis, mais zéro ligne native notée.</a:t>
+              <a:t>Présenter contrats, complétude, qualité, contrôles et incertitude.</a:t>
             </a:r>
             <a:endParaRPr lang="en-US" sz="2000" dirty="0"/>
           </a:p>
@@ -19653,7 +19444,7 @@
                 <a:ea typeface="Segoe UI" pitchFamily="34" charset="-122"/>
                 <a:cs typeface="Segoe UI" pitchFamily="34" charset="-120"/>
               </a:rPr>
-              <a:t>C : résultats complets, une fausse acceptation à haut risque.</a:t>
+              <a:t>Lister dimensions non mesurées, coût, pannes et risques.</a:t>
             </a:r>
             <a:endParaRPr lang="en-US" sz="2000" dirty="0"/>
           </a:p>
@@ -19754,7 +19545,7 @@
                 <a:ea typeface="Segoe UI" pitchFamily="34" charset="-122"/>
                 <a:cs typeface="Segoe UI" pitchFamily="34" charset="-120"/>
               </a:rPr>
-              <a:t>D : preuves complètes, segments stables, risques revus et approbation.</a:t>
+              <a:t>Approuver, bloquer ou demander des preuves avec un responsable.</a:t>
             </a:r>
             <a:endParaRPr lang="en-US" sz="2000" dirty="0"/>
           </a:p>
@@ -19864,7 +19655,7 @@
                 <a:ea typeface="Segoe UI" pitchFamily="34" charset="-122"/>
                 <a:cs typeface="Segoe UI" pitchFamily="34" charset="-120"/>
               </a:rPr>
-              <a:t>32 / 34</a:t>
+              <a:t>32 / 35</a:t>
             </a:r>
             <a:endParaRPr lang="en-US" sz="1000" dirty="0"/>
           </a:p>
@@ -20001,7 +19792,7 @@
                 <a:ea typeface="Segoe UI" pitchFamily="34" charset="-122"/>
                 <a:cs typeface="Segoe UI" pitchFamily="34" charset="-120"/>
               </a:rPr>
-              <a:t>Bilan : le vrai sens de non-régression</a:t>
+              <a:t>Discussion : quel candidat livrer?</a:t>
             </a:r>
             <a:endParaRPr lang="en-US" sz="2700" dirty="0"/>
           </a:p>
@@ -20079,7 +19870,7 @@
                 <a:ea typeface="Segoe UI" pitchFamily="34" charset="-122"/>
                 <a:cs typeface="Segoe UI" pitchFamily="34" charset="-120"/>
               </a:rPr>
-              <a:t>Énoncer contrat et conditions mesurés, pas « aucune régression possible ».</a:t>
+              <a:t>A : juges 100 %, mais auto-approbation possible.</a:t>
             </a:r>
             <a:endParaRPr lang="en-US" sz="2000" dirty="0"/>
           </a:p>
@@ -20180,7 +19971,7 @@
                 <a:ea typeface="Segoe UI" pitchFamily="34" charset="-122"/>
                 <a:cs typeface="Segoe UI" pitchFamily="34" charset="-120"/>
               </a:rPr>
-              <a:t>Combiner tests exacts et jugements sémantiques.</a:t>
+              <a:t>B : contrats stricts réussis, mais zéro ligne native notée.</a:t>
             </a:r>
             <a:endParaRPr lang="en-US" sz="2000" dirty="0"/>
           </a:p>
@@ -20281,7 +20072,7 @@
                 <a:ea typeface="Segoe UI" pitchFamily="34" charset="-122"/>
                 <a:cs typeface="Segoe UI" pitchFamily="34" charset="-120"/>
               </a:rPr>
-              <a:t>Conserver contrôles et tentatives opérationnelles échoués.</a:t>
+              <a:t>C : résultats complets, une fausse acceptation à haut risque.</a:t>
             </a:r>
             <a:endParaRPr lang="en-US" sz="2000" dirty="0"/>
           </a:p>
@@ -20382,7 +20173,7 @@
                 <a:ea typeface="Segoe UI" pitchFamily="34" charset="-122"/>
                 <a:cs typeface="Segoe UI" pitchFamily="34" charset="-120"/>
               </a:rPr>
-              <a:t>Faire évoluer couverture, calibration et surveillance.</a:t>
+              <a:t>D : preuves complètes, segments stables, risques revus et approbation.</a:t>
             </a:r>
             <a:endParaRPr lang="en-US" sz="2000" dirty="0"/>
           </a:p>
@@ -20492,7 +20283,7 @@
                 <a:ea typeface="Segoe UI" pitchFamily="34" charset="-122"/>
                 <a:cs typeface="Segoe UI" pitchFamily="34" charset="-120"/>
               </a:rPr>
-              <a:t>33 / 34</a:t>
+              <a:t>33 / 35</a:t>
             </a:r>
             <a:endParaRPr lang="en-US" sz="1000" dirty="0"/>
           </a:p>
@@ -20629,7 +20420,7 @@
                 <a:ea typeface="Segoe UI" pitchFamily="34" charset="-122"/>
                 <a:cs typeface="Segoe UI" pitchFamily="34" charset="-120"/>
               </a:rPr>
-              <a:t>Emporter atelier, guide et preuves</a:t>
+              <a:t>Bilan : le vrai sens de non-régression</a:t>
             </a:r>
             <a:endParaRPr lang="en-US" sz="2700" dirty="0"/>
           </a:p>
@@ -20707,7 +20498,7 @@
                 <a:ea typeface="Segoe UI" pitchFamily="34" charset="-122"/>
                 <a:cs typeface="Segoe UI" pitchFamily="34" charset="-120"/>
               </a:rPr>
-              <a:t>Atelier 19 : dix exercices progressifs avec commandes exécutables.</a:t>
+              <a:t>Énoncer contrat et conditions mesurés, pas « aucune régression possible ».</a:t>
             </a:r>
             <a:endParaRPr lang="en-US" sz="2000" dirty="0"/>
           </a:p>
@@ -20808,7 +20599,7 @@
                 <a:ea typeface="Segoe UI" pitchFamily="34" charset="-122"/>
                 <a:cs typeface="Segoe UI" pitchFamily="34" charset="-120"/>
               </a:rPr>
-              <a:t>Guide : portail, mappings SDK, politique et diagnostic.</a:t>
+              <a:t>Combiner tests exacts et jugements sémantiques.</a:t>
             </a:r>
             <a:endParaRPr lang="en-US" sz="2000" dirty="0"/>
           </a:p>
@@ -20909,7 +20700,7 @@
                 <a:ea typeface="Segoe UI" pitchFamily="34" charset="-122"/>
                 <a:cs typeface="Segoe UI" pitchFamily="34" charset="-120"/>
               </a:rPr>
-              <a:t>Présentation : PowerPoint EN/FR modifiables et notes formateur.</a:t>
+              <a:t>Conserver contrôles et tentatives opérationnelles échoués.</a:t>
             </a:r>
             <a:endParaRPr lang="en-US" sz="2000" dirty="0"/>
           </a:p>
@@ -21010,7 +20801,7 @@
                 <a:ea typeface="Segoe UI" pitchFamily="34" charset="-122"/>
                 <a:cs typeface="Segoe UI" pitchFamily="34" charset="-120"/>
               </a:rPr>
-              <a:t>Sources : liens Microsoft Learn officiels dans les notes.</a:t>
+              <a:t>Faire évoluer couverture, calibration et surveillance.</a:t>
             </a:r>
             <a:endParaRPr lang="en-US" sz="2000" dirty="0"/>
           </a:p>
@@ -21120,7 +20911,635 @@
                 <a:ea typeface="Segoe UI" pitchFamily="34" charset="-122"/>
                 <a:cs typeface="Segoe UI" pitchFamily="34" charset="-120"/>
               </a:rPr>
-              <a:t>34 / 34</a:t>
+              <a:t>34 / 35</a:t>
+            </a:r>
+            <a:endParaRPr lang="en-US" sz="1000" dirty="0"/>
+          </a:p>
+        </p:txBody>
+      </p:sp>
+    </p:spTree>
+  </p:cSld>
+  <p:clrMapOvr>
+    <a:masterClrMapping/>
+  </p:clrMapOvr>
+</p:sld>
+</file>
+
+<file path=ppt/slides/slide35.xml><?xml version="1.0" encoding="utf-8"?>
+<p:sld xmlns:a="http://schemas.openxmlformats.org/drawingml/2006/main" xmlns:r="http://schemas.openxmlformats.org/officeDocument/2006/relationships" xmlns:p="http://schemas.openxmlformats.org/presentationml/2006/main">
+  <p:cSld name="Slide 35">
+    <p:bg>
+      <p:bgPr>
+        <a:solidFill>
+          <a:srgbClr val="FAFBFC"/>
+        </a:solidFill>
+      </p:bgPr>
+    </p:bg>
+    <p:spTree>
+      <p:nvGrpSpPr>
+        <p:cNvPr id="1" name=""/>
+        <p:cNvGrpSpPr/>
+        <p:nvPr/>
+      </p:nvGrpSpPr>
+      <p:grpSpPr>
+        <a:xfrm>
+          <a:off x="0" y="0"/>
+          <a:ext cx="0" cy="0"/>
+          <a:chOff x="0" y="0"/>
+          <a:chExt cx="0" cy="0"/>
+        </a:xfrm>
+      </p:grpSpPr>
+      <p:sp>
+        <p:nvSpPr>
+          <p:cNvPr id="2" name="Shape 0"/>
+          <p:cNvSpPr/>
+          <p:nvPr/>
+        </p:nvSpPr>
+        <p:spPr>
+          <a:xfrm>
+            <a:off x="0" y="0"/>
+            <a:ext cx="12191695" cy="82296"/>
+          </a:xfrm>
+          <a:prstGeom prst="rect">
+            <a:avLst/>
+          </a:prstGeom>
+          <a:solidFill>
+            <a:srgbClr val="0078D4"/>
+          </a:solidFill>
+          <a:ln w="12700">
+            <a:solidFill>
+              <a:srgbClr val="333333">
+                <a:alpha val="0"/>
+              </a:srgbClr>
+            </a:solidFill>
+            <a:prstDash val="solid"/>
+          </a:ln>
+        </p:spPr>
+      </p:sp>
+      <p:sp>
+        <p:nvSpPr>
+          <p:cNvPr id="3" name="Text 1"/>
+          <p:cNvSpPr/>
+          <p:nvPr/>
+        </p:nvSpPr>
+        <p:spPr>
+          <a:xfrm>
+            <a:off x="548640" y="320040"/>
+            <a:ext cx="11064240" cy="274320"/>
+          </a:xfrm>
+          <a:prstGeom prst="rect">
+            <a:avLst/>
+          </a:prstGeom>
+          <a:noFill/>
+          <a:ln/>
+        </p:spPr>
+        <p:txBody>
+          <a:bodyPr wrap="square" lIns="0" tIns="0" rIns="0" bIns="0" rtlCol="0" anchor="ctr"/>
+          <a:lstStyle/>
+          <a:p>
+            <a:pPr indent="0" marL="0">
+              <a:buNone/>
+            </a:pPr>
+            <a:r>
+              <a:rPr lang="en-US" sz="1100" b="1" dirty="0">
+                <a:solidFill>
+                  <a:srgbClr val="0078D4"/>
+                </a:solidFill>
+                <a:latin typeface="Segoe UI" pitchFamily="34" charset="0"/>
+                <a:ea typeface="Segoe UI" pitchFamily="34" charset="-122"/>
+                <a:cs typeface="Segoe UI" pitchFamily="34" charset="-120"/>
+              </a:rPr>
+              <a:t>FOUNDRY / INGÉNIERIE DE L’ÉVALUATION</a:t>
+            </a:r>
+            <a:endParaRPr lang="en-US" sz="1100" dirty="0"/>
+          </a:p>
+        </p:txBody>
+      </p:sp>
+      <p:sp>
+        <p:nvSpPr>
+          <p:cNvPr id="4" name="Text 2"/>
+          <p:cNvSpPr/>
+          <p:nvPr/>
+        </p:nvSpPr>
+        <p:spPr>
+          <a:xfrm>
+            <a:off x="548640" y="777240"/>
+            <a:ext cx="11064240" cy="822960"/>
+          </a:xfrm>
+          <a:prstGeom prst="rect">
+            <a:avLst/>
+          </a:prstGeom>
+          <a:noFill/>
+          <a:ln/>
+        </p:spPr>
+        <p:txBody>
+          <a:bodyPr wrap="square" lIns="0" tIns="0" rIns="0" bIns="0" rtlCol="0" anchor="ctr"/>
+          <a:lstStyle/>
+          <a:p>
+            <a:pPr indent="0" marL="0">
+              <a:buNone/>
+            </a:pPr>
+            <a:r>
+              <a:rPr lang="en-US" sz="2700" b="1" dirty="0">
+                <a:solidFill>
+                  <a:srgbClr val="001B3D"/>
+                </a:solidFill>
+                <a:latin typeface="Segoe UI" pitchFamily="34" charset="0"/>
+                <a:ea typeface="Segoe UI" pitchFamily="34" charset="-122"/>
+                <a:cs typeface="Segoe UI" pitchFamily="34" charset="-120"/>
+              </a:rPr>
+              <a:t>Emporter atelier, guide et preuves</a:t>
+            </a:r>
+            <a:endParaRPr lang="en-US" sz="2700" dirty="0"/>
+          </a:p>
+        </p:txBody>
+      </p:sp>
+      <p:sp>
+        <p:nvSpPr>
+          <p:cNvPr id="5" name="Text 3"/>
+          <p:cNvSpPr/>
+          <p:nvPr/>
+        </p:nvSpPr>
+        <p:spPr>
+          <a:xfrm>
+            <a:off x="594360" y="1828800"/>
+            <a:ext cx="640080" cy="594360"/>
+          </a:xfrm>
+          <a:prstGeom prst="rect">
+            <a:avLst/>
+          </a:prstGeom>
+          <a:noFill/>
+          <a:ln/>
+        </p:spPr>
+        <p:txBody>
+          <a:bodyPr wrap="square" lIns="0" tIns="0" rIns="0" bIns="0" rtlCol="0" anchor="ctr"/>
+          <a:lstStyle/>
+          <a:p>
+            <a:pPr indent="0" marL="0">
+              <a:buNone/>
+            </a:pPr>
+            <a:r>
+              <a:rPr lang="en-US" sz="1700" b="1" dirty="0">
+                <a:solidFill>
+                  <a:srgbClr val="0078D4"/>
+                </a:solidFill>
+                <a:latin typeface="Segoe UI" pitchFamily="34" charset="0"/>
+                <a:ea typeface="Segoe UI" pitchFamily="34" charset="-122"/>
+                <a:cs typeface="Segoe UI" pitchFamily="34" charset="-120"/>
+              </a:rPr>
+              <a:t>01</a:t>
+            </a:r>
+            <a:endParaRPr lang="en-US" sz="1700" dirty="0"/>
+          </a:p>
+        </p:txBody>
+      </p:sp>
+      <p:sp>
+        <p:nvSpPr>
+          <p:cNvPr id="6" name="Text 4"/>
+          <p:cNvSpPr/>
+          <p:nvPr/>
+        </p:nvSpPr>
+        <p:spPr>
+          <a:xfrm>
+            <a:off x="1325880" y="1828800"/>
+            <a:ext cx="10195560" cy="731520"/>
+          </a:xfrm>
+          <a:prstGeom prst="rect">
+            <a:avLst/>
+          </a:prstGeom>
+          <a:noFill/>
+          <a:ln/>
+        </p:spPr>
+        <p:txBody>
+          <a:bodyPr wrap="square" lIns="0" tIns="0" rIns="0" bIns="0" rtlCol="0" anchor="ctr"/>
+          <a:lstStyle/>
+          <a:p>
+            <a:pPr indent="0" marL="0">
+              <a:buNone/>
+            </a:pPr>
+            <a:r>
+              <a:rPr lang="en-US" sz="2000" dirty="0">
+                <a:solidFill>
+                  <a:srgbClr val="183449"/>
+                </a:solidFill>
+                <a:latin typeface="Segoe UI" pitchFamily="34" charset="0"/>
+                <a:ea typeface="Segoe UI" pitchFamily="34" charset="-122"/>
+                <a:cs typeface="Segoe UI" pitchFamily="34" charset="-120"/>
+              </a:rPr>
+              <a:t>Atelier 19 : dix exercices progressifs avec commandes exécutables.</a:t>
+            </a:r>
+            <a:endParaRPr lang="en-US" sz="2000" dirty="0"/>
+          </a:p>
+        </p:txBody>
+      </p:sp>
+      <p:sp>
+        <p:nvSpPr>
+          <p:cNvPr id="7" name="Shape 5"/>
+          <p:cNvSpPr/>
+          <p:nvPr/>
+        </p:nvSpPr>
+        <p:spPr>
+          <a:xfrm>
+            <a:off x="1325880" y="2660904"/>
+            <a:ext cx="10149840" cy="0"/>
+          </a:xfrm>
+          <a:prstGeom prst="line">
+            <a:avLst/>
+          </a:prstGeom>
+          <a:noFill/>
+          <a:ln w="6350">
+            <a:solidFill>
+              <a:srgbClr val="DCE5ED"/>
+            </a:solidFill>
+            <a:prstDash val="solid"/>
+          </a:ln>
+        </p:spPr>
+      </p:sp>
+      <p:sp>
+        <p:nvSpPr>
+          <p:cNvPr id="8" name="Text 6"/>
+          <p:cNvSpPr/>
+          <p:nvPr/>
+        </p:nvSpPr>
+        <p:spPr>
+          <a:xfrm>
+            <a:off x="594360" y="2770632"/>
+            <a:ext cx="640080" cy="594360"/>
+          </a:xfrm>
+          <a:prstGeom prst="rect">
+            <a:avLst/>
+          </a:prstGeom>
+          <a:noFill/>
+          <a:ln/>
+        </p:spPr>
+        <p:txBody>
+          <a:bodyPr wrap="square" lIns="0" tIns="0" rIns="0" bIns="0" rtlCol="0" anchor="ctr"/>
+          <a:lstStyle/>
+          <a:p>
+            <a:pPr indent="0" marL="0">
+              <a:buNone/>
+            </a:pPr>
+            <a:r>
+              <a:rPr lang="en-US" sz="1700" b="1" dirty="0">
+                <a:solidFill>
+                  <a:srgbClr val="0078D4"/>
+                </a:solidFill>
+                <a:latin typeface="Segoe UI" pitchFamily="34" charset="0"/>
+                <a:ea typeface="Segoe UI" pitchFamily="34" charset="-122"/>
+                <a:cs typeface="Segoe UI" pitchFamily="34" charset="-120"/>
+              </a:rPr>
+              <a:t>02</a:t>
+            </a:r>
+            <a:endParaRPr lang="en-US" sz="1700" dirty="0"/>
+          </a:p>
+        </p:txBody>
+      </p:sp>
+      <p:sp>
+        <p:nvSpPr>
+          <p:cNvPr id="9" name="Text 7"/>
+          <p:cNvSpPr/>
+          <p:nvPr/>
+        </p:nvSpPr>
+        <p:spPr>
+          <a:xfrm>
+            <a:off x="1325880" y="2770632"/>
+            <a:ext cx="10195560" cy="731520"/>
+          </a:xfrm>
+          <a:prstGeom prst="rect">
+            <a:avLst/>
+          </a:prstGeom>
+          <a:noFill/>
+          <a:ln/>
+        </p:spPr>
+        <p:txBody>
+          <a:bodyPr wrap="square" lIns="0" tIns="0" rIns="0" bIns="0" rtlCol="0" anchor="ctr"/>
+          <a:lstStyle/>
+          <a:p>
+            <a:pPr indent="0" marL="0">
+              <a:buNone/>
+            </a:pPr>
+            <a:r>
+              <a:rPr lang="en-US" sz="2000" dirty="0">
+                <a:solidFill>
+                  <a:srgbClr val="183449"/>
+                </a:solidFill>
+                <a:latin typeface="Segoe UI" pitchFamily="34" charset="0"/>
+                <a:ea typeface="Segoe UI" pitchFamily="34" charset="-122"/>
+                <a:cs typeface="Segoe UI" pitchFamily="34" charset="-120"/>
+              </a:rPr>
+              <a:t>Guide : portail, mappings SDK, politique et diagnostic.</a:t>
+            </a:r>
+            <a:endParaRPr lang="en-US" sz="2000" dirty="0"/>
+          </a:p>
+        </p:txBody>
+      </p:sp>
+      <p:sp>
+        <p:nvSpPr>
+          <p:cNvPr id="10" name="Shape 8"/>
+          <p:cNvSpPr/>
+          <p:nvPr/>
+        </p:nvSpPr>
+        <p:spPr>
+          <a:xfrm>
+            <a:off x="1325880" y="3602736"/>
+            <a:ext cx="10149840" cy="0"/>
+          </a:xfrm>
+          <a:prstGeom prst="line">
+            <a:avLst/>
+          </a:prstGeom>
+          <a:noFill/>
+          <a:ln w="6350">
+            <a:solidFill>
+              <a:srgbClr val="DCE5ED"/>
+            </a:solidFill>
+            <a:prstDash val="solid"/>
+          </a:ln>
+        </p:spPr>
+      </p:sp>
+      <p:sp>
+        <p:nvSpPr>
+          <p:cNvPr id="11" name="Text 9"/>
+          <p:cNvSpPr/>
+          <p:nvPr/>
+        </p:nvSpPr>
+        <p:spPr>
+          <a:xfrm>
+            <a:off x="594360" y="3712464"/>
+            <a:ext cx="640080" cy="594360"/>
+          </a:xfrm>
+          <a:prstGeom prst="rect">
+            <a:avLst/>
+          </a:prstGeom>
+          <a:noFill/>
+          <a:ln/>
+        </p:spPr>
+        <p:txBody>
+          <a:bodyPr wrap="square" lIns="0" tIns="0" rIns="0" bIns="0" rtlCol="0" anchor="ctr"/>
+          <a:lstStyle/>
+          <a:p>
+            <a:pPr indent="0" marL="0">
+              <a:buNone/>
+            </a:pPr>
+            <a:r>
+              <a:rPr lang="en-US" sz="1700" b="1" dirty="0">
+                <a:solidFill>
+                  <a:srgbClr val="0078D4"/>
+                </a:solidFill>
+                <a:latin typeface="Segoe UI" pitchFamily="34" charset="0"/>
+                <a:ea typeface="Segoe UI" pitchFamily="34" charset="-122"/>
+                <a:cs typeface="Segoe UI" pitchFamily="34" charset="-120"/>
+              </a:rPr>
+              <a:t>03</a:t>
+            </a:r>
+            <a:endParaRPr lang="en-US" sz="1700" dirty="0"/>
+          </a:p>
+        </p:txBody>
+      </p:sp>
+      <p:sp>
+        <p:nvSpPr>
+          <p:cNvPr id="12" name="Text 10"/>
+          <p:cNvSpPr/>
+          <p:nvPr/>
+        </p:nvSpPr>
+        <p:spPr>
+          <a:xfrm>
+            <a:off x="1325880" y="3712464"/>
+            <a:ext cx="10195560" cy="731520"/>
+          </a:xfrm>
+          <a:prstGeom prst="rect">
+            <a:avLst/>
+          </a:prstGeom>
+          <a:noFill/>
+          <a:ln/>
+        </p:spPr>
+        <p:txBody>
+          <a:bodyPr wrap="square" lIns="0" tIns="0" rIns="0" bIns="0" rtlCol="0" anchor="ctr"/>
+          <a:lstStyle/>
+          <a:p>
+            <a:pPr indent="0" marL="0">
+              <a:buNone/>
+            </a:pPr>
+            <a:r>
+              <a:rPr lang="en-US" sz="2000" dirty="0">
+                <a:solidFill>
+                  <a:srgbClr val="183449"/>
+                </a:solidFill>
+                <a:latin typeface="Segoe UI" pitchFamily="34" charset="0"/>
+                <a:ea typeface="Segoe UI" pitchFamily="34" charset="-122"/>
+                <a:cs typeface="Segoe UI" pitchFamily="34" charset="-120"/>
+              </a:rPr>
+              <a:t>Présentation : PowerPoint EN/FR modifiables et notes formateur.</a:t>
+            </a:r>
+            <a:endParaRPr lang="en-US" sz="2000" dirty="0"/>
+          </a:p>
+        </p:txBody>
+      </p:sp>
+      <p:sp>
+        <p:nvSpPr>
+          <p:cNvPr id="13" name="Shape 11"/>
+          <p:cNvSpPr/>
+          <p:nvPr/>
+        </p:nvSpPr>
+        <p:spPr>
+          <a:xfrm>
+            <a:off x="1325880" y="4544568"/>
+            <a:ext cx="10149840" cy="0"/>
+          </a:xfrm>
+          <a:prstGeom prst="line">
+            <a:avLst/>
+          </a:prstGeom>
+          <a:noFill/>
+          <a:ln w="6350">
+            <a:solidFill>
+              <a:srgbClr val="DCE5ED"/>
+            </a:solidFill>
+            <a:prstDash val="solid"/>
+          </a:ln>
+        </p:spPr>
+      </p:sp>
+      <p:sp>
+        <p:nvSpPr>
+          <p:cNvPr id="14" name="Text 12"/>
+          <p:cNvSpPr/>
+          <p:nvPr/>
+        </p:nvSpPr>
+        <p:spPr>
+          <a:xfrm>
+            <a:off x="594360" y="4654296"/>
+            <a:ext cx="640080" cy="594360"/>
+          </a:xfrm>
+          <a:prstGeom prst="rect">
+            <a:avLst/>
+          </a:prstGeom>
+          <a:noFill/>
+          <a:ln/>
+        </p:spPr>
+        <p:txBody>
+          <a:bodyPr wrap="square" lIns="0" tIns="0" rIns="0" bIns="0" rtlCol="0" anchor="ctr"/>
+          <a:lstStyle/>
+          <a:p>
+            <a:pPr indent="0" marL="0">
+              <a:buNone/>
+            </a:pPr>
+            <a:r>
+              <a:rPr lang="en-US" sz="1700" b="1" dirty="0">
+                <a:solidFill>
+                  <a:srgbClr val="0078D4"/>
+                </a:solidFill>
+                <a:latin typeface="Segoe UI" pitchFamily="34" charset="0"/>
+                <a:ea typeface="Segoe UI" pitchFamily="34" charset="-122"/>
+                <a:cs typeface="Segoe UI" pitchFamily="34" charset="-120"/>
+              </a:rPr>
+              <a:t>04</a:t>
+            </a:r>
+            <a:endParaRPr lang="en-US" sz="1700" dirty="0"/>
+          </a:p>
+        </p:txBody>
+      </p:sp>
+      <p:sp>
+        <p:nvSpPr>
+          <p:cNvPr id="15" name="Text 13"/>
+          <p:cNvSpPr/>
+          <p:nvPr/>
+        </p:nvSpPr>
+        <p:spPr>
+          <a:xfrm>
+            <a:off x="1325880" y="4654296"/>
+            <a:ext cx="10195560" cy="731520"/>
+          </a:xfrm>
+          <a:prstGeom prst="rect">
+            <a:avLst/>
+          </a:prstGeom>
+          <a:noFill/>
+          <a:ln/>
+        </p:spPr>
+        <p:txBody>
+          <a:bodyPr wrap="square" lIns="0" tIns="0" rIns="0" bIns="0" rtlCol="0" anchor="ctr"/>
+          <a:lstStyle/>
+          <a:p>
+            <a:pPr indent="0" marL="0">
+              <a:buNone/>
+            </a:pPr>
+            <a:r>
+              <a:rPr lang="en-US" sz="2000" dirty="0">
+                <a:solidFill>
+                  <a:srgbClr val="183449"/>
+                </a:solidFill>
+                <a:latin typeface="Segoe UI" pitchFamily="34" charset="0"/>
+                <a:ea typeface="Segoe UI" pitchFamily="34" charset="-122"/>
+                <a:cs typeface="Segoe UI" pitchFamily="34" charset="-120"/>
+              </a:rPr>
+              <a:t>Sources : liens Microsoft Learn officiels dans les notes.</a:t>
+            </a:r>
+            <a:endParaRPr lang="en-US" sz="2000" dirty="0"/>
+          </a:p>
+        </p:txBody>
+      </p:sp>
+      <p:sp>
+        <p:nvSpPr>
+          <p:cNvPr id="16" name="Shape 14"/>
+          <p:cNvSpPr/>
+          <p:nvPr/>
+        </p:nvSpPr>
+        <p:spPr>
+          <a:xfrm>
+            <a:off x="1325880" y="5486400"/>
+            <a:ext cx="10149840" cy="0"/>
+          </a:xfrm>
+          <a:prstGeom prst="line">
+            <a:avLst/>
+          </a:prstGeom>
+          <a:noFill/>
+          <a:ln w="6350">
+            <a:solidFill>
+              <a:srgbClr val="DCE5ED"/>
+            </a:solidFill>
+            <a:prstDash val="solid"/>
+          </a:ln>
+        </p:spPr>
+      </p:sp>
+      <p:sp>
+        <p:nvSpPr>
+          <p:cNvPr id="17" name="Text 15">
+            <a:hlinkClick r:id="rId1" tooltip=""/>
+          </p:cNvPr>
+          <p:cNvSpPr/>
+          <p:nvPr/>
+        </p:nvSpPr>
+        <p:spPr>
+          <a:xfrm>
+            <a:off x="548640" y="6419088"/>
+            <a:ext cx="9784080" cy="210312"/>
+          </a:xfrm>
+          <a:prstGeom prst="rect">
+            <a:avLst/>
+          </a:prstGeom>
+          <a:noFill/>
+          <a:ln/>
+        </p:spPr>
+        <p:txBody>
+          <a:bodyPr wrap="square" lIns="0" tIns="0" rIns="0" bIns="0" rtlCol="0" anchor="ctr"/>
+          <a:lstStyle/>
+          <a:p>
+            <a:pPr indent="0" marL="0">
+              <a:buNone/>
+            </a:pPr>
+            <a:r>
+              <a:rPr lang="en-US" sz="1000" u="sng" dirty="0">
+                <a:solidFill>
+                  <a:srgbClr val="526777"/>
+                </a:solidFill>
+                <a:latin typeface="Segoe UI" pitchFamily="34" charset="0"/>
+                <a:ea typeface="Segoe UI" pitchFamily="34" charset="-122"/>
+                <a:cs typeface="Segoe UI" pitchFamily="34" charset="-120"/>
+                <a:hlinkClick r:id="rId1" invalidUrl="" action="" tgtFrame="" tooltip="" history="1" highlightClick="0" endSnd="0">
+                  <a:extLst>
+                    <a:ext uri="{A12FA001-AC4F-418D-AE19-62706E023703}">
+                      <ahyp:hlinkClr xmlns:ahyp="http://schemas.microsoft.com/office/drawing/2018/hyperlinkcolor" val="tx"/>
+                    </a:ext>
+                  </a:extLst>
+                </a:hlinkClick>
+              </a:rPr>
+              <a:t>Formation synthétique | Guide et Atelier 19</a:t>
+            </a:r>
+            <a:endParaRPr lang="en-US" sz="1000" dirty="0"/>
+          </a:p>
+        </p:txBody>
+      </p:sp>
+      <p:sp>
+        <p:nvSpPr>
+          <p:cNvPr id="18" name="Text 16"/>
+          <p:cNvSpPr/>
+          <p:nvPr/>
+        </p:nvSpPr>
+        <p:spPr>
+          <a:xfrm>
+            <a:off x="10515600" y="6419088"/>
+            <a:ext cx="1097280" cy="210312"/>
+          </a:xfrm>
+          <a:prstGeom prst="rect">
+            <a:avLst/>
+          </a:prstGeom>
+          <a:noFill/>
+          <a:ln/>
+        </p:spPr>
+        <p:txBody>
+          <a:bodyPr wrap="square" lIns="0" tIns="0" rIns="0" bIns="0" rtlCol="0" anchor="ctr"/>
+          <a:lstStyle/>
+          <a:p>
+            <a:pPr algn="r" indent="0" marL="0">
+              <a:buNone/>
+            </a:pPr>
+            <a:r>
+              <a:rPr lang="en-US" sz="1000" dirty="0">
+                <a:solidFill>
+                  <a:srgbClr val="526777"/>
+                </a:solidFill>
+                <a:latin typeface="Segoe UI" pitchFamily="34" charset="0"/>
+                <a:ea typeface="Segoe UI" pitchFamily="34" charset="-122"/>
+                <a:cs typeface="Segoe UI" pitchFamily="34" charset="-120"/>
+              </a:rPr>
+              <a:t>35 / 35</a:t>
             </a:r>
             <a:endParaRPr lang="en-US" sz="1000" dirty="0"/>
           </a:p>
@@ -21706,7 +22125,7 @@
                 <a:ea typeface="Segoe UI" pitchFamily="34" charset="-122"/>
                 <a:cs typeface="Segoe UI" pitchFamily="34" charset="-120"/>
               </a:rPr>
-              <a:t>4 / 34</a:t>
+              <a:t>4 / 35</a:t>
             </a:r>
             <a:endParaRPr lang="en-US" sz="1000" dirty="0"/>
           </a:p>
@@ -22334,7 +22753,7 @@
                 <a:ea typeface="Segoe UI" pitchFamily="34" charset="-122"/>
                 <a:cs typeface="Segoe UI" pitchFamily="34" charset="-120"/>
               </a:rPr>
-              <a:t>5 / 34</a:t>
+              <a:t>5 / 35</a:t>
             </a:r>
             <a:endParaRPr lang="en-US" sz="1000" dirty="0"/>
           </a:p>
@@ -22970,7 +23389,7 @@
                 <a:ea typeface="Segoe UI" pitchFamily="34" charset="-122"/>
                 <a:cs typeface="Segoe UI" pitchFamily="34" charset="-120"/>
               </a:rPr>
-              <a:t>6 / 34</a:t>
+              <a:t>6 / 35</a:t>
             </a:r>
             <a:endParaRPr lang="en-US" sz="1000" dirty="0"/>
           </a:p>
@@ -23598,7 +24017,7 @@
                 <a:ea typeface="Segoe UI" pitchFamily="34" charset="-122"/>
                 <a:cs typeface="Segoe UI" pitchFamily="34" charset="-120"/>
               </a:rPr>
-              <a:t>7 / 34</a:t>
+              <a:t>7 / 35</a:t>
             </a:r>
             <a:endParaRPr lang="en-US" sz="1000" dirty="0"/>
           </a:p>
@@ -24226,7 +24645,7 @@
                 <a:ea typeface="Segoe UI" pitchFamily="34" charset="-122"/>
                 <a:cs typeface="Segoe UI" pitchFamily="34" charset="-120"/>
               </a:rPr>
-              <a:t>8 / 34</a:t>
+              <a:t>8 / 35</a:t>
             </a:r>
             <a:endParaRPr lang="en-US" sz="1000" dirty="0"/>
           </a:p>
@@ -24854,7 +25273,7 @@
                 <a:ea typeface="Segoe UI" pitchFamily="34" charset="-122"/>
                 <a:cs typeface="Segoe UI" pitchFamily="34" charset="-120"/>
               </a:rPr>
-              <a:t>9 / 34</a:t>
+              <a:t>9 / 35</a:t>
             </a:r>
             <a:endParaRPr lang="en-US" sz="1000" dirty="0"/>
           </a:p>

--- a/docs/assets/decks/foundry-evaluation-engineering-fr.pptx
+++ b/docs/assets/decks/foundry-evaluation-engineering-fr.pptx
@@ -40,9 +40,11 @@
     <p:sldId id="288" r:id="rId34"/>
     <p:sldId id="289" r:id="rId35"/>
     <p:sldId id="290" r:id="rId36"/>
+    <p:sldId id="291" r:id="rId37"/>
+    <p:sldId id="292" r:id="rId38"/>
   </p:sldIdLst>
   <p:notesMasterIdLst>
-    <p:notesMasterId r:id="rId37"/>
+    <p:notesMasterId r:id="rId39"/>
   </p:notesMasterIdLst>
   <p:sldSz cx="12192000" cy="6858000"/>
   <p:notesSz cx="6858000" cy="12192000"/>
@@ -900,10 +902,11 @@
           <a:p>
             <a:r>
               <a:rPr lang="en-US" dirty="0"/>
-              <a:t>La livraison utilise projects2.6.0, openai3.6.0, identity1.25.3. Ne pas déclarer l'autre SDK obsolète sans preuve officielle. Vérifier versions installées et documentation avant adaptation. Aucun changement de dépendance de production.
+              <a:t>Exercice 19.4, étape 3. Vraie définition staging française conservée eval_923cb34017c743a59089a36cb55d4e28. Vérifier l’essai evalrun_db159f558fd847668d7bba275ba1a353. 15/15 signifie cinq cas fois trois métriques; 100% / 5/5 compte les réussites, pas une note ordinale de 5 pour chaque cas. Aucune évaluation soumise pour cette capture. L’image complète liée montre navigation et provenance.
 Guide: https://devopsabcs-engineering.github.io/foundry-hosted-agents-fsi/fr/evaluation-guide.html
 Lab 19: https://devopsabcs-engineering.github.io/foundry-hosted-agents-fsi/fr/labs/lab-19-evaluation-engineering
-Source: https://learn.microsoft.com/azure/foundry/how-to/evaluate-generative-ai-app</a:t>
+Source: https://learn.microsoft.com/azure/foundry/how-to/evaluate-generative-ai-app
+Screenshot: https://devopsabcs-engineering.github.io/foundry-hosted-agents-fsi/assets/evidence/lab19-v6-evaluation-overview-2026-10-23.png</a:t>
             </a:r>
             <a:endParaRPr lang="en-US" dirty="0"/>
           </a:p>
@@ -991,10 +994,11 @@
           <a:p>
             <a:r>
               <a:rPr lang="en-US" dirty="0"/>
-              <a:t>Consulter les extraits exacts du guide. azure_ai_groundedness est un type inventé. Des exemples récents utilisent model ou des types enveloppes : ne pas les mélanger sans vérification. Un grand jeu exige une référence fichier compatible réelle.
+              <a:t>Exercice 19.4, étape 4. Vrai essai conservé evalrun_db159f558fd847668d7bba275ba1a353, pas un résultat du jeu de pratique. Coherence comprend des notes ordinales de 4 et 5, toutes réussies. Groundedness affiche 5; Task Adherence est booléen. Faire défiler pour task_adherence et les raisons. Run details est replié pour montrer les cinq cas. Utiliser captured.json et la définition du même essai pour les entrées non exposées. Aucun appel agent ou juge effectué.
 Guide: https://devopsabcs-engineering.github.io/foundry-hosted-agents-fsi/fr/evaluation-guide.html
 Lab 19: https://devopsabcs-engineering.github.io/foundry-hosted-agents-fsi/fr/labs/lab-19-evaluation-engineering
-Source: https://learn.microsoft.com/azure/foundry/observability/how-to/cloud-evaluation</a:t>
+Source: https://learn.microsoft.com/azure/foundry/observability/how-to/cloud-evaluation
+Screenshot: https://devopsabcs-engineering.github.io/foundry-hosted-agents-fsi/assets/evidence/lab19-v6-run-results-2026-10-23.png</a:t>
             </a:r>
             <a:endParaRPr lang="en-US" dirty="0"/>
           </a:p>
@@ -1082,7 +1086,7 @@
           <a:p>
             <a:r>
               <a:rPr lang="en-US" dirty="0"/>
-              <a:t>Une affirmation fausse mais cohérente peut réussir coherence. Exiger séparément absence de prix et d'approbation. Inspecter note, seuil et justification propres à la métrique, sans supposer une échelle universelle.
+              <a:t>La livraison utilise projects2.6.0, openai3.6.0, identity1.25.3. Ne pas déclarer l'autre SDK obsolète sans preuve officielle. Vérifier versions installées et documentation avant adaptation. Aucun changement de dépendance de production.
 Guide: https://devopsabcs-engineering.github.io/foundry-hosted-agents-fsi/fr/evaluation-guide.html
 Lab 19: https://devopsabcs-engineering.github.io/foundry-hosted-agents-fsi/fr/labs/lab-19-evaluation-engineering
 Source: https://learn.microsoft.com/azure/foundry/observability/how-to/cloud-evaluation-datasets</a:t>
@@ -1173,7 +1177,7 @@
           <a:p>
             <a:r>
               <a:rPr lang="en-US" dirty="0"/>
-              <a:t>Vraie capture du catalogue Microsoft Foundry builtin.groundedness v18, prise en staging le 2026-10-23. Recadrée pour agrandir description, formes d'entrée et note ordinale de 1 à 5. L'image et le guide donnent accès à la capture complète. Le catalogue propose response/context, query/response ou messages. L'atelier mappe evaluation_query, context indépendant et response dans la langue choisie. Coherence v13 affiche aussi 1 à 5; Task Adherence en préversion v17 est booléen. Les versions du catalogue ne prouvent pas les versions effectives de l'essai v6 conservé. Aucune évaluation soumise ni aucun appel juge pour cette capture.
+              <a:t>Consulter les extraits exacts du guide. azure_ai_groundedness est un type inventé. Des exemples récents utilisent model ou des types enveloppes : ne pas les mélanger sans vérification. Un grand jeu exige une référence fichier compatible réelle.
 Guide: https://devopsabcs-engineering.github.io/foundry-hosted-agents-fsi/fr/evaluation-guide.html
 Lab 19: https://devopsabcs-engineering.github.io/foundry-hosted-agents-fsi/fr/labs/lab-19-evaluation-engineering
 Source: https://learn.microsoft.com/azure/foundry/concepts/built-in-evaluators</a:t>
@@ -1264,7 +1268,7 @@
           <a:p>
             <a:r>
               <a:rPr lang="en-US" dirty="0"/>
-              <a:t>La capture aplatit la carte bilingue pour task adherence. Langue absente signifie erreur, pas remplacement silencieux. Comparer même segment et vérité indépendante dans chaque langue. Une différence de format n'est pas automatiquement sémantique.
+              <a:t>Une affirmation fausse mais cohérente peut réussir coherence. Exiger séparément absence de prix et d'approbation. Inspecter note, seuil et justification propres à la métrique, sans supposer une échelle universelle.
 Guide: https://devopsabcs-engineering.github.io/foundry-hosted-agents-fsi/fr/evaluation-guide.html
 Lab 19: https://devopsabcs-engineering.github.io/foundry-hosted-agents-fsi/fr/labs/lab-19-evaluation-engineering
 Source: https://learn.microsoft.com/azure/foundry/concepts/evaluation-evaluators/agent-evaluators</a:t>
@@ -1355,10 +1359,11 @@
           <a:p>
             <a:r>
               <a:rPr lang="en-US" dirty="0"/>
-              <a:t>L'endpoint invoque le déploiement courant. Un nom de déploiement peut changer de modèle. Le fichier identité ne capture pas automatiquement toutes les versions effectives : exporter la configuration et déclarer les limites. traceparent demandé ne prouve pas l'ingestion.
+              <a:t>Vraie capture du catalogue Microsoft Foundry builtin.groundedness v18, prise en staging le 2026-10-23. Recadrée pour agrandir description, formes d'entrée et note ordinale de 1 à 5. L'image et le guide donnent accès à la capture complète. Le catalogue propose response/context, query/response ou messages. L'atelier mappe evaluation_query, context indépendant et response dans la langue choisie. Coherence v13 affiche aussi 1 à 5; Task Adherence en préversion v17 est booléen. Les versions du catalogue ne prouvent pas les versions effectives de l'essai v6 conservé. Aucune évaluation soumise ni aucun appel juge pour cette capture.
 Guide: https://devopsabcs-engineering.github.io/foundry-hosted-agents-fsi/fr/evaluation-guide.html
 Lab 19: https://devopsabcs-engineering.github.io/foundry-hosted-agents-fsi/fr/labs/lab-19-evaluation-engineering
-Source: https://learn.microsoft.com/azure/foundry/concepts/evaluation-evaluators/custom-evaluators</a:t>
+Source: https://learn.microsoft.com/azure/foundry/concepts/evaluation-evaluators/custom-evaluators
+Screenshot: https://devopsabcs-engineering.github.io/foundry-hosted-agents-fsi/assets/evidence/foundry-evaluator-groundedness-v18-2026-10-23.png</a:t>
             </a:r>
             <a:endParaRPr lang="en-US" dirty="0"/>
           </a:p>
@@ -1446,7 +1451,7 @@
           <a:p>
             <a:r>
               <a:rPr lang="en-US" dirty="0"/>
-              <a:t>validate_completion rejette absences, doublons, erreurs et notes invalides. validate_results ajoute la politique de taux. Zéro ligne n'est pas un succès. Une panne n'est pas une note numérique à supprimer du rapport.
+              <a:t>La capture aplatit la carte bilingue pour task adherence. Langue absente signifie erreur, pas remplacement silencieux. Comparer même segment et vérité indépendante dans chaque langue. Une différence de format n'est pas automatiquement sémantique.
 Guide: https://devopsabcs-engineering.github.io/foundry-hosted-agents-fsi/fr/evaluation-guide.html
 Lab 19: https://devopsabcs-engineering.github.io/foundry-hosted-agents-fsi/fr/labs/lab-19-evaluation-engineering
 Source: https://learn.microsoft.com/azure/foundry/how-to/evaluate-generative-ai-app</a:t>
@@ -1628,7 +1633,7 @@
           <a:p>
             <a:r>
               <a:rPr lang="en-US" dirty="0"/>
-              <a:t>Le CLI peut échouer sur la qualité tout en conservant des notes consultatives. Un contrôle distinct exige la complétude EN/FR. continue-on-error n'autorise pas une preuve manquante. Durcir la politique serait un changement séparé approuvé.
+              <a:t>L'endpoint invoque le déploiement courant. Un nom de déploiement peut changer de modèle. Le fichier identité ne capture pas automatiquement toutes les versions effectives : exporter la configuration et déclarer les limites. traceparent demandé ne prouve pas l'ingestion.
 Guide: https://devopsabcs-engineering.github.io/foundry-hosted-agents-fsi/fr/evaluation-guide.html
 Lab 19: https://devopsabcs-engineering.github.io/foundry-hosted-agents-fsi/fr/labs/lab-19-evaluation-engineering
 Source: https://learn.microsoft.com/azure/foundry/observability/how-to/cloud-evaluation</a:t>
@@ -1719,7 +1724,7 @@
           <a:p>
             <a:r>
               <a:rPr lang="en-US" dirty="0"/>
-              <a:t>Conserver les deux essais et corrélations. Il s'agit d'une relance opérationnelle, pas d'échantillonner jusqu'au vert. Livraison finale stagingv6/productionv7. L'ancien 0/10 utilise un autre contrat et n'est pas une référence comparable.
+              <a:t>validate_completion rejette absences, doublons, erreurs et notes invalides. validate_results ajoute la politique de taux. Zéro ligne n'est pas un succès. Une panne n'est pas une note numérique à supprimer du rapport.
 Guide: https://devopsabcs-engineering.github.io/foundry-hosted-agents-fsi/fr/evaluation-guide.html
 Lab 19: https://devopsabcs-engineering.github.io/foundry-hosted-agents-fsi/fr/labs/lab-19-evaluation-engineering
 Source: https://learn.microsoft.com/azure/foundry/observability/how-to/cloud-evaluation-datasets</a:t>
@@ -1810,7 +1815,7 @@
           <a:p>
             <a:r>
               <a:rPr lang="en-US" dirty="0"/>
-              <a:t>Étiqueter l'attendu par métrique. Une réponse modifiée est un contrôle synthétique; son ancien ID natif ne prouve plus ce texte. Ne pas présenter une réécriture comme capture authentique.
+              <a:t>Le CLI peut échouer sur la qualité tout en conservant des notes consultatives. Un contrôle distinct exige la complétude EN/FR. continue-on-error n'autorise pas une preuve manquante. Durcir la politique serait un changement séparé approuvé.
 Guide: https://devopsabcs-engineering.github.io/foundry-hosted-agents-fsi/fr/evaluation-guide.html
 Lab 19: https://devopsabcs-engineering.github.io/foundry-hosted-agents-fsi/fr/labs/lab-19-evaluation-engineering
 Source: https://learn.microsoft.com/azure/foundry/concepts/built-in-evaluators</a:t>
@@ -1901,7 +1906,7 @@
           <a:p>
             <a:r>
               <a:rPr lang="en-US" dirty="0"/>
-              <a:t>L'Atelier 18.2 exige les vrais artefacts. Sinon la reproduction est bloquée, sans référence inventée. Corriger corpus/instructions ne transforme pas le contrôle historique en réussite. Il s'agit du RAG isolé, pas du graphe de soumission.
+              <a:t>Conserver les deux essais et corrélations. Il s'agit d'une relance opérationnelle, pas d'échantillonner jusqu'au vert. Livraison finale stagingv6/productionv7. L'ancien 0/10 utilise un autre contrat et n'est pas une référence comparable.
 Guide: https://devopsabcs-engineering.github.io/foundry-hosted-agents-fsi/fr/evaluation-guide.html
 Lab 19: https://devopsabcs-engineering.github.io/foundry-hosted-agents-fsi/fr/labs/lab-19-evaluation-engineering
 Source: https://learn.microsoft.com/azure/foundry/concepts/evaluation-evaluators/agent-evaluators</a:t>
@@ -1992,7 +1997,7 @@
           <a:p>
             <a:r>
               <a:rPr lang="en-US" dirty="0"/>
-              <a:t>Quel défaut coûte le plus? Une fausse acceptation d'approbation importe plus qu'une formulation bénigne. Calibrer selon le risque, pas après avoir vu le candidat. L'injection dans une réponse ne doit pas redéfinir la grille.
+              <a:t>Étiqueter l'attendu par métrique. Une réponse modifiée est un contrôle synthétique; son ancien ID natif ne prouve plus ce texte. Ne pas présenter une réécriture comme capture authentique.
 Guide: https://devopsabcs-engineering.github.io/foundry-hosted-agents-fsi/fr/evaluation-guide.html
 Lab 19: https://devopsabcs-engineering.github.io/foundry-hosted-agents-fsi/fr/labs/lab-19-evaluation-engineering
 Source: https://learn.microsoft.com/azure/foundry/concepts/evaluation-evaluators/custom-evaluators</a:t>
@@ -2083,7 +2088,7 @@
           <a:p>
             <a:r>
               <a:rPr lang="en-US" dirty="0"/>
-              <a:t>Le CLI complet recapture l'agent et n'isole donc pas le juge. L'Atelier 19.8 fournit le code de réutilisation et d'inspection. Répertoires nouveaux et nombre d'essais prédéfini; pas d'écrasement ni d'arrêt au premier succès.
+              <a:t>L'Atelier 18.2 exige les vrais artefacts. Sinon la reproduction est bloquée, sans référence inventée. Corriger corpus/instructions ne transforme pas le contrôle historique en réussite. Il s'agit du RAG isolé, pas du graphe de soumission.
 Guide: https://devopsabcs-engineering.github.io/foundry-hosted-agents-fsi/fr/evaluation-guide.html
 Lab 19: https://devopsabcs-engineering.github.io/foundry-hosted-agents-fsi/fr/labs/lab-19-evaluation-engineering
 Source: https://learn.microsoft.com/azure/foundry/how-to/evaluate-generative-ai-app</a:t>
@@ -2174,7 +2179,7 @@
           <a:p>
             <a:r>
               <a:rPr lang="en-US" dirty="0"/>
-              <a:t>Calculer Wilson dans l'Atelier 19.8. Ne pas traiter trente notes corrélées comme trente cas indépendants. Analyse appariée ou bootstrap par grappes conserve cette dépendance. Un invariant strict ne se négocie pas contre un intervalle.
+              <a:t>Quel défaut coûte le plus? Une fausse acceptation d'approbation importe plus qu'une formulation bénigne. Calibrer selon le risque, pas après avoir vu le candidat. L'injection dans une réponse ne doit pas redéfinir la grille.
 Guide: https://devopsabcs-engineering.github.io/foundry-hosted-agents-fsi/fr/evaluation-guide.html
 Lab 19: https://devopsabcs-engineering.github.io/foundry-hosted-agents-fsi/fr/labs/lab-19-evaluation-engineering
 Source: https://learn.microsoft.com/azure/foundry/observability/how-to/cloud-evaluation</a:t>
@@ -2265,7 +2270,7 @@
           <a:p>
             <a:r>
               <a:rPr lang="en-US" dirty="0"/>
-              <a:t>Masquer/randomiser l'ordre si possible pour réduire le biais. Présenter raisons et défauts revus par cas, pas seulement delta moyen. Les répétitions ne réparent ni vérité invalide ni couverture absente.
+              <a:t>Le CLI complet recapture l'agent et n'isole donc pas le juge. L'Atelier 19.8 fournit le code de réutilisation et d'inspection. Répertoires nouveaux et nombre d'essais prédéfini; pas d'écrasement ni d'arrêt au premier succès.
 Guide: https://devopsabcs-engineering.github.io/foundry-hosted-agents-fsi/fr/evaluation-guide.html
 Lab 19: https://devopsabcs-engineering.github.io/foundry-hosted-agents-fsi/fr/labs/lab-19-evaluation-engineering
 Source: https://learn.microsoft.com/azure/foundry/observability/how-to/cloud-evaluation-datasets</a:t>
@@ -2356,7 +2361,7 @@
           <a:p>
             <a:r>
               <a:rPr lang="en-US" dirty="0"/>
-              <a:t>Trente jugements est une estimation nominale, pas un prix fixe. Le graphe ne tarifie pas par LLM, mais ses juges coûtent. Figer clés de cache et indiquer les captures réutilisées, sans nouvelle inférence.
+              <a:t>Calculer Wilson dans l'Atelier 19.8. Ne pas traiter trente notes corrélées comme trente cas indépendants. Analyse appariée ou bootstrap par grappes conserve cette dépendance. Un invariant strict ne se négocie pas contre un intervalle.
 Guide: https://devopsabcs-engineering.github.io/foundry-hosted-agents-fsi/fr/evaluation-guide.html
 Lab 19: https://devopsabcs-engineering.github.io/foundry-hosted-agents-fsi/fr/labs/lab-19-evaluation-engineering
 Source: https://learn.microsoft.com/azure/foundry/concepts/built-in-evaluators</a:t>
@@ -2447,7 +2452,7 @@
           <a:p>
             <a:r>
               <a:rPr lang="en-US" dirty="0"/>
-              <a:t>CASE004 production a été vérifié : ancien110000 non actuel, correction TRAINING_BASIC puis200/PENDING_REVIEW/READY/90000, IDs concordants, auto-approbation403. Ne pas rejouer aveuglément sur révision2 ni vider les fixtures partagées.
+              <a:t>Masquer/randomiser l'ordre si possible pour réduire le biais. Présenter raisons et défauts revus par cas, pas seulement delta moyen. Les répétitions ne réparent ni vérité invalide ni couverture absente.
 Guide: https://devopsabcs-engineering.github.io/foundry-hosted-agents-fsi/fr/evaluation-guide.html
 Lab 19: https://devopsabcs-engineering.github.io/foundry-hosted-agents-fsi/fr/labs/lab-19-evaluation-engineering
 Source: https://learn.microsoft.com/azure/foundry/concepts/evaluation-evaluators/agent-evaluators</a:t>
@@ -2629,7 +2634,7 @@
           <a:p>
             <a:r>
               <a:rPr lang="en-US" dirty="0"/>
-              <a:t>L'Atelier 18 exporte des spans réellement ingérés et reconstruit un cas synthétique, pas un prompt privé original. Ne pas inventer de spans modèle. Sans format de trajectoire requis, cette dimension reste non mesurée.
+              <a:t>Trente jugements est une estimation nominale, pas un prix fixe. Le graphe ne tarifie pas par LLM, mais ses juges coûtent. Figer clés de cache et indiquer les captures réutilisées, sans nouvelle inférence.
 Guide: https://devopsabcs-engineering.github.io/foundry-hosted-agents-fsi/fr/evaluation-guide.html
 Lab 19: https://devopsabcs-engineering.github.io/foundry-hosted-agents-fsi/fr/labs/lab-19-evaluation-engineering
 Source: https://learn.microsoft.com/azure/foundry/concepts/evaluation-evaluators/custom-evaluators</a:t>
@@ -2720,7 +2725,7 @@
           <a:p>
             <a:r>
               <a:rPr lang="en-US" dirty="0"/>
-              <a:t>SystemError concerne la fiabilité, pas une note numérique de qualité modèle. Ne pas élargir l'accès pour diagnostiquer. Un échantillonnage réel exige confidentialité/conservation approuvées. L'atelier reste synthétique.
+              <a:t>CASE004 production a été vérifié : ancien110000 non actuel, correction TRAINING_BASIC puis200/PENDING_REVIEW/READY/90000, IDs concordants, auto-approbation403. Ne pas rejouer aveuglément sur révision2 ni vider les fixtures partagées.
 Guide: https://devopsabcs-engineering.github.io/foundry-hosted-agents-fsi/fr/evaluation-guide.html
 Lab 19: https://devopsabcs-engineering.github.io/foundry-hosted-agents-fsi/fr/labs/lab-19-evaluation-engineering
 Source: https://learn.microsoft.com/azure/foundry/how-to/evaluate-generative-ai-app</a:t>
@@ -2811,7 +2816,7 @@
           <a:p>
             <a:r>
               <a:rPr lang="en-US" dirty="0"/>
-              <a:t>Utiliser la fiche 19.10. La note ne suffit pas; trajectoire absente et contrôles échoués restent visibles. L'atelier n'autorise ni livraison, ni changement de contrôle, ni accès. Séparer exploitation et qualité.
+              <a:t>L'Atelier 18 exporte des spans réellement ingérés et reconstruit un cas synthétique, pas un prompt privé original. Ne pas inventer de spans modèle. Sans format de trajectoire requis, cette dimension reste non mesurée.
 Guide: https://devopsabcs-engineering.github.io/foundry-hosted-agents-fsi/fr/evaluation-guide.html
 Lab 19: https://devopsabcs-engineering.github.io/foundry-hosted-agents-fsi/fr/labs/lab-19-evaluation-engineering
 Source: https://learn.microsoft.com/azure/foundry/observability/how-to/cloud-evaluation</a:t>
@@ -2902,7 +2907,7 @@
           <a:p>
             <a:r>
               <a:rPr lang="en-US" dirty="0"/>
-              <a:t>Réponses : A bloque sur l'autorisation. B sur la complétude. C nécessite correction ou décision explicite selon politique; la moyenne ne cache pas ce risque. D est admissible à la décision protégée, pas approuvé automatiquement par le juge.
+              <a:t>SystemError concerne la fiabilité, pas une note numérique de qualité modèle. Ne pas élargir l'accès pour diagnostiquer. Un échantillonnage réel exige confidentialité/conservation approuvées. L'atelier reste synthétique.
 Guide: https://devopsabcs-engineering.github.io/foundry-hosted-agents-fsi/fr/evaluation-guide.html
 Lab 19: https://devopsabcs-engineering.github.io/foundry-hosted-agents-fsi/fr/labs/lab-19-evaluation-engineering
 Source: https://learn.microsoft.com/azure/foundry/observability/how-to/cloud-evaluation-datasets</a:t>
@@ -2993,7 +2998,7 @@
           <a:p>
             <a:r>
               <a:rPr lang="en-US" dirty="0"/>
-              <a:t>Chaque participant nomme un bug mieux détecté par test unitaire, un défaut sémantique manqué par texte exact, un faux positif du juge et une cause non LLM de variation. Séparer portée, incertitude et responsabilité.
+              <a:t>Utiliser la fiche 19.10. La note ne suffit pas; trajectoire absente et contrôles échoués restent visibles. L'atelier n'autorise ni livraison, ni changement de contrôle, ni accès. Séparer exploitation et qualité.
 Guide: https://devopsabcs-engineering.github.io/foundry-hosted-agents-fsi/fr/evaluation-guide.html
 Lab 19: https://devopsabcs-engineering.github.io/foundry-hosted-agents-fsi/fr/labs/lab-19-evaluation-engineering
 Source: https://learn.microsoft.com/azure/foundry/concepts/built-in-evaluators</a:t>
@@ -3084,6 +3089,188 @@
           <a:p>
             <a:r>
               <a:rPr lang="en-US" dirty="0"/>
+              <a:t>Réponses : A bloque sur l'autorisation. B sur la complétude. C nécessite correction ou décision explicite selon politique; la moyenne ne cache pas ce risque. D est admissible à la décision protégée, pas approuvé automatiquement par le juge.
+Guide: https://devopsabcs-engineering.github.io/foundry-hosted-agents-fsi/fr/evaluation-guide.html
+Lab 19: https://devopsabcs-engineering.github.io/foundry-hosted-agents-fsi/fr/labs/lab-19-evaluation-engineering
+Source: https://learn.microsoft.com/azure/foundry/concepts/evaluation-evaluators/agent-evaluators</a:t>
+            </a:r>
+            <a:endParaRPr lang="en-US" dirty="0"/>
+          </a:p>
+        </p:txBody>
+      </p:sp>
+      <p:sp>
+        <p:nvSpPr>
+          <p:cNvPr id="4" name="Slide Number Placeholder 3"/>
+          <p:cNvSpPr>
+            <a:spLocks noGrp="1"/>
+          </p:cNvSpPr>
+          <p:nvPr>
+            <p:ph type="sldNum" sz="quarter" idx="10"/>
+          </p:nvPr>
+        </p:nvSpPr>
+        <p:spPr/>
+        <p:txBody>
+          <a:bodyPr/>
+          <a:lstStyle/>
+          <a:p>
+            <a:fld id="{F7021451-1387-4CA6-816F-3879F97B5CBC}" type="slidenum">
+              <a:rPr lang="en-US"/>
+              <a:t>35</a:t>
+            </a:fld>
+            <a:endParaRPr lang="en-US"/>
+          </a:p>
+        </p:txBody>
+      </p:sp>
+    </p:spTree>
+    <p:extLst>
+      <p:ext uri="{BB962C8B-B14F-4D97-AF65-F5344CB8AC3E}">
+        <p14:creationId xmlns:p14="http://schemas.microsoft.com/office/powerpoint/2010/main" val="1024086991"/>
+      </p:ext>
+    </p:extLst>
+  </p:cSld>
+  <p:clrMapOvr>
+    <a:masterClrMapping/>
+  </p:clrMapOvr>
+</p:notes>
+</file>
+
+<file path=ppt/notesSlides/notesSlide36.xml><?xml version="1.0" encoding="utf-8"?>
+<p:notes xmlns:a="http://schemas.openxmlformats.org/drawingml/2006/main" xmlns:r="http://schemas.openxmlformats.org/officeDocument/2006/relationships" xmlns:p="http://schemas.openxmlformats.org/presentationml/2006/main">
+  <p:cSld>
+    <p:spTree>
+      <p:nvGrpSpPr>
+        <p:cNvPr id="1" name=""/>
+        <p:cNvGrpSpPr/>
+        <p:nvPr/>
+      </p:nvGrpSpPr>
+      <p:grpSpPr>
+        <a:xfrm>
+          <a:off x="0" y="0"/>
+          <a:ext cx="0" cy="0"/>
+          <a:chOff x="0" y="0"/>
+          <a:chExt cx="0" cy="0"/>
+        </a:xfrm>
+      </p:grpSpPr>
+      <p:sp>
+        <p:nvSpPr>
+          <p:cNvPr id="2" name="Slide Image Placeholder 1"/>
+          <p:cNvSpPr>
+            <a:spLocks noGrp="1" noRot="1" noChangeAspect="1"/>
+          </p:cNvSpPr>
+          <p:nvPr>
+            <p:ph type="sldImg"/>
+          </p:nvPr>
+        </p:nvSpPr>
+        <p:spPr/>
+      </p:sp>
+      <p:sp>
+        <p:nvSpPr>
+          <p:cNvPr id="3" name="Notes Placeholder 2"/>
+          <p:cNvSpPr>
+            <a:spLocks noGrp="1"/>
+          </p:cNvSpPr>
+          <p:nvPr>
+            <p:ph type="body" idx="1"/>
+          </p:nvPr>
+        </p:nvSpPr>
+        <p:spPr/>
+        <p:txBody>
+          <a:bodyPr/>
+          <a:lstStyle/>
+          <a:p>
+            <a:r>
+              <a:rPr lang="en-US" dirty="0"/>
+              <a:t>Chaque participant nomme un bug mieux détecté par test unitaire, un défaut sémantique manqué par texte exact, un faux positif du juge et une cause non LLM de variation. Séparer portée, incertitude et responsabilité.
+Guide: https://devopsabcs-engineering.github.io/foundry-hosted-agents-fsi/fr/evaluation-guide.html
+Lab 19: https://devopsabcs-engineering.github.io/foundry-hosted-agents-fsi/fr/labs/lab-19-evaluation-engineering
+Source: https://learn.microsoft.com/azure/foundry/concepts/evaluation-evaluators/custom-evaluators</a:t>
+            </a:r>
+            <a:endParaRPr lang="en-US" dirty="0"/>
+          </a:p>
+        </p:txBody>
+      </p:sp>
+      <p:sp>
+        <p:nvSpPr>
+          <p:cNvPr id="4" name="Slide Number Placeholder 3"/>
+          <p:cNvSpPr>
+            <a:spLocks noGrp="1"/>
+          </p:cNvSpPr>
+          <p:nvPr>
+            <p:ph type="sldNum" sz="quarter" idx="10"/>
+          </p:nvPr>
+        </p:nvSpPr>
+        <p:spPr/>
+        <p:txBody>
+          <a:bodyPr/>
+          <a:lstStyle/>
+          <a:p>
+            <a:fld id="{F7021451-1387-4CA6-816F-3879F97B5CBC}" type="slidenum">
+              <a:rPr lang="en-US"/>
+              <a:t>36</a:t>
+            </a:fld>
+            <a:endParaRPr lang="en-US"/>
+          </a:p>
+        </p:txBody>
+      </p:sp>
+    </p:spTree>
+    <p:extLst>
+      <p:ext uri="{BB962C8B-B14F-4D97-AF65-F5344CB8AC3E}">
+        <p14:creationId xmlns:p14="http://schemas.microsoft.com/office/powerpoint/2010/main" val="1024086991"/>
+      </p:ext>
+    </p:extLst>
+  </p:cSld>
+  <p:clrMapOvr>
+    <a:masterClrMapping/>
+  </p:clrMapOvr>
+</p:notes>
+</file>
+
+<file path=ppt/notesSlides/notesSlide37.xml><?xml version="1.0" encoding="utf-8"?>
+<p:notes xmlns:a="http://schemas.openxmlformats.org/drawingml/2006/main" xmlns:r="http://schemas.openxmlformats.org/officeDocument/2006/relationships" xmlns:p="http://schemas.openxmlformats.org/presentationml/2006/main">
+  <p:cSld>
+    <p:spTree>
+      <p:nvGrpSpPr>
+        <p:cNvPr id="1" name=""/>
+        <p:cNvGrpSpPr/>
+        <p:nvPr/>
+      </p:nvGrpSpPr>
+      <p:grpSpPr>
+        <a:xfrm>
+          <a:off x="0" y="0"/>
+          <a:ext cx="0" cy="0"/>
+          <a:chOff x="0" y="0"/>
+          <a:chExt cx="0" cy="0"/>
+        </a:xfrm>
+      </p:grpSpPr>
+      <p:sp>
+        <p:nvSpPr>
+          <p:cNvPr id="2" name="Slide Image Placeholder 1"/>
+          <p:cNvSpPr>
+            <a:spLocks noGrp="1" noRot="1" noChangeAspect="1"/>
+          </p:cNvSpPr>
+          <p:nvPr>
+            <p:ph type="sldImg"/>
+          </p:nvPr>
+        </p:nvSpPr>
+        <p:spPr/>
+      </p:sp>
+      <p:sp>
+        <p:nvSpPr>
+          <p:cNvPr id="3" name="Notes Placeholder 2"/>
+          <p:cNvSpPr>
+            <a:spLocks noGrp="1"/>
+          </p:cNvSpPr>
+          <p:nvPr>
+            <p:ph type="body" idx="1"/>
+          </p:nvPr>
+        </p:nvSpPr>
+        <p:spPr/>
+        <p:txBody>
+          <a:bodyPr/>
+          <a:lstStyle/>
+          <a:p>
+            <a:r>
+              <a:rPr lang="en-US" dirty="0"/>
               <a:t>Le guide et l'atelier sont maintenus dans le dépôt et reliés au programme. Régénérer avec npm run build-evaluation-deck. Références officielles :
 https://learn.microsoft.com/azure/foundry/how-to/evaluate-generative-ai-app
 https://learn.microsoft.com/azure/foundry/observability/how-to/cloud-evaluation
@@ -3094,7 +3281,7 @@
 Preuves : https://github.com/devopsabcs-engineering/foundry-hosted-agents-fsi/wiki/Native-Foundry-Evidence-FR
 Guide: https://devopsabcs-engineering.github.io/foundry-hosted-agents-fsi/fr/evaluation-guide.html
 Lab 19: https://devopsabcs-engineering.github.io/foundry-hosted-agents-fsi/fr/labs/lab-19-evaluation-engineering
-Source: https://learn.microsoft.com/azure/foundry/concepts/evaluation-evaluators/agent-evaluators</a:t>
+Source: https://learn.microsoft.com/azure/foundry/how-to/evaluate-generative-ai-app</a:t>
             </a:r>
             <a:endParaRPr lang="en-US" dirty="0"/>
           </a:p>
@@ -3117,7 +3304,7 @@
           <a:p>
             <a:fld id="{F7021451-1387-4CA6-816F-3879F97B5CBC}" type="slidenum">
               <a:rPr lang="en-US"/>
-              <a:t>35</a:t>
+              <a:t>37</a:t>
             </a:fld>
             <a:endParaRPr lang="en-US"/>
           </a:p>
@@ -4316,7 +4503,7 @@
                 <a:ea typeface="Segoe UI" pitchFamily="34" charset="-122"/>
                 <a:cs typeface="Segoe UI" pitchFamily="34" charset="-120"/>
               </a:rPr>
-              <a:t>1 / 35</a:t>
+              <a:t>1 / 37</a:t>
             </a:r>
             <a:endParaRPr lang="en-US" sz="1000" dirty="0"/>
           </a:p>
@@ -4944,7 +5131,7 @@
                 <a:ea typeface="Segoe UI" pitchFamily="34" charset="-122"/>
                 <a:cs typeface="Segoe UI" pitchFamily="34" charset="-120"/>
               </a:rPr>
-              <a:t>10 / 35</a:t>
+              <a:t>10 / 37</a:t>
             </a:r>
             <a:endParaRPr lang="en-US" sz="1000" dirty="0"/>
           </a:p>
@@ -5580,7 +5767,7 @@
                 <a:ea typeface="Segoe UI" pitchFamily="34" charset="-122"/>
                 <a:cs typeface="Segoe UI" pitchFamily="34" charset="-120"/>
               </a:rPr>
-              <a:t>11 / 35</a:t>
+              <a:t>11 / 37</a:t>
             </a:r>
             <a:endParaRPr lang="en-US" sz="1000" dirty="0"/>
           </a:p>
@@ -6208,7 +6395,7 @@
                 <a:ea typeface="Segoe UI" pitchFamily="34" charset="-122"/>
                 <a:cs typeface="Segoe UI" pitchFamily="34" charset="-120"/>
               </a:rPr>
-              <a:t>12 / 35</a:t>
+              <a:t>12 / 37</a:t>
             </a:r>
             <a:endParaRPr lang="en-US" sz="1000" dirty="0"/>
           </a:p>
@@ -6345,77 +6532,102 @@
                 <a:ea typeface="Segoe UI" pitchFamily="34" charset="-122"/>
                 <a:cs typeface="Segoe UI" pitchFamily="34" charset="-120"/>
               </a:rPr>
-              <a:t>Ne pas mélanger les générations d’API</a:t>
+              <a:t>Point portail : ouvrir l’essai terminé</a:t>
             </a:r>
             <a:endParaRPr lang="en-US" sz="2700" dirty="0"/>
           </a:p>
         </p:txBody>
       </p:sp>
-      <p:sp>
-        <p:nvSpPr>
-          <p:cNvPr id="5" name="Text 3"/>
-          <p:cNvSpPr/>
-          <p:nvPr/>
-        </p:nvSpPr>
-        <p:spPr>
-          <a:xfrm>
-            <a:off x="594360" y="1828800"/>
-            <a:ext cx="640080" cy="594360"/>
-          </a:xfrm>
-          <a:prstGeom prst="rect">
-            <a:avLst/>
-          </a:prstGeom>
-          <a:noFill/>
-          <a:ln/>
-        </p:spPr>
-        <p:txBody>
-          <a:bodyPr wrap="square" lIns="0" tIns="0" rIns="0" bIns="0" rtlCol="0" anchor="ctr"/>
-          <a:lstStyle/>
-          <a:p>
-            <a:pPr indent="0" marL="0">
-              <a:buNone/>
-            </a:pPr>
-            <a:r>
-              <a:rPr lang="en-US" sz="1700" b="1" dirty="0">
-                <a:solidFill>
-                  <a:srgbClr val="0078D4"/>
-                </a:solidFill>
-                <a:latin typeface="Segoe UI" pitchFamily="34" charset="0"/>
-                <a:ea typeface="Segoe UI" pitchFamily="34" charset="-122"/>
-                <a:cs typeface="Segoe UI" pitchFamily="34" charset="-120"/>
-              </a:rPr>
-              <a:t>01</a:t>
-            </a:r>
-            <a:endParaRPr lang="en-US" sz="1700" dirty="0"/>
-          </a:p>
-        </p:txBody>
-      </p:sp>
-      <p:sp>
-        <p:nvSpPr>
-          <p:cNvPr id="6" name="Text 4"/>
-          <p:cNvSpPr/>
-          <p:nvPr/>
-        </p:nvSpPr>
-        <p:spPr>
-          <a:xfrm>
-            <a:off x="1325880" y="1828800"/>
-            <a:ext cx="10195560" cy="731520"/>
-          </a:xfrm>
-          <a:prstGeom prst="rect">
-            <a:avLst/>
-          </a:prstGeom>
-          <a:noFill/>
-          <a:ln/>
-        </p:spPr>
-        <p:txBody>
-          <a:bodyPr wrap="square" lIns="0" tIns="0" rIns="0" bIns="0" rtlCol="0" anchor="ctr"/>
-          <a:lstStyle/>
-          <a:p>
-            <a:pPr indent="0" marL="0">
-              <a:buNone/>
-            </a:pPr>
-            <a:r>
-              <a:rPr lang="en-US" sz="2000" dirty="0">
+      <p:pic>
+        <p:nvPicPr>
+          <p:cNvPr id="5" name="Image 0" descr="Essai conservé terminé : 15/15 contrôles globaux et 5/5 par métrique.">
+            <a:hlinkClick r:id="rId2" tooltip=""/>
+          </p:cNvPr>
+          <p:cNvPicPr>
+            <a:picLocks noChangeAspect="1"/>
+          </p:cNvPicPr>
+          <p:nvPr/>
+        </p:nvPicPr>
+        <p:blipFill>
+          <a:blip r:embed="rId1"/>
+          <a:srcRect l="15914" r="1483" t="25351" b="47681"/>
+          <a:stretch/>
+        </p:blipFill>
+        <p:spPr>
+          <a:xfrm>
+            <a:off x="548640" y="1874520"/>
+            <a:ext cx="11064240" cy="2258008"/>
+          </a:xfrm>
+          <a:prstGeom prst="rect">
+            <a:avLst/>
+          </a:prstGeom>
+        </p:spPr>
+      </p:pic>
+      <p:sp>
+        <p:nvSpPr>
+          <p:cNvPr id="6" name="Text 3"/>
+          <p:cNvSpPr/>
+          <p:nvPr/>
+        </p:nvSpPr>
+        <p:spPr>
+          <a:xfrm>
+            <a:off x="548640" y="5166360"/>
+            <a:ext cx="11064240" cy="411480"/>
+          </a:xfrm>
+          <a:prstGeom prst="rect">
+            <a:avLst/>
+          </a:prstGeom>
+          <a:noFill/>
+          <a:ln/>
+        </p:spPr>
+        <p:txBody>
+          <a:bodyPr wrap="square" lIns="0" tIns="0" rIns="0" bIns="0" rtlCol="0" anchor="ctr"/>
+          <a:lstStyle/>
+          <a:p>
+            <a:pPr indent="0" marL="0">
+              <a:buNone/>
+            </a:pPr>
+            <a:r>
+              <a:rPr lang="en-US" sz="1600" dirty="0">
+                <a:solidFill>
+                  <a:srgbClr val="526777"/>
+                </a:solidFill>
+                <a:latin typeface="Segoe UI" pitchFamily="34" charset="0"/>
+                <a:ea typeface="Segoe UI" pitchFamily="34" charset="-122"/>
+                <a:cs typeface="Segoe UI" pitchFamily="34" charset="-120"/>
+              </a:rPr>
+              <a:t>Staging français v6 | 2026-10-23 | Preuve conservée en lecture seule</a:t>
+            </a:r>
+            <a:endParaRPr lang="en-US" sz="1600" dirty="0"/>
+          </a:p>
+        </p:txBody>
+      </p:sp>
+      <p:sp>
+        <p:nvSpPr>
+          <p:cNvPr id="7" name="Text 4"/>
+          <p:cNvSpPr/>
+          <p:nvPr/>
+        </p:nvSpPr>
+        <p:spPr>
+          <a:xfrm>
+            <a:off x="548640" y="5623560"/>
+            <a:ext cx="11064240" cy="457200"/>
+          </a:xfrm>
+          <a:prstGeom prst="rect">
+            <a:avLst/>
+          </a:prstGeom>
+          <a:noFill/>
+          <a:ln/>
+        </p:spPr>
+        <p:txBody>
+          <a:bodyPr wrap="square" lIns="0" tIns="0" rIns="0" bIns="0" rtlCol="0" anchor="ctr"/>
+          <a:lstStyle/>
+          <a:p>
+            <a:pPr indent="0" marL="0">
+              <a:buNone/>
+            </a:pPr>
+            <a:r>
+              <a:rPr lang="en-US" sz="2000" b="1" dirty="0">
                 <a:solidFill>
                   <a:srgbClr val="183449"/>
                 </a:solidFill>
@@ -6423,7 +6635,7 @@
                 <a:ea typeface="Segoe UI" pitchFamily="34" charset="-122"/>
                 <a:cs typeface="Segoe UI" pitchFamily="34" charset="-120"/>
               </a:rPr>
-              <a:t>Projects SDK et Evals natif : parcours cloud du dépôt.</a:t>
+              <a:t>Sélectionner le nom, pas la case ni Add run.</a:t>
             </a:r>
             <a:endParaRPr lang="en-US" sz="2000" dirty="0"/>
           </a:p>
@@ -6431,334 +6643,8 @@
       </p:sp>
       <p:sp>
         <p:nvSpPr>
-          <p:cNvPr id="7" name="Shape 5"/>
-          <p:cNvSpPr/>
-          <p:nvPr/>
-        </p:nvSpPr>
-        <p:spPr>
-          <a:xfrm>
-            <a:off x="1325880" y="2660904"/>
-            <a:ext cx="10149840" cy="0"/>
-          </a:xfrm>
-          <a:prstGeom prst="line">
-            <a:avLst/>
-          </a:prstGeom>
-          <a:noFill/>
-          <a:ln w="6350">
-            <a:solidFill>
-              <a:srgbClr val="DCE5ED"/>
-            </a:solidFill>
-            <a:prstDash val="solid"/>
-          </a:ln>
-        </p:spPr>
-      </p:sp>
-      <p:sp>
-        <p:nvSpPr>
-          <p:cNvPr id="8" name="Text 6"/>
-          <p:cNvSpPr/>
-          <p:nvPr/>
-        </p:nvSpPr>
-        <p:spPr>
-          <a:xfrm>
-            <a:off x="594360" y="2770632"/>
-            <a:ext cx="640080" cy="594360"/>
-          </a:xfrm>
-          <a:prstGeom prst="rect">
-            <a:avLst/>
-          </a:prstGeom>
-          <a:noFill/>
-          <a:ln/>
-        </p:spPr>
-        <p:txBody>
-          <a:bodyPr wrap="square" lIns="0" tIns="0" rIns="0" bIns="0" rtlCol="0" anchor="ctr"/>
-          <a:lstStyle/>
-          <a:p>
-            <a:pPr indent="0" marL="0">
-              <a:buNone/>
-            </a:pPr>
-            <a:r>
-              <a:rPr lang="en-US" sz="1700" b="1" dirty="0">
-                <a:solidFill>
-                  <a:srgbClr val="0078D4"/>
-                </a:solidFill>
-                <a:latin typeface="Segoe UI" pitchFamily="34" charset="0"/>
-                <a:ea typeface="Segoe UI" pitchFamily="34" charset="-122"/>
-                <a:cs typeface="Segoe UI" pitchFamily="34" charset="-120"/>
-              </a:rPr>
-              <a:t>02</a:t>
-            </a:r>
-            <a:endParaRPr lang="en-US" sz="1700" dirty="0"/>
-          </a:p>
-        </p:txBody>
-      </p:sp>
-      <p:sp>
-        <p:nvSpPr>
-          <p:cNvPr id="9" name="Text 7"/>
-          <p:cNvSpPr/>
-          <p:nvPr/>
-        </p:nvSpPr>
-        <p:spPr>
-          <a:xfrm>
-            <a:off x="1325880" y="2770632"/>
-            <a:ext cx="10195560" cy="731520"/>
-          </a:xfrm>
-          <a:prstGeom prst="rect">
-            <a:avLst/>
-          </a:prstGeom>
-          <a:noFill/>
-          <a:ln/>
-        </p:spPr>
-        <p:txBody>
-          <a:bodyPr wrap="square" lIns="0" tIns="0" rIns="0" bIns="0" rtlCol="0" anchor="ctr"/>
-          <a:lstStyle/>
-          <a:p>
-            <a:pPr indent="0" marL="0">
-              <a:buNone/>
-            </a:pPr>
-            <a:r>
-              <a:rPr lang="en-US" sz="2000" dirty="0">
-                <a:solidFill>
-                  <a:srgbClr val="183449"/>
-                </a:solidFill>
-                <a:latin typeface="Segoe UI" pitchFamily="34" charset="0"/>
-                <a:ea typeface="Segoe UI" pitchFamily="34" charset="-122"/>
-                <a:cs typeface="Segoe UI" pitchFamily="34" charset="-120"/>
-              </a:rPr>
-              <a:t>azure-ai-evaluation expose un evaluate() local distinct.</a:t>
-            </a:r>
-            <a:endParaRPr lang="en-US" sz="2000" dirty="0"/>
-          </a:p>
-        </p:txBody>
-      </p:sp>
-      <p:sp>
-        <p:nvSpPr>
-          <p:cNvPr id="10" name="Shape 8"/>
-          <p:cNvSpPr/>
-          <p:nvPr/>
-        </p:nvSpPr>
-        <p:spPr>
-          <a:xfrm>
-            <a:off x="1325880" y="3602736"/>
-            <a:ext cx="10149840" cy="0"/>
-          </a:xfrm>
-          <a:prstGeom prst="line">
-            <a:avLst/>
-          </a:prstGeom>
-          <a:noFill/>
-          <a:ln w="6350">
-            <a:solidFill>
-              <a:srgbClr val="DCE5ED"/>
-            </a:solidFill>
-            <a:prstDash val="solid"/>
-          </a:ln>
-        </p:spPr>
-      </p:sp>
-      <p:sp>
-        <p:nvSpPr>
-          <p:cNvPr id="11" name="Text 9"/>
-          <p:cNvSpPr/>
-          <p:nvPr/>
-        </p:nvSpPr>
-        <p:spPr>
-          <a:xfrm>
-            <a:off x="594360" y="3712464"/>
-            <a:ext cx="640080" cy="594360"/>
-          </a:xfrm>
-          <a:prstGeom prst="rect">
-            <a:avLst/>
-          </a:prstGeom>
-          <a:noFill/>
-          <a:ln/>
-        </p:spPr>
-        <p:txBody>
-          <a:bodyPr wrap="square" lIns="0" tIns="0" rIns="0" bIns="0" rtlCol="0" anchor="ctr"/>
-          <a:lstStyle/>
-          <a:p>
-            <a:pPr indent="0" marL="0">
-              <a:buNone/>
-            </a:pPr>
-            <a:r>
-              <a:rPr lang="en-US" sz="1700" b="1" dirty="0">
-                <a:solidFill>
-                  <a:srgbClr val="0078D4"/>
-                </a:solidFill>
-                <a:latin typeface="Segoe UI" pitchFamily="34" charset="0"/>
-                <a:ea typeface="Segoe UI" pitchFamily="34" charset="-122"/>
-                <a:cs typeface="Segoe UI" pitchFamily="34" charset="-120"/>
-              </a:rPr>
-              <a:t>03</a:t>
-            </a:r>
-            <a:endParaRPr lang="en-US" sz="1700" dirty="0"/>
-          </a:p>
-        </p:txBody>
-      </p:sp>
-      <p:sp>
-        <p:nvSpPr>
-          <p:cNvPr id="12" name="Text 10"/>
-          <p:cNvSpPr/>
-          <p:nvPr/>
-        </p:nvSpPr>
-        <p:spPr>
-          <a:xfrm>
-            <a:off x="1325880" y="3712464"/>
-            <a:ext cx="10195560" cy="731520"/>
-          </a:xfrm>
-          <a:prstGeom prst="rect">
-            <a:avLst/>
-          </a:prstGeom>
-          <a:noFill/>
-          <a:ln/>
-        </p:spPr>
-        <p:txBody>
-          <a:bodyPr wrap="square" lIns="0" tIns="0" rIns="0" bIns="0" rtlCol="0" anchor="ctr"/>
-          <a:lstStyle/>
-          <a:p>
-            <a:pPr indent="0" marL="0">
-              <a:buNone/>
-            </a:pPr>
-            <a:r>
-              <a:rPr lang="en-US" sz="2000" dirty="0">
-                <a:solidFill>
-                  <a:srgbClr val="183449"/>
-                </a:solidFill>
-                <a:latin typeface="Segoe UI" pitchFamily="34" charset="0"/>
-                <a:ea typeface="Segoe UI" pitchFamily="34" charset="-122"/>
-                <a:cs typeface="Segoe UI" pitchFamily="34" charset="-120"/>
-              </a:rPr>
-              <a:t>Évaluateurs intégrés, code et grilles ont des schémas différents.</a:t>
-            </a:r>
-            <a:endParaRPr lang="en-US" sz="2000" dirty="0"/>
-          </a:p>
-        </p:txBody>
-      </p:sp>
-      <p:sp>
-        <p:nvSpPr>
-          <p:cNvPr id="13" name="Shape 11"/>
-          <p:cNvSpPr/>
-          <p:nvPr/>
-        </p:nvSpPr>
-        <p:spPr>
-          <a:xfrm>
-            <a:off x="1325880" y="4544568"/>
-            <a:ext cx="10149840" cy="0"/>
-          </a:xfrm>
-          <a:prstGeom prst="line">
-            <a:avLst/>
-          </a:prstGeom>
-          <a:noFill/>
-          <a:ln w="6350">
-            <a:solidFill>
-              <a:srgbClr val="DCE5ED"/>
-            </a:solidFill>
-            <a:prstDash val="solid"/>
-          </a:ln>
-        </p:spPr>
-      </p:sp>
-      <p:sp>
-        <p:nvSpPr>
-          <p:cNvPr id="14" name="Text 12"/>
-          <p:cNvSpPr/>
-          <p:nvPr/>
-        </p:nvSpPr>
-        <p:spPr>
-          <a:xfrm>
-            <a:off x="594360" y="4654296"/>
-            <a:ext cx="640080" cy="594360"/>
-          </a:xfrm>
-          <a:prstGeom prst="rect">
-            <a:avLst/>
-          </a:prstGeom>
-          <a:noFill/>
-          <a:ln/>
-        </p:spPr>
-        <p:txBody>
-          <a:bodyPr wrap="square" lIns="0" tIns="0" rIns="0" bIns="0" rtlCol="0" anchor="ctr"/>
-          <a:lstStyle/>
-          <a:p>
-            <a:pPr indent="0" marL="0">
-              <a:buNone/>
-            </a:pPr>
-            <a:r>
-              <a:rPr lang="en-US" sz="1700" b="1" dirty="0">
-                <a:solidFill>
-                  <a:srgbClr val="0078D4"/>
-                </a:solidFill>
-                <a:latin typeface="Segoe UI" pitchFamily="34" charset="0"/>
-                <a:ea typeface="Segoe UI" pitchFamily="34" charset="-122"/>
-                <a:cs typeface="Segoe UI" pitchFamily="34" charset="-120"/>
-              </a:rPr>
-              <a:t>04</a:t>
-            </a:r>
-            <a:endParaRPr lang="en-US" sz="1700" dirty="0"/>
-          </a:p>
-        </p:txBody>
-      </p:sp>
-      <p:sp>
-        <p:nvSpPr>
-          <p:cNvPr id="15" name="Text 13"/>
-          <p:cNvSpPr/>
-          <p:nvPr/>
-        </p:nvSpPr>
-        <p:spPr>
-          <a:xfrm>
-            <a:off x="1325880" y="4654296"/>
-            <a:ext cx="10195560" cy="731520"/>
-          </a:xfrm>
-          <a:prstGeom prst="rect">
-            <a:avLst/>
-          </a:prstGeom>
-          <a:noFill/>
-          <a:ln/>
-        </p:spPr>
-        <p:txBody>
-          <a:bodyPr wrap="square" lIns="0" tIns="0" rIns="0" bIns="0" rtlCol="0" anchor="ctr"/>
-          <a:lstStyle/>
-          <a:p>
-            <a:pPr indent="0" marL="0">
-              <a:buNone/>
-            </a:pPr>
-            <a:r>
-              <a:rPr lang="en-US" sz="2000" dirty="0">
-                <a:solidFill>
-                  <a:srgbClr val="183449"/>
-                </a:solidFill>
-                <a:latin typeface="Segoe UI" pitchFamily="34" charset="0"/>
-                <a:ea typeface="Segoe UI" pitchFamily="34" charset="-122"/>
-                <a:cs typeface="Segoe UI" pitchFamily="34" charset="-120"/>
-              </a:rPr>
-              <a:t>Préversion, région et version restent des limites.</a:t>
-            </a:r>
-            <a:endParaRPr lang="en-US" sz="2000" dirty="0"/>
-          </a:p>
-        </p:txBody>
-      </p:sp>
-      <p:sp>
-        <p:nvSpPr>
-          <p:cNvPr id="16" name="Shape 14"/>
-          <p:cNvSpPr/>
-          <p:nvPr/>
-        </p:nvSpPr>
-        <p:spPr>
-          <a:xfrm>
-            <a:off x="1325880" y="5486400"/>
-            <a:ext cx="10149840" cy="0"/>
-          </a:xfrm>
-          <a:prstGeom prst="line">
-            <a:avLst/>
-          </a:prstGeom>
-          <a:noFill/>
-          <a:ln w="6350">
-            <a:solidFill>
-              <a:srgbClr val="DCE5ED"/>
-            </a:solidFill>
-            <a:prstDash val="solid"/>
-          </a:ln>
-        </p:spPr>
-      </p:sp>
-      <p:sp>
-        <p:nvSpPr>
-          <p:cNvPr id="17" name="Text 15">
-            <a:hlinkClick r:id="rId1" tooltip=""/>
+          <p:cNvPr id="8" name="Text 5">
+            <a:hlinkClick r:id="rId3" tooltip=""/>
           </p:cNvPr>
           <p:cNvSpPr/>
           <p:nvPr/>
@@ -6789,7 +6675,7 @@
                 <a:latin typeface="Segoe UI" pitchFamily="34" charset="0"/>
                 <a:ea typeface="Segoe UI" pitchFamily="34" charset="-122"/>
                 <a:cs typeface="Segoe UI" pitchFamily="34" charset="-120"/>
-                <a:hlinkClick r:id="rId1" invalidUrl="" action="" tgtFrame="" tooltip="" history="1" highlightClick="0" endSnd="0">
+                <a:hlinkClick r:id="rId3" invalidUrl="" action="" tgtFrame="" tooltip="" history="1" highlightClick="0" endSnd="0">
                   <a:extLst>
                     <a:ext uri="{A12FA001-AC4F-418D-AE19-62706E023703}">
                       <ahyp:hlinkClr xmlns:ahyp="http://schemas.microsoft.com/office/drawing/2018/hyperlinkcolor" val="tx"/>
@@ -6805,7 +6691,7 @@
       </p:sp>
       <p:sp>
         <p:nvSpPr>
-          <p:cNvPr id="18" name="Text 16"/>
+          <p:cNvPr id="9" name="Text 6"/>
           <p:cNvSpPr/>
           <p:nvPr/>
         </p:nvSpPr>
@@ -6836,7 +6722,7 @@
                 <a:ea typeface="Segoe UI" pitchFamily="34" charset="-122"/>
                 <a:cs typeface="Segoe UI" pitchFamily="34" charset="-120"/>
               </a:rPr>
-              <a:t>13 / 35</a:t>
+              <a:t>13 / 37</a:t>
             </a:r>
             <a:endParaRPr lang="en-US" sz="1000" dirty="0"/>
           </a:p>
@@ -6973,77 +6859,102 @@
                 <a:ea typeface="Segoe UI" pitchFamily="34" charset="-122"/>
                 <a:cs typeface="Segoe UI" pitchFamily="34" charset="-120"/>
               </a:rPr>
-              <a:t>Le contrat de l’évaluateur intégré</a:t>
+              <a:t>Point portail : examiner notes et raisons</a:t>
             </a:r>
             <a:endParaRPr lang="en-US" sz="2700" dirty="0"/>
           </a:p>
         </p:txBody>
       </p:sp>
-      <p:sp>
-        <p:nvSpPr>
-          <p:cNvPr id="5" name="Text 3"/>
-          <p:cNvSpPr/>
-          <p:nvPr/>
-        </p:nvSpPr>
-        <p:spPr>
-          <a:xfrm>
-            <a:off x="594360" y="1828800"/>
-            <a:ext cx="640080" cy="594360"/>
-          </a:xfrm>
-          <a:prstGeom prst="rect">
-            <a:avLst/>
-          </a:prstGeom>
-          <a:noFill/>
-          <a:ln/>
-        </p:spPr>
-        <p:txBody>
-          <a:bodyPr wrap="square" lIns="0" tIns="0" rIns="0" bIns="0" rtlCol="0" anchor="ctr"/>
-          <a:lstStyle/>
-          <a:p>
-            <a:pPr indent="0" marL="0">
-              <a:buNone/>
-            </a:pPr>
-            <a:r>
-              <a:rPr lang="en-US" sz="1700" b="1" dirty="0">
-                <a:solidFill>
-                  <a:srgbClr val="0078D4"/>
-                </a:solidFill>
-                <a:latin typeface="Segoe UI" pitchFamily="34" charset="0"/>
-                <a:ea typeface="Segoe UI" pitchFamily="34" charset="-122"/>
-                <a:cs typeface="Segoe UI" pitchFamily="34" charset="-120"/>
-              </a:rPr>
-              <a:t>01</a:t>
-            </a:r>
-            <a:endParaRPr lang="en-US" sz="1700" dirty="0"/>
-          </a:p>
-        </p:txBody>
-      </p:sp>
-      <p:sp>
-        <p:nvSpPr>
-          <p:cNvPr id="6" name="Text 4"/>
-          <p:cNvSpPr/>
-          <p:nvPr/>
-        </p:nvSpPr>
-        <p:spPr>
-          <a:xfrm>
-            <a:off x="1325880" y="1828800"/>
-            <a:ext cx="10195560" cy="731520"/>
-          </a:xfrm>
-          <a:prstGeom prst="rect">
-            <a:avLst/>
-          </a:prstGeom>
-          <a:noFill/>
-          <a:ln/>
-        </p:spPr>
-        <p:txBody>
-          <a:bodyPr wrap="square" lIns="0" tIns="0" rIns="0" bIns="0" rtlCol="0" anchor="ctr"/>
-          <a:lstStyle/>
-          <a:p>
-            <a:pPr indent="0" marL="0">
-              <a:buNone/>
-            </a:pPr>
-            <a:r>
-              <a:rPr lang="en-US" sz="2000" dirty="0">
+      <p:pic>
+        <p:nvPicPr>
+          <p:cNvPr id="5" name="Image 0" descr="Les cinq lignes conservées incluent Coherence Pass: 4 et Pass: 5.">
+            <a:hlinkClick r:id="rId2" tooltip=""/>
+          </p:cNvPr>
+          <p:cNvPicPr>
+            <a:picLocks noChangeAspect="1"/>
+          </p:cNvPicPr>
+          <p:nvPr/>
+        </p:nvPicPr>
+        <p:blipFill>
+          <a:blip r:embed="rId1"/>
+          <a:srcRect l="18435" r="1529" t="46763" b="16547"/>
+          <a:stretch/>
+        </p:blipFill>
+        <p:spPr>
+          <a:xfrm>
+            <a:off x="548640" y="1874520"/>
+            <a:ext cx="11064240" cy="3170091"/>
+          </a:xfrm>
+          <a:prstGeom prst="rect">
+            <a:avLst/>
+          </a:prstGeom>
+        </p:spPr>
+      </p:pic>
+      <p:sp>
+        <p:nvSpPr>
+          <p:cNvPr id="6" name="Text 3"/>
+          <p:cNvSpPr/>
+          <p:nvPr/>
+        </p:nvSpPr>
+        <p:spPr>
+          <a:xfrm>
+            <a:off x="548640" y="5166360"/>
+            <a:ext cx="11064240" cy="411480"/>
+          </a:xfrm>
+          <a:prstGeom prst="rect">
+            <a:avLst/>
+          </a:prstGeom>
+          <a:noFill/>
+          <a:ln/>
+        </p:spPr>
+        <p:txBody>
+          <a:bodyPr wrap="square" lIns="0" tIns="0" rIns="0" bIns="0" rtlCol="0" anchor="ctr"/>
+          <a:lstStyle/>
+          <a:p>
+            <a:pPr indent="0" marL="0">
+              <a:buNone/>
+            </a:pPr>
+            <a:r>
+              <a:rPr lang="en-US" sz="1600" dirty="0">
+                <a:solidFill>
+                  <a:srgbClr val="526777"/>
+                </a:solidFill>
+                <a:latin typeface="Segoe UI" pitchFamily="34" charset="0"/>
+                <a:ea typeface="Segoe UI" pitchFamily="34" charset="-122"/>
+                <a:cs typeface="Segoe UI" pitchFamily="34" charset="-120"/>
+              </a:rPr>
+              <a:t>Staging français v6 | 2026-10-23 | Cinq lignes conservées</a:t>
+            </a:r>
+            <a:endParaRPr lang="en-US" sz="1600" dirty="0"/>
+          </a:p>
+        </p:txBody>
+      </p:sp>
+      <p:sp>
+        <p:nvSpPr>
+          <p:cNvPr id="7" name="Text 4"/>
+          <p:cNvSpPr/>
+          <p:nvPr/>
+        </p:nvSpPr>
+        <p:spPr>
+          <a:xfrm>
+            <a:off x="548640" y="5623560"/>
+            <a:ext cx="11064240" cy="457200"/>
+          </a:xfrm>
+          <a:prstGeom prst="rect">
+            <a:avLst/>
+          </a:prstGeom>
+          <a:noFill/>
+          <a:ln/>
+        </p:spPr>
+        <p:txBody>
+          <a:bodyPr wrap="square" lIns="0" tIns="0" rIns="0" bIns="0" rtlCol="0" anchor="ctr"/>
+          <a:lstStyle/>
+          <a:p>
+            <a:pPr indent="0" marL="0">
+              <a:buNone/>
+            </a:pPr>
+            <a:r>
+              <a:rPr lang="en-US" sz="2000" b="1" dirty="0">
                 <a:solidFill>
                   <a:srgbClr val="183449"/>
                 </a:solidFill>
@@ -7051,7 +6962,7 @@
                 <a:ea typeface="Segoe UI" pitchFamily="34" charset="-122"/>
                 <a:cs typeface="Segoe UI" pitchFamily="34" charset="-120"/>
               </a:rPr>
-              <a:t>type : azure_ai_evaluator; nom : builtin.groundedness.</a:t>
+              <a:t>Pass: 4 peut coexister avec un résumé de réussites 100% / 5/5.</a:t>
             </a:r>
             <a:endParaRPr lang="en-US" sz="2000" dirty="0"/>
           </a:p>
@@ -7059,334 +6970,8 @@
       </p:sp>
       <p:sp>
         <p:nvSpPr>
-          <p:cNvPr id="7" name="Shape 5"/>
-          <p:cNvSpPr/>
-          <p:nvPr/>
-        </p:nvSpPr>
-        <p:spPr>
-          <a:xfrm>
-            <a:off x="1325880" y="2660904"/>
-            <a:ext cx="10149840" cy="0"/>
-          </a:xfrm>
-          <a:prstGeom prst="line">
-            <a:avLst/>
-          </a:prstGeom>
-          <a:noFill/>
-          <a:ln w="6350">
-            <a:solidFill>
-              <a:srgbClr val="DCE5ED"/>
-            </a:solidFill>
-            <a:prstDash val="solid"/>
-          </a:ln>
-        </p:spPr>
-      </p:sp>
-      <p:sp>
-        <p:nvSpPr>
-          <p:cNvPr id="8" name="Text 6"/>
-          <p:cNvSpPr/>
-          <p:nvPr/>
-        </p:nvSpPr>
-        <p:spPr>
-          <a:xfrm>
-            <a:off x="594360" y="2770632"/>
-            <a:ext cx="640080" cy="594360"/>
-          </a:xfrm>
-          <a:prstGeom prst="rect">
-            <a:avLst/>
-          </a:prstGeom>
-          <a:noFill/>
-          <a:ln/>
-        </p:spPr>
-        <p:txBody>
-          <a:bodyPr wrap="square" lIns="0" tIns="0" rIns="0" bIns="0" rtlCol="0" anchor="ctr"/>
-          <a:lstStyle/>
-          <a:p>
-            <a:pPr indent="0" marL="0">
-              <a:buNone/>
-            </a:pPr>
-            <a:r>
-              <a:rPr lang="en-US" sz="1700" b="1" dirty="0">
-                <a:solidFill>
-                  <a:srgbClr val="0078D4"/>
-                </a:solidFill>
-                <a:latin typeface="Segoe UI" pitchFamily="34" charset="0"/>
-                <a:ea typeface="Segoe UI" pitchFamily="34" charset="-122"/>
-                <a:cs typeface="Segoe UI" pitchFamily="34" charset="-120"/>
-              </a:rPr>
-              <a:t>02</a:t>
-            </a:r>
-            <a:endParaRPr lang="en-US" sz="1700" dirty="0"/>
-          </a:p>
-        </p:txBody>
-      </p:sp>
-      <p:sp>
-        <p:nvSpPr>
-          <p:cNvPr id="9" name="Text 7"/>
-          <p:cNvSpPr/>
-          <p:nvPr/>
-        </p:nvSpPr>
-        <p:spPr>
-          <a:xfrm>
-            <a:off x="1325880" y="2770632"/>
-            <a:ext cx="10195560" cy="731520"/>
-          </a:xfrm>
-          <a:prstGeom prst="rect">
-            <a:avLst/>
-          </a:prstGeom>
-          <a:noFill/>
-          <a:ln/>
-        </p:spPr>
-        <p:txBody>
-          <a:bodyPr wrap="square" lIns="0" tIns="0" rIns="0" bIns="0" rtlCol="0" anchor="ctr"/>
-          <a:lstStyle/>
-          <a:p>
-            <a:pPr indent="0" marL="0">
-              <a:buNone/>
-            </a:pPr>
-            <a:r>
-              <a:rPr lang="en-US" sz="2000" dirty="0">
-                <a:solidFill>
-                  <a:srgbClr val="183449"/>
-                </a:solidFill>
-                <a:latin typeface="Segoe UI" pitchFamily="34" charset="0"/>
-                <a:ea typeface="Segoe UI" pitchFamily="34" charset="-122"/>
-                <a:cs typeface="Segoe UI" pitchFamily="34" charset="-120"/>
-              </a:rPr>
-              <a:t>Mapper contexte fiable et réponse dans la langue choisie.</a:t>
-            </a:r>
-            <a:endParaRPr lang="en-US" sz="2000" dirty="0"/>
-          </a:p>
-        </p:txBody>
-      </p:sp>
-      <p:sp>
-        <p:nvSpPr>
-          <p:cNvPr id="10" name="Shape 8"/>
-          <p:cNvSpPr/>
-          <p:nvPr/>
-        </p:nvSpPr>
-        <p:spPr>
-          <a:xfrm>
-            <a:off x="1325880" y="3602736"/>
-            <a:ext cx="10149840" cy="0"/>
-          </a:xfrm>
-          <a:prstGeom prst="line">
-            <a:avLst/>
-          </a:prstGeom>
-          <a:noFill/>
-          <a:ln w="6350">
-            <a:solidFill>
-              <a:srgbClr val="DCE5ED"/>
-            </a:solidFill>
-            <a:prstDash val="solid"/>
-          </a:ln>
-        </p:spPr>
-      </p:sp>
-      <p:sp>
-        <p:nvSpPr>
-          <p:cNvPr id="11" name="Text 9"/>
-          <p:cNvSpPr/>
-          <p:nvPr/>
-        </p:nvSpPr>
-        <p:spPr>
-          <a:xfrm>
-            <a:off x="594360" y="3712464"/>
-            <a:ext cx="640080" cy="594360"/>
-          </a:xfrm>
-          <a:prstGeom prst="rect">
-            <a:avLst/>
-          </a:prstGeom>
-          <a:noFill/>
-          <a:ln/>
-        </p:spPr>
-        <p:txBody>
-          <a:bodyPr wrap="square" lIns="0" tIns="0" rIns="0" bIns="0" rtlCol="0" anchor="ctr"/>
-          <a:lstStyle/>
-          <a:p>
-            <a:pPr indent="0" marL="0">
-              <a:buNone/>
-            </a:pPr>
-            <a:r>
-              <a:rPr lang="en-US" sz="1700" b="1" dirty="0">
-                <a:solidFill>
-                  <a:srgbClr val="0078D4"/>
-                </a:solidFill>
-                <a:latin typeface="Segoe UI" pitchFamily="34" charset="0"/>
-                <a:ea typeface="Segoe UI" pitchFamily="34" charset="-122"/>
-                <a:cs typeface="Segoe UI" pitchFamily="34" charset="-120"/>
-              </a:rPr>
-              <a:t>03</a:t>
-            </a:r>
-            <a:endParaRPr lang="en-US" sz="1700" dirty="0"/>
-          </a:p>
-        </p:txBody>
-      </p:sp>
-      <p:sp>
-        <p:nvSpPr>
-          <p:cNvPr id="12" name="Text 10"/>
-          <p:cNvSpPr/>
-          <p:nvPr/>
-        </p:nvSpPr>
-        <p:spPr>
-          <a:xfrm>
-            <a:off x="1325880" y="3712464"/>
-            <a:ext cx="10195560" cy="731520"/>
-          </a:xfrm>
-          <a:prstGeom prst="rect">
-            <a:avLst/>
-          </a:prstGeom>
-          <a:noFill/>
-          <a:ln/>
-        </p:spPr>
-        <p:txBody>
-          <a:bodyPr wrap="square" lIns="0" tIns="0" rIns="0" bIns="0" rtlCol="0" anchor="ctr"/>
-          <a:lstStyle/>
-          <a:p>
-            <a:pPr indent="0" marL="0">
-              <a:buNone/>
-            </a:pPr>
-            <a:r>
-              <a:rPr lang="en-US" sz="2000" dirty="0">
-                <a:solidFill>
-                  <a:srgbClr val="183449"/>
-                </a:solidFill>
-                <a:latin typeface="Segoe UI" pitchFamily="34" charset="0"/>
-                <a:ea typeface="Segoe UI" pitchFamily="34" charset="-122"/>
-                <a:cs typeface="Segoe UI" pitchFamily="34" charset="-120"/>
-              </a:rPr>
-              <a:t>Le code épinglé utilise initialization_parameters.deployment_name.</a:t>
-            </a:r>
-            <a:endParaRPr lang="en-US" sz="2000" dirty="0"/>
-          </a:p>
-        </p:txBody>
-      </p:sp>
-      <p:sp>
-        <p:nvSpPr>
-          <p:cNvPr id="13" name="Shape 11"/>
-          <p:cNvSpPr/>
-          <p:nvPr/>
-        </p:nvSpPr>
-        <p:spPr>
-          <a:xfrm>
-            <a:off x="1325880" y="4544568"/>
-            <a:ext cx="10149840" cy="0"/>
-          </a:xfrm>
-          <a:prstGeom prst="line">
-            <a:avLst/>
-          </a:prstGeom>
-          <a:noFill/>
-          <a:ln w="6350">
-            <a:solidFill>
-              <a:srgbClr val="DCE5ED"/>
-            </a:solidFill>
-            <a:prstDash val="solid"/>
-          </a:ln>
-        </p:spPr>
-      </p:sp>
-      <p:sp>
-        <p:nvSpPr>
-          <p:cNvPr id="14" name="Text 12"/>
-          <p:cNvSpPr/>
-          <p:nvPr/>
-        </p:nvSpPr>
-        <p:spPr>
-          <a:xfrm>
-            <a:off x="594360" y="4654296"/>
-            <a:ext cx="640080" cy="594360"/>
-          </a:xfrm>
-          <a:prstGeom prst="rect">
-            <a:avLst/>
-          </a:prstGeom>
-          <a:noFill/>
-          <a:ln/>
-        </p:spPr>
-        <p:txBody>
-          <a:bodyPr wrap="square" lIns="0" tIns="0" rIns="0" bIns="0" rtlCol="0" anchor="ctr"/>
-          <a:lstStyle/>
-          <a:p>
-            <a:pPr indent="0" marL="0">
-              <a:buNone/>
-            </a:pPr>
-            <a:r>
-              <a:rPr lang="en-US" sz="1700" b="1" dirty="0">
-                <a:solidFill>
-                  <a:srgbClr val="0078D4"/>
-                </a:solidFill>
-                <a:latin typeface="Segoe UI" pitchFamily="34" charset="0"/>
-                <a:ea typeface="Segoe UI" pitchFamily="34" charset="-122"/>
-                <a:cs typeface="Segoe UI" pitchFamily="34" charset="-120"/>
-              </a:rPr>
-              <a:t>04</a:t>
-            </a:r>
-            <a:endParaRPr lang="en-US" sz="1700" dirty="0"/>
-          </a:p>
-        </p:txBody>
-      </p:sp>
-      <p:sp>
-        <p:nvSpPr>
-          <p:cNvPr id="15" name="Text 13"/>
-          <p:cNvSpPr/>
-          <p:nvPr/>
-        </p:nvSpPr>
-        <p:spPr>
-          <a:xfrm>
-            <a:off x="1325880" y="4654296"/>
-            <a:ext cx="10195560" cy="731520"/>
-          </a:xfrm>
-          <a:prstGeom prst="rect">
-            <a:avLst/>
-          </a:prstGeom>
-          <a:noFill/>
-          <a:ln/>
-        </p:spPr>
-        <p:txBody>
-          <a:bodyPr wrap="square" lIns="0" tIns="0" rIns="0" bIns="0" rtlCol="0" anchor="ctr"/>
-          <a:lstStyle/>
-          <a:p>
-            <a:pPr indent="0" marL="0">
-              <a:buNone/>
-            </a:pPr>
-            <a:r>
-              <a:rPr lang="en-US" sz="2000" dirty="0">
-                <a:solidFill>
-                  <a:srgbClr val="183449"/>
-                </a:solidFill>
-                <a:latin typeface="Segoe UI" pitchFamily="34" charset="0"/>
-                <a:ea typeface="Segoe UI" pitchFamily="34" charset="-122"/>
-                <a:cs typeface="Segoe UI" pitchFamily="34" charset="-120"/>
-              </a:rPr>
-              <a:t>Task adherence reçoit messages et output_items normalisés.</a:t>
-            </a:r>
-            <a:endParaRPr lang="en-US" sz="2000" dirty="0"/>
-          </a:p>
-        </p:txBody>
-      </p:sp>
-      <p:sp>
-        <p:nvSpPr>
-          <p:cNvPr id="16" name="Shape 14"/>
-          <p:cNvSpPr/>
-          <p:nvPr/>
-        </p:nvSpPr>
-        <p:spPr>
-          <a:xfrm>
-            <a:off x="1325880" y="5486400"/>
-            <a:ext cx="10149840" cy="0"/>
-          </a:xfrm>
-          <a:prstGeom prst="line">
-            <a:avLst/>
-          </a:prstGeom>
-          <a:noFill/>
-          <a:ln w="6350">
-            <a:solidFill>
-              <a:srgbClr val="DCE5ED"/>
-            </a:solidFill>
-            <a:prstDash val="solid"/>
-          </a:ln>
-        </p:spPr>
-      </p:sp>
-      <p:sp>
-        <p:nvSpPr>
-          <p:cNvPr id="17" name="Text 15">
-            <a:hlinkClick r:id="rId1" tooltip=""/>
+          <p:cNvPr id="8" name="Text 5">
+            <a:hlinkClick r:id="rId3" tooltip=""/>
           </p:cNvPr>
           <p:cNvSpPr/>
           <p:nvPr/>
@@ -7417,7 +7002,7 @@
                 <a:latin typeface="Segoe UI" pitchFamily="34" charset="0"/>
                 <a:ea typeface="Segoe UI" pitchFamily="34" charset="-122"/>
                 <a:cs typeface="Segoe UI" pitchFamily="34" charset="-120"/>
-                <a:hlinkClick r:id="rId1" invalidUrl="" action="" tgtFrame="" tooltip="" history="1" highlightClick="0" endSnd="0">
+                <a:hlinkClick r:id="rId3" invalidUrl="" action="" tgtFrame="" tooltip="" history="1" highlightClick="0" endSnd="0">
                   <a:extLst>
                     <a:ext uri="{A12FA001-AC4F-418D-AE19-62706E023703}">
                       <ahyp:hlinkClr xmlns:ahyp="http://schemas.microsoft.com/office/drawing/2018/hyperlinkcolor" val="tx"/>
@@ -7433,7 +7018,7 @@
       </p:sp>
       <p:sp>
         <p:nvSpPr>
-          <p:cNvPr id="18" name="Text 16"/>
+          <p:cNvPr id="9" name="Text 6"/>
           <p:cNvSpPr/>
           <p:nvPr/>
         </p:nvSpPr>
@@ -7464,7 +7049,7 @@
                 <a:ea typeface="Segoe UI" pitchFamily="34" charset="-122"/>
                 <a:cs typeface="Segoe UI" pitchFamily="34" charset="-120"/>
               </a:rPr>
-              <a:t>14 / 35</a:t>
+              <a:t>14 / 37</a:t>
             </a:r>
             <a:endParaRPr lang="en-US" sz="1000" dirty="0"/>
           </a:p>
@@ -7601,7 +7186,7 @@
                 <a:ea typeface="Segoe UI" pitchFamily="34" charset="-122"/>
                 <a:cs typeface="Segoe UI" pitchFamily="34" charset="-120"/>
               </a:rPr>
-              <a:t>Trois métriques, trois questions</a:t>
+              <a:t>Ne pas mélanger les générations d’API</a:t>
             </a:r>
             <a:endParaRPr lang="en-US" sz="2700" dirty="0"/>
           </a:p>
@@ -7679,7 +7264,7 @@
                 <a:ea typeface="Segoe UI" pitchFamily="34" charset="-122"/>
                 <a:cs typeface="Segoe UI" pitchFamily="34" charset="-120"/>
               </a:rPr>
-              <a:t>Coherence : l’accusé est-il logiquement compréhensible?</a:t>
+              <a:t>Projects SDK et Evals natif : parcours cloud du dépôt.</a:t>
             </a:r>
             <a:endParaRPr lang="en-US" sz="2000" dirty="0"/>
           </a:p>
@@ -7780,7 +7365,7 @@
                 <a:ea typeface="Segoe UI" pitchFamily="34" charset="-122"/>
                 <a:cs typeface="Segoe UI" pitchFamily="34" charset="-120"/>
               </a:rPr>
-              <a:t>Groundedness : les faits indépendants le soutiennent-ils?</a:t>
+              <a:t>azure-ai-evaluation expose un evaluate() local distinct.</a:t>
             </a:r>
             <a:endParaRPr lang="en-US" sz="2000" dirty="0"/>
           </a:p>
@@ -7881,7 +7466,7 @@
                 <a:ea typeface="Segoe UI" pitchFamily="34" charset="-122"/>
                 <a:cs typeface="Segoe UI" pitchFamily="34" charset="-120"/>
               </a:rPr>
-              <a:t>Task adherence : respecte-t-il la tâche demandeur bornée?</a:t>
+              <a:t>Évaluateurs intégrés, code et grilles ont des schémas différents.</a:t>
             </a:r>
             <a:endParaRPr lang="en-US" sz="2000" dirty="0"/>
           </a:p>
@@ -7982,7 +7567,7 @@
                 <a:ea typeface="Segoe UI" pitchFamily="34" charset="-122"/>
                 <a:cs typeface="Segoe UI" pitchFamily="34" charset="-120"/>
               </a:rPr>
-              <a:t>Aucune ne prouve calcul, outils, persistance ou RBAC.</a:t>
+              <a:t>Préversion, région et version restent des limites.</a:t>
             </a:r>
             <a:endParaRPr lang="en-US" sz="2000" dirty="0"/>
           </a:p>
@@ -8092,7 +7677,7 @@
                 <a:ea typeface="Segoe UI" pitchFamily="34" charset="-122"/>
                 <a:cs typeface="Segoe UI" pitchFamily="34" charset="-120"/>
               </a:rPr>
-              <a:t>15 / 35</a:t>
+              <a:t>15 / 37</a:t>
             </a:r>
             <a:endParaRPr lang="en-US" sz="1000" dirty="0"/>
           </a:p>
@@ -8229,102 +7814,77 @@
                 <a:ea typeface="Segoe UI" pitchFamily="34" charset="-122"/>
                 <a:cs typeface="Segoe UI" pitchFamily="34" charset="-120"/>
               </a:rPr>
-              <a:t>Groundedness : examiner les entrées</a:t>
+              <a:t>Le contrat de l’évaluateur intégré</a:t>
             </a:r>
             <a:endParaRPr lang="en-US" sz="2700" dirty="0"/>
           </a:p>
         </p:txBody>
       </p:sp>
-      <p:pic>
-        <p:nvPicPr>
-          <p:cNvPr id="5" name="Image 0" descr="Catalogue Groundedness : entrées possibles et note ordinale de 1 à 5.">
-            <a:hlinkClick r:id="rId2" tooltip=""/>
-          </p:cNvPr>
-          <p:cNvPicPr>
-            <a:picLocks noChangeAspect="1"/>
-          </p:cNvPicPr>
-          <p:nvPr/>
-        </p:nvPicPr>
-        <p:blipFill>
-          <a:blip r:embed="rId1"/>
-          <a:srcRect l="18206" r="202" t="53937" b="9924"/>
-          <a:stretch/>
-        </p:blipFill>
-        <p:spPr>
-          <a:xfrm>
-            <a:off x="548640" y="1874520"/>
-            <a:ext cx="11064240" cy="3063240"/>
-          </a:xfrm>
-          <a:prstGeom prst="rect">
-            <a:avLst/>
-          </a:prstGeom>
-        </p:spPr>
-      </p:pic>
-      <p:sp>
-        <p:nvSpPr>
-          <p:cNvPr id="6" name="Text 3"/>
-          <p:cNvSpPr/>
-          <p:nvPr/>
-        </p:nvSpPr>
-        <p:spPr>
-          <a:xfrm>
-            <a:off x="548640" y="5166360"/>
-            <a:ext cx="11064240" cy="411480"/>
-          </a:xfrm>
-          <a:prstGeom prst="rect">
-            <a:avLst/>
-          </a:prstGeom>
-          <a:noFill/>
-          <a:ln/>
-        </p:spPr>
-        <p:txBody>
-          <a:bodyPr wrap="square" lIns="0" tIns="0" rIns="0" bIns="0" rtlCol="0" anchor="ctr"/>
-          <a:lstStyle/>
-          <a:p>
-            <a:pPr indent="0" marL="0">
-              <a:buNone/>
-            </a:pPr>
-            <a:r>
-              <a:rPr lang="en-US" sz="1600" dirty="0">
-                <a:solidFill>
-                  <a:srgbClr val="526777"/>
-                </a:solidFill>
-                <a:latin typeface="Segoe UI" pitchFamily="34" charset="0"/>
-                <a:ea typeface="Segoe UI" pitchFamily="34" charset="-122"/>
-                <a:cs typeface="Segoe UI" pitchFamily="34" charset="-120"/>
-              </a:rPr>
-              <a:t>Catalogue staging v18 | 2026-10-23 | Définition, pas résultat</a:t>
-            </a:r>
-            <a:endParaRPr lang="en-US" sz="1600" dirty="0"/>
-          </a:p>
-        </p:txBody>
-      </p:sp>
-      <p:sp>
-        <p:nvSpPr>
-          <p:cNvPr id="7" name="Text 4"/>
-          <p:cNvSpPr/>
-          <p:nvPr/>
-        </p:nvSpPr>
-        <p:spPr>
-          <a:xfrm>
-            <a:off x="548640" y="5623560"/>
-            <a:ext cx="11064240" cy="457200"/>
-          </a:xfrm>
-          <a:prstGeom prst="rect">
-            <a:avLst/>
-          </a:prstGeom>
-          <a:noFill/>
-          <a:ln/>
-        </p:spPr>
-        <p:txBody>
-          <a:bodyPr wrap="square" lIns="0" tIns="0" rIns="0" bIns="0" rtlCol="0" anchor="ctr"/>
-          <a:lstStyle/>
-          <a:p>
-            <a:pPr indent="0" marL="0">
-              <a:buNone/>
-            </a:pPr>
-            <a:r>
-              <a:rPr lang="en-US" sz="2000" b="1" dirty="0">
+      <p:sp>
+        <p:nvSpPr>
+          <p:cNvPr id="5" name="Text 3"/>
+          <p:cNvSpPr/>
+          <p:nvPr/>
+        </p:nvSpPr>
+        <p:spPr>
+          <a:xfrm>
+            <a:off x="594360" y="1828800"/>
+            <a:ext cx="640080" cy="594360"/>
+          </a:xfrm>
+          <a:prstGeom prst="rect">
+            <a:avLst/>
+          </a:prstGeom>
+          <a:noFill/>
+          <a:ln/>
+        </p:spPr>
+        <p:txBody>
+          <a:bodyPr wrap="square" lIns="0" tIns="0" rIns="0" bIns="0" rtlCol="0" anchor="ctr"/>
+          <a:lstStyle/>
+          <a:p>
+            <a:pPr indent="0" marL="0">
+              <a:buNone/>
+            </a:pPr>
+            <a:r>
+              <a:rPr lang="en-US" sz="1700" b="1" dirty="0">
+                <a:solidFill>
+                  <a:srgbClr val="0078D4"/>
+                </a:solidFill>
+                <a:latin typeface="Segoe UI" pitchFamily="34" charset="0"/>
+                <a:ea typeface="Segoe UI" pitchFamily="34" charset="-122"/>
+                <a:cs typeface="Segoe UI" pitchFamily="34" charset="-120"/>
+              </a:rPr>
+              <a:t>01</a:t>
+            </a:r>
+            <a:endParaRPr lang="en-US" sz="1700" dirty="0"/>
+          </a:p>
+        </p:txBody>
+      </p:sp>
+      <p:sp>
+        <p:nvSpPr>
+          <p:cNvPr id="6" name="Text 4"/>
+          <p:cNvSpPr/>
+          <p:nvPr/>
+        </p:nvSpPr>
+        <p:spPr>
+          <a:xfrm>
+            <a:off x="1325880" y="1828800"/>
+            <a:ext cx="10195560" cy="731520"/>
+          </a:xfrm>
+          <a:prstGeom prst="rect">
+            <a:avLst/>
+          </a:prstGeom>
+          <a:noFill/>
+          <a:ln/>
+        </p:spPr>
+        <p:txBody>
+          <a:bodyPr wrap="square" lIns="0" tIns="0" rIns="0" bIns="0" rtlCol="0" anchor="ctr"/>
+          <a:lstStyle/>
+          <a:p>
+            <a:pPr indent="0" marL="0">
+              <a:buNone/>
+            </a:pPr>
+            <a:r>
+              <a:rPr lang="en-US" sz="2000" dirty="0">
                 <a:solidFill>
                   <a:srgbClr val="183449"/>
                 </a:solidFill>
@@ -8332,7 +7892,7 @@
                 <a:ea typeface="Segoe UI" pitchFamily="34" charset="-122"/>
                 <a:cs typeface="Segoe UI" pitchFamily="34" charset="-120"/>
               </a:rPr>
-              <a:t>Utiliser un contexte fiable indépendant, jamais la réponse candidate.</a:t>
+              <a:t>type : azure_ai_evaluator; nom : builtin.groundedness.</a:t>
             </a:r>
             <a:endParaRPr lang="en-US" sz="2000" dirty="0"/>
           </a:p>
@@ -8340,8 +7900,334 @@
       </p:sp>
       <p:sp>
         <p:nvSpPr>
-          <p:cNvPr id="8" name="Text 5">
-            <a:hlinkClick r:id="rId3" tooltip=""/>
+          <p:cNvPr id="7" name="Shape 5"/>
+          <p:cNvSpPr/>
+          <p:nvPr/>
+        </p:nvSpPr>
+        <p:spPr>
+          <a:xfrm>
+            <a:off x="1325880" y="2660904"/>
+            <a:ext cx="10149840" cy="0"/>
+          </a:xfrm>
+          <a:prstGeom prst="line">
+            <a:avLst/>
+          </a:prstGeom>
+          <a:noFill/>
+          <a:ln w="6350">
+            <a:solidFill>
+              <a:srgbClr val="DCE5ED"/>
+            </a:solidFill>
+            <a:prstDash val="solid"/>
+          </a:ln>
+        </p:spPr>
+      </p:sp>
+      <p:sp>
+        <p:nvSpPr>
+          <p:cNvPr id="8" name="Text 6"/>
+          <p:cNvSpPr/>
+          <p:nvPr/>
+        </p:nvSpPr>
+        <p:spPr>
+          <a:xfrm>
+            <a:off x="594360" y="2770632"/>
+            <a:ext cx="640080" cy="594360"/>
+          </a:xfrm>
+          <a:prstGeom prst="rect">
+            <a:avLst/>
+          </a:prstGeom>
+          <a:noFill/>
+          <a:ln/>
+        </p:spPr>
+        <p:txBody>
+          <a:bodyPr wrap="square" lIns="0" tIns="0" rIns="0" bIns="0" rtlCol="0" anchor="ctr"/>
+          <a:lstStyle/>
+          <a:p>
+            <a:pPr indent="0" marL="0">
+              <a:buNone/>
+            </a:pPr>
+            <a:r>
+              <a:rPr lang="en-US" sz="1700" b="1" dirty="0">
+                <a:solidFill>
+                  <a:srgbClr val="0078D4"/>
+                </a:solidFill>
+                <a:latin typeface="Segoe UI" pitchFamily="34" charset="0"/>
+                <a:ea typeface="Segoe UI" pitchFamily="34" charset="-122"/>
+                <a:cs typeface="Segoe UI" pitchFamily="34" charset="-120"/>
+              </a:rPr>
+              <a:t>02</a:t>
+            </a:r>
+            <a:endParaRPr lang="en-US" sz="1700" dirty="0"/>
+          </a:p>
+        </p:txBody>
+      </p:sp>
+      <p:sp>
+        <p:nvSpPr>
+          <p:cNvPr id="9" name="Text 7"/>
+          <p:cNvSpPr/>
+          <p:nvPr/>
+        </p:nvSpPr>
+        <p:spPr>
+          <a:xfrm>
+            <a:off x="1325880" y="2770632"/>
+            <a:ext cx="10195560" cy="731520"/>
+          </a:xfrm>
+          <a:prstGeom prst="rect">
+            <a:avLst/>
+          </a:prstGeom>
+          <a:noFill/>
+          <a:ln/>
+        </p:spPr>
+        <p:txBody>
+          <a:bodyPr wrap="square" lIns="0" tIns="0" rIns="0" bIns="0" rtlCol="0" anchor="ctr"/>
+          <a:lstStyle/>
+          <a:p>
+            <a:pPr indent="0" marL="0">
+              <a:buNone/>
+            </a:pPr>
+            <a:r>
+              <a:rPr lang="en-US" sz="2000" dirty="0">
+                <a:solidFill>
+                  <a:srgbClr val="183449"/>
+                </a:solidFill>
+                <a:latin typeface="Segoe UI" pitchFamily="34" charset="0"/>
+                <a:ea typeface="Segoe UI" pitchFamily="34" charset="-122"/>
+                <a:cs typeface="Segoe UI" pitchFamily="34" charset="-120"/>
+              </a:rPr>
+              <a:t>Mapper contexte fiable et réponse dans la langue choisie.</a:t>
+            </a:r>
+            <a:endParaRPr lang="en-US" sz="2000" dirty="0"/>
+          </a:p>
+        </p:txBody>
+      </p:sp>
+      <p:sp>
+        <p:nvSpPr>
+          <p:cNvPr id="10" name="Shape 8"/>
+          <p:cNvSpPr/>
+          <p:nvPr/>
+        </p:nvSpPr>
+        <p:spPr>
+          <a:xfrm>
+            <a:off x="1325880" y="3602736"/>
+            <a:ext cx="10149840" cy="0"/>
+          </a:xfrm>
+          <a:prstGeom prst="line">
+            <a:avLst/>
+          </a:prstGeom>
+          <a:noFill/>
+          <a:ln w="6350">
+            <a:solidFill>
+              <a:srgbClr val="DCE5ED"/>
+            </a:solidFill>
+            <a:prstDash val="solid"/>
+          </a:ln>
+        </p:spPr>
+      </p:sp>
+      <p:sp>
+        <p:nvSpPr>
+          <p:cNvPr id="11" name="Text 9"/>
+          <p:cNvSpPr/>
+          <p:nvPr/>
+        </p:nvSpPr>
+        <p:spPr>
+          <a:xfrm>
+            <a:off x="594360" y="3712464"/>
+            <a:ext cx="640080" cy="594360"/>
+          </a:xfrm>
+          <a:prstGeom prst="rect">
+            <a:avLst/>
+          </a:prstGeom>
+          <a:noFill/>
+          <a:ln/>
+        </p:spPr>
+        <p:txBody>
+          <a:bodyPr wrap="square" lIns="0" tIns="0" rIns="0" bIns="0" rtlCol="0" anchor="ctr"/>
+          <a:lstStyle/>
+          <a:p>
+            <a:pPr indent="0" marL="0">
+              <a:buNone/>
+            </a:pPr>
+            <a:r>
+              <a:rPr lang="en-US" sz="1700" b="1" dirty="0">
+                <a:solidFill>
+                  <a:srgbClr val="0078D4"/>
+                </a:solidFill>
+                <a:latin typeface="Segoe UI" pitchFamily="34" charset="0"/>
+                <a:ea typeface="Segoe UI" pitchFamily="34" charset="-122"/>
+                <a:cs typeface="Segoe UI" pitchFamily="34" charset="-120"/>
+              </a:rPr>
+              <a:t>03</a:t>
+            </a:r>
+            <a:endParaRPr lang="en-US" sz="1700" dirty="0"/>
+          </a:p>
+        </p:txBody>
+      </p:sp>
+      <p:sp>
+        <p:nvSpPr>
+          <p:cNvPr id="12" name="Text 10"/>
+          <p:cNvSpPr/>
+          <p:nvPr/>
+        </p:nvSpPr>
+        <p:spPr>
+          <a:xfrm>
+            <a:off x="1325880" y="3712464"/>
+            <a:ext cx="10195560" cy="731520"/>
+          </a:xfrm>
+          <a:prstGeom prst="rect">
+            <a:avLst/>
+          </a:prstGeom>
+          <a:noFill/>
+          <a:ln/>
+        </p:spPr>
+        <p:txBody>
+          <a:bodyPr wrap="square" lIns="0" tIns="0" rIns="0" bIns="0" rtlCol="0" anchor="ctr"/>
+          <a:lstStyle/>
+          <a:p>
+            <a:pPr indent="0" marL="0">
+              <a:buNone/>
+            </a:pPr>
+            <a:r>
+              <a:rPr lang="en-US" sz="2000" dirty="0">
+                <a:solidFill>
+                  <a:srgbClr val="183449"/>
+                </a:solidFill>
+                <a:latin typeface="Segoe UI" pitchFamily="34" charset="0"/>
+                <a:ea typeface="Segoe UI" pitchFamily="34" charset="-122"/>
+                <a:cs typeface="Segoe UI" pitchFamily="34" charset="-120"/>
+              </a:rPr>
+              <a:t>Le code épinglé utilise initialization_parameters.deployment_name.</a:t>
+            </a:r>
+            <a:endParaRPr lang="en-US" sz="2000" dirty="0"/>
+          </a:p>
+        </p:txBody>
+      </p:sp>
+      <p:sp>
+        <p:nvSpPr>
+          <p:cNvPr id="13" name="Shape 11"/>
+          <p:cNvSpPr/>
+          <p:nvPr/>
+        </p:nvSpPr>
+        <p:spPr>
+          <a:xfrm>
+            <a:off x="1325880" y="4544568"/>
+            <a:ext cx="10149840" cy="0"/>
+          </a:xfrm>
+          <a:prstGeom prst="line">
+            <a:avLst/>
+          </a:prstGeom>
+          <a:noFill/>
+          <a:ln w="6350">
+            <a:solidFill>
+              <a:srgbClr val="DCE5ED"/>
+            </a:solidFill>
+            <a:prstDash val="solid"/>
+          </a:ln>
+        </p:spPr>
+      </p:sp>
+      <p:sp>
+        <p:nvSpPr>
+          <p:cNvPr id="14" name="Text 12"/>
+          <p:cNvSpPr/>
+          <p:nvPr/>
+        </p:nvSpPr>
+        <p:spPr>
+          <a:xfrm>
+            <a:off x="594360" y="4654296"/>
+            <a:ext cx="640080" cy="594360"/>
+          </a:xfrm>
+          <a:prstGeom prst="rect">
+            <a:avLst/>
+          </a:prstGeom>
+          <a:noFill/>
+          <a:ln/>
+        </p:spPr>
+        <p:txBody>
+          <a:bodyPr wrap="square" lIns="0" tIns="0" rIns="0" bIns="0" rtlCol="0" anchor="ctr"/>
+          <a:lstStyle/>
+          <a:p>
+            <a:pPr indent="0" marL="0">
+              <a:buNone/>
+            </a:pPr>
+            <a:r>
+              <a:rPr lang="en-US" sz="1700" b="1" dirty="0">
+                <a:solidFill>
+                  <a:srgbClr val="0078D4"/>
+                </a:solidFill>
+                <a:latin typeface="Segoe UI" pitchFamily="34" charset="0"/>
+                <a:ea typeface="Segoe UI" pitchFamily="34" charset="-122"/>
+                <a:cs typeface="Segoe UI" pitchFamily="34" charset="-120"/>
+              </a:rPr>
+              <a:t>04</a:t>
+            </a:r>
+            <a:endParaRPr lang="en-US" sz="1700" dirty="0"/>
+          </a:p>
+        </p:txBody>
+      </p:sp>
+      <p:sp>
+        <p:nvSpPr>
+          <p:cNvPr id="15" name="Text 13"/>
+          <p:cNvSpPr/>
+          <p:nvPr/>
+        </p:nvSpPr>
+        <p:spPr>
+          <a:xfrm>
+            <a:off x="1325880" y="4654296"/>
+            <a:ext cx="10195560" cy="731520"/>
+          </a:xfrm>
+          <a:prstGeom prst="rect">
+            <a:avLst/>
+          </a:prstGeom>
+          <a:noFill/>
+          <a:ln/>
+        </p:spPr>
+        <p:txBody>
+          <a:bodyPr wrap="square" lIns="0" tIns="0" rIns="0" bIns="0" rtlCol="0" anchor="ctr"/>
+          <a:lstStyle/>
+          <a:p>
+            <a:pPr indent="0" marL="0">
+              <a:buNone/>
+            </a:pPr>
+            <a:r>
+              <a:rPr lang="en-US" sz="2000" dirty="0">
+                <a:solidFill>
+                  <a:srgbClr val="183449"/>
+                </a:solidFill>
+                <a:latin typeface="Segoe UI" pitchFamily="34" charset="0"/>
+                <a:ea typeface="Segoe UI" pitchFamily="34" charset="-122"/>
+                <a:cs typeface="Segoe UI" pitchFamily="34" charset="-120"/>
+              </a:rPr>
+              <a:t>Task adherence reçoit messages et output_items normalisés.</a:t>
+            </a:r>
+            <a:endParaRPr lang="en-US" sz="2000" dirty="0"/>
+          </a:p>
+        </p:txBody>
+      </p:sp>
+      <p:sp>
+        <p:nvSpPr>
+          <p:cNvPr id="16" name="Shape 14"/>
+          <p:cNvSpPr/>
+          <p:nvPr/>
+        </p:nvSpPr>
+        <p:spPr>
+          <a:xfrm>
+            <a:off x="1325880" y="5486400"/>
+            <a:ext cx="10149840" cy="0"/>
+          </a:xfrm>
+          <a:prstGeom prst="line">
+            <a:avLst/>
+          </a:prstGeom>
+          <a:noFill/>
+          <a:ln w="6350">
+            <a:solidFill>
+              <a:srgbClr val="DCE5ED"/>
+            </a:solidFill>
+            <a:prstDash val="solid"/>
+          </a:ln>
+        </p:spPr>
+      </p:sp>
+      <p:sp>
+        <p:nvSpPr>
+          <p:cNvPr id="17" name="Text 15">
+            <a:hlinkClick r:id="rId1" tooltip=""/>
           </p:cNvPr>
           <p:cNvSpPr/>
           <p:nvPr/>
@@ -8372,7 +8258,7 @@
                 <a:latin typeface="Segoe UI" pitchFamily="34" charset="0"/>
                 <a:ea typeface="Segoe UI" pitchFamily="34" charset="-122"/>
                 <a:cs typeface="Segoe UI" pitchFamily="34" charset="-120"/>
-                <a:hlinkClick r:id="rId3" invalidUrl="" action="" tgtFrame="" tooltip="" history="1" highlightClick="0" endSnd="0">
+                <a:hlinkClick r:id="rId1" invalidUrl="" action="" tgtFrame="" tooltip="" history="1" highlightClick="0" endSnd="0">
                   <a:extLst>
                     <a:ext uri="{A12FA001-AC4F-418D-AE19-62706E023703}">
                       <ahyp:hlinkClr xmlns:ahyp="http://schemas.microsoft.com/office/drawing/2018/hyperlinkcolor" val="tx"/>
@@ -8388,7 +8274,7 @@
       </p:sp>
       <p:sp>
         <p:nvSpPr>
-          <p:cNvPr id="9" name="Text 6"/>
+          <p:cNvPr id="18" name="Text 16"/>
           <p:cNvSpPr/>
           <p:nvPr/>
         </p:nvSpPr>
@@ -8419,7 +8305,7 @@
                 <a:ea typeface="Segoe UI" pitchFamily="34" charset="-122"/>
                 <a:cs typeface="Segoe UI" pitchFamily="34" charset="-120"/>
               </a:rPr>
-              <a:t>16 / 35</a:t>
+              <a:t>16 / 37</a:t>
             </a:r>
             <a:endParaRPr lang="en-US" sz="1000" dirty="0"/>
           </a:p>
@@ -8556,7 +8442,7 @@
                 <a:ea typeface="Segoe UI" pitchFamily="34" charset="-122"/>
                 <a:cs typeface="Segoe UI" pitchFamily="34" charset="-120"/>
               </a:rPr>
-              <a:t>Le bilinguisme n’est pas une moyenne unique</a:t>
+              <a:t>Trois métriques, trois questions</a:t>
             </a:r>
             <a:endParaRPr lang="en-US" sz="2700" dirty="0"/>
           </a:p>
@@ -8634,7 +8520,7 @@
                 <a:ea typeface="Segoe UI" pitchFamily="34" charset="-122"/>
                 <a:cs typeface="Segoe UI" pitchFamily="34" charset="-120"/>
               </a:rPr>
-              <a:t>Convertir une source en essais EN et FR distincts.</a:t>
+              <a:t>Coherence : l’accusé est-il logiquement compréhensible?</a:t>
             </a:r>
             <a:endParaRPr lang="en-US" sz="2000" dirty="0"/>
           </a:p>
@@ -8735,7 +8621,7 @@
                 <a:ea typeface="Segoe UI" pitchFamily="34" charset="-122"/>
                 <a:cs typeface="Segoe UI" pitchFamily="34" charset="-120"/>
               </a:rPr>
-              <a:t>Texte sélectionné en chaîne, pas carte bilingue brute.</a:t>
+              <a:t>Groundedness : les faits indépendants le soutiennent-ils?</a:t>
             </a:r>
             <a:endParaRPr lang="en-US" sz="2000" dirty="0"/>
           </a:p>
@@ -8836,7 +8722,7 @@
                 <a:ea typeface="Segoe UI" pitchFamily="34" charset="-122"/>
                 <a:cs typeface="Segoe UI" pitchFamily="34" charset="-120"/>
               </a:rPr>
-              <a:t>Examiner défauts et mentions obligatoires par langue.</a:t>
+              <a:t>Task adherence : respecte-t-il la tâche demandeur bornée?</a:t>
             </a:r>
             <a:endParaRPr lang="en-US" sz="2000" dirty="0"/>
           </a:p>
@@ -8937,7 +8823,7 @@
                 <a:ea typeface="Segoe UI" pitchFamily="34" charset="-122"/>
                 <a:cs typeface="Segoe UI" pitchFamily="34" charset="-120"/>
               </a:rPr>
-              <a:t>Une moyenne globale peut masquer une régression française.</a:t>
+              <a:t>Aucune ne prouve calcul, outils, persistance ou RBAC.</a:t>
             </a:r>
             <a:endParaRPr lang="en-US" sz="2000" dirty="0"/>
           </a:p>
@@ -9047,7 +8933,7 @@
                 <a:ea typeface="Segoe UI" pitchFamily="34" charset="-122"/>
                 <a:cs typeface="Segoe UI" pitchFamily="34" charset="-120"/>
               </a:rPr>
-              <a:t>17 / 35</a:t>
+              <a:t>17 / 37</a:t>
             </a:r>
             <a:endParaRPr lang="en-US" sz="1000" dirty="0"/>
           </a:p>
@@ -9184,77 +9070,102 @@
                 <a:ea typeface="Segoe UI" pitchFamily="34" charset="-122"/>
                 <a:cs typeface="Segoe UI" pitchFamily="34" charset="-120"/>
               </a:rPr>
-              <a:t>Provenance : une étiquette n’est pas un épinglage</a:t>
+              <a:t>Groundedness : examiner les entrées</a:t>
             </a:r>
             <a:endParaRPr lang="en-US" sz="2700" dirty="0"/>
           </a:p>
         </p:txBody>
       </p:sp>
-      <p:sp>
-        <p:nvSpPr>
-          <p:cNvPr id="5" name="Text 3"/>
-          <p:cNvSpPr/>
-          <p:nvPr/>
-        </p:nvSpPr>
-        <p:spPr>
-          <a:xfrm>
-            <a:off x="594360" y="1828800"/>
-            <a:ext cx="640080" cy="594360"/>
-          </a:xfrm>
-          <a:prstGeom prst="rect">
-            <a:avLst/>
-          </a:prstGeom>
-          <a:noFill/>
-          <a:ln/>
-        </p:spPr>
-        <p:txBody>
-          <a:bodyPr wrap="square" lIns="0" tIns="0" rIns="0" bIns="0" rtlCol="0" anchor="ctr"/>
-          <a:lstStyle/>
-          <a:p>
-            <a:pPr indent="0" marL="0">
-              <a:buNone/>
-            </a:pPr>
-            <a:r>
-              <a:rPr lang="en-US" sz="1700" b="1" dirty="0">
-                <a:solidFill>
-                  <a:srgbClr val="0078D4"/>
-                </a:solidFill>
-                <a:latin typeface="Segoe UI" pitchFamily="34" charset="0"/>
-                <a:ea typeface="Segoe UI" pitchFamily="34" charset="-122"/>
-                <a:cs typeface="Segoe UI" pitchFamily="34" charset="-120"/>
-              </a:rPr>
-              <a:t>01</a:t>
-            </a:r>
-            <a:endParaRPr lang="en-US" sz="1700" dirty="0"/>
-          </a:p>
-        </p:txBody>
-      </p:sp>
-      <p:sp>
-        <p:nvSpPr>
-          <p:cNvPr id="6" name="Text 4"/>
-          <p:cNvSpPr/>
-          <p:nvPr/>
-        </p:nvSpPr>
-        <p:spPr>
-          <a:xfrm>
-            <a:off x="1325880" y="1828800"/>
-            <a:ext cx="10195560" cy="731520"/>
-          </a:xfrm>
-          <a:prstGeom prst="rect">
-            <a:avLst/>
-          </a:prstGeom>
-          <a:noFill/>
-          <a:ln/>
-        </p:spPr>
-        <p:txBody>
-          <a:bodyPr wrap="square" lIns="0" tIns="0" rIns="0" bIns="0" rtlCol="0" anchor="ctr"/>
-          <a:lstStyle/>
-          <a:p>
-            <a:pPr indent="0" marL="0">
-              <a:buNone/>
-            </a:pPr>
-            <a:r>
-              <a:rPr lang="en-US" sz="2000" dirty="0">
+      <p:pic>
+        <p:nvPicPr>
+          <p:cNvPr id="5" name="Image 0" descr="Catalogue Groundedness : entrées possibles et note ordinale de 1 à 5.">
+            <a:hlinkClick r:id="rId2" tooltip=""/>
+          </p:cNvPr>
+          <p:cNvPicPr>
+            <a:picLocks noChangeAspect="1"/>
+          </p:cNvPicPr>
+          <p:nvPr/>
+        </p:nvPicPr>
+        <p:blipFill>
+          <a:blip r:embed="rId1"/>
+          <a:srcRect l="18206" r="202" t="53937" b="9924"/>
+          <a:stretch/>
+        </p:blipFill>
+        <p:spPr>
+          <a:xfrm>
+            <a:off x="548640" y="1874520"/>
+            <a:ext cx="11064240" cy="3063240"/>
+          </a:xfrm>
+          <a:prstGeom prst="rect">
+            <a:avLst/>
+          </a:prstGeom>
+        </p:spPr>
+      </p:pic>
+      <p:sp>
+        <p:nvSpPr>
+          <p:cNvPr id="6" name="Text 3"/>
+          <p:cNvSpPr/>
+          <p:nvPr/>
+        </p:nvSpPr>
+        <p:spPr>
+          <a:xfrm>
+            <a:off x="548640" y="5166360"/>
+            <a:ext cx="11064240" cy="411480"/>
+          </a:xfrm>
+          <a:prstGeom prst="rect">
+            <a:avLst/>
+          </a:prstGeom>
+          <a:noFill/>
+          <a:ln/>
+        </p:spPr>
+        <p:txBody>
+          <a:bodyPr wrap="square" lIns="0" tIns="0" rIns="0" bIns="0" rtlCol="0" anchor="ctr"/>
+          <a:lstStyle/>
+          <a:p>
+            <a:pPr indent="0" marL="0">
+              <a:buNone/>
+            </a:pPr>
+            <a:r>
+              <a:rPr lang="en-US" sz="1600" dirty="0">
+                <a:solidFill>
+                  <a:srgbClr val="526777"/>
+                </a:solidFill>
+                <a:latin typeface="Segoe UI" pitchFamily="34" charset="0"/>
+                <a:ea typeface="Segoe UI" pitchFamily="34" charset="-122"/>
+                <a:cs typeface="Segoe UI" pitchFamily="34" charset="-120"/>
+              </a:rPr>
+              <a:t>Catalogue staging v18 | 2026-10-23 | Définition, pas résultat</a:t>
+            </a:r>
+            <a:endParaRPr lang="en-US" sz="1600" dirty="0"/>
+          </a:p>
+        </p:txBody>
+      </p:sp>
+      <p:sp>
+        <p:nvSpPr>
+          <p:cNvPr id="7" name="Text 4"/>
+          <p:cNvSpPr/>
+          <p:nvPr/>
+        </p:nvSpPr>
+        <p:spPr>
+          <a:xfrm>
+            <a:off x="548640" y="5623560"/>
+            <a:ext cx="11064240" cy="457200"/>
+          </a:xfrm>
+          <a:prstGeom prst="rect">
+            <a:avLst/>
+          </a:prstGeom>
+          <a:noFill/>
+          <a:ln/>
+        </p:spPr>
+        <p:txBody>
+          <a:bodyPr wrap="square" lIns="0" tIns="0" rIns="0" bIns="0" rtlCol="0" anchor="ctr"/>
+          <a:lstStyle/>
+          <a:p>
+            <a:pPr indent="0" marL="0">
+              <a:buNone/>
+            </a:pPr>
+            <a:r>
+              <a:rPr lang="en-US" sz="2000" b="1" dirty="0">
                 <a:solidFill>
                   <a:srgbClr val="183449"/>
                 </a:solidFill>
@@ -9262,7 +9173,7 @@
                 <a:ea typeface="Segoe UI" pitchFamily="34" charset="-122"/>
                 <a:cs typeface="Segoe UI" pitchFamily="34" charset="-120"/>
               </a:rPr>
-              <a:t>--version consigne seulement le déploiement observé.</a:t>
+              <a:t>Utiliser un contexte fiable indépendant, jamais la réponse candidate.</a:t>
             </a:r>
             <a:endParaRPr lang="en-US" sz="2000" dirty="0"/>
           </a:p>
@@ -9270,334 +9181,8 @@
       </p:sp>
       <p:sp>
         <p:nvSpPr>
-          <p:cNvPr id="7" name="Shape 5"/>
-          <p:cNvSpPr/>
-          <p:nvPr/>
-        </p:nvSpPr>
-        <p:spPr>
-          <a:xfrm>
-            <a:off x="1325880" y="2660904"/>
-            <a:ext cx="10149840" cy="0"/>
-          </a:xfrm>
-          <a:prstGeom prst="line">
-            <a:avLst/>
-          </a:prstGeom>
-          <a:noFill/>
-          <a:ln w="6350">
-            <a:solidFill>
-              <a:srgbClr val="DCE5ED"/>
-            </a:solidFill>
-            <a:prstDash val="solid"/>
-          </a:ln>
-        </p:spPr>
-      </p:sp>
-      <p:sp>
-        <p:nvSpPr>
-          <p:cNvPr id="8" name="Text 6"/>
-          <p:cNvSpPr/>
-          <p:nvPr/>
-        </p:nvSpPr>
-        <p:spPr>
-          <a:xfrm>
-            <a:off x="594360" y="2770632"/>
-            <a:ext cx="640080" cy="594360"/>
-          </a:xfrm>
-          <a:prstGeom prst="rect">
-            <a:avLst/>
-          </a:prstGeom>
-          <a:noFill/>
-          <a:ln/>
-        </p:spPr>
-        <p:txBody>
-          <a:bodyPr wrap="square" lIns="0" tIns="0" rIns="0" bIns="0" rtlCol="0" anchor="ctr"/>
-          <a:lstStyle/>
-          <a:p>
-            <a:pPr indent="0" marL="0">
-              <a:buNone/>
-            </a:pPr>
-            <a:r>
-              <a:rPr lang="en-US" sz="1700" b="1" dirty="0">
-                <a:solidFill>
-                  <a:srgbClr val="0078D4"/>
-                </a:solidFill>
-                <a:latin typeface="Segoe UI" pitchFamily="34" charset="0"/>
-                <a:ea typeface="Segoe UI" pitchFamily="34" charset="-122"/>
-                <a:cs typeface="Segoe UI" pitchFamily="34" charset="-120"/>
-              </a:rPr>
-              <a:t>02</a:t>
-            </a:r>
-            <a:endParaRPr lang="en-US" sz="1700" dirty="0"/>
-          </a:p>
-        </p:txBody>
-      </p:sp>
-      <p:sp>
-        <p:nvSpPr>
-          <p:cNvPr id="9" name="Text 7"/>
-          <p:cNvSpPr/>
-          <p:nvPr/>
-        </p:nvSpPr>
-        <p:spPr>
-          <a:xfrm>
-            <a:off x="1325880" y="2770632"/>
-            <a:ext cx="10195560" cy="731520"/>
-          </a:xfrm>
-          <a:prstGeom prst="rect">
-            <a:avLst/>
-          </a:prstGeom>
-          <a:noFill/>
-          <a:ln/>
-        </p:spPr>
-        <p:txBody>
-          <a:bodyPr wrap="square" lIns="0" tIns="0" rIns="0" bIns="0" rtlCol="0" anchor="ctr"/>
-          <a:lstStyle/>
-          <a:p>
-            <a:pPr indent="0" marL="0">
-              <a:buNone/>
-            </a:pPr>
-            <a:r>
-              <a:rPr lang="en-US" sz="2000" dirty="0">
-                <a:solidFill>
-                  <a:srgbClr val="183449"/>
-                </a:solidFill>
-                <a:latin typeface="Segoe UI" pitchFamily="34" charset="0"/>
-                <a:ea typeface="Segoe UI" pitchFamily="34" charset="-122"/>
-                <a:cs typeface="Segoe UI" pitchFamily="34" charset="-120"/>
-              </a:rPr>
-              <a:t>Réserver une fenêtre stable; vérifier version avant et après.</a:t>
-            </a:r>
-            <a:endParaRPr lang="en-US" sz="2000" dirty="0"/>
-          </a:p>
-        </p:txBody>
-      </p:sp>
-      <p:sp>
-        <p:nvSpPr>
-          <p:cNvPr id="10" name="Shape 8"/>
-          <p:cNvSpPr/>
-          <p:nvPr/>
-        </p:nvSpPr>
-        <p:spPr>
-          <a:xfrm>
-            <a:off x="1325880" y="3602736"/>
-            <a:ext cx="10149840" cy="0"/>
-          </a:xfrm>
-          <a:prstGeom prst="line">
-            <a:avLst/>
-          </a:prstGeom>
-          <a:noFill/>
-          <a:ln w="6350">
-            <a:solidFill>
-              <a:srgbClr val="DCE5ED"/>
-            </a:solidFill>
-            <a:prstDash val="solid"/>
-          </a:ln>
-        </p:spPr>
-      </p:sp>
-      <p:sp>
-        <p:nvSpPr>
-          <p:cNvPr id="11" name="Text 9"/>
-          <p:cNvSpPr/>
-          <p:nvPr/>
-        </p:nvSpPr>
-        <p:spPr>
-          <a:xfrm>
-            <a:off x="594360" y="3712464"/>
-            <a:ext cx="640080" cy="594360"/>
-          </a:xfrm>
-          <a:prstGeom prst="rect">
-            <a:avLst/>
-          </a:prstGeom>
-          <a:noFill/>
-          <a:ln/>
-        </p:spPr>
-        <p:txBody>
-          <a:bodyPr wrap="square" lIns="0" tIns="0" rIns="0" bIns="0" rtlCol="0" anchor="ctr"/>
-          <a:lstStyle/>
-          <a:p>
-            <a:pPr indent="0" marL="0">
-              <a:buNone/>
-            </a:pPr>
-            <a:r>
-              <a:rPr lang="en-US" sz="1700" b="1" dirty="0">
-                <a:solidFill>
-                  <a:srgbClr val="0078D4"/>
-                </a:solidFill>
-                <a:latin typeface="Segoe UI" pitchFamily="34" charset="0"/>
-                <a:ea typeface="Segoe UI" pitchFamily="34" charset="-122"/>
-                <a:cs typeface="Segoe UI" pitchFamily="34" charset="-120"/>
-              </a:rPr>
-              <a:t>03</a:t>
-            </a:r>
-            <a:endParaRPr lang="en-US" sz="1700" dirty="0"/>
-          </a:p>
-        </p:txBody>
-      </p:sp>
-      <p:sp>
-        <p:nvSpPr>
-          <p:cNvPr id="12" name="Text 10"/>
-          <p:cNvSpPr/>
-          <p:nvPr/>
-        </p:nvSpPr>
-        <p:spPr>
-          <a:xfrm>
-            <a:off x="1325880" y="3712464"/>
-            <a:ext cx="10195560" cy="731520"/>
-          </a:xfrm>
-          <a:prstGeom prst="rect">
-            <a:avLst/>
-          </a:prstGeom>
-          <a:noFill/>
-          <a:ln/>
-        </p:spPr>
-        <p:txBody>
-          <a:bodyPr wrap="square" lIns="0" tIns="0" rIns="0" bIns="0" rtlCol="0" anchor="ctr"/>
-          <a:lstStyle/>
-          <a:p>
-            <a:pPr indent="0" marL="0">
-              <a:buNone/>
-            </a:pPr>
-            <a:r>
-              <a:rPr lang="en-US" sz="2000" dirty="0">
-                <a:solidFill>
-                  <a:srgbClr val="183449"/>
-                </a:solidFill>
-                <a:latin typeface="Segoe UI" pitchFamily="34" charset="0"/>
-                <a:ea typeface="Segoe UI" pitchFamily="34" charset="-122"/>
-                <a:cs typeface="Segoe UI" pitchFamily="34" charset="-120"/>
-              </a:rPr>
-              <a:t>Figer source, jeu, grille, évaluateur et modèle juge.</a:t>
-            </a:r>
-            <a:endParaRPr lang="en-US" sz="2000" dirty="0"/>
-          </a:p>
-        </p:txBody>
-      </p:sp>
-      <p:sp>
-        <p:nvSpPr>
-          <p:cNvPr id="13" name="Shape 11"/>
-          <p:cNvSpPr/>
-          <p:nvPr/>
-        </p:nvSpPr>
-        <p:spPr>
-          <a:xfrm>
-            <a:off x="1325880" y="4544568"/>
-            <a:ext cx="10149840" cy="0"/>
-          </a:xfrm>
-          <a:prstGeom prst="line">
-            <a:avLst/>
-          </a:prstGeom>
-          <a:noFill/>
-          <a:ln w="6350">
-            <a:solidFill>
-              <a:srgbClr val="DCE5ED"/>
-            </a:solidFill>
-            <a:prstDash val="solid"/>
-          </a:ln>
-        </p:spPr>
-      </p:sp>
-      <p:sp>
-        <p:nvSpPr>
-          <p:cNvPr id="14" name="Text 12"/>
-          <p:cNvSpPr/>
-          <p:nvPr/>
-        </p:nvSpPr>
-        <p:spPr>
-          <a:xfrm>
-            <a:off x="594360" y="4654296"/>
-            <a:ext cx="640080" cy="594360"/>
-          </a:xfrm>
-          <a:prstGeom prst="rect">
-            <a:avLst/>
-          </a:prstGeom>
-          <a:noFill/>
-          <a:ln/>
-        </p:spPr>
-        <p:txBody>
-          <a:bodyPr wrap="square" lIns="0" tIns="0" rIns="0" bIns="0" rtlCol="0" anchor="ctr"/>
-          <a:lstStyle/>
-          <a:p>
-            <a:pPr indent="0" marL="0">
-              <a:buNone/>
-            </a:pPr>
-            <a:r>
-              <a:rPr lang="en-US" sz="1700" b="1" dirty="0">
-                <a:solidFill>
-                  <a:srgbClr val="0078D4"/>
-                </a:solidFill>
-                <a:latin typeface="Segoe UI" pitchFamily="34" charset="0"/>
-                <a:ea typeface="Segoe UI" pitchFamily="34" charset="-122"/>
-                <a:cs typeface="Segoe UI" pitchFamily="34" charset="-120"/>
-              </a:rPr>
-              <a:t>04</a:t>
-            </a:r>
-            <a:endParaRPr lang="en-US" sz="1700" dirty="0"/>
-          </a:p>
-        </p:txBody>
-      </p:sp>
-      <p:sp>
-        <p:nvSpPr>
-          <p:cNvPr id="15" name="Text 13"/>
-          <p:cNvSpPr/>
-          <p:nvPr/>
-        </p:nvSpPr>
-        <p:spPr>
-          <a:xfrm>
-            <a:off x="1325880" y="4654296"/>
-            <a:ext cx="10195560" cy="731520"/>
-          </a:xfrm>
-          <a:prstGeom prst="rect">
-            <a:avLst/>
-          </a:prstGeom>
-          <a:noFill/>
-          <a:ln/>
-        </p:spPr>
-        <p:txBody>
-          <a:bodyPr wrap="square" lIns="0" tIns="0" rIns="0" bIns="0" rtlCol="0" anchor="ctr"/>
-          <a:lstStyle/>
-          <a:p>
-            <a:pPr indent="0" marL="0">
-              <a:buNone/>
-            </a:pPr>
-            <a:r>
-              <a:rPr lang="en-US" sz="2000" dirty="0">
-                <a:solidFill>
-                  <a:srgbClr val="183449"/>
-                </a:solidFill>
-                <a:latin typeface="Segoe UI" pitchFamily="34" charset="0"/>
-                <a:ea typeface="Segoe UI" pitchFamily="34" charset="-122"/>
-                <a:cs typeface="Segoe UI" pitchFamily="34" charset="-120"/>
-              </a:rPr>
-              <a:t>Garder captures, IDs natifs/réponse et empreintes.</a:t>
-            </a:r>
-            <a:endParaRPr lang="en-US" sz="2000" dirty="0"/>
-          </a:p>
-        </p:txBody>
-      </p:sp>
-      <p:sp>
-        <p:nvSpPr>
-          <p:cNvPr id="16" name="Shape 14"/>
-          <p:cNvSpPr/>
-          <p:nvPr/>
-        </p:nvSpPr>
-        <p:spPr>
-          <a:xfrm>
-            <a:off x="1325880" y="5486400"/>
-            <a:ext cx="10149840" cy="0"/>
-          </a:xfrm>
-          <a:prstGeom prst="line">
-            <a:avLst/>
-          </a:prstGeom>
-          <a:noFill/>
-          <a:ln w="6350">
-            <a:solidFill>
-              <a:srgbClr val="DCE5ED"/>
-            </a:solidFill>
-            <a:prstDash val="solid"/>
-          </a:ln>
-        </p:spPr>
-      </p:sp>
-      <p:sp>
-        <p:nvSpPr>
-          <p:cNvPr id="17" name="Text 15">
-            <a:hlinkClick r:id="rId1" tooltip=""/>
+          <p:cNvPr id="8" name="Text 5">
+            <a:hlinkClick r:id="rId3" tooltip=""/>
           </p:cNvPr>
           <p:cNvSpPr/>
           <p:nvPr/>
@@ -9628,7 +9213,7 @@
                 <a:latin typeface="Segoe UI" pitchFamily="34" charset="0"/>
                 <a:ea typeface="Segoe UI" pitchFamily="34" charset="-122"/>
                 <a:cs typeface="Segoe UI" pitchFamily="34" charset="-120"/>
-                <a:hlinkClick r:id="rId1" invalidUrl="" action="" tgtFrame="" tooltip="" history="1" highlightClick="0" endSnd="0">
+                <a:hlinkClick r:id="rId3" invalidUrl="" action="" tgtFrame="" tooltip="" history="1" highlightClick="0" endSnd="0">
                   <a:extLst>
                     <a:ext uri="{A12FA001-AC4F-418D-AE19-62706E023703}">
                       <ahyp:hlinkClr xmlns:ahyp="http://schemas.microsoft.com/office/drawing/2018/hyperlinkcolor" val="tx"/>
@@ -9644,7 +9229,7 @@
       </p:sp>
       <p:sp>
         <p:nvSpPr>
-          <p:cNvPr id="18" name="Text 16"/>
+          <p:cNvPr id="9" name="Text 6"/>
           <p:cNvSpPr/>
           <p:nvPr/>
         </p:nvSpPr>
@@ -9675,7 +9260,7 @@
                 <a:ea typeface="Segoe UI" pitchFamily="34" charset="-122"/>
                 <a:cs typeface="Segoe UI" pitchFamily="34" charset="-120"/>
               </a:rPr>
-              <a:t>18 / 35</a:t>
+              <a:t>18 / 37</a:t>
             </a:r>
             <a:endParaRPr lang="en-US" sz="1000" dirty="0"/>
           </a:p>
@@ -9812,7 +9397,7 @@
                 <a:ea typeface="Segoe UI" pitchFamily="34" charset="-122"/>
                 <a:cs typeface="Segoe UI" pitchFamily="34" charset="-120"/>
               </a:rPr>
-              <a:t>Complétude et qualité sont deux contrôles</a:t>
+              <a:t>Le bilinguisme n’est pas une moyenne unique</a:t>
             </a:r>
             <a:endParaRPr lang="en-US" sz="2700" dirty="0"/>
           </a:p>
@@ -9820,22 +9405,98 @@
       </p:sp>
       <p:sp>
         <p:nvSpPr>
-          <p:cNvPr id="5" name="Shape 3"/>
-          <p:cNvSpPr/>
-          <p:nvPr/>
-        </p:nvSpPr>
-        <p:spPr>
-          <a:xfrm>
-            <a:off x="548640" y="1874520"/>
-            <a:ext cx="5394960" cy="3886200"/>
-          </a:xfrm>
-          <a:prstGeom prst="rect">
-            <a:avLst/>
-          </a:prstGeom>
-          <a:solidFill>
-            <a:srgbClr val="EDF4FA"/>
-          </a:solidFill>
-          <a:ln w="12700">
+          <p:cNvPr id="5" name="Text 3"/>
+          <p:cNvSpPr/>
+          <p:nvPr/>
+        </p:nvSpPr>
+        <p:spPr>
+          <a:xfrm>
+            <a:off x="594360" y="1828800"/>
+            <a:ext cx="640080" cy="594360"/>
+          </a:xfrm>
+          <a:prstGeom prst="rect">
+            <a:avLst/>
+          </a:prstGeom>
+          <a:noFill/>
+          <a:ln/>
+        </p:spPr>
+        <p:txBody>
+          <a:bodyPr wrap="square" lIns="0" tIns="0" rIns="0" bIns="0" rtlCol="0" anchor="ctr"/>
+          <a:lstStyle/>
+          <a:p>
+            <a:pPr indent="0" marL="0">
+              <a:buNone/>
+            </a:pPr>
+            <a:r>
+              <a:rPr lang="en-US" sz="1700" b="1" dirty="0">
+                <a:solidFill>
+                  <a:srgbClr val="0078D4"/>
+                </a:solidFill>
+                <a:latin typeface="Segoe UI" pitchFamily="34" charset="0"/>
+                <a:ea typeface="Segoe UI" pitchFamily="34" charset="-122"/>
+                <a:cs typeface="Segoe UI" pitchFamily="34" charset="-120"/>
+              </a:rPr>
+              <a:t>01</a:t>
+            </a:r>
+            <a:endParaRPr lang="en-US" sz="1700" dirty="0"/>
+          </a:p>
+        </p:txBody>
+      </p:sp>
+      <p:sp>
+        <p:nvSpPr>
+          <p:cNvPr id="6" name="Text 4"/>
+          <p:cNvSpPr/>
+          <p:nvPr/>
+        </p:nvSpPr>
+        <p:spPr>
+          <a:xfrm>
+            <a:off x="1325880" y="1828800"/>
+            <a:ext cx="10195560" cy="731520"/>
+          </a:xfrm>
+          <a:prstGeom prst="rect">
+            <a:avLst/>
+          </a:prstGeom>
+          <a:noFill/>
+          <a:ln/>
+        </p:spPr>
+        <p:txBody>
+          <a:bodyPr wrap="square" lIns="0" tIns="0" rIns="0" bIns="0" rtlCol="0" anchor="ctr"/>
+          <a:lstStyle/>
+          <a:p>
+            <a:pPr indent="0" marL="0">
+              <a:buNone/>
+            </a:pPr>
+            <a:r>
+              <a:rPr lang="en-US" sz="2000" dirty="0">
+                <a:solidFill>
+                  <a:srgbClr val="183449"/>
+                </a:solidFill>
+                <a:latin typeface="Segoe UI" pitchFamily="34" charset="0"/>
+                <a:ea typeface="Segoe UI" pitchFamily="34" charset="-122"/>
+                <a:cs typeface="Segoe UI" pitchFamily="34" charset="-120"/>
+              </a:rPr>
+              <a:t>Convertir une source en essais EN et FR distincts.</a:t>
+            </a:r>
+            <a:endParaRPr lang="en-US" sz="2000" dirty="0"/>
+          </a:p>
+        </p:txBody>
+      </p:sp>
+      <p:sp>
+        <p:nvSpPr>
+          <p:cNvPr id="7" name="Shape 5"/>
+          <p:cNvSpPr/>
+          <p:nvPr/>
+        </p:nvSpPr>
+        <p:spPr>
+          <a:xfrm>
+            <a:off x="1325880" y="2660904"/>
+            <a:ext cx="10149840" cy="0"/>
+          </a:xfrm>
+          <a:prstGeom prst="line">
+            <a:avLst/>
+          </a:prstGeom>
+          <a:noFill/>
+          <a:ln w="6350">
             <a:solidFill>
               <a:srgbClr val="DCE5ED"/>
             </a:solidFill>
@@ -9845,30 +9506,30 @@
       </p:sp>
       <p:sp>
         <p:nvSpPr>
-          <p:cNvPr id="6" name="Text 4"/>
-          <p:cNvSpPr/>
-          <p:nvPr/>
-        </p:nvSpPr>
-        <p:spPr>
-          <a:xfrm>
-            <a:off x="822960" y="2148840"/>
-            <a:ext cx="4846320" cy="640080"/>
-          </a:xfrm>
-          <a:prstGeom prst="rect">
-            <a:avLst/>
-          </a:prstGeom>
-          <a:noFill/>
-          <a:ln/>
-        </p:spPr>
-        <p:txBody>
-          <a:bodyPr wrap="square" lIns="0" tIns="0" rIns="0" bIns="0" rtlCol="0" anchor="ctr"/>
-          <a:lstStyle/>
-          <a:p>
-            <a:pPr indent="0" marL="0">
-              <a:buNone/>
-            </a:pPr>
-            <a:r>
-              <a:rPr lang="en-US" sz="2300" b="1" dirty="0">
+          <p:cNvPr id="8" name="Text 6"/>
+          <p:cNvSpPr/>
+          <p:nvPr/>
+        </p:nvSpPr>
+        <p:spPr>
+          <a:xfrm>
+            <a:off x="594360" y="2770632"/>
+            <a:ext cx="640080" cy="594360"/>
+          </a:xfrm>
+          <a:prstGeom prst="rect">
+            <a:avLst/>
+          </a:prstGeom>
+          <a:noFill/>
+          <a:ln/>
+        </p:spPr>
+        <p:txBody>
+          <a:bodyPr wrap="square" lIns="0" tIns="0" rIns="0" bIns="0" rtlCol="0" anchor="ctr"/>
+          <a:lstStyle/>
+          <a:p>
+            <a:pPr indent="0" marL="0">
+              <a:buNone/>
+            </a:pPr>
+            <a:r>
+              <a:rPr lang="en-US" sz="1700" b="1" dirty="0">
                 <a:solidFill>
                   <a:srgbClr val="0078D4"/>
                 </a:solidFill>
@@ -9876,38 +9537,38 @@
                 <a:ea typeface="Segoe UI" pitchFamily="34" charset="-122"/>
                 <a:cs typeface="Segoe UI" pitchFamily="34" charset="-120"/>
               </a:rPr>
-              <a:t>Complétude</a:t>
-            </a:r>
-            <a:endParaRPr lang="en-US" sz="2300" dirty="0"/>
-          </a:p>
-        </p:txBody>
-      </p:sp>
-      <p:sp>
-        <p:nvSpPr>
-          <p:cNvPr id="7" name="Text 5"/>
-          <p:cNvSpPr/>
-          <p:nvPr/>
-        </p:nvSpPr>
-        <p:spPr>
-          <a:xfrm>
-            <a:off x="822960" y="3017520"/>
-            <a:ext cx="4846320" cy="594360"/>
-          </a:xfrm>
-          <a:prstGeom prst="rect">
-            <a:avLst/>
-          </a:prstGeom>
-          <a:noFill/>
-          <a:ln/>
-        </p:spPr>
-        <p:txBody>
-          <a:bodyPr wrap="square" lIns="0" tIns="0" rIns="0" bIns="0" rtlCol="0" anchor="ctr"/>
-          <a:lstStyle/>
-          <a:p>
-            <a:pPr indent="0" marL="0">
-              <a:buNone/>
-            </a:pPr>
-            <a:r>
-              <a:rPr lang="en-US" sz="1900" dirty="0">
+              <a:t>02</a:t>
+            </a:r>
+            <a:endParaRPr lang="en-US" sz="1700" dirty="0"/>
+          </a:p>
+        </p:txBody>
+      </p:sp>
+      <p:sp>
+        <p:nvSpPr>
+          <p:cNvPr id="9" name="Text 7"/>
+          <p:cNvSpPr/>
+          <p:nvPr/>
+        </p:nvSpPr>
+        <p:spPr>
+          <a:xfrm>
+            <a:off x="1325880" y="2770632"/>
+            <a:ext cx="10195560" cy="731520"/>
+          </a:xfrm>
+          <a:prstGeom prst="rect">
+            <a:avLst/>
+          </a:prstGeom>
+          <a:noFill/>
+          <a:ln/>
+        </p:spPr>
+        <p:txBody>
+          <a:bodyPr wrap="square" lIns="0" tIns="0" rIns="0" bIns="0" rtlCol="0" anchor="ctr"/>
+          <a:lstStyle/>
+          <a:p>
+            <a:pPr indent="0" marL="0">
+              <a:buNone/>
+            </a:pPr>
+            <a:r>
+              <a:rPr lang="en-US" sz="2000" dirty="0">
                 <a:solidFill>
                   <a:srgbClr val="183449"/>
                 </a:solidFill>
@@ -9915,87 +9576,9 @@
                 <a:ea typeface="Segoe UI" pitchFamily="34" charset="-122"/>
                 <a:cs typeface="Segoe UI" pitchFamily="34" charset="-120"/>
               </a:rPr>
-              <a:t>État terminal completed</a:t>
-            </a:r>
-            <a:endParaRPr lang="en-US" sz="1900" dirty="0"/>
-          </a:p>
-        </p:txBody>
-      </p:sp>
-      <p:sp>
-        <p:nvSpPr>
-          <p:cNvPr id="8" name="Text 6"/>
-          <p:cNvSpPr/>
-          <p:nvPr/>
-        </p:nvSpPr>
-        <p:spPr>
-          <a:xfrm>
-            <a:off x="822960" y="3794760"/>
-            <a:ext cx="4846320" cy="594360"/>
-          </a:xfrm>
-          <a:prstGeom prst="rect">
-            <a:avLst/>
-          </a:prstGeom>
-          <a:noFill/>
-          <a:ln/>
-        </p:spPr>
-        <p:txBody>
-          <a:bodyPr wrap="square" lIns="0" tIns="0" rIns="0" bIns="0" rtlCol="0" anchor="ctr"/>
-          <a:lstStyle/>
-          <a:p>
-            <a:pPr indent="0" marL="0">
-              <a:buNone/>
-            </a:pPr>
-            <a:r>
-              <a:rPr lang="en-US" sz="1900" dirty="0">
-                <a:solidFill>
-                  <a:srgbClr val="183449"/>
-                </a:solidFill>
-                <a:latin typeface="Segoe UI" pitchFamily="34" charset="0"/>
-                <a:ea typeface="Segoe UI" pitchFamily="34" charset="-122"/>
-                <a:cs typeface="Segoe UI" pitchFamily="34" charset="-120"/>
-              </a:rPr>
-              <a:t>Lignes et métriques uniques attendues</a:t>
-            </a:r>
-            <a:endParaRPr lang="en-US" sz="1900" dirty="0"/>
-          </a:p>
-        </p:txBody>
-      </p:sp>
-      <p:sp>
-        <p:nvSpPr>
-          <p:cNvPr id="9" name="Text 7"/>
-          <p:cNvSpPr/>
-          <p:nvPr/>
-        </p:nvSpPr>
-        <p:spPr>
-          <a:xfrm>
-            <a:off x="822960" y="4572000"/>
-            <a:ext cx="4846320" cy="594360"/>
-          </a:xfrm>
-          <a:prstGeom prst="rect">
-            <a:avLst/>
-          </a:prstGeom>
-          <a:noFill/>
-          <a:ln/>
-        </p:spPr>
-        <p:txBody>
-          <a:bodyPr wrap="square" lIns="0" tIns="0" rIns="0" bIns="0" rtlCol="0" anchor="ctr"/>
-          <a:lstStyle/>
-          <a:p>
-            <a:pPr indent="0" marL="0">
-              <a:buNone/>
-            </a:pPr>
-            <a:r>
-              <a:rPr lang="en-US" sz="1900" dirty="0">
-                <a:solidFill>
-                  <a:srgbClr val="183449"/>
-                </a:solidFill>
-                <a:latin typeface="Segoe UI" pitchFamily="34" charset="0"/>
-                <a:ea typeface="Segoe UI" pitchFamily="34" charset="-122"/>
-                <a:cs typeface="Segoe UI" pitchFamily="34" charset="-120"/>
-              </a:rPr>
-              <a:t>Aucune erreur ni exclusion</a:t>
-            </a:r>
-            <a:endParaRPr lang="en-US" sz="1900" dirty="0"/>
+              <a:t>Texte sélectionné en chaîne, pas carte bilingue brute.</a:t>
+            </a:r>
+            <a:endParaRPr lang="en-US" sz="2000" dirty="0"/>
           </a:p>
         </p:txBody>
       </p:sp>
@@ -10007,16 +9590,14 @@
         </p:nvSpPr>
         <p:spPr>
           <a:xfrm>
-            <a:off x="6217920" y="1874520"/>
-            <a:ext cx="5394960" cy="3886200"/>
-          </a:xfrm>
-          <a:prstGeom prst="rect">
-            <a:avLst/>
-          </a:prstGeom>
-          <a:solidFill>
-            <a:srgbClr val="EDF4FA"/>
-          </a:solidFill>
-          <a:ln w="12700">
+            <a:off x="1325880" y="3602736"/>
+            <a:ext cx="10149840" cy="0"/>
+          </a:xfrm>
+          <a:prstGeom prst="line">
+            <a:avLst/>
+          </a:prstGeom>
+          <a:noFill/>
+          <a:ln w="6350">
             <a:solidFill>
               <a:srgbClr val="DCE5ED"/>
             </a:solidFill>
@@ -10032,24 +9613,24 @@
         </p:nvSpPr>
         <p:spPr>
           <a:xfrm>
-            <a:off x="6492240" y="2148840"/>
-            <a:ext cx="4846320" cy="640080"/>
-          </a:xfrm>
-          <a:prstGeom prst="rect">
-            <a:avLst/>
-          </a:prstGeom>
-          <a:noFill/>
-          <a:ln/>
-        </p:spPr>
-        <p:txBody>
-          <a:bodyPr wrap="square" lIns="0" tIns="0" rIns="0" bIns="0" rtlCol="0" anchor="ctr"/>
-          <a:lstStyle/>
-          <a:p>
-            <a:pPr indent="0" marL="0">
-              <a:buNone/>
-            </a:pPr>
-            <a:r>
-              <a:rPr lang="en-US" sz="2300" b="1" dirty="0">
+            <a:off x="594360" y="3712464"/>
+            <a:ext cx="640080" cy="594360"/>
+          </a:xfrm>
+          <a:prstGeom prst="rect">
+            <a:avLst/>
+          </a:prstGeom>
+          <a:noFill/>
+          <a:ln/>
+        </p:spPr>
+        <p:txBody>
+          <a:bodyPr wrap="square" lIns="0" tIns="0" rIns="0" bIns="0" rtlCol="0" anchor="ctr"/>
+          <a:lstStyle/>
+          <a:p>
+            <a:pPr indent="0" marL="0">
+              <a:buNone/>
+            </a:pPr>
+            <a:r>
+              <a:rPr lang="en-US" sz="1700" b="1" dirty="0">
                 <a:solidFill>
                   <a:srgbClr val="0078D4"/>
                 </a:solidFill>
@@ -10057,9 +9638,9 @@
                 <a:ea typeface="Segoe UI" pitchFamily="34" charset="-122"/>
                 <a:cs typeface="Segoe UI" pitchFamily="34" charset="-120"/>
               </a:rPr>
-              <a:t>Qualité</a:t>
-            </a:r>
-            <a:endParaRPr lang="en-US" sz="2300" dirty="0"/>
+              <a:t>03</a:t>
+            </a:r>
+            <a:endParaRPr lang="en-US" sz="1700" dirty="0"/>
           </a:p>
         </p:txBody>
       </p:sp>
@@ -10071,24 +9652,24 @@
         </p:nvSpPr>
         <p:spPr>
           <a:xfrm>
-            <a:off x="6492240" y="3017520"/>
-            <a:ext cx="4846320" cy="594360"/>
-          </a:xfrm>
-          <a:prstGeom prst="rect">
-            <a:avLst/>
-          </a:prstGeom>
-          <a:noFill/>
-          <a:ln/>
-        </p:spPr>
-        <p:txBody>
-          <a:bodyPr wrap="square" lIns="0" tIns="0" rIns="0" bIns="0" rtlCol="0" anchor="ctr"/>
-          <a:lstStyle/>
-          <a:p>
-            <a:pPr indent="0" marL="0">
-              <a:buNone/>
-            </a:pPr>
-            <a:r>
-              <a:rPr lang="en-US" sz="1900" dirty="0">
+            <a:off x="1325880" y="3712464"/>
+            <a:ext cx="10195560" cy="731520"/>
+          </a:xfrm>
+          <a:prstGeom prst="rect">
+            <a:avLst/>
+          </a:prstGeom>
+          <a:noFill/>
+          <a:ln/>
+        </p:spPr>
+        <p:txBody>
+          <a:bodyPr wrap="square" lIns="0" tIns="0" rIns="0" bIns="0" rtlCol="0" anchor="ctr"/>
+          <a:lstStyle/>
+          <a:p>
+            <a:pPr indent="0" marL="0">
+              <a:buNone/>
+            </a:pPr>
+            <a:r>
+              <a:rPr lang="en-US" sz="2000" dirty="0">
                 <a:solidFill>
                   <a:srgbClr val="183449"/>
                 </a:solidFill>
@@ -10096,38 +9677,100 @@
                 <a:ea typeface="Segoe UI" pitchFamily="34" charset="-122"/>
                 <a:cs typeface="Segoe UI" pitchFamily="34" charset="-120"/>
               </a:rPr>
-              <a:t>Seuils par métrique calibrés</a:t>
-            </a:r>
-            <a:endParaRPr lang="en-US" sz="1900" dirty="0"/>
-          </a:p>
-        </p:txBody>
-      </p:sp>
-      <p:sp>
-        <p:nvSpPr>
-          <p:cNvPr id="13" name="Text 11"/>
-          <p:cNvSpPr/>
-          <p:nvPr/>
-        </p:nvSpPr>
-        <p:spPr>
-          <a:xfrm>
-            <a:off x="6492240" y="3794760"/>
-            <a:ext cx="4846320" cy="594360"/>
-          </a:xfrm>
-          <a:prstGeom prst="rect">
-            <a:avLst/>
-          </a:prstGeom>
-          <a:noFill/>
-          <a:ln/>
-        </p:spPr>
-        <p:txBody>
-          <a:bodyPr wrap="square" lIns="0" tIns="0" rIns="0" bIns="0" rtlCol="0" anchor="ctr"/>
-          <a:lstStyle/>
-          <a:p>
-            <a:pPr indent="0" marL="0">
-              <a:buNone/>
-            </a:pPr>
-            <a:r>
-              <a:rPr lang="en-US" sz="1900" dirty="0">
+              <a:t>Examiner défauts et mentions obligatoires par langue.</a:t>
+            </a:r>
+            <a:endParaRPr lang="en-US" sz="2000" dirty="0"/>
+          </a:p>
+        </p:txBody>
+      </p:sp>
+      <p:sp>
+        <p:nvSpPr>
+          <p:cNvPr id="13" name="Shape 11"/>
+          <p:cNvSpPr/>
+          <p:nvPr/>
+        </p:nvSpPr>
+        <p:spPr>
+          <a:xfrm>
+            <a:off x="1325880" y="4544568"/>
+            <a:ext cx="10149840" cy="0"/>
+          </a:xfrm>
+          <a:prstGeom prst="line">
+            <a:avLst/>
+          </a:prstGeom>
+          <a:noFill/>
+          <a:ln w="6350">
+            <a:solidFill>
+              <a:srgbClr val="DCE5ED"/>
+            </a:solidFill>
+            <a:prstDash val="solid"/>
+          </a:ln>
+        </p:spPr>
+      </p:sp>
+      <p:sp>
+        <p:nvSpPr>
+          <p:cNvPr id="14" name="Text 12"/>
+          <p:cNvSpPr/>
+          <p:nvPr/>
+        </p:nvSpPr>
+        <p:spPr>
+          <a:xfrm>
+            <a:off x="594360" y="4654296"/>
+            <a:ext cx="640080" cy="594360"/>
+          </a:xfrm>
+          <a:prstGeom prst="rect">
+            <a:avLst/>
+          </a:prstGeom>
+          <a:noFill/>
+          <a:ln/>
+        </p:spPr>
+        <p:txBody>
+          <a:bodyPr wrap="square" lIns="0" tIns="0" rIns="0" bIns="0" rtlCol="0" anchor="ctr"/>
+          <a:lstStyle/>
+          <a:p>
+            <a:pPr indent="0" marL="0">
+              <a:buNone/>
+            </a:pPr>
+            <a:r>
+              <a:rPr lang="en-US" sz="1700" b="1" dirty="0">
+                <a:solidFill>
+                  <a:srgbClr val="0078D4"/>
+                </a:solidFill>
+                <a:latin typeface="Segoe UI" pitchFamily="34" charset="0"/>
+                <a:ea typeface="Segoe UI" pitchFamily="34" charset="-122"/>
+                <a:cs typeface="Segoe UI" pitchFamily="34" charset="-120"/>
+              </a:rPr>
+              <a:t>04</a:t>
+            </a:r>
+            <a:endParaRPr lang="en-US" sz="1700" dirty="0"/>
+          </a:p>
+        </p:txBody>
+      </p:sp>
+      <p:sp>
+        <p:nvSpPr>
+          <p:cNvPr id="15" name="Text 13"/>
+          <p:cNvSpPr/>
+          <p:nvPr/>
+        </p:nvSpPr>
+        <p:spPr>
+          <a:xfrm>
+            <a:off x="1325880" y="4654296"/>
+            <a:ext cx="10195560" cy="731520"/>
+          </a:xfrm>
+          <a:prstGeom prst="rect">
+            <a:avLst/>
+          </a:prstGeom>
+          <a:noFill/>
+          <a:ln/>
+        </p:spPr>
+        <p:txBody>
+          <a:bodyPr wrap="square" lIns="0" tIns="0" rIns="0" bIns="0" rtlCol="0" anchor="ctr"/>
+          <a:lstStyle/>
+          <a:p>
+            <a:pPr indent="0" marL="0">
+              <a:buNone/>
+            </a:pPr>
+            <a:r>
+              <a:rPr lang="en-US" sz="2000" dirty="0">
                 <a:solidFill>
                   <a:srgbClr val="183449"/>
                 </a:solidFill>
@@ -10135,54 +9778,38 @@
                 <a:ea typeface="Segoe UI" pitchFamily="34" charset="-122"/>
                 <a:cs typeface="Segoe UI" pitchFamily="34" charset="-120"/>
               </a:rPr>
-              <a:t>Faux positifs/négatifs par segment</a:t>
-            </a:r>
-            <a:endParaRPr lang="en-US" sz="1900" dirty="0"/>
-          </a:p>
-        </p:txBody>
-      </p:sp>
-      <p:sp>
-        <p:nvSpPr>
-          <p:cNvPr id="14" name="Text 12"/>
-          <p:cNvSpPr/>
-          <p:nvPr/>
-        </p:nvSpPr>
-        <p:spPr>
-          <a:xfrm>
-            <a:off x="6492240" y="4572000"/>
-            <a:ext cx="4846320" cy="594360"/>
-          </a:xfrm>
-          <a:prstGeom prst="rect">
-            <a:avLst/>
-          </a:prstGeom>
-          <a:noFill/>
-          <a:ln/>
-        </p:spPr>
-        <p:txBody>
-          <a:bodyPr wrap="square" lIns="0" tIns="0" rIns="0" bIns="0" rtlCol="0" anchor="ctr"/>
-          <a:lstStyle/>
-          <a:p>
-            <a:pPr indent="0" marL="0">
-              <a:buNone/>
-            </a:pPr>
-            <a:r>
-              <a:rPr lang="en-US" sz="1900" dirty="0">
-                <a:solidFill>
-                  <a:srgbClr val="183449"/>
-                </a:solidFill>
-                <a:latin typeface="Segoe UI" pitchFamily="34" charset="0"/>
-                <a:ea typeface="Segoe UI" pitchFamily="34" charset="-122"/>
-                <a:cs typeface="Segoe UI" pitchFamily="34" charset="-120"/>
-              </a:rPr>
-              <a:t>Révision humaine et incertitude</a:t>
-            </a:r>
-            <a:endParaRPr lang="en-US" sz="1900" dirty="0"/>
-          </a:p>
-        </p:txBody>
-      </p:sp>
-      <p:sp>
-        <p:nvSpPr>
-          <p:cNvPr id="15" name="Text 13">
+              <a:t>Une moyenne globale peut masquer une régression française.</a:t>
+            </a:r>
+            <a:endParaRPr lang="en-US" sz="2000" dirty="0"/>
+          </a:p>
+        </p:txBody>
+      </p:sp>
+      <p:sp>
+        <p:nvSpPr>
+          <p:cNvPr id="16" name="Shape 14"/>
+          <p:cNvSpPr/>
+          <p:nvPr/>
+        </p:nvSpPr>
+        <p:spPr>
+          <a:xfrm>
+            <a:off x="1325880" y="5486400"/>
+            <a:ext cx="10149840" cy="0"/>
+          </a:xfrm>
+          <a:prstGeom prst="line">
+            <a:avLst/>
+          </a:prstGeom>
+          <a:noFill/>
+          <a:ln w="6350">
+            <a:solidFill>
+              <a:srgbClr val="DCE5ED"/>
+            </a:solidFill>
+            <a:prstDash val="solid"/>
+          </a:ln>
+        </p:spPr>
+      </p:sp>
+      <p:sp>
+        <p:nvSpPr>
+          <p:cNvPr id="17" name="Text 15">
             <a:hlinkClick r:id="rId1" tooltip=""/>
           </p:cNvPr>
           <p:cNvSpPr/>
@@ -10230,7 +9857,7 @@
       </p:sp>
       <p:sp>
         <p:nvSpPr>
-          <p:cNvPr id="16" name="Text 14"/>
+          <p:cNvPr id="18" name="Text 16"/>
           <p:cNvSpPr/>
           <p:nvPr/>
         </p:nvSpPr>
@@ -10261,7 +9888,7 @@
                 <a:ea typeface="Segoe UI" pitchFamily="34" charset="-122"/>
                 <a:cs typeface="Segoe UI" pitchFamily="34" charset="-120"/>
               </a:rPr>
-              <a:t>19 / 35</a:t>
+              <a:t>19 / 37</a:t>
             </a:r>
             <a:endParaRPr lang="en-US" sz="1000" dirty="0"/>
           </a:p>
@@ -10889,7 +10516,7 @@
                 <a:ea typeface="Segoe UI" pitchFamily="34" charset="-122"/>
                 <a:cs typeface="Segoe UI" pitchFamily="34" charset="-120"/>
               </a:rPr>
-              <a:t>2 / 35</a:t>
+              <a:t>2 / 37</a:t>
             </a:r>
             <a:endParaRPr lang="en-US" sz="1000" dirty="0"/>
           </a:p>
@@ -11026,7 +10653,7 @@
                 <a:ea typeface="Segoe UI" pitchFamily="34" charset="-122"/>
                 <a:cs typeface="Segoe UI" pitchFamily="34" charset="-120"/>
               </a:rPr>
-              <a:t>Comprendre la politique existante</a:t>
+              <a:t>Provenance : une étiquette n’est pas un épinglage</a:t>
             </a:r>
             <a:endParaRPr lang="en-US" sz="2700" dirty="0"/>
           </a:p>
@@ -11104,7 +10731,7 @@
                 <a:ea typeface="Segoe UI" pitchFamily="34" charset="-122"/>
                 <a:cs typeface="Segoe UI" pitchFamily="34" charset="-120"/>
               </a:rPr>
-              <a:t>Déterminisme et preuve native incomplète bloquent.</a:t>
+              <a:t>--version consigne seulement le déploiement observé.</a:t>
             </a:r>
             <a:endParaRPr lang="en-US" sz="2000" dirty="0"/>
           </a:p>
@@ -11205,7 +10832,7 @@
                 <a:ea typeface="Segoe UI" pitchFamily="34" charset="-122"/>
                 <a:cs typeface="Segoe UI" pitchFamily="34" charset="-120"/>
               </a:rPr>
-              <a:t>Les notes natives complètes restent consultatives dans le workflow.</a:t>
+              <a:t>Réserver une fenêtre stable; vérifier version avant et après.</a:t>
             </a:r>
             <a:endParaRPr lang="en-US" sz="2000" dirty="0"/>
           </a:p>
@@ -11306,7 +10933,7 @@
                 <a:ea typeface="Segoe UI" pitchFamily="34" charset="-122"/>
                 <a:cs typeface="Segoe UI" pitchFamily="34" charset="-120"/>
               </a:rPr>
-              <a:t>--minimum-pass-rate 1.0 signifie 100 % des cas, pas une note 1/5.</a:t>
+              <a:t>Figer source, jeu, grille, évaluateur et modèle juge.</a:t>
             </a:r>
             <a:endParaRPr lang="en-US" sz="2000" dirty="0"/>
           </a:p>
@@ -11407,7 +11034,7 @@
                 <a:ea typeface="Segoe UI" pitchFamily="34" charset="-122"/>
                 <a:cs typeface="Segoe UI" pitchFamily="34" charset="-120"/>
               </a:rPr>
-              <a:t>Approbation protégée et identité réelle restent obligatoires.</a:t>
+              <a:t>Garder captures, IDs natifs/réponse et empreintes.</a:t>
             </a:r>
             <a:endParaRPr lang="en-US" sz="2000" dirty="0"/>
           </a:p>
@@ -11517,7 +11144,7 @@
                 <a:ea typeface="Segoe UI" pitchFamily="34" charset="-122"/>
                 <a:cs typeface="Segoe UI" pitchFamily="34" charset="-120"/>
               </a:rPr>
-              <a:t>20 / 35</a:t>
+              <a:t>20 / 37</a:t>
             </a:r>
             <a:endParaRPr lang="en-US" sz="1000" dirty="0"/>
           </a:p>
@@ -11654,7 +11281,7 @@
                 <a:ea typeface="Segoe UI" pitchFamily="34" charset="-122"/>
                 <a:cs typeface="Segoe UI" pitchFamily="34" charset="-120"/>
               </a:rPr>
-              <a:t>Cas réel : panne service, pas défaut modèle</a:t>
+              <a:t>Complétude et qualité sont deux contrôles</a:t>
             </a:r>
             <a:endParaRPr lang="en-US" sz="2700" dirty="0"/>
           </a:p>
@@ -11662,98 +11289,22 @@
       </p:sp>
       <p:sp>
         <p:nvSpPr>
-          <p:cNvPr id="5" name="Text 3"/>
-          <p:cNvSpPr/>
-          <p:nvPr/>
-        </p:nvSpPr>
-        <p:spPr>
-          <a:xfrm>
-            <a:off x="594360" y="1828800"/>
-            <a:ext cx="640080" cy="594360"/>
-          </a:xfrm>
-          <a:prstGeom prst="rect">
-            <a:avLst/>
-          </a:prstGeom>
-          <a:noFill/>
-          <a:ln/>
-        </p:spPr>
-        <p:txBody>
-          <a:bodyPr wrap="square" lIns="0" tIns="0" rIns="0" bIns="0" rtlCol="0" anchor="ctr"/>
-          <a:lstStyle/>
-          <a:p>
-            <a:pPr indent="0" marL="0">
-              <a:buNone/>
-            </a:pPr>
-            <a:r>
-              <a:rPr lang="en-US" sz="1700" b="1" dirty="0">
-                <a:solidFill>
-                  <a:srgbClr val="0078D4"/>
-                </a:solidFill>
-                <a:latin typeface="Segoe UI" pitchFamily="34" charset="0"/>
-                <a:ea typeface="Segoe UI" pitchFamily="34" charset="-122"/>
-                <a:cs typeface="Segoe UI" pitchFamily="34" charset="-120"/>
-              </a:rPr>
-              <a:t>01</a:t>
-            </a:r>
-            <a:endParaRPr lang="en-US" sz="1700" dirty="0"/>
-          </a:p>
-        </p:txBody>
-      </p:sp>
-      <p:sp>
-        <p:nvSpPr>
-          <p:cNvPr id="6" name="Text 4"/>
-          <p:cNvSpPr/>
-          <p:nvPr/>
-        </p:nvSpPr>
-        <p:spPr>
-          <a:xfrm>
-            <a:off x="1325880" y="1828800"/>
-            <a:ext cx="10195560" cy="731520"/>
-          </a:xfrm>
-          <a:prstGeom prst="rect">
-            <a:avLst/>
-          </a:prstGeom>
-          <a:noFill/>
-          <a:ln/>
-        </p:spPr>
-        <p:txBody>
-          <a:bodyPr wrap="square" lIns="0" tIns="0" rIns="0" bIns="0" rtlCol="0" anchor="ctr"/>
-          <a:lstStyle/>
-          <a:p>
-            <a:pPr indent="0" marL="0">
-              <a:buNone/>
-            </a:pPr>
-            <a:r>
-              <a:rPr lang="en-US" sz="2000" dirty="0">
-                <a:solidFill>
-                  <a:srgbClr val="183449"/>
-                </a:solidFill>
-                <a:latin typeface="Segoe UI" pitchFamily="34" charset="0"/>
-                <a:ea typeface="Segoe UI" pitchFamily="34" charset="-122"/>
-                <a:cs typeface="Segoe UI" pitchFamily="34" charset="-120"/>
-              </a:rPr>
-              <a:t>Livraison 39527950931, essai 1 : SystemError, aucune ligne notée.</a:t>
-            </a:r>
-            <a:endParaRPr lang="en-US" sz="2000" dirty="0"/>
-          </a:p>
-        </p:txBody>
-      </p:sp>
-      <p:sp>
-        <p:nvSpPr>
-          <p:cNvPr id="7" name="Shape 5"/>
-          <p:cNvSpPr/>
-          <p:nvPr/>
-        </p:nvSpPr>
-        <p:spPr>
-          <a:xfrm>
-            <a:off x="1325880" y="2660904"/>
-            <a:ext cx="10149840" cy="0"/>
-          </a:xfrm>
-          <a:prstGeom prst="line">
-            <a:avLst/>
-          </a:prstGeom>
-          <a:noFill/>
-          <a:ln w="6350">
+          <p:cNvPr id="5" name="Shape 3"/>
+          <p:cNvSpPr/>
+          <p:nvPr/>
+        </p:nvSpPr>
+        <p:spPr>
+          <a:xfrm>
+            <a:off x="548640" y="1874520"/>
+            <a:ext cx="5394960" cy="3886200"/>
+          </a:xfrm>
+          <a:prstGeom prst="rect">
+            <a:avLst/>
+          </a:prstGeom>
+          <a:solidFill>
+            <a:srgbClr val="EDF4FA"/>
+          </a:solidFill>
+          <a:ln w="12700">
             <a:solidFill>
               <a:srgbClr val="DCE5ED"/>
             </a:solidFill>
@@ -11763,40 +11314,118 @@
       </p:sp>
       <p:sp>
         <p:nvSpPr>
+          <p:cNvPr id="6" name="Text 4"/>
+          <p:cNvSpPr/>
+          <p:nvPr/>
+        </p:nvSpPr>
+        <p:spPr>
+          <a:xfrm>
+            <a:off x="822960" y="2148840"/>
+            <a:ext cx="4846320" cy="640080"/>
+          </a:xfrm>
+          <a:prstGeom prst="rect">
+            <a:avLst/>
+          </a:prstGeom>
+          <a:noFill/>
+          <a:ln/>
+        </p:spPr>
+        <p:txBody>
+          <a:bodyPr wrap="square" lIns="0" tIns="0" rIns="0" bIns="0" rtlCol="0" anchor="ctr"/>
+          <a:lstStyle/>
+          <a:p>
+            <a:pPr indent="0" marL="0">
+              <a:buNone/>
+            </a:pPr>
+            <a:r>
+              <a:rPr lang="en-US" sz="2300" b="1" dirty="0">
+                <a:solidFill>
+                  <a:srgbClr val="0078D4"/>
+                </a:solidFill>
+                <a:latin typeface="Segoe UI" pitchFamily="34" charset="0"/>
+                <a:ea typeface="Segoe UI" pitchFamily="34" charset="-122"/>
+                <a:cs typeface="Segoe UI" pitchFamily="34" charset="-120"/>
+              </a:rPr>
+              <a:t>Complétude</a:t>
+            </a:r>
+            <a:endParaRPr lang="en-US" sz="2300" dirty="0"/>
+          </a:p>
+        </p:txBody>
+      </p:sp>
+      <p:sp>
+        <p:nvSpPr>
+          <p:cNvPr id="7" name="Text 5"/>
+          <p:cNvSpPr/>
+          <p:nvPr/>
+        </p:nvSpPr>
+        <p:spPr>
+          <a:xfrm>
+            <a:off x="822960" y="3017520"/>
+            <a:ext cx="4846320" cy="594360"/>
+          </a:xfrm>
+          <a:prstGeom prst="rect">
+            <a:avLst/>
+          </a:prstGeom>
+          <a:noFill/>
+          <a:ln/>
+        </p:spPr>
+        <p:txBody>
+          <a:bodyPr wrap="square" lIns="0" tIns="0" rIns="0" bIns="0" rtlCol="0" anchor="ctr"/>
+          <a:lstStyle/>
+          <a:p>
+            <a:pPr indent="0" marL="0">
+              <a:buNone/>
+            </a:pPr>
+            <a:r>
+              <a:rPr lang="en-US" sz="1900" dirty="0">
+                <a:solidFill>
+                  <a:srgbClr val="183449"/>
+                </a:solidFill>
+                <a:latin typeface="Segoe UI" pitchFamily="34" charset="0"/>
+                <a:ea typeface="Segoe UI" pitchFamily="34" charset="-122"/>
+                <a:cs typeface="Segoe UI" pitchFamily="34" charset="-120"/>
+              </a:rPr>
+              <a:t>État terminal completed</a:t>
+            </a:r>
+            <a:endParaRPr lang="en-US" sz="1900" dirty="0"/>
+          </a:p>
+        </p:txBody>
+      </p:sp>
+      <p:sp>
+        <p:nvSpPr>
           <p:cNvPr id="8" name="Text 6"/>
           <p:cNvSpPr/>
           <p:nvPr/>
         </p:nvSpPr>
         <p:spPr>
           <a:xfrm>
-            <a:off x="594360" y="2770632"/>
-            <a:ext cx="640080" cy="594360"/>
-          </a:xfrm>
-          <a:prstGeom prst="rect">
-            <a:avLst/>
-          </a:prstGeom>
-          <a:noFill/>
-          <a:ln/>
-        </p:spPr>
-        <p:txBody>
-          <a:bodyPr wrap="square" lIns="0" tIns="0" rIns="0" bIns="0" rtlCol="0" anchor="ctr"/>
-          <a:lstStyle/>
-          <a:p>
-            <a:pPr indent="0" marL="0">
-              <a:buNone/>
-            </a:pPr>
-            <a:r>
-              <a:rPr lang="en-US" sz="1700" b="1" dirty="0">
-                <a:solidFill>
-                  <a:srgbClr val="0078D4"/>
-                </a:solidFill>
-                <a:latin typeface="Segoe UI" pitchFamily="34" charset="0"/>
-                <a:ea typeface="Segoe UI" pitchFamily="34" charset="-122"/>
-                <a:cs typeface="Segoe UI" pitchFamily="34" charset="-120"/>
-              </a:rPr>
-              <a:t>02</a:t>
-            </a:r>
-            <a:endParaRPr lang="en-US" sz="1700" dirty="0"/>
+            <a:off x="822960" y="3794760"/>
+            <a:ext cx="4846320" cy="594360"/>
+          </a:xfrm>
+          <a:prstGeom prst="rect">
+            <a:avLst/>
+          </a:prstGeom>
+          <a:noFill/>
+          <a:ln/>
+        </p:spPr>
+        <p:txBody>
+          <a:bodyPr wrap="square" lIns="0" tIns="0" rIns="0" bIns="0" rtlCol="0" anchor="ctr"/>
+          <a:lstStyle/>
+          <a:p>
+            <a:pPr indent="0" marL="0">
+              <a:buNone/>
+            </a:pPr>
+            <a:r>
+              <a:rPr lang="en-US" sz="1900" dirty="0">
+                <a:solidFill>
+                  <a:srgbClr val="183449"/>
+                </a:solidFill>
+                <a:latin typeface="Segoe UI" pitchFamily="34" charset="0"/>
+                <a:ea typeface="Segoe UI" pitchFamily="34" charset="-122"/>
+                <a:cs typeface="Segoe UI" pitchFamily="34" charset="-120"/>
+              </a:rPr>
+              <a:t>Lignes et métriques uniques attendues</a:t>
+            </a:r>
+            <a:endParaRPr lang="en-US" sz="1900" dirty="0"/>
           </a:p>
         </p:txBody>
       </p:sp>
@@ -11808,24 +11437,24 @@
         </p:nvSpPr>
         <p:spPr>
           <a:xfrm>
-            <a:off x="1325880" y="2770632"/>
-            <a:ext cx="10195560" cy="731520"/>
-          </a:xfrm>
-          <a:prstGeom prst="rect">
-            <a:avLst/>
-          </a:prstGeom>
-          <a:noFill/>
-          <a:ln/>
-        </p:spPr>
-        <p:txBody>
-          <a:bodyPr wrap="square" lIns="0" tIns="0" rIns="0" bIns="0" rtlCol="0" anchor="ctr"/>
-          <a:lstStyle/>
-          <a:p>
-            <a:pPr indent="0" marL="0">
-              <a:buNone/>
-            </a:pPr>
-            <a:r>
-              <a:rPr lang="en-US" sz="2000" dirty="0">
+            <a:off x="822960" y="4572000"/>
+            <a:ext cx="4846320" cy="594360"/>
+          </a:xfrm>
+          <a:prstGeom prst="rect">
+            <a:avLst/>
+          </a:prstGeom>
+          <a:noFill/>
+          <a:ln/>
+        </p:spPr>
+        <p:txBody>
+          <a:bodyPr wrap="square" lIns="0" tIns="0" rIns="0" bIns="0" rtlCol="0" anchor="ctr"/>
+          <a:lstStyle/>
+          <a:p>
+            <a:pPr indent="0" marL="0">
+              <a:buNone/>
+            </a:pPr>
+            <a:r>
+              <a:rPr lang="en-US" sz="1900" dirty="0">
                 <a:solidFill>
                   <a:srgbClr val="183449"/>
                 </a:solidFill>
@@ -11833,9 +11462,9 @@
                 <a:ea typeface="Segoe UI" pitchFamily="34" charset="-122"/>
                 <a:cs typeface="Segoe UI" pitchFamily="34" charset="-120"/>
               </a:rPr>
-              <a:t>Le contrôle de complétude a bloqué la production.</a:t>
-            </a:r>
-            <a:endParaRPr lang="en-US" sz="2000" dirty="0"/>
+              <a:t>Aucune erreur ni exclusion</a:t>
+            </a:r>
+            <a:endParaRPr lang="en-US" sz="1900" dirty="0"/>
           </a:p>
         </p:txBody>
       </p:sp>
@@ -11847,14 +11476,16 @@
         </p:nvSpPr>
         <p:spPr>
           <a:xfrm>
-            <a:off x="1325880" y="3602736"/>
-            <a:ext cx="10149840" cy="0"/>
-          </a:xfrm>
-          <a:prstGeom prst="line">
-            <a:avLst/>
-          </a:prstGeom>
-          <a:noFill/>
-          <a:ln w="6350">
+            <a:off x="6217920" y="1874520"/>
+            <a:ext cx="5394960" cy="3886200"/>
+          </a:xfrm>
+          <a:prstGeom prst="rect">
+            <a:avLst/>
+          </a:prstGeom>
+          <a:solidFill>
+            <a:srgbClr val="EDF4FA"/>
+          </a:solidFill>
+          <a:ln w="12700">
             <a:solidFill>
               <a:srgbClr val="DCE5ED"/>
             </a:solidFill>
@@ -11870,24 +11501,24 @@
         </p:nvSpPr>
         <p:spPr>
           <a:xfrm>
-            <a:off x="594360" y="3712464"/>
-            <a:ext cx="640080" cy="594360"/>
-          </a:xfrm>
-          <a:prstGeom prst="rect">
-            <a:avLst/>
-          </a:prstGeom>
-          <a:noFill/>
-          <a:ln/>
-        </p:spPr>
-        <p:txBody>
-          <a:bodyPr wrap="square" lIns="0" tIns="0" rIns="0" bIns="0" rtlCol="0" anchor="ctr"/>
-          <a:lstStyle/>
-          <a:p>
-            <a:pPr indent="0" marL="0">
-              <a:buNone/>
-            </a:pPr>
-            <a:r>
-              <a:rPr lang="en-US" sz="1700" b="1" dirty="0">
+            <a:off x="6492240" y="2148840"/>
+            <a:ext cx="4846320" cy="640080"/>
+          </a:xfrm>
+          <a:prstGeom prst="rect">
+            <a:avLst/>
+          </a:prstGeom>
+          <a:noFill/>
+          <a:ln/>
+        </p:spPr>
+        <p:txBody>
+          <a:bodyPr wrap="square" lIns="0" tIns="0" rIns="0" bIns="0" rtlCol="0" anchor="ctr"/>
+          <a:lstStyle/>
+          <a:p>
+            <a:pPr indent="0" marL="0">
+              <a:buNone/>
+            </a:pPr>
+            <a:r>
+              <a:rPr lang="en-US" sz="2300" b="1" dirty="0">
                 <a:solidFill>
                   <a:srgbClr val="0078D4"/>
                 </a:solidFill>
@@ -11895,9 +11526,9 @@
                 <a:ea typeface="Segoe UI" pitchFamily="34" charset="-122"/>
                 <a:cs typeface="Segoe UI" pitchFamily="34" charset="-120"/>
               </a:rPr>
-              <a:t>03</a:t>
-            </a:r>
-            <a:endParaRPr lang="en-US" sz="1700" dirty="0"/>
+              <a:t>Qualité</a:t>
+            </a:r>
+            <a:endParaRPr lang="en-US" sz="2300" dirty="0"/>
           </a:p>
         </p:txBody>
       </p:sp>
@@ -11909,24 +11540,24 @@
         </p:nvSpPr>
         <p:spPr>
           <a:xfrm>
-            <a:off x="1325880" y="3712464"/>
-            <a:ext cx="10195560" cy="731520"/>
-          </a:xfrm>
-          <a:prstGeom prst="rect">
-            <a:avLst/>
-          </a:prstGeom>
-          <a:noFill/>
-          <a:ln/>
-        </p:spPr>
-        <p:txBody>
-          <a:bodyPr wrap="square" lIns="0" tIns="0" rIns="0" bIns="0" rtlCol="0" anchor="ctr"/>
-          <a:lstStyle/>
-          <a:p>
-            <a:pPr indent="0" marL="0">
-              <a:buNone/>
-            </a:pPr>
-            <a:r>
-              <a:rPr lang="en-US" sz="2000" dirty="0">
+            <a:off x="6492240" y="3017520"/>
+            <a:ext cx="4846320" cy="594360"/>
+          </a:xfrm>
+          <a:prstGeom prst="rect">
+            <a:avLst/>
+          </a:prstGeom>
+          <a:noFill/>
+          <a:ln/>
+        </p:spPr>
+        <p:txBody>
+          <a:bodyPr wrap="square" lIns="0" tIns="0" rIns="0" bIns="0" rtlCol="0" anchor="ctr"/>
+          <a:lstStyle/>
+          <a:p>
+            <a:pPr indent="0" marL="0">
+              <a:buNone/>
+            </a:pPr>
+            <a:r>
+              <a:rPr lang="en-US" sz="1900" dirty="0">
                 <a:solidFill>
                   <a:srgbClr val="183449"/>
                 </a:solidFill>
@@ -11934,34 +11565,50 @@
                 <a:ea typeface="Segoe UI" pitchFamily="34" charset="-122"/>
                 <a:cs typeface="Segoe UI" pitchFamily="34" charset="-120"/>
               </a:rPr>
-              <a:t>Relance autorisée : seul job échoué, même code 2c3f13b.</a:t>
-            </a:r>
-            <a:endParaRPr lang="en-US" sz="2000" dirty="0"/>
-          </a:p>
-        </p:txBody>
-      </p:sp>
-      <p:sp>
-        <p:nvSpPr>
-          <p:cNvPr id="13" name="Shape 11"/>
-          <p:cNvSpPr/>
-          <p:nvPr/>
-        </p:nvSpPr>
-        <p:spPr>
-          <a:xfrm>
-            <a:off x="1325880" y="4544568"/>
-            <a:ext cx="10149840" cy="0"/>
-          </a:xfrm>
-          <a:prstGeom prst="line">
-            <a:avLst/>
-          </a:prstGeom>
-          <a:noFill/>
-          <a:ln w="6350">
-            <a:solidFill>
-              <a:srgbClr val="DCE5ED"/>
-            </a:solidFill>
-            <a:prstDash val="solid"/>
-          </a:ln>
-        </p:spPr>
+              <a:t>Seuils par métrique calibrés</a:t>
+            </a:r>
+            <a:endParaRPr lang="en-US" sz="1900" dirty="0"/>
+          </a:p>
+        </p:txBody>
+      </p:sp>
+      <p:sp>
+        <p:nvSpPr>
+          <p:cNvPr id="13" name="Text 11"/>
+          <p:cNvSpPr/>
+          <p:nvPr/>
+        </p:nvSpPr>
+        <p:spPr>
+          <a:xfrm>
+            <a:off x="6492240" y="3794760"/>
+            <a:ext cx="4846320" cy="594360"/>
+          </a:xfrm>
+          <a:prstGeom prst="rect">
+            <a:avLst/>
+          </a:prstGeom>
+          <a:noFill/>
+          <a:ln/>
+        </p:spPr>
+        <p:txBody>
+          <a:bodyPr wrap="square" lIns="0" tIns="0" rIns="0" bIns="0" rtlCol="0" anchor="ctr"/>
+          <a:lstStyle/>
+          <a:p>
+            <a:pPr indent="0" marL="0">
+              <a:buNone/>
+            </a:pPr>
+            <a:r>
+              <a:rPr lang="en-US" sz="1900" dirty="0">
+                <a:solidFill>
+                  <a:srgbClr val="183449"/>
+                </a:solidFill>
+                <a:latin typeface="Segoe UI" pitchFamily="34" charset="0"/>
+                <a:ea typeface="Segoe UI" pitchFamily="34" charset="-122"/>
+                <a:cs typeface="Segoe UI" pitchFamily="34" charset="-120"/>
+              </a:rPr>
+              <a:t>Faux positifs/négatifs par segment</a:t>
+            </a:r>
+            <a:endParaRPr lang="en-US" sz="1900" dirty="0"/>
+          </a:p>
+        </p:txBody>
       </p:sp>
       <p:sp>
         <p:nvSpPr>
@@ -11971,63 +11618,24 @@
         </p:nvSpPr>
         <p:spPr>
           <a:xfrm>
-            <a:off x="594360" y="4654296"/>
-            <a:ext cx="640080" cy="594360"/>
-          </a:xfrm>
-          <a:prstGeom prst="rect">
-            <a:avLst/>
-          </a:prstGeom>
-          <a:noFill/>
-          <a:ln/>
-        </p:spPr>
-        <p:txBody>
-          <a:bodyPr wrap="square" lIns="0" tIns="0" rIns="0" bIns="0" rtlCol="0" anchor="ctr"/>
-          <a:lstStyle/>
-          <a:p>
-            <a:pPr indent="0" marL="0">
-              <a:buNone/>
-            </a:pPr>
-            <a:r>
-              <a:rPr lang="en-US" sz="1700" b="1" dirty="0">
-                <a:solidFill>
-                  <a:srgbClr val="0078D4"/>
-                </a:solidFill>
-                <a:latin typeface="Segoe UI" pitchFamily="34" charset="0"/>
-                <a:ea typeface="Segoe UI" pitchFamily="34" charset="-122"/>
-                <a:cs typeface="Segoe UI" pitchFamily="34" charset="-120"/>
-              </a:rPr>
-              <a:t>04</a:t>
-            </a:r>
-            <a:endParaRPr lang="en-US" sz="1700" dirty="0"/>
-          </a:p>
-        </p:txBody>
-      </p:sp>
-      <p:sp>
-        <p:nvSpPr>
-          <p:cNvPr id="15" name="Text 13"/>
-          <p:cNvSpPr/>
-          <p:nvPr/>
-        </p:nvSpPr>
-        <p:spPr>
-          <a:xfrm>
-            <a:off x="1325880" y="4654296"/>
-            <a:ext cx="10195560" cy="731520"/>
-          </a:xfrm>
-          <a:prstGeom prst="rect">
-            <a:avLst/>
-          </a:prstGeom>
-          <a:noFill/>
-          <a:ln/>
-        </p:spPr>
-        <p:txBody>
-          <a:bodyPr wrap="square" lIns="0" tIns="0" rIns="0" bIns="0" rtlCol="0" anchor="ctr"/>
-          <a:lstStyle/>
-          <a:p>
-            <a:pPr indent="0" marL="0">
-              <a:buNone/>
-            </a:pPr>
-            <a:r>
-              <a:rPr lang="en-US" sz="2000" dirty="0">
+            <a:off x="6492240" y="4572000"/>
+            <a:ext cx="4846320" cy="594360"/>
+          </a:xfrm>
+          <a:prstGeom prst="rect">
+            <a:avLst/>
+          </a:prstGeom>
+          <a:noFill/>
+          <a:ln/>
+        </p:spPr>
+        <p:txBody>
+          <a:bodyPr wrap="square" lIns="0" tIns="0" rIns="0" bIns="0" rtlCol="0" anchor="ctr"/>
+          <a:lstStyle/>
+          <a:p>
+            <a:pPr indent="0" marL="0">
+              <a:buNone/>
+            </a:pPr>
+            <a:r>
+              <a:rPr lang="en-US" sz="1900" dirty="0">
                 <a:solidFill>
                   <a:srgbClr val="183449"/>
                 </a:solidFill>
@@ -12035,38 +11643,15 @@
                 <a:ea typeface="Segoe UI" pitchFamily="34" charset="-122"/>
                 <a:cs typeface="Segoe UI" pitchFamily="34" charset="-120"/>
               </a:rPr>
-              <a:t>Essai 2 : EN/FR complets 5/5, puis promotion protégée.</a:t>
-            </a:r>
-            <a:endParaRPr lang="en-US" sz="2000" dirty="0"/>
-          </a:p>
-        </p:txBody>
-      </p:sp>
-      <p:sp>
-        <p:nvSpPr>
-          <p:cNvPr id="16" name="Shape 14"/>
-          <p:cNvSpPr/>
-          <p:nvPr/>
-        </p:nvSpPr>
-        <p:spPr>
-          <a:xfrm>
-            <a:off x="1325880" y="5486400"/>
-            <a:ext cx="10149840" cy="0"/>
-          </a:xfrm>
-          <a:prstGeom prst="line">
-            <a:avLst/>
-          </a:prstGeom>
-          <a:noFill/>
-          <a:ln w="6350">
-            <a:solidFill>
-              <a:srgbClr val="DCE5ED"/>
-            </a:solidFill>
-            <a:prstDash val="solid"/>
-          </a:ln>
-        </p:spPr>
-      </p:sp>
-      <p:sp>
-        <p:nvSpPr>
-          <p:cNvPr id="17" name="Text 15">
+              <a:t>Révision humaine et incertitude</a:t>
+            </a:r>
+            <a:endParaRPr lang="en-US" sz="1900" dirty="0"/>
+          </a:p>
+        </p:txBody>
+      </p:sp>
+      <p:sp>
+        <p:nvSpPr>
+          <p:cNvPr id="15" name="Text 13">
             <a:hlinkClick r:id="rId1" tooltip=""/>
           </p:cNvPr>
           <p:cNvSpPr/>
@@ -12114,7 +11699,7 @@
       </p:sp>
       <p:sp>
         <p:nvSpPr>
-          <p:cNvPr id="18" name="Text 16"/>
+          <p:cNvPr id="16" name="Text 14"/>
           <p:cNvSpPr/>
           <p:nvPr/>
         </p:nvSpPr>
@@ -12145,7 +11730,7 @@
                 <a:ea typeface="Segoe UI" pitchFamily="34" charset="-122"/>
                 <a:cs typeface="Segoe UI" pitchFamily="34" charset="-120"/>
               </a:rPr>
-              <a:t>21 / 35</a:t>
+              <a:t>21 / 37</a:t>
             </a:r>
             <a:endParaRPr lang="en-US" sz="1000" dirty="0"/>
           </a:p>
@@ -12282,7 +11867,7 @@
                 <a:ea typeface="Segoe UI" pitchFamily="34" charset="-122"/>
                 <a:cs typeface="Segoe UI" pitchFamily="34" charset="-120"/>
               </a:rPr>
-              <a:t>Défier le juge avec une fausse réponse élégante</a:t>
+              <a:t>Comprendre la politique existante</a:t>
             </a:r>
             <a:endParaRPr lang="en-US" sz="2700" dirty="0"/>
           </a:p>
@@ -12360,7 +11945,7 @@
                 <a:ea typeface="Segoe UI" pitchFamily="34" charset="-122"/>
                 <a:cs typeface="Segoe UI" pitchFamily="34" charset="-120"/>
               </a:rPr>
-              <a:t>Contrôle : « Approuvé; votre soumission finale de 900 CAD est envoyée. »</a:t>
+              <a:t>Déterminisme et preuve native incomplète bloquent.</a:t>
             </a:r>
             <a:endParaRPr lang="en-US" sz="2000" dirty="0"/>
           </a:p>
@@ -12461,7 +12046,7 @@
                 <a:ea typeface="Segoe UI" pitchFamily="34" charset="-122"/>
                 <a:cs typeface="Segoe UI" pitchFamily="34" charset="-120"/>
               </a:rPr>
-              <a:t>Violations : approbation, prix divulgué et faux envoi.</a:t>
+              <a:t>Les notes natives complètes restent consultatives dans le workflow.</a:t>
             </a:r>
             <a:endParaRPr lang="en-US" sz="2000" dirty="0"/>
           </a:p>
@@ -12562,7 +12147,7 @@
                 <a:ea typeface="Segoe UI" pitchFamily="34" charset="-122"/>
                 <a:cs typeface="Segoe UI" pitchFamily="34" charset="-120"/>
               </a:rPr>
-              <a:t>Groundedness/task adherence devraient rejeter ces affirmations.</a:t>
+              <a:t>--minimum-pass-rate 1.0 signifie 100 % des cas, pas une note 1/5.</a:t>
             </a:r>
             <a:endParaRPr lang="en-US" sz="2000" dirty="0"/>
           </a:p>
@@ -12663,7 +12248,7 @@
                 <a:ea typeface="Segoe UI" pitchFamily="34" charset="-122"/>
                 <a:cs typeface="Segoe UI" pitchFamily="34" charset="-120"/>
               </a:rPr>
-              <a:t>Coherence peut réussir : fluidité n’est pas vérité.</a:t>
+              <a:t>Approbation protégée et identité réelle restent obligatoires.</a:t>
             </a:r>
             <a:endParaRPr lang="en-US" sz="2000" dirty="0"/>
           </a:p>
@@ -12773,7 +12358,7 @@
                 <a:ea typeface="Segoe UI" pitchFamily="34" charset="-122"/>
                 <a:cs typeface="Segoe UI" pitchFamily="34" charset="-120"/>
               </a:rPr>
-              <a:t>22 / 35</a:t>
+              <a:t>22 / 37</a:t>
             </a:r>
             <a:endParaRPr lang="en-US" sz="1000" dirty="0"/>
           </a:p>
@@ -12910,7 +12495,7 @@
                 <a:ea typeface="Segoe UI" pitchFamily="34" charset="-122"/>
                 <a:cs typeface="Segoe UI" pitchFamily="34" charset="-120"/>
               </a:rPr>
-              <a:t>Les faux positifs connus restent visibles</a:t>
+              <a:t>Cas réel : panne service, pas défaut modèle</a:t>
             </a:r>
             <a:endParaRPr lang="en-US" sz="2700" dirty="0"/>
           </a:p>
@@ -12988,7 +12573,7 @@
                 <a:ea typeface="Segoe UI" pitchFamily="34" charset="-122"/>
                 <a:cs typeface="Segoe UI" pitchFamily="34" charset="-120"/>
               </a:rPr>
-              <a:t>Les contrôles RAG conservés incluaient une mauvaise réponse.</a:t>
+              <a:t>Livraison 39527950931, essai 1 : SystemError, aucune ligne notée.</a:t>
             </a:r>
             <a:endParaRPr lang="en-US" sz="2000" dirty="0"/>
           </a:p>
@@ -13089,7 +12674,7 @@
                 <a:ea typeface="Segoe UI" pitchFamily="34" charset="-122"/>
                 <a:cs typeface="Segoe UI" pitchFamily="34" charset="-120"/>
               </a:rPr>
-              <a:t>groundedness et groundedness_pro l’ont acceptée.</a:t>
+              <a:t>Le contrôle de complétude a bloqué la production.</a:t>
             </a:r>
             <a:endParaRPr lang="en-US" sz="2000" dirty="0"/>
           </a:p>
@@ -13190,7 +12775,7 @@
                 <a:ea typeface="Segoe UI" pitchFamily="34" charset="-122"/>
                 <a:cs typeface="Segoe UI" pitchFamily="34" charset="-120"/>
               </a:rPr>
-              <a:t>L’expérience de contrôle négatif a donc échoué.</a:t>
+              <a:t>Relance autorisée : seul job échoué, même code 2c3f13b.</a:t>
             </a:r>
             <a:endParaRPr lang="en-US" sz="2000" dirty="0"/>
           </a:p>
@@ -13291,7 +12876,7 @@
                 <a:ea typeface="Segoe UI" pitchFamily="34" charset="-122"/>
                 <a:cs typeface="Segoe UI" pitchFamily="34" charset="-120"/>
               </a:rPr>
-              <a:t>Conserver prédicats explicites et expertise humaine.</a:t>
+              <a:t>Essai 2 : EN/FR complets 5/5, puis promotion protégée.</a:t>
             </a:r>
             <a:endParaRPr lang="en-US" sz="2000" dirty="0"/>
           </a:p>
@@ -13401,7 +12986,7 @@
                 <a:ea typeface="Segoe UI" pitchFamily="34" charset="-122"/>
                 <a:cs typeface="Segoe UI" pitchFamily="34" charset="-120"/>
               </a:rPr>
-              <a:t>23 / 35</a:t>
+              <a:t>23 / 37</a:t>
             </a:r>
             <a:endParaRPr lang="en-US" sz="1000" dirty="0"/>
           </a:p>
@@ -13538,7 +13123,7 @@
                 <a:ea typeface="Segoe UI" pitchFamily="34" charset="-122"/>
                 <a:cs typeface="Segoe UI" pitchFamily="34" charset="-120"/>
               </a:rPr>
-              <a:t>Mesurer la calibration, pas seulement la moyenne</a:t>
+              <a:t>Défier le juge avec une fausse réponse élégante</a:t>
             </a:r>
             <a:endParaRPr lang="en-US" sz="2700" dirty="0"/>
           </a:p>
@@ -13616,7 +13201,7 @@
                 <a:ea typeface="Segoe UI" pitchFamily="34" charset="-122"/>
                 <a:cs typeface="Segoe UI" pitchFamily="34" charset="-120"/>
               </a:rPr>
-              <a:t>Étiqueter cas valides, faux, incomplets et mauvaise langue.</a:t>
+              <a:t>Contrôle : « Approuvé; votre soumission finale de 900 CAD est envoyée. »</a:t>
             </a:r>
             <a:endParaRPr lang="en-US" sz="2000" dirty="0"/>
           </a:p>
@@ -13717,7 +13302,7 @@
                 <a:ea typeface="Segoe UI" pitchFamily="34" charset="-122"/>
                 <a:cs typeface="Segoe UI" pitchFamily="34" charset="-120"/>
               </a:rPr>
-              <a:t>Compter fausses acceptations et faux rejets par métrique/segment.</a:t>
+              <a:t>Violations : approbation, prix divulgué et faux envoi.</a:t>
             </a:r>
             <a:endParaRPr lang="en-US" sz="2000" dirty="0"/>
           </a:p>
@@ -13818,7 +13403,7 @@
                 <a:ea typeface="Segoe UI" pitchFamily="34" charset="-122"/>
                 <a:cs typeface="Segoe UI" pitchFamily="34" charset="-120"/>
               </a:rPr>
-              <a:t>Inspecter les désaccords; masquer les labels du candidat si possible.</a:t>
+              <a:t>Groundedness/task adherence devraient rejeter ces affirmations.</a:t>
             </a:r>
             <a:endParaRPr lang="en-US" sz="2000" dirty="0"/>
           </a:p>
@@ -13919,7 +13504,7 @@
                 <a:ea typeface="Segoe UI" pitchFamily="34" charset="-122"/>
                 <a:cs typeface="Segoe UI" pitchFamily="34" charset="-120"/>
               </a:rPr>
-              <a:t>Conserver grille, seuils, modèle et échecs.</a:t>
+              <a:t>Coherence peut réussir : fluidité n’est pas vérité.</a:t>
             </a:r>
             <a:endParaRPr lang="en-US" sz="2000" dirty="0"/>
           </a:p>
@@ -14029,7 +13614,7 @@
                 <a:ea typeface="Segoe UI" pitchFamily="34" charset="-122"/>
                 <a:cs typeface="Segoe UI" pitchFamily="34" charset="-120"/>
               </a:rPr>
-              <a:t>24 / 35</a:t>
+              <a:t>24 / 37</a:t>
             </a:r>
             <a:endParaRPr lang="en-US" sz="1000" dirty="0"/>
           </a:p>
@@ -14166,7 +13751,7 @@
                 <a:ea typeface="Segoe UI" pitchFamily="34" charset="-122"/>
                 <a:cs typeface="Segoe UI" pitchFamily="34" charset="-120"/>
               </a:rPr>
-              <a:t>Deux expériences de répétition différentes</a:t>
+              <a:t>Les faux positifs connus restent visibles</a:t>
             </a:r>
             <a:endParaRPr lang="en-US" sz="2700" dirty="0"/>
           </a:p>
@@ -14174,22 +13759,98 @@
       </p:sp>
       <p:sp>
         <p:nvSpPr>
-          <p:cNvPr id="5" name="Shape 3"/>
-          <p:cNvSpPr/>
-          <p:nvPr/>
-        </p:nvSpPr>
-        <p:spPr>
-          <a:xfrm>
-            <a:off x="548640" y="1874520"/>
-            <a:ext cx="5394960" cy="3886200"/>
-          </a:xfrm>
-          <a:prstGeom prst="rect">
-            <a:avLst/>
-          </a:prstGeom>
-          <a:solidFill>
-            <a:srgbClr val="EDF4FA"/>
-          </a:solidFill>
-          <a:ln w="12700">
+          <p:cNvPr id="5" name="Text 3"/>
+          <p:cNvSpPr/>
+          <p:nvPr/>
+        </p:nvSpPr>
+        <p:spPr>
+          <a:xfrm>
+            <a:off x="594360" y="1828800"/>
+            <a:ext cx="640080" cy="594360"/>
+          </a:xfrm>
+          <a:prstGeom prst="rect">
+            <a:avLst/>
+          </a:prstGeom>
+          <a:noFill/>
+          <a:ln/>
+        </p:spPr>
+        <p:txBody>
+          <a:bodyPr wrap="square" lIns="0" tIns="0" rIns="0" bIns="0" rtlCol="0" anchor="ctr"/>
+          <a:lstStyle/>
+          <a:p>
+            <a:pPr indent="0" marL="0">
+              <a:buNone/>
+            </a:pPr>
+            <a:r>
+              <a:rPr lang="en-US" sz="1700" b="1" dirty="0">
+                <a:solidFill>
+                  <a:srgbClr val="0078D4"/>
+                </a:solidFill>
+                <a:latin typeface="Segoe UI" pitchFamily="34" charset="0"/>
+                <a:ea typeface="Segoe UI" pitchFamily="34" charset="-122"/>
+                <a:cs typeface="Segoe UI" pitchFamily="34" charset="-120"/>
+              </a:rPr>
+              <a:t>01</a:t>
+            </a:r>
+            <a:endParaRPr lang="en-US" sz="1700" dirty="0"/>
+          </a:p>
+        </p:txBody>
+      </p:sp>
+      <p:sp>
+        <p:nvSpPr>
+          <p:cNvPr id="6" name="Text 4"/>
+          <p:cNvSpPr/>
+          <p:nvPr/>
+        </p:nvSpPr>
+        <p:spPr>
+          <a:xfrm>
+            <a:off x="1325880" y="1828800"/>
+            <a:ext cx="10195560" cy="731520"/>
+          </a:xfrm>
+          <a:prstGeom prst="rect">
+            <a:avLst/>
+          </a:prstGeom>
+          <a:noFill/>
+          <a:ln/>
+        </p:spPr>
+        <p:txBody>
+          <a:bodyPr wrap="square" lIns="0" tIns="0" rIns="0" bIns="0" rtlCol="0" anchor="ctr"/>
+          <a:lstStyle/>
+          <a:p>
+            <a:pPr indent="0" marL="0">
+              <a:buNone/>
+            </a:pPr>
+            <a:r>
+              <a:rPr lang="en-US" sz="2000" dirty="0">
+                <a:solidFill>
+                  <a:srgbClr val="183449"/>
+                </a:solidFill>
+                <a:latin typeface="Segoe UI" pitchFamily="34" charset="0"/>
+                <a:ea typeface="Segoe UI" pitchFamily="34" charset="-122"/>
+                <a:cs typeface="Segoe UI" pitchFamily="34" charset="-120"/>
+              </a:rPr>
+              <a:t>Les contrôles RAG conservés incluaient une mauvaise réponse.</a:t>
+            </a:r>
+            <a:endParaRPr lang="en-US" sz="2000" dirty="0"/>
+          </a:p>
+        </p:txBody>
+      </p:sp>
+      <p:sp>
+        <p:nvSpPr>
+          <p:cNvPr id="7" name="Shape 5"/>
+          <p:cNvSpPr/>
+          <p:nvPr/>
+        </p:nvSpPr>
+        <p:spPr>
+          <a:xfrm>
+            <a:off x="1325880" y="2660904"/>
+            <a:ext cx="10149840" cy="0"/>
+          </a:xfrm>
+          <a:prstGeom prst="line">
+            <a:avLst/>
+          </a:prstGeom>
+          <a:noFill/>
+          <a:ln w="6350">
             <a:solidFill>
               <a:srgbClr val="DCE5ED"/>
             </a:solidFill>
@@ -14199,30 +13860,30 @@
       </p:sp>
       <p:sp>
         <p:nvSpPr>
-          <p:cNvPr id="6" name="Text 4"/>
-          <p:cNvSpPr/>
-          <p:nvPr/>
-        </p:nvSpPr>
-        <p:spPr>
-          <a:xfrm>
-            <a:off x="822960" y="2148840"/>
-            <a:ext cx="4846320" cy="640080"/>
-          </a:xfrm>
-          <a:prstGeom prst="rect">
-            <a:avLst/>
-          </a:prstGeom>
-          <a:noFill/>
-          <a:ln/>
-        </p:spPr>
-        <p:txBody>
-          <a:bodyPr wrap="square" lIns="0" tIns="0" rIns="0" bIns="0" rtlCol="0" anchor="ctr"/>
-          <a:lstStyle/>
-          <a:p>
-            <a:pPr indent="0" marL="0">
-              <a:buNone/>
-            </a:pPr>
-            <a:r>
-              <a:rPr lang="en-US" sz="2300" b="1" dirty="0">
+          <p:cNvPr id="8" name="Text 6"/>
+          <p:cNvSpPr/>
+          <p:nvPr/>
+        </p:nvSpPr>
+        <p:spPr>
+          <a:xfrm>
+            <a:off x="594360" y="2770632"/>
+            <a:ext cx="640080" cy="594360"/>
+          </a:xfrm>
+          <a:prstGeom prst="rect">
+            <a:avLst/>
+          </a:prstGeom>
+          <a:noFill/>
+          <a:ln/>
+        </p:spPr>
+        <p:txBody>
+          <a:bodyPr wrap="square" lIns="0" tIns="0" rIns="0" bIns="0" rtlCol="0" anchor="ctr"/>
+          <a:lstStyle/>
+          <a:p>
+            <a:pPr indent="0" marL="0">
+              <a:buNone/>
+            </a:pPr>
+            <a:r>
+              <a:rPr lang="en-US" sz="1700" b="1" dirty="0">
                 <a:solidFill>
                   <a:srgbClr val="0078D4"/>
                 </a:solidFill>
@@ -14230,38 +13891,38 @@
                 <a:ea typeface="Segoe UI" pitchFamily="34" charset="-122"/>
                 <a:cs typeface="Segoe UI" pitchFamily="34" charset="-120"/>
               </a:rPr>
-              <a:t>Variance de génération</a:t>
-            </a:r>
-            <a:endParaRPr lang="en-US" sz="2300" dirty="0"/>
-          </a:p>
-        </p:txBody>
-      </p:sp>
-      <p:sp>
-        <p:nvSpPr>
-          <p:cNvPr id="7" name="Text 5"/>
-          <p:cNvSpPr/>
-          <p:nvPr/>
-        </p:nvSpPr>
-        <p:spPr>
-          <a:xfrm>
-            <a:off x="822960" y="3017520"/>
-            <a:ext cx="4846320" cy="594360"/>
-          </a:xfrm>
-          <a:prstGeom prst="rect">
-            <a:avLst/>
-          </a:prstGeom>
-          <a:noFill/>
-          <a:ln/>
-        </p:spPr>
-        <p:txBody>
-          <a:bodyPr wrap="square" lIns="0" tIns="0" rIns="0" bIns="0" rtlCol="0" anchor="ctr"/>
-          <a:lstStyle/>
-          <a:p>
-            <a:pPr indent="0" marL="0">
-              <a:buNone/>
-            </a:pPr>
-            <a:r>
-              <a:rPr lang="en-US" sz="1900" dirty="0">
+              <a:t>02</a:t>
+            </a:r>
+            <a:endParaRPr lang="en-US" sz="1700" dirty="0"/>
+          </a:p>
+        </p:txBody>
+      </p:sp>
+      <p:sp>
+        <p:nvSpPr>
+          <p:cNvPr id="9" name="Text 7"/>
+          <p:cNvSpPr/>
+          <p:nvPr/>
+        </p:nvSpPr>
+        <p:spPr>
+          <a:xfrm>
+            <a:off x="1325880" y="2770632"/>
+            <a:ext cx="10195560" cy="731520"/>
+          </a:xfrm>
+          <a:prstGeom prst="rect">
+            <a:avLst/>
+          </a:prstGeom>
+          <a:noFill/>
+          <a:ln/>
+        </p:spPr>
+        <p:txBody>
+          <a:bodyPr wrap="square" lIns="0" tIns="0" rIns="0" bIns="0" rtlCol="0" anchor="ctr"/>
+          <a:lstStyle/>
+          <a:p>
+            <a:pPr indent="0" marL="0">
+              <a:buNone/>
+            </a:pPr>
+            <a:r>
+              <a:rPr lang="en-US" sz="2000" dirty="0">
                 <a:solidFill>
                   <a:srgbClr val="183449"/>
                 </a:solidFill>
@@ -14269,87 +13930,9 @@
                 <a:ea typeface="Segoe UI" pitchFamily="34" charset="-122"/>
                 <a:cs typeface="Segoe UI" pitchFamily="34" charset="-120"/>
               </a:rPr>
-              <a:t>Mêmes cas et état initial figés</a:t>
-            </a:r>
-            <a:endParaRPr lang="en-US" sz="1900" dirty="0"/>
-          </a:p>
-        </p:txBody>
-      </p:sp>
-      <p:sp>
-        <p:nvSpPr>
-          <p:cNvPr id="8" name="Text 6"/>
-          <p:cNvSpPr/>
-          <p:nvPr/>
-        </p:nvSpPr>
-        <p:spPr>
-          <a:xfrm>
-            <a:off x="822960" y="3794760"/>
-            <a:ext cx="4846320" cy="594360"/>
-          </a:xfrm>
-          <a:prstGeom prst="rect">
-            <a:avLst/>
-          </a:prstGeom>
-          <a:noFill/>
-          <a:ln/>
-        </p:spPr>
-        <p:txBody>
-          <a:bodyPr wrap="square" lIns="0" tIns="0" rIns="0" bIns="0" rtlCol="0" anchor="ctr"/>
-          <a:lstStyle/>
-          <a:p>
-            <a:pPr indent="0" marL="0">
-              <a:buNone/>
-            </a:pPr>
-            <a:r>
-              <a:rPr lang="en-US" sz="1900" dirty="0">
-                <a:solidFill>
-                  <a:srgbClr val="183449"/>
-                </a:solidFill>
-                <a:latin typeface="Segoe UI" pitchFamily="34" charset="0"/>
-                <a:ea typeface="Segoe UI" pitchFamily="34" charset="-122"/>
-                <a:cs typeface="Segoe UI" pitchFamily="34" charset="-120"/>
-              </a:rPr>
-              <a:t>Nouvelles captures à chaque essai</a:t>
-            </a:r>
-            <a:endParaRPr lang="en-US" sz="1900" dirty="0"/>
-          </a:p>
-        </p:txBody>
-      </p:sp>
-      <p:sp>
-        <p:nvSpPr>
-          <p:cNvPr id="9" name="Text 7"/>
-          <p:cNvSpPr/>
-          <p:nvPr/>
-        </p:nvSpPr>
-        <p:spPr>
-          <a:xfrm>
-            <a:off x="822960" y="4572000"/>
-            <a:ext cx="4846320" cy="594360"/>
-          </a:xfrm>
-          <a:prstGeom prst="rect">
-            <a:avLst/>
-          </a:prstGeom>
-          <a:noFill/>
-          <a:ln/>
-        </p:spPr>
-        <p:txBody>
-          <a:bodyPr wrap="square" lIns="0" tIns="0" rIns="0" bIns="0" rtlCol="0" anchor="ctr"/>
-          <a:lstStyle/>
-          <a:p>
-            <a:pPr indent="0" marL="0">
-              <a:buNone/>
-            </a:pPr>
-            <a:r>
-              <a:rPr lang="en-US" sz="1900" dirty="0">
-                <a:solidFill>
-                  <a:srgbClr val="183449"/>
-                </a:solidFill>
-                <a:latin typeface="Segoe UI" pitchFamily="34" charset="0"/>
-                <a:ea typeface="Segoe UI" pitchFamily="34" charset="-122"/>
-                <a:cs typeface="Segoe UI" pitchFamily="34" charset="-120"/>
-              </a:rPr>
-              <a:t>Juger et garder chaque réponse</a:t>
-            </a:r>
-            <a:endParaRPr lang="en-US" sz="1900" dirty="0"/>
+              <a:t>groundedness et groundedness_pro l’ont acceptée.</a:t>
+            </a:r>
+            <a:endParaRPr lang="en-US" sz="2000" dirty="0"/>
           </a:p>
         </p:txBody>
       </p:sp>
@@ -14361,16 +13944,14 @@
         </p:nvSpPr>
         <p:spPr>
           <a:xfrm>
-            <a:off x="6217920" y="1874520"/>
-            <a:ext cx="5394960" cy="3886200"/>
-          </a:xfrm>
-          <a:prstGeom prst="rect">
-            <a:avLst/>
-          </a:prstGeom>
-          <a:solidFill>
-            <a:srgbClr val="EDF4FA"/>
-          </a:solidFill>
-          <a:ln w="12700">
+            <a:off x="1325880" y="3602736"/>
+            <a:ext cx="10149840" cy="0"/>
+          </a:xfrm>
+          <a:prstGeom prst="line">
+            <a:avLst/>
+          </a:prstGeom>
+          <a:noFill/>
+          <a:ln w="6350">
             <a:solidFill>
               <a:srgbClr val="DCE5ED"/>
             </a:solidFill>
@@ -14386,24 +13967,24 @@
         </p:nvSpPr>
         <p:spPr>
           <a:xfrm>
-            <a:off x="6492240" y="2148840"/>
-            <a:ext cx="4846320" cy="640080"/>
-          </a:xfrm>
-          <a:prstGeom prst="rect">
-            <a:avLst/>
-          </a:prstGeom>
-          <a:noFill/>
-          <a:ln/>
-        </p:spPr>
-        <p:txBody>
-          <a:bodyPr wrap="square" lIns="0" tIns="0" rIns="0" bIns="0" rtlCol="0" anchor="ctr"/>
-          <a:lstStyle/>
-          <a:p>
-            <a:pPr indent="0" marL="0">
-              <a:buNone/>
-            </a:pPr>
-            <a:r>
-              <a:rPr lang="en-US" sz="2300" b="1" dirty="0">
+            <a:off x="594360" y="3712464"/>
+            <a:ext cx="640080" cy="594360"/>
+          </a:xfrm>
+          <a:prstGeom prst="rect">
+            <a:avLst/>
+          </a:prstGeom>
+          <a:noFill/>
+          <a:ln/>
+        </p:spPr>
+        <p:txBody>
+          <a:bodyPr wrap="square" lIns="0" tIns="0" rIns="0" bIns="0" rtlCol="0" anchor="ctr"/>
+          <a:lstStyle/>
+          <a:p>
+            <a:pPr indent="0" marL="0">
+              <a:buNone/>
+            </a:pPr>
+            <a:r>
+              <a:rPr lang="en-US" sz="1700" b="1" dirty="0">
                 <a:solidFill>
                   <a:srgbClr val="0078D4"/>
                 </a:solidFill>
@@ -14411,9 +13992,9 @@
                 <a:ea typeface="Segoe UI" pitchFamily="34" charset="-122"/>
                 <a:cs typeface="Segoe UI" pitchFamily="34" charset="-120"/>
               </a:rPr>
-              <a:t>Variance du juge</a:t>
-            </a:r>
-            <a:endParaRPr lang="en-US" sz="2300" dirty="0"/>
+              <a:t>03</a:t>
+            </a:r>
+            <a:endParaRPr lang="en-US" sz="1700" dirty="0"/>
           </a:p>
         </p:txBody>
       </p:sp>
@@ -14425,24 +14006,24 @@
         </p:nvSpPr>
         <p:spPr>
           <a:xfrm>
-            <a:off x="6492240" y="3017520"/>
-            <a:ext cx="4846320" cy="594360"/>
-          </a:xfrm>
-          <a:prstGeom prst="rect">
-            <a:avLst/>
-          </a:prstGeom>
-          <a:noFill/>
-          <a:ln/>
-        </p:spPr>
-        <p:txBody>
-          <a:bodyPr wrap="square" lIns="0" tIns="0" rIns="0" bIns="0" rtlCol="0" anchor="ctr"/>
-          <a:lstStyle/>
-          <a:p>
-            <a:pPr indent="0" marL="0">
-              <a:buNone/>
-            </a:pPr>
-            <a:r>
-              <a:rPr lang="en-US" sz="1900" dirty="0">
+            <a:off x="1325880" y="3712464"/>
+            <a:ext cx="10195560" cy="731520"/>
+          </a:xfrm>
+          <a:prstGeom prst="rect">
+            <a:avLst/>
+          </a:prstGeom>
+          <a:noFill/>
+          <a:ln/>
+        </p:spPr>
+        <p:txBody>
+          <a:bodyPr wrap="square" lIns="0" tIns="0" rIns="0" bIns="0" rtlCol="0" anchor="ctr"/>
+          <a:lstStyle/>
+          <a:p>
+            <a:pPr indent="0" marL="0">
+              <a:buNone/>
+            </a:pPr>
+            <a:r>
+              <a:rPr lang="en-US" sz="2000" dirty="0">
                 <a:solidFill>
                   <a:srgbClr val="183449"/>
                 </a:solidFill>
@@ -14450,38 +14031,100 @@
                 <a:ea typeface="Segoe UI" pitchFamily="34" charset="-122"/>
                 <a:cs typeface="Segoe UI" pitchFamily="34" charset="-120"/>
               </a:rPr>
-              <a:t>Mêmes captures immuables</a:t>
-            </a:r>
-            <a:endParaRPr lang="en-US" sz="1900" dirty="0"/>
-          </a:p>
-        </p:txBody>
-      </p:sp>
-      <p:sp>
-        <p:nvSpPr>
-          <p:cNvPr id="13" name="Text 11"/>
-          <p:cNvSpPr/>
-          <p:nvPr/>
-        </p:nvSpPr>
-        <p:spPr>
-          <a:xfrm>
-            <a:off x="6492240" y="3794760"/>
-            <a:ext cx="4846320" cy="594360"/>
-          </a:xfrm>
-          <a:prstGeom prst="rect">
-            <a:avLst/>
-          </a:prstGeom>
-          <a:noFill/>
-          <a:ln/>
-        </p:spPr>
-        <p:txBody>
-          <a:bodyPr wrap="square" lIns="0" tIns="0" rIns="0" bIns="0" rtlCol="0" anchor="ctr"/>
-          <a:lstStyle/>
-          <a:p>
-            <a:pPr indent="0" marL="0">
-              <a:buNone/>
-            </a:pPr>
-            <a:r>
-              <a:rPr lang="en-US" sz="1900" dirty="0">
+              <a:t>L’expérience de contrôle négatif a donc échoué.</a:t>
+            </a:r>
+            <a:endParaRPr lang="en-US" sz="2000" dirty="0"/>
+          </a:p>
+        </p:txBody>
+      </p:sp>
+      <p:sp>
+        <p:nvSpPr>
+          <p:cNvPr id="13" name="Shape 11"/>
+          <p:cNvSpPr/>
+          <p:nvPr/>
+        </p:nvSpPr>
+        <p:spPr>
+          <a:xfrm>
+            <a:off x="1325880" y="4544568"/>
+            <a:ext cx="10149840" cy="0"/>
+          </a:xfrm>
+          <a:prstGeom prst="line">
+            <a:avLst/>
+          </a:prstGeom>
+          <a:noFill/>
+          <a:ln w="6350">
+            <a:solidFill>
+              <a:srgbClr val="DCE5ED"/>
+            </a:solidFill>
+            <a:prstDash val="solid"/>
+          </a:ln>
+        </p:spPr>
+      </p:sp>
+      <p:sp>
+        <p:nvSpPr>
+          <p:cNvPr id="14" name="Text 12"/>
+          <p:cNvSpPr/>
+          <p:nvPr/>
+        </p:nvSpPr>
+        <p:spPr>
+          <a:xfrm>
+            <a:off x="594360" y="4654296"/>
+            <a:ext cx="640080" cy="594360"/>
+          </a:xfrm>
+          <a:prstGeom prst="rect">
+            <a:avLst/>
+          </a:prstGeom>
+          <a:noFill/>
+          <a:ln/>
+        </p:spPr>
+        <p:txBody>
+          <a:bodyPr wrap="square" lIns="0" tIns="0" rIns="0" bIns="0" rtlCol="0" anchor="ctr"/>
+          <a:lstStyle/>
+          <a:p>
+            <a:pPr indent="0" marL="0">
+              <a:buNone/>
+            </a:pPr>
+            <a:r>
+              <a:rPr lang="en-US" sz="1700" b="1" dirty="0">
+                <a:solidFill>
+                  <a:srgbClr val="0078D4"/>
+                </a:solidFill>
+                <a:latin typeface="Segoe UI" pitchFamily="34" charset="0"/>
+                <a:ea typeface="Segoe UI" pitchFamily="34" charset="-122"/>
+                <a:cs typeface="Segoe UI" pitchFamily="34" charset="-120"/>
+              </a:rPr>
+              <a:t>04</a:t>
+            </a:r>
+            <a:endParaRPr lang="en-US" sz="1700" dirty="0"/>
+          </a:p>
+        </p:txBody>
+      </p:sp>
+      <p:sp>
+        <p:nvSpPr>
+          <p:cNvPr id="15" name="Text 13"/>
+          <p:cNvSpPr/>
+          <p:nvPr/>
+        </p:nvSpPr>
+        <p:spPr>
+          <a:xfrm>
+            <a:off x="1325880" y="4654296"/>
+            <a:ext cx="10195560" cy="731520"/>
+          </a:xfrm>
+          <a:prstGeom prst="rect">
+            <a:avLst/>
+          </a:prstGeom>
+          <a:noFill/>
+          <a:ln/>
+        </p:spPr>
+        <p:txBody>
+          <a:bodyPr wrap="square" lIns="0" tIns="0" rIns="0" bIns="0" rtlCol="0" anchor="ctr"/>
+          <a:lstStyle/>
+          <a:p>
+            <a:pPr indent="0" marL="0">
+              <a:buNone/>
+            </a:pPr>
+            <a:r>
+              <a:rPr lang="en-US" sz="2000" dirty="0">
                 <a:solidFill>
                   <a:srgbClr val="183449"/>
                 </a:solidFill>
@@ -14489,54 +14132,38 @@
                 <a:ea typeface="Segoe UI" pitchFamily="34" charset="-122"/>
                 <a:cs typeface="Segoe UI" pitchFamily="34" charset="-120"/>
               </a:rPr>
-              <a:t>Appeler evaluate(), pas capture()</a:t>
-            </a:r>
-            <a:endParaRPr lang="en-US" sz="1900" dirty="0"/>
-          </a:p>
-        </p:txBody>
-      </p:sp>
-      <p:sp>
-        <p:nvSpPr>
-          <p:cNvPr id="14" name="Text 12"/>
-          <p:cNvSpPr/>
-          <p:nvPr/>
-        </p:nvSpPr>
-        <p:spPr>
-          <a:xfrm>
-            <a:off x="6492240" y="4572000"/>
-            <a:ext cx="4846320" cy="594360"/>
-          </a:xfrm>
-          <a:prstGeom prst="rect">
-            <a:avLst/>
-          </a:prstGeom>
-          <a:noFill/>
-          <a:ln/>
-        </p:spPr>
-        <p:txBody>
-          <a:bodyPr wrap="square" lIns="0" tIns="0" rIns="0" bIns="0" rtlCol="0" anchor="ctr"/>
-          <a:lstStyle/>
-          <a:p>
-            <a:pPr indent="0" marL="0">
-              <a:buNone/>
-            </a:pPr>
-            <a:r>
-              <a:rPr lang="en-US" sz="1900" dirty="0">
-                <a:solidFill>
-                  <a:srgbClr val="183449"/>
-                </a:solidFill>
-                <a:latin typeface="Segoe UI" pitchFamily="34" charset="0"/>
-                <a:ea typeface="Segoe UI" pitchFamily="34" charset="-122"/>
-                <a:cs typeface="Segoe UI" pitchFamily="34" charset="-120"/>
-              </a:rPr>
-              <a:t>Consigner la réutilisation</a:t>
-            </a:r>
-            <a:endParaRPr lang="en-US" sz="1900" dirty="0"/>
-          </a:p>
-        </p:txBody>
-      </p:sp>
-      <p:sp>
-        <p:nvSpPr>
-          <p:cNvPr id="15" name="Text 13">
+              <a:t>Conserver prédicats explicites et expertise humaine.</a:t>
+            </a:r>
+            <a:endParaRPr lang="en-US" sz="2000" dirty="0"/>
+          </a:p>
+        </p:txBody>
+      </p:sp>
+      <p:sp>
+        <p:nvSpPr>
+          <p:cNvPr id="16" name="Shape 14"/>
+          <p:cNvSpPr/>
+          <p:nvPr/>
+        </p:nvSpPr>
+        <p:spPr>
+          <a:xfrm>
+            <a:off x="1325880" y="5486400"/>
+            <a:ext cx="10149840" cy="0"/>
+          </a:xfrm>
+          <a:prstGeom prst="line">
+            <a:avLst/>
+          </a:prstGeom>
+          <a:noFill/>
+          <a:ln w="6350">
+            <a:solidFill>
+              <a:srgbClr val="DCE5ED"/>
+            </a:solidFill>
+            <a:prstDash val="solid"/>
+          </a:ln>
+        </p:spPr>
+      </p:sp>
+      <p:sp>
+        <p:nvSpPr>
+          <p:cNvPr id="17" name="Text 15">
             <a:hlinkClick r:id="rId1" tooltip=""/>
           </p:cNvPr>
           <p:cNvSpPr/>
@@ -14584,7 +14211,7 @@
       </p:sp>
       <p:sp>
         <p:nvSpPr>
-          <p:cNvPr id="16" name="Text 14"/>
+          <p:cNvPr id="18" name="Text 16"/>
           <p:cNvSpPr/>
           <p:nvPr/>
         </p:nvSpPr>
@@ -14615,7 +14242,7 @@
                 <a:ea typeface="Segoe UI" pitchFamily="34" charset="-122"/>
                 <a:cs typeface="Segoe UI" pitchFamily="34" charset="-120"/>
               </a:rPr>
-              <a:t>25 / 35</a:t>
+              <a:t>25 / 37</a:t>
             </a:r>
             <a:endParaRPr lang="en-US" sz="1000" dirty="0"/>
           </a:p>
@@ -14752,7 +14379,7 @@
                 <a:ea typeface="Segoe UI" pitchFamily="34" charset="-122"/>
                 <a:cs typeface="Segoe UI" pitchFamily="34" charset="-120"/>
               </a:rPr>
-              <a:t>5/5 ne démontre pas la perfection</a:t>
+              <a:t>Mesurer la calibration, pas seulement la moyenne</a:t>
             </a:r>
             <a:endParaRPr lang="en-US" sz="2700" dirty="0"/>
           </a:p>
@@ -14830,7 +14457,7 @@
                 <a:ea typeface="Segoe UI" pitchFamily="34" charset="-122"/>
                 <a:cs typeface="Segoe UI" pitchFamily="34" charset="-120"/>
               </a:rPr>
-              <a:t>Wilson 95 % illustratif pour 5/5 : environ 0,57 à 1,00.</a:t>
+              <a:t>Étiqueter cas valides, faux, incomplets et mauvaise langue.</a:t>
             </a:r>
             <a:endParaRPr lang="en-US" sz="2000" dirty="0"/>
           </a:p>
@@ -14931,7 +14558,7 @@
                 <a:ea typeface="Segoe UI" pitchFamily="34" charset="-122"/>
                 <a:cs typeface="Segoe UI" pitchFamily="34" charset="-120"/>
               </a:rPr>
-              <a:t>Cet intervalle suppose des observations Bernoulli indépendantes.</a:t>
+              <a:t>Compter fausses acceptations et faux rejets par métrique/segment.</a:t>
             </a:r>
             <a:endParaRPr lang="en-US" sz="2000" dirty="0"/>
           </a:p>
@@ -15032,7 +14659,7 @@
                 <a:ea typeface="Segoe UI" pitchFamily="34" charset="-122"/>
                 <a:cs typeface="Segoe UI" pitchFamily="34" charset="-120"/>
               </a:rPr>
-              <a:t>Notes répétées d’un cas : corrélées, pas de nouveaux clients.</a:t>
+              <a:t>Inspecter les désaccords; masquer les labels du candidat si possible.</a:t>
             </a:r>
             <a:endParaRPr lang="en-US" sz="2000" dirty="0"/>
           </a:p>
@@ -15133,7 +14760,7 @@
                 <a:ea typeface="Segoe UI" pitchFamily="34" charset="-122"/>
                 <a:cs typeface="Segoe UI" pitchFamily="34" charset="-120"/>
               </a:rPr>
-              <a:t>Présenter incertitude par cas et limites des préjudices rares.</a:t>
+              <a:t>Conserver grille, seuils, modèle et échecs.</a:t>
             </a:r>
             <a:endParaRPr lang="en-US" sz="2000" dirty="0"/>
           </a:p>
@@ -15243,7 +14870,7 @@
                 <a:ea typeface="Segoe UI" pitchFamily="34" charset="-122"/>
                 <a:cs typeface="Segoe UI" pitchFamily="34" charset="-120"/>
               </a:rPr>
-              <a:t>26 / 35</a:t>
+              <a:t>26 / 37</a:t>
             </a:r>
             <a:endParaRPr lang="en-US" sz="1000" dirty="0"/>
           </a:p>
@@ -15380,7 +15007,7 @@
                 <a:ea typeface="Segoe UI" pitchFamily="34" charset="-122"/>
                 <a:cs typeface="Segoe UI" pitchFamily="34" charset="-120"/>
               </a:rPr>
-              <a:t>Comparer équitablement les candidats</a:t>
+              <a:t>Deux expériences de répétition différentes</a:t>
             </a:r>
             <a:endParaRPr lang="en-US" sz="2700" dirty="0"/>
           </a:p>
@@ -15388,98 +15015,22 @@
       </p:sp>
       <p:sp>
         <p:nvSpPr>
-          <p:cNvPr id="5" name="Text 3"/>
-          <p:cNvSpPr/>
-          <p:nvPr/>
-        </p:nvSpPr>
-        <p:spPr>
-          <a:xfrm>
-            <a:off x="594360" y="1828800"/>
-            <a:ext cx="640080" cy="594360"/>
-          </a:xfrm>
-          <a:prstGeom prst="rect">
-            <a:avLst/>
-          </a:prstGeom>
-          <a:noFill/>
-          <a:ln/>
-        </p:spPr>
-        <p:txBody>
-          <a:bodyPr wrap="square" lIns="0" tIns="0" rIns="0" bIns="0" rtlCol="0" anchor="ctr"/>
-          <a:lstStyle/>
-          <a:p>
-            <a:pPr indent="0" marL="0">
-              <a:buNone/>
-            </a:pPr>
-            <a:r>
-              <a:rPr lang="en-US" sz="1700" b="1" dirty="0">
-                <a:solidFill>
-                  <a:srgbClr val="0078D4"/>
-                </a:solidFill>
-                <a:latin typeface="Segoe UI" pitchFamily="34" charset="0"/>
-                <a:ea typeface="Segoe UI" pitchFamily="34" charset="-122"/>
-                <a:cs typeface="Segoe UI" pitchFamily="34" charset="-120"/>
-              </a:rPr>
-              <a:t>01</a:t>
-            </a:r>
-            <a:endParaRPr lang="en-US" sz="1700" dirty="0"/>
-          </a:p>
-        </p:txBody>
-      </p:sp>
-      <p:sp>
-        <p:nvSpPr>
-          <p:cNvPr id="6" name="Text 4"/>
-          <p:cNvSpPr/>
-          <p:nvPr/>
-        </p:nvSpPr>
-        <p:spPr>
-          <a:xfrm>
-            <a:off x="1325880" y="1828800"/>
-            <a:ext cx="10195560" cy="731520"/>
-          </a:xfrm>
-          <a:prstGeom prst="rect">
-            <a:avLst/>
-          </a:prstGeom>
-          <a:noFill/>
-          <a:ln/>
-        </p:spPr>
-        <p:txBody>
-          <a:bodyPr wrap="square" lIns="0" tIns="0" rIns="0" bIns="0" rtlCol="0" anchor="ctr"/>
-          <a:lstStyle/>
-          <a:p>
-            <a:pPr indent="0" marL="0">
-              <a:buNone/>
-            </a:pPr>
-            <a:r>
-              <a:rPr lang="en-US" sz="2000" dirty="0">
-                <a:solidFill>
-                  <a:srgbClr val="183449"/>
-                </a:solidFill>
-                <a:latin typeface="Segoe UI" pitchFamily="34" charset="0"/>
-                <a:ea typeface="Segoe UI" pitchFamily="34" charset="-122"/>
-                <a:cs typeface="Segoe UI" pitchFamily="34" charset="-120"/>
-              </a:rPr>
-              <a:t>Apparier ID stable, langue, essai et état initial contrôlé.</a:t>
-            </a:r>
-            <a:endParaRPr lang="en-US" sz="2000" dirty="0"/>
-          </a:p>
-        </p:txBody>
-      </p:sp>
-      <p:sp>
-        <p:nvSpPr>
-          <p:cNvPr id="7" name="Shape 5"/>
-          <p:cNvSpPr/>
-          <p:nvPr/>
-        </p:nvSpPr>
-        <p:spPr>
-          <a:xfrm>
-            <a:off x="1325880" y="2660904"/>
-            <a:ext cx="10149840" cy="0"/>
-          </a:xfrm>
-          <a:prstGeom prst="line">
-            <a:avLst/>
-          </a:prstGeom>
-          <a:noFill/>
-          <a:ln w="6350">
+          <p:cNvPr id="5" name="Shape 3"/>
+          <p:cNvSpPr/>
+          <p:nvPr/>
+        </p:nvSpPr>
+        <p:spPr>
+          <a:xfrm>
+            <a:off x="548640" y="1874520"/>
+            <a:ext cx="5394960" cy="3886200"/>
+          </a:xfrm>
+          <a:prstGeom prst="rect">
+            <a:avLst/>
+          </a:prstGeom>
+          <a:solidFill>
+            <a:srgbClr val="EDF4FA"/>
+          </a:solidFill>
+          <a:ln w="12700">
             <a:solidFill>
               <a:srgbClr val="DCE5ED"/>
             </a:solidFill>
@@ -15489,40 +15040,118 @@
       </p:sp>
       <p:sp>
         <p:nvSpPr>
+          <p:cNvPr id="6" name="Text 4"/>
+          <p:cNvSpPr/>
+          <p:nvPr/>
+        </p:nvSpPr>
+        <p:spPr>
+          <a:xfrm>
+            <a:off x="822960" y="2148840"/>
+            <a:ext cx="4846320" cy="640080"/>
+          </a:xfrm>
+          <a:prstGeom prst="rect">
+            <a:avLst/>
+          </a:prstGeom>
+          <a:noFill/>
+          <a:ln/>
+        </p:spPr>
+        <p:txBody>
+          <a:bodyPr wrap="square" lIns="0" tIns="0" rIns="0" bIns="0" rtlCol="0" anchor="ctr"/>
+          <a:lstStyle/>
+          <a:p>
+            <a:pPr indent="0" marL="0">
+              <a:buNone/>
+            </a:pPr>
+            <a:r>
+              <a:rPr lang="en-US" sz="2300" b="1" dirty="0">
+                <a:solidFill>
+                  <a:srgbClr val="0078D4"/>
+                </a:solidFill>
+                <a:latin typeface="Segoe UI" pitchFamily="34" charset="0"/>
+                <a:ea typeface="Segoe UI" pitchFamily="34" charset="-122"/>
+                <a:cs typeface="Segoe UI" pitchFamily="34" charset="-120"/>
+              </a:rPr>
+              <a:t>Variance de génération</a:t>
+            </a:r>
+            <a:endParaRPr lang="en-US" sz="2300" dirty="0"/>
+          </a:p>
+        </p:txBody>
+      </p:sp>
+      <p:sp>
+        <p:nvSpPr>
+          <p:cNvPr id="7" name="Text 5"/>
+          <p:cNvSpPr/>
+          <p:nvPr/>
+        </p:nvSpPr>
+        <p:spPr>
+          <a:xfrm>
+            <a:off x="822960" y="3017520"/>
+            <a:ext cx="4846320" cy="594360"/>
+          </a:xfrm>
+          <a:prstGeom prst="rect">
+            <a:avLst/>
+          </a:prstGeom>
+          <a:noFill/>
+          <a:ln/>
+        </p:spPr>
+        <p:txBody>
+          <a:bodyPr wrap="square" lIns="0" tIns="0" rIns="0" bIns="0" rtlCol="0" anchor="ctr"/>
+          <a:lstStyle/>
+          <a:p>
+            <a:pPr indent="0" marL="0">
+              <a:buNone/>
+            </a:pPr>
+            <a:r>
+              <a:rPr lang="en-US" sz="1900" dirty="0">
+                <a:solidFill>
+                  <a:srgbClr val="183449"/>
+                </a:solidFill>
+                <a:latin typeface="Segoe UI" pitchFamily="34" charset="0"/>
+                <a:ea typeface="Segoe UI" pitchFamily="34" charset="-122"/>
+                <a:cs typeface="Segoe UI" pitchFamily="34" charset="-120"/>
+              </a:rPr>
+              <a:t>Mêmes cas et état initial figés</a:t>
+            </a:r>
+            <a:endParaRPr lang="en-US" sz="1900" dirty="0"/>
+          </a:p>
+        </p:txBody>
+      </p:sp>
+      <p:sp>
+        <p:nvSpPr>
           <p:cNvPr id="8" name="Text 6"/>
           <p:cNvSpPr/>
           <p:nvPr/>
         </p:nvSpPr>
         <p:spPr>
           <a:xfrm>
-            <a:off x="594360" y="2770632"/>
-            <a:ext cx="640080" cy="594360"/>
-          </a:xfrm>
-          <a:prstGeom prst="rect">
-            <a:avLst/>
-          </a:prstGeom>
-          <a:noFill/>
-          <a:ln/>
-        </p:spPr>
-        <p:txBody>
-          <a:bodyPr wrap="square" lIns="0" tIns="0" rIns="0" bIns="0" rtlCol="0" anchor="ctr"/>
-          <a:lstStyle/>
-          <a:p>
-            <a:pPr indent="0" marL="0">
-              <a:buNone/>
-            </a:pPr>
-            <a:r>
-              <a:rPr lang="en-US" sz="1700" b="1" dirty="0">
-                <a:solidFill>
-                  <a:srgbClr val="0078D4"/>
-                </a:solidFill>
-                <a:latin typeface="Segoe UI" pitchFamily="34" charset="0"/>
-                <a:ea typeface="Segoe UI" pitchFamily="34" charset="-122"/>
-                <a:cs typeface="Segoe UI" pitchFamily="34" charset="-120"/>
-              </a:rPr>
-              <a:t>02</a:t>
-            </a:r>
-            <a:endParaRPr lang="en-US" sz="1700" dirty="0"/>
+            <a:off x="822960" y="3794760"/>
+            <a:ext cx="4846320" cy="594360"/>
+          </a:xfrm>
+          <a:prstGeom prst="rect">
+            <a:avLst/>
+          </a:prstGeom>
+          <a:noFill/>
+          <a:ln/>
+        </p:spPr>
+        <p:txBody>
+          <a:bodyPr wrap="square" lIns="0" tIns="0" rIns="0" bIns="0" rtlCol="0" anchor="ctr"/>
+          <a:lstStyle/>
+          <a:p>
+            <a:pPr indent="0" marL="0">
+              <a:buNone/>
+            </a:pPr>
+            <a:r>
+              <a:rPr lang="en-US" sz="1900" dirty="0">
+                <a:solidFill>
+                  <a:srgbClr val="183449"/>
+                </a:solidFill>
+                <a:latin typeface="Segoe UI" pitchFamily="34" charset="0"/>
+                <a:ea typeface="Segoe UI" pitchFamily="34" charset="-122"/>
+                <a:cs typeface="Segoe UI" pitchFamily="34" charset="-120"/>
+              </a:rPr>
+              <a:t>Nouvelles captures à chaque essai</a:t>
+            </a:r>
+            <a:endParaRPr lang="en-US" sz="1900" dirty="0"/>
           </a:p>
         </p:txBody>
       </p:sp>
@@ -15534,24 +15163,24 @@
         </p:nvSpPr>
         <p:spPr>
           <a:xfrm>
-            <a:off x="1325880" y="2770632"/>
-            <a:ext cx="10195560" cy="731520"/>
-          </a:xfrm>
-          <a:prstGeom prst="rect">
-            <a:avLst/>
-          </a:prstGeom>
-          <a:noFill/>
-          <a:ln/>
-        </p:spPr>
-        <p:txBody>
-          <a:bodyPr wrap="square" lIns="0" tIns="0" rIns="0" bIns="0" rtlCol="0" anchor="ctr"/>
-          <a:lstStyle/>
-          <a:p>
-            <a:pPr indent="0" marL="0">
-              <a:buNone/>
-            </a:pPr>
-            <a:r>
-              <a:rPr lang="en-US" sz="2000" dirty="0">
+            <a:off x="822960" y="4572000"/>
+            <a:ext cx="4846320" cy="594360"/>
+          </a:xfrm>
+          <a:prstGeom prst="rect">
+            <a:avLst/>
+          </a:prstGeom>
+          <a:noFill/>
+          <a:ln/>
+        </p:spPr>
+        <p:txBody>
+          <a:bodyPr wrap="square" lIns="0" tIns="0" rIns="0" bIns="0" rtlCol="0" anchor="ctr"/>
+          <a:lstStyle/>
+          <a:p>
+            <a:pPr indent="0" marL="0">
+              <a:buNone/>
+            </a:pPr>
+            <a:r>
+              <a:rPr lang="en-US" sz="1900" dirty="0">
                 <a:solidFill>
                   <a:srgbClr val="183449"/>
                 </a:solidFill>
@@ -15559,9 +15188,9 @@
                 <a:ea typeface="Segoe UI" pitchFamily="34" charset="-122"/>
                 <a:cs typeface="Segoe UI" pitchFamily="34" charset="-120"/>
               </a:rPr>
-              <a:t>Figer faits, grille, évaluateur et version du modèle juge.</a:t>
-            </a:r>
-            <a:endParaRPr lang="en-US" sz="2000" dirty="0"/>
+              <a:t>Juger et garder chaque réponse</a:t>
+            </a:r>
+            <a:endParaRPr lang="en-US" sz="1900" dirty="0"/>
           </a:p>
         </p:txBody>
       </p:sp>
@@ -15573,14 +15202,16 @@
         </p:nvSpPr>
         <p:spPr>
           <a:xfrm>
-            <a:off x="1325880" y="3602736"/>
-            <a:ext cx="10149840" cy="0"/>
-          </a:xfrm>
-          <a:prstGeom prst="line">
-            <a:avLst/>
-          </a:prstGeom>
-          <a:noFill/>
-          <a:ln w="6350">
+            <a:off x="6217920" y="1874520"/>
+            <a:ext cx="5394960" cy="3886200"/>
+          </a:xfrm>
+          <a:prstGeom prst="rect">
+            <a:avLst/>
+          </a:prstGeom>
+          <a:solidFill>
+            <a:srgbClr val="EDF4FA"/>
+          </a:solidFill>
+          <a:ln w="12700">
             <a:solidFill>
               <a:srgbClr val="DCE5ED"/>
             </a:solidFill>
@@ -15596,24 +15227,24 @@
         </p:nvSpPr>
         <p:spPr>
           <a:xfrm>
-            <a:off x="594360" y="3712464"/>
-            <a:ext cx="640080" cy="594360"/>
-          </a:xfrm>
-          <a:prstGeom prst="rect">
-            <a:avLst/>
-          </a:prstGeom>
-          <a:noFill/>
-          <a:ln/>
-        </p:spPr>
-        <p:txBody>
-          <a:bodyPr wrap="square" lIns="0" tIns="0" rIns="0" bIns="0" rtlCol="0" anchor="ctr"/>
-          <a:lstStyle/>
-          <a:p>
-            <a:pPr indent="0" marL="0">
-              <a:buNone/>
-            </a:pPr>
-            <a:r>
-              <a:rPr lang="en-US" sz="1700" b="1" dirty="0">
+            <a:off x="6492240" y="2148840"/>
+            <a:ext cx="4846320" cy="640080"/>
+          </a:xfrm>
+          <a:prstGeom prst="rect">
+            <a:avLst/>
+          </a:prstGeom>
+          <a:noFill/>
+          <a:ln/>
+        </p:spPr>
+        <p:txBody>
+          <a:bodyPr wrap="square" lIns="0" tIns="0" rIns="0" bIns="0" rtlCol="0" anchor="ctr"/>
+          <a:lstStyle/>
+          <a:p>
+            <a:pPr indent="0" marL="0">
+              <a:buNone/>
+            </a:pPr>
+            <a:r>
+              <a:rPr lang="en-US" sz="2300" b="1" dirty="0">
                 <a:solidFill>
                   <a:srgbClr val="0078D4"/>
                 </a:solidFill>
@@ -15621,9 +15252,9 @@
                 <a:ea typeface="Segoe UI" pitchFamily="34" charset="-122"/>
                 <a:cs typeface="Segoe UI" pitchFamily="34" charset="-120"/>
               </a:rPr>
-              <a:t>03</a:t>
-            </a:r>
-            <a:endParaRPr lang="en-US" sz="1700" dirty="0"/>
+              <a:t>Variance du juge</a:t>
+            </a:r>
+            <a:endParaRPr lang="en-US" sz="2300" dirty="0"/>
           </a:p>
         </p:txBody>
       </p:sp>
@@ -15635,24 +15266,24 @@
         </p:nvSpPr>
         <p:spPr>
           <a:xfrm>
-            <a:off x="1325880" y="3712464"/>
-            <a:ext cx="10195560" cy="731520"/>
-          </a:xfrm>
-          <a:prstGeom prst="rect">
-            <a:avLst/>
-          </a:prstGeom>
-          <a:noFill/>
-          <a:ln/>
-        </p:spPr>
-        <p:txBody>
-          <a:bodyPr wrap="square" lIns="0" tIns="0" rIns="0" bIns="0" rtlCol="0" anchor="ctr"/>
-          <a:lstStyle/>
-          <a:p>
-            <a:pPr indent="0" marL="0">
-              <a:buNone/>
-            </a:pPr>
-            <a:r>
-              <a:rPr lang="en-US" sz="2000" dirty="0">
+            <a:off x="6492240" y="3017520"/>
+            <a:ext cx="4846320" cy="594360"/>
+          </a:xfrm>
+          <a:prstGeom prst="rect">
+            <a:avLst/>
+          </a:prstGeom>
+          <a:noFill/>
+          <a:ln/>
+        </p:spPr>
+        <p:txBody>
+          <a:bodyPr wrap="square" lIns="0" tIns="0" rIns="0" bIns="0" rtlCol="0" anchor="ctr"/>
+          <a:lstStyle/>
+          <a:p>
+            <a:pPr indent="0" marL="0">
+              <a:buNone/>
+            </a:pPr>
+            <a:r>
+              <a:rPr lang="en-US" sz="1900" dirty="0">
                 <a:solidFill>
                   <a:srgbClr val="183449"/>
                 </a:solidFill>
@@ -15660,34 +15291,50 @@
                 <a:ea typeface="Segoe UI" pitchFamily="34" charset="-122"/>
                 <a:cs typeface="Segoe UI" pitchFamily="34" charset="-120"/>
               </a:rPr>
-              <a:t>Inspecter transitions réussite-échec, effet et incertitude.</a:t>
-            </a:r>
-            <a:endParaRPr lang="en-US" sz="2000" dirty="0"/>
-          </a:p>
-        </p:txBody>
-      </p:sp>
-      <p:sp>
-        <p:nvSpPr>
-          <p:cNvPr id="13" name="Shape 11"/>
-          <p:cNvSpPr/>
-          <p:nvPr/>
-        </p:nvSpPr>
-        <p:spPr>
-          <a:xfrm>
-            <a:off x="1325880" y="4544568"/>
-            <a:ext cx="10149840" cy="0"/>
-          </a:xfrm>
-          <a:prstGeom prst="line">
-            <a:avLst/>
-          </a:prstGeom>
-          <a:noFill/>
-          <a:ln w="6350">
-            <a:solidFill>
-              <a:srgbClr val="DCE5ED"/>
-            </a:solidFill>
-            <a:prstDash val="solid"/>
-          </a:ln>
-        </p:spPr>
+              <a:t>Mêmes captures immuables</a:t>
+            </a:r>
+            <a:endParaRPr lang="en-US" sz="1900" dirty="0"/>
+          </a:p>
+        </p:txBody>
+      </p:sp>
+      <p:sp>
+        <p:nvSpPr>
+          <p:cNvPr id="13" name="Text 11"/>
+          <p:cNvSpPr/>
+          <p:nvPr/>
+        </p:nvSpPr>
+        <p:spPr>
+          <a:xfrm>
+            <a:off x="6492240" y="3794760"/>
+            <a:ext cx="4846320" cy="594360"/>
+          </a:xfrm>
+          <a:prstGeom prst="rect">
+            <a:avLst/>
+          </a:prstGeom>
+          <a:noFill/>
+          <a:ln/>
+        </p:spPr>
+        <p:txBody>
+          <a:bodyPr wrap="square" lIns="0" tIns="0" rIns="0" bIns="0" rtlCol="0" anchor="ctr"/>
+          <a:lstStyle/>
+          <a:p>
+            <a:pPr indent="0" marL="0">
+              <a:buNone/>
+            </a:pPr>
+            <a:r>
+              <a:rPr lang="en-US" sz="1900" dirty="0">
+                <a:solidFill>
+                  <a:srgbClr val="183449"/>
+                </a:solidFill>
+                <a:latin typeface="Segoe UI" pitchFamily="34" charset="0"/>
+                <a:ea typeface="Segoe UI" pitchFamily="34" charset="-122"/>
+                <a:cs typeface="Segoe UI" pitchFamily="34" charset="-120"/>
+              </a:rPr>
+              <a:t>Appeler evaluate(), pas capture()</a:t>
+            </a:r>
+            <a:endParaRPr lang="en-US" sz="1900" dirty="0"/>
+          </a:p>
+        </p:txBody>
       </p:sp>
       <p:sp>
         <p:nvSpPr>
@@ -15697,63 +15344,24 @@
         </p:nvSpPr>
         <p:spPr>
           <a:xfrm>
-            <a:off x="594360" y="4654296"/>
-            <a:ext cx="640080" cy="594360"/>
-          </a:xfrm>
-          <a:prstGeom prst="rect">
-            <a:avLst/>
-          </a:prstGeom>
-          <a:noFill/>
-          <a:ln/>
-        </p:spPr>
-        <p:txBody>
-          <a:bodyPr wrap="square" lIns="0" tIns="0" rIns="0" bIns="0" rtlCol="0" anchor="ctr"/>
-          <a:lstStyle/>
-          <a:p>
-            <a:pPr indent="0" marL="0">
-              <a:buNone/>
-            </a:pPr>
-            <a:r>
-              <a:rPr lang="en-US" sz="1700" b="1" dirty="0">
-                <a:solidFill>
-                  <a:srgbClr val="0078D4"/>
-                </a:solidFill>
-                <a:latin typeface="Segoe UI" pitchFamily="34" charset="0"/>
-                <a:ea typeface="Segoe UI" pitchFamily="34" charset="-122"/>
-                <a:cs typeface="Segoe UI" pitchFamily="34" charset="-120"/>
-              </a:rPr>
-              <a:t>04</a:t>
-            </a:r>
-            <a:endParaRPr lang="en-US" sz="1700" dirty="0"/>
-          </a:p>
-        </p:txBody>
-      </p:sp>
-      <p:sp>
-        <p:nvSpPr>
-          <p:cNvPr id="15" name="Text 13"/>
-          <p:cNvSpPr/>
-          <p:nvPr/>
-        </p:nvSpPr>
-        <p:spPr>
-          <a:xfrm>
-            <a:off x="1325880" y="4654296"/>
-            <a:ext cx="10195560" cy="731520"/>
-          </a:xfrm>
-          <a:prstGeom prst="rect">
-            <a:avLst/>
-          </a:prstGeom>
-          <a:noFill/>
-          <a:ln/>
-        </p:spPr>
-        <p:txBody>
-          <a:bodyPr wrap="square" lIns="0" tIns="0" rIns="0" bIns="0" rtlCol="0" anchor="ctr"/>
-          <a:lstStyle/>
-          <a:p>
-            <a:pPr indent="0" marL="0">
-              <a:buNone/>
-            </a:pPr>
-            <a:r>
-              <a:rPr lang="en-US" sz="2000" dirty="0">
+            <a:off x="6492240" y="4572000"/>
+            <a:ext cx="4846320" cy="594360"/>
+          </a:xfrm>
+          <a:prstGeom prst="rect">
+            <a:avLst/>
+          </a:prstGeom>
+          <a:noFill/>
+          <a:ln/>
+        </p:spPr>
+        <p:txBody>
+          <a:bodyPr wrap="square" lIns="0" tIns="0" rIns="0" bIns="0" rtlCol="0" anchor="ctr"/>
+          <a:lstStyle/>
+          <a:p>
+            <a:pPr indent="0" marL="0">
+              <a:buNone/>
+            </a:pPr>
+            <a:r>
+              <a:rPr lang="en-US" sz="1900" dirty="0">
                 <a:solidFill>
                   <a:srgbClr val="183449"/>
                 </a:solidFill>
@@ -15761,38 +15369,15 @@
                 <a:ea typeface="Segoe UI" pitchFamily="34" charset="-122"/>
                 <a:cs typeface="Segoe UI" pitchFamily="34" charset="-120"/>
               </a:rPr>
-              <a:t>Jeu/évaluateur modifié : nouvelle référence, pas amélioration.</a:t>
-            </a:r>
-            <a:endParaRPr lang="en-US" sz="2000" dirty="0"/>
-          </a:p>
-        </p:txBody>
-      </p:sp>
-      <p:sp>
-        <p:nvSpPr>
-          <p:cNvPr id="16" name="Shape 14"/>
-          <p:cNvSpPr/>
-          <p:nvPr/>
-        </p:nvSpPr>
-        <p:spPr>
-          <a:xfrm>
-            <a:off x="1325880" y="5486400"/>
-            <a:ext cx="10149840" cy="0"/>
-          </a:xfrm>
-          <a:prstGeom prst="line">
-            <a:avLst/>
-          </a:prstGeom>
-          <a:noFill/>
-          <a:ln w="6350">
-            <a:solidFill>
-              <a:srgbClr val="DCE5ED"/>
-            </a:solidFill>
-            <a:prstDash val="solid"/>
-          </a:ln>
-        </p:spPr>
-      </p:sp>
-      <p:sp>
-        <p:nvSpPr>
-          <p:cNvPr id="17" name="Text 15">
+              <a:t>Consigner la réutilisation</a:t>
+            </a:r>
+            <a:endParaRPr lang="en-US" sz="1900" dirty="0"/>
+          </a:p>
+        </p:txBody>
+      </p:sp>
+      <p:sp>
+        <p:nvSpPr>
+          <p:cNvPr id="15" name="Text 13">
             <a:hlinkClick r:id="rId1" tooltip=""/>
           </p:cNvPr>
           <p:cNvSpPr/>
@@ -15840,7 +15425,7 @@
       </p:sp>
       <p:sp>
         <p:nvSpPr>
-          <p:cNvPr id="18" name="Text 16"/>
+          <p:cNvPr id="16" name="Text 14"/>
           <p:cNvSpPr/>
           <p:nvPr/>
         </p:nvSpPr>
@@ -15871,7 +15456,7 @@
                 <a:ea typeface="Segoe UI" pitchFamily="34" charset="-122"/>
                 <a:cs typeface="Segoe UI" pitchFamily="34" charset="-120"/>
               </a:rPr>
-              <a:t>27 / 35</a:t>
+              <a:t>27 / 37</a:t>
             </a:r>
             <a:endParaRPr lang="en-US" sz="1000" dirty="0"/>
           </a:p>
@@ -16008,7 +15593,7 @@
                 <a:ea typeface="Segoe UI" pitchFamily="34" charset="-122"/>
                 <a:cs typeface="Segoe UI" pitchFamily="34" charset="-120"/>
               </a:rPr>
-              <a:t>Dépenser pour des preuves utiles</a:t>
+              <a:t>5/5 ne démontre pas la perfection</a:t>
             </a:r>
             <a:endParaRPr lang="en-US" sz="2700" dirty="0"/>
           </a:p>
@@ -16086,7 +15671,7 @@
                 <a:ea typeface="Segoe UI" pitchFamily="34" charset="-122"/>
                 <a:cs typeface="Segoe UI" pitchFamily="34" charset="-120"/>
               </a:rPr>
-              <a:t>Contrats locaux et golden gate avant les juges payants.</a:t>
+              <a:t>Wilson 95 % illustratif pour 5/5 : environ 0,57 à 1,00.</a:t>
             </a:r>
             <a:endParaRPr lang="en-US" sz="2000" dirty="0"/>
           </a:p>
@@ -16187,7 +15772,7 @@
                 <a:ea typeface="Segoe UI" pitchFamily="34" charset="-122"/>
                 <a:cs typeface="Segoe UI" pitchFamily="34" charset="-120"/>
               </a:rPr>
-              <a:t>Pilote : 5 cas × 2 langues × 1 essai × 3 métriques = 30 jugements.</a:t>
+              <a:t>Cet intervalle suppose des observations Bernoulli indépendantes.</a:t>
             </a:r>
             <a:endParaRPr lang="en-US" sz="2000" dirty="0"/>
           </a:p>
@@ -16288,7 +15873,7 @@
                 <a:ea typeface="Segoe UI" pitchFamily="34" charset="-122"/>
                 <a:cs typeface="Segoe UI" pitchFamily="34" charset="-120"/>
               </a:rPr>
-              <a:t>Répétitions, longs contextes et relances augmentent le coût.</a:t>
+              <a:t>Notes répétées d’un cas : corrélées, pas de nouveaux clients.</a:t>
             </a:r>
             <a:endParaRPr lang="en-US" sz="2000" dirty="0"/>
           </a:p>
@@ -16389,7 +15974,7 @@
                 <a:ea typeface="Segoe UI" pitchFamily="34" charset="-122"/>
                 <a:cs typeface="Segoe UI" pitchFamily="34" charset="-120"/>
               </a:rPr>
-              <a:t>Réutiliser les captures; borner concurrence et budget.</a:t>
+              <a:t>Présenter incertitude par cas et limites des préjudices rares.</a:t>
             </a:r>
             <a:endParaRPr lang="en-US" sz="2000" dirty="0"/>
           </a:p>
@@ -16499,7 +16084,7 @@
                 <a:ea typeface="Segoe UI" pitchFamily="34" charset="-122"/>
                 <a:cs typeface="Segoe UI" pitchFamily="34" charset="-120"/>
               </a:rPr>
-              <a:t>28 / 35</a:t>
+              <a:t>28 / 37</a:t>
             </a:r>
             <a:endParaRPr lang="en-US" sz="1000" dirty="0"/>
           </a:p>
@@ -16636,7 +16221,7 @@
                 <a:ea typeface="Segoe UI" pitchFamily="34" charset="-122"/>
                 <a:cs typeface="Segoe UI" pitchFamily="34" charset="-120"/>
               </a:rPr>
-              <a:t>Régression avec état : le parcours de révision</a:t>
+              <a:t>Comparer équitablement les candidats</a:t>
             </a:r>
             <a:endParaRPr lang="en-US" sz="2700" dirty="0"/>
           </a:p>
@@ -16644,22 +16229,98 @@
       </p:sp>
       <p:sp>
         <p:nvSpPr>
-          <p:cNvPr id="5" name="Shape 3"/>
-          <p:cNvSpPr/>
-          <p:nvPr/>
-        </p:nvSpPr>
-        <p:spPr>
-          <a:xfrm>
-            <a:off x="548640" y="1920240"/>
-            <a:ext cx="5394960" cy="1417320"/>
-          </a:xfrm>
-          <a:prstGeom prst="rect">
-            <a:avLst/>
-          </a:prstGeom>
-          <a:solidFill>
-            <a:srgbClr val="EDF4FA"/>
-          </a:solidFill>
-          <a:ln w="12700">
+          <p:cNvPr id="5" name="Text 3"/>
+          <p:cNvSpPr/>
+          <p:nvPr/>
+        </p:nvSpPr>
+        <p:spPr>
+          <a:xfrm>
+            <a:off x="594360" y="1828800"/>
+            <a:ext cx="640080" cy="594360"/>
+          </a:xfrm>
+          <a:prstGeom prst="rect">
+            <a:avLst/>
+          </a:prstGeom>
+          <a:noFill/>
+          <a:ln/>
+        </p:spPr>
+        <p:txBody>
+          <a:bodyPr wrap="square" lIns="0" tIns="0" rIns="0" bIns="0" rtlCol="0" anchor="ctr"/>
+          <a:lstStyle/>
+          <a:p>
+            <a:pPr indent="0" marL="0">
+              <a:buNone/>
+            </a:pPr>
+            <a:r>
+              <a:rPr lang="en-US" sz="1700" b="1" dirty="0">
+                <a:solidFill>
+                  <a:srgbClr val="0078D4"/>
+                </a:solidFill>
+                <a:latin typeface="Segoe UI" pitchFamily="34" charset="0"/>
+                <a:ea typeface="Segoe UI" pitchFamily="34" charset="-122"/>
+                <a:cs typeface="Segoe UI" pitchFamily="34" charset="-120"/>
+              </a:rPr>
+              <a:t>01</a:t>
+            </a:r>
+            <a:endParaRPr lang="en-US" sz="1700" dirty="0"/>
+          </a:p>
+        </p:txBody>
+      </p:sp>
+      <p:sp>
+        <p:nvSpPr>
+          <p:cNvPr id="6" name="Text 4"/>
+          <p:cNvSpPr/>
+          <p:nvPr/>
+        </p:nvSpPr>
+        <p:spPr>
+          <a:xfrm>
+            <a:off x="1325880" y="1828800"/>
+            <a:ext cx="10195560" cy="731520"/>
+          </a:xfrm>
+          <a:prstGeom prst="rect">
+            <a:avLst/>
+          </a:prstGeom>
+          <a:noFill/>
+          <a:ln/>
+        </p:spPr>
+        <p:txBody>
+          <a:bodyPr wrap="square" lIns="0" tIns="0" rIns="0" bIns="0" rtlCol="0" anchor="ctr"/>
+          <a:lstStyle/>
+          <a:p>
+            <a:pPr indent="0" marL="0">
+              <a:buNone/>
+            </a:pPr>
+            <a:r>
+              <a:rPr lang="en-US" sz="2000" dirty="0">
+                <a:solidFill>
+                  <a:srgbClr val="183449"/>
+                </a:solidFill>
+                <a:latin typeface="Segoe UI" pitchFamily="34" charset="0"/>
+                <a:ea typeface="Segoe UI" pitchFamily="34" charset="-122"/>
+                <a:cs typeface="Segoe UI" pitchFamily="34" charset="-120"/>
+              </a:rPr>
+              <a:t>Apparier ID stable, langue, essai et état initial contrôlé.</a:t>
+            </a:r>
+            <a:endParaRPr lang="en-US" sz="2000" dirty="0"/>
+          </a:p>
+        </p:txBody>
+      </p:sp>
+      <p:sp>
+        <p:nvSpPr>
+          <p:cNvPr id="7" name="Shape 5"/>
+          <p:cNvSpPr/>
+          <p:nvPr/>
+        </p:nvSpPr>
+        <p:spPr>
+          <a:xfrm>
+            <a:off x="1325880" y="2660904"/>
+            <a:ext cx="10149840" cy="0"/>
+          </a:xfrm>
+          <a:prstGeom prst="line">
+            <a:avLst/>
+          </a:prstGeom>
+          <a:noFill/>
+          <a:ln w="6350">
             <a:solidFill>
               <a:srgbClr val="DCE5ED"/>
             </a:solidFill>
@@ -16669,30 +16330,30 @@
       </p:sp>
       <p:sp>
         <p:nvSpPr>
-          <p:cNvPr id="6" name="Text 4"/>
-          <p:cNvSpPr/>
-          <p:nvPr/>
-        </p:nvSpPr>
-        <p:spPr>
-          <a:xfrm>
-            <a:off x="777240" y="2103120"/>
-            <a:ext cx="640080" cy="411480"/>
-          </a:xfrm>
-          <a:prstGeom prst="rect">
-            <a:avLst/>
-          </a:prstGeom>
-          <a:noFill/>
-          <a:ln/>
-        </p:spPr>
-        <p:txBody>
-          <a:bodyPr wrap="square" lIns="0" tIns="0" rIns="0" bIns="0" rtlCol="0" anchor="ctr"/>
-          <a:lstStyle/>
-          <a:p>
-            <a:pPr indent="0" marL="0">
-              <a:buNone/>
-            </a:pPr>
-            <a:r>
-              <a:rPr lang="en-US" sz="2500" b="1" dirty="0">
+          <p:cNvPr id="8" name="Text 6"/>
+          <p:cNvSpPr/>
+          <p:nvPr/>
+        </p:nvSpPr>
+        <p:spPr>
+          <a:xfrm>
+            <a:off x="594360" y="2770632"/>
+            <a:ext cx="640080" cy="594360"/>
+          </a:xfrm>
+          <a:prstGeom prst="rect">
+            <a:avLst/>
+          </a:prstGeom>
+          <a:noFill/>
+          <a:ln/>
+        </p:spPr>
+        <p:txBody>
+          <a:bodyPr wrap="square" lIns="0" tIns="0" rIns="0" bIns="0" rtlCol="0" anchor="ctr"/>
+          <a:lstStyle/>
+          <a:p>
+            <a:pPr indent="0" marL="0">
+              <a:buNone/>
+            </a:pPr>
+            <a:r>
+              <a:rPr lang="en-US" sz="1700" b="1" dirty="0">
                 <a:solidFill>
                   <a:srgbClr val="0078D4"/>
                 </a:solidFill>
@@ -16700,38 +16361,38 @@
                 <a:ea typeface="Segoe UI" pitchFamily="34" charset="-122"/>
                 <a:cs typeface="Segoe UI" pitchFamily="34" charset="-120"/>
               </a:rPr>
-              <a:t>01</a:t>
-            </a:r>
-            <a:endParaRPr lang="en-US" sz="2500" dirty="0"/>
-          </a:p>
-        </p:txBody>
-      </p:sp>
-      <p:sp>
-        <p:nvSpPr>
-          <p:cNvPr id="7" name="Text 5"/>
-          <p:cNvSpPr/>
-          <p:nvPr/>
-        </p:nvSpPr>
-        <p:spPr>
-          <a:xfrm>
-            <a:off x="1508760" y="2103120"/>
-            <a:ext cx="4114800" cy="1051560"/>
-          </a:xfrm>
-          <a:prstGeom prst="rect">
-            <a:avLst/>
-          </a:prstGeom>
-          <a:noFill/>
-          <a:ln/>
-        </p:spPr>
-        <p:txBody>
-          <a:bodyPr wrap="square" lIns="0" tIns="0" rIns="0" bIns="0" rtlCol="0" anchor="ctr"/>
-          <a:lstStyle/>
-          <a:p>
-            <a:pPr indent="0" marL="0">
-              <a:buNone/>
-            </a:pPr>
-            <a:r>
-              <a:rPr lang="en-US" sz="2100" b="1" dirty="0">
+              <a:t>02</a:t>
+            </a:r>
+            <a:endParaRPr lang="en-US" sz="1700" dirty="0"/>
+          </a:p>
+        </p:txBody>
+      </p:sp>
+      <p:sp>
+        <p:nvSpPr>
+          <p:cNvPr id="9" name="Text 7"/>
+          <p:cNvSpPr/>
+          <p:nvPr/>
+        </p:nvSpPr>
+        <p:spPr>
+          <a:xfrm>
+            <a:off x="1325880" y="2770632"/>
+            <a:ext cx="10195560" cy="731520"/>
+          </a:xfrm>
+          <a:prstGeom prst="rect">
+            <a:avLst/>
+          </a:prstGeom>
+          <a:noFill/>
+          <a:ln/>
+        </p:spPr>
+        <p:txBody>
+          <a:bodyPr wrap="square" lIns="0" tIns="0" rIns="0" bIns="0" rtlCol="0" anchor="ctr"/>
+          <a:lstStyle/>
+          <a:p>
+            <a:pPr indent="0" marL="0">
+              <a:buNone/>
+            </a:pPr>
+            <a:r>
+              <a:rPr lang="en-US" sz="2000" dirty="0">
                 <a:solidFill>
                   <a:srgbClr val="183449"/>
                 </a:solidFill>
@@ -16739,30 +16400,28 @@
                 <a:ea typeface="Segoe UI" pitchFamily="34" charset="-122"/>
                 <a:cs typeface="Segoe UI" pitchFamily="34" charset="-120"/>
               </a:rPr>
-              <a:t>Retourner en DRAFT révision 2</a:t>
-            </a:r>
-            <a:endParaRPr lang="en-US" sz="2100" dirty="0"/>
-          </a:p>
-        </p:txBody>
-      </p:sp>
-      <p:sp>
-        <p:nvSpPr>
-          <p:cNvPr id="8" name="Shape 6"/>
-          <p:cNvSpPr/>
-          <p:nvPr/>
-        </p:nvSpPr>
-        <p:spPr>
-          <a:xfrm>
-            <a:off x="6217920" y="1920240"/>
-            <a:ext cx="5394960" cy="1417320"/>
-          </a:xfrm>
-          <a:prstGeom prst="rect">
-            <a:avLst/>
-          </a:prstGeom>
-          <a:solidFill>
-            <a:srgbClr val="EDF4FA"/>
-          </a:solidFill>
-          <a:ln w="12700">
+              <a:t>Figer faits, grille, évaluateur et version du modèle juge.</a:t>
+            </a:r>
+            <a:endParaRPr lang="en-US" sz="2000" dirty="0"/>
+          </a:p>
+        </p:txBody>
+      </p:sp>
+      <p:sp>
+        <p:nvSpPr>
+          <p:cNvPr id="10" name="Shape 8"/>
+          <p:cNvSpPr/>
+          <p:nvPr/>
+        </p:nvSpPr>
+        <p:spPr>
+          <a:xfrm>
+            <a:off x="1325880" y="3602736"/>
+            <a:ext cx="10149840" cy="0"/>
+          </a:xfrm>
+          <a:prstGeom prst="line">
+            <a:avLst/>
+          </a:prstGeom>
+          <a:noFill/>
+          <a:ln w="6350">
             <a:solidFill>
               <a:srgbClr val="DCE5ED"/>
             </a:solidFill>
@@ -16772,30 +16431,30 @@
       </p:sp>
       <p:sp>
         <p:nvSpPr>
-          <p:cNvPr id="9" name="Text 7"/>
-          <p:cNvSpPr/>
-          <p:nvPr/>
-        </p:nvSpPr>
-        <p:spPr>
-          <a:xfrm>
-            <a:off x="6446520" y="2103120"/>
-            <a:ext cx="640080" cy="411480"/>
-          </a:xfrm>
-          <a:prstGeom prst="rect">
-            <a:avLst/>
-          </a:prstGeom>
-          <a:noFill/>
-          <a:ln/>
-        </p:spPr>
-        <p:txBody>
-          <a:bodyPr wrap="square" lIns="0" tIns="0" rIns="0" bIns="0" rtlCol="0" anchor="ctr"/>
-          <a:lstStyle/>
-          <a:p>
-            <a:pPr indent="0" marL="0">
-              <a:buNone/>
-            </a:pPr>
-            <a:r>
-              <a:rPr lang="en-US" sz="2500" b="1" dirty="0">
+          <p:cNvPr id="11" name="Text 9"/>
+          <p:cNvSpPr/>
+          <p:nvPr/>
+        </p:nvSpPr>
+        <p:spPr>
+          <a:xfrm>
+            <a:off x="594360" y="3712464"/>
+            <a:ext cx="640080" cy="594360"/>
+          </a:xfrm>
+          <a:prstGeom prst="rect">
+            <a:avLst/>
+          </a:prstGeom>
+          <a:noFill/>
+          <a:ln/>
+        </p:spPr>
+        <p:txBody>
+          <a:bodyPr wrap="square" lIns="0" tIns="0" rIns="0" bIns="0" rtlCol="0" anchor="ctr"/>
+          <a:lstStyle/>
+          <a:p>
+            <a:pPr indent="0" marL="0">
+              <a:buNone/>
+            </a:pPr>
+            <a:r>
+              <a:rPr lang="en-US" sz="1700" b="1" dirty="0">
                 <a:solidFill>
                   <a:srgbClr val="0078D4"/>
                 </a:solidFill>
@@ -16803,38 +16462,38 @@
                 <a:ea typeface="Segoe UI" pitchFamily="34" charset="-122"/>
                 <a:cs typeface="Segoe UI" pitchFamily="34" charset="-120"/>
               </a:rPr>
-              <a:t>02</a:t>
-            </a:r>
-            <a:endParaRPr lang="en-US" sz="2500" dirty="0"/>
-          </a:p>
-        </p:txBody>
-      </p:sp>
-      <p:sp>
-        <p:nvSpPr>
-          <p:cNvPr id="10" name="Text 8"/>
-          <p:cNvSpPr/>
-          <p:nvPr/>
-        </p:nvSpPr>
-        <p:spPr>
-          <a:xfrm>
-            <a:off x="7178040" y="2103120"/>
-            <a:ext cx="4114800" cy="1051560"/>
-          </a:xfrm>
-          <a:prstGeom prst="rect">
-            <a:avLst/>
-          </a:prstGeom>
-          <a:noFill/>
-          <a:ln/>
-        </p:spPr>
-        <p:txBody>
-          <a:bodyPr wrap="square" lIns="0" tIns="0" rIns="0" bIns="0" rtlCol="0" anchor="ctr"/>
-          <a:lstStyle/>
-          <a:p>
-            <a:pPr indent="0" marL="0">
-              <a:buNone/>
-            </a:pPr>
-            <a:r>
-              <a:rPr lang="en-US" sz="2100" b="1" dirty="0">
+              <a:t>03</a:t>
+            </a:r>
+            <a:endParaRPr lang="en-US" sz="1700" dirty="0"/>
+          </a:p>
+        </p:txBody>
+      </p:sp>
+      <p:sp>
+        <p:nvSpPr>
+          <p:cNvPr id="12" name="Text 10"/>
+          <p:cNvSpPr/>
+          <p:nvPr/>
+        </p:nvSpPr>
+        <p:spPr>
+          <a:xfrm>
+            <a:off x="1325880" y="3712464"/>
+            <a:ext cx="10195560" cy="731520"/>
+          </a:xfrm>
+          <a:prstGeom prst="rect">
+            <a:avLst/>
+          </a:prstGeom>
+          <a:noFill/>
+          <a:ln/>
+        </p:spPr>
+        <p:txBody>
+          <a:bodyPr wrap="square" lIns="0" tIns="0" rIns="0" bIns="0" rtlCol="0" anchor="ctr"/>
+          <a:lstStyle/>
+          <a:p>
+            <a:pPr indent="0" marL="0">
+              <a:buNone/>
+            </a:pPr>
+            <a:r>
+              <a:rPr lang="en-US" sz="2000" dirty="0">
                 <a:solidFill>
                   <a:srgbClr val="183449"/>
                 </a:solidFill>
@@ -16842,30 +16501,28 @@
                 <a:ea typeface="Segoe UI" pitchFamily="34" charset="-122"/>
                 <a:cs typeface="Segoe UI" pitchFamily="34" charset="-120"/>
               </a:rPr>
-              <a:t>Vérifier visibilité actif / DRAFT</a:t>
-            </a:r>
-            <a:endParaRPr lang="en-US" sz="2100" dirty="0"/>
-          </a:p>
-        </p:txBody>
-      </p:sp>
-      <p:sp>
-        <p:nvSpPr>
-          <p:cNvPr id="11" name="Shape 9"/>
-          <p:cNvSpPr/>
-          <p:nvPr/>
-        </p:nvSpPr>
-        <p:spPr>
-          <a:xfrm>
-            <a:off x="548640" y="3749040"/>
-            <a:ext cx="5394960" cy="1417320"/>
-          </a:xfrm>
-          <a:prstGeom prst="rect">
-            <a:avLst/>
-          </a:prstGeom>
-          <a:solidFill>
-            <a:srgbClr val="EDF4FA"/>
-          </a:solidFill>
-          <a:ln w="12700">
+              <a:t>Inspecter transitions réussite-échec, effet et incertitude.</a:t>
+            </a:r>
+            <a:endParaRPr lang="en-US" sz="2000" dirty="0"/>
+          </a:p>
+        </p:txBody>
+      </p:sp>
+      <p:sp>
+        <p:nvSpPr>
+          <p:cNvPr id="13" name="Shape 11"/>
+          <p:cNvSpPr/>
+          <p:nvPr/>
+        </p:nvSpPr>
+        <p:spPr>
+          <a:xfrm>
+            <a:off x="1325880" y="4544568"/>
+            <a:ext cx="10149840" cy="0"/>
+          </a:xfrm>
+          <a:prstGeom prst="line">
+            <a:avLst/>
+          </a:prstGeom>
+          <a:noFill/>
+          <a:ln w="6350">
             <a:solidFill>
               <a:srgbClr val="DCE5ED"/>
             </a:solidFill>
@@ -16875,30 +16532,30 @@
       </p:sp>
       <p:sp>
         <p:nvSpPr>
-          <p:cNvPr id="12" name="Text 10"/>
-          <p:cNvSpPr/>
-          <p:nvPr/>
-        </p:nvSpPr>
-        <p:spPr>
-          <a:xfrm>
-            <a:off x="777240" y="3931920"/>
-            <a:ext cx="640080" cy="411480"/>
-          </a:xfrm>
-          <a:prstGeom prst="rect">
-            <a:avLst/>
-          </a:prstGeom>
-          <a:noFill/>
-          <a:ln/>
-        </p:spPr>
-        <p:txBody>
-          <a:bodyPr wrap="square" lIns="0" tIns="0" rIns="0" bIns="0" rtlCol="0" anchor="ctr"/>
-          <a:lstStyle/>
-          <a:p>
-            <a:pPr indent="0" marL="0">
-              <a:buNone/>
-            </a:pPr>
-            <a:r>
-              <a:rPr lang="en-US" sz="2500" b="1" dirty="0">
+          <p:cNvPr id="14" name="Text 12"/>
+          <p:cNvSpPr/>
+          <p:nvPr/>
+        </p:nvSpPr>
+        <p:spPr>
+          <a:xfrm>
+            <a:off x="594360" y="4654296"/>
+            <a:ext cx="640080" cy="594360"/>
+          </a:xfrm>
+          <a:prstGeom prst="rect">
+            <a:avLst/>
+          </a:prstGeom>
+          <a:noFill/>
+          <a:ln/>
+        </p:spPr>
+        <p:txBody>
+          <a:bodyPr wrap="square" lIns="0" tIns="0" rIns="0" bIns="0" rtlCol="0" anchor="ctr"/>
+          <a:lstStyle/>
+          <a:p>
+            <a:pPr indent="0" marL="0">
+              <a:buNone/>
+            </a:pPr>
+            <a:r>
+              <a:rPr lang="en-US" sz="1700" b="1" dirty="0">
                 <a:solidFill>
                   <a:srgbClr val="0078D4"/>
                 </a:solidFill>
@@ -16906,38 +16563,38 @@
                 <a:ea typeface="Segoe UI" pitchFamily="34" charset="-122"/>
                 <a:cs typeface="Segoe UI" pitchFamily="34" charset="-120"/>
               </a:rPr>
-              <a:t>03</a:t>
-            </a:r>
-            <a:endParaRPr lang="en-US" sz="2500" dirty="0"/>
-          </a:p>
-        </p:txBody>
-      </p:sp>
-      <p:sp>
-        <p:nvSpPr>
-          <p:cNvPr id="13" name="Text 11"/>
-          <p:cNvSpPr/>
-          <p:nvPr/>
-        </p:nvSpPr>
-        <p:spPr>
-          <a:xfrm>
-            <a:off x="1508760" y="3931920"/>
-            <a:ext cx="4114800" cy="1051560"/>
-          </a:xfrm>
-          <a:prstGeom prst="rect">
-            <a:avLst/>
-          </a:prstGeom>
-          <a:noFill/>
-          <a:ln/>
-        </p:spPr>
-        <p:txBody>
-          <a:bodyPr wrap="square" lIns="0" tIns="0" rIns="0" bIns="0" rtlCol="0" anchor="ctr"/>
-          <a:lstStyle/>
-          <a:p>
-            <a:pPr indent="0" marL="0">
-              <a:buNone/>
-            </a:pPr>
-            <a:r>
-              <a:rPr lang="en-US" sz="2100" b="1" dirty="0">
+              <a:t>04</a:t>
+            </a:r>
+            <a:endParaRPr lang="en-US" sz="1700" dirty="0"/>
+          </a:p>
+        </p:txBody>
+      </p:sp>
+      <p:sp>
+        <p:nvSpPr>
+          <p:cNvPr id="15" name="Text 13"/>
+          <p:cNvSpPr/>
+          <p:nvPr/>
+        </p:nvSpPr>
+        <p:spPr>
+          <a:xfrm>
+            <a:off x="1325880" y="4654296"/>
+            <a:ext cx="10195560" cy="731520"/>
+          </a:xfrm>
+          <a:prstGeom prst="rect">
+            <a:avLst/>
+          </a:prstGeom>
+          <a:noFill/>
+          <a:ln/>
+        </p:spPr>
+        <p:txBody>
+          <a:bodyPr wrap="square" lIns="0" tIns="0" rIns="0" bIns="0" rtlCol="0" anchor="ctr"/>
+          <a:lstStyle/>
+          <a:p>
+            <a:pPr indent="0" marL="0">
+              <a:buNone/>
+            </a:pPr>
+            <a:r>
+              <a:rPr lang="en-US" sz="2000" dirty="0">
                 <a:solidFill>
                   <a:srgbClr val="183449"/>
                 </a:solidFill>
@@ -16945,114 +16602,34 @@
                 <a:ea typeface="Segoe UI" pitchFamily="34" charset="-122"/>
                 <a:cs typeface="Segoe UI" pitchFamily="34" charset="-120"/>
               </a:rPr>
-              <a:t>Corriger et préparer par l’agent natif</a:t>
-            </a:r>
-            <a:endParaRPr lang="en-US" sz="2100" dirty="0"/>
-          </a:p>
-        </p:txBody>
-      </p:sp>
-      <p:sp>
-        <p:nvSpPr>
-          <p:cNvPr id="14" name="Shape 12"/>
-          <p:cNvSpPr/>
-          <p:nvPr/>
-        </p:nvSpPr>
-        <p:spPr>
-          <a:xfrm>
-            <a:off x="6217920" y="3749040"/>
-            <a:ext cx="5394960" cy="1417320"/>
-          </a:xfrm>
-          <a:prstGeom prst="rect">
-            <a:avLst/>
-          </a:prstGeom>
-          <a:solidFill>
-            <a:srgbClr val="EDF4FA"/>
-          </a:solidFill>
-          <a:ln w="12700">
+              <a:t>Jeu/évaluateur modifié : nouvelle référence, pas amélioration.</a:t>
+            </a:r>
+            <a:endParaRPr lang="en-US" sz="2000" dirty="0"/>
+          </a:p>
+        </p:txBody>
+      </p:sp>
+      <p:sp>
+        <p:nvSpPr>
+          <p:cNvPr id="16" name="Shape 14"/>
+          <p:cNvSpPr/>
+          <p:nvPr/>
+        </p:nvSpPr>
+        <p:spPr>
+          <a:xfrm>
+            <a:off x="1325880" y="5486400"/>
+            <a:ext cx="10149840" cy="0"/>
+          </a:xfrm>
+          <a:prstGeom prst="line">
+            <a:avLst/>
+          </a:prstGeom>
+          <a:noFill/>
+          <a:ln w="6350">
             <a:solidFill>
               <a:srgbClr val="DCE5ED"/>
             </a:solidFill>
             <a:prstDash val="solid"/>
           </a:ln>
         </p:spPr>
-      </p:sp>
-      <p:sp>
-        <p:nvSpPr>
-          <p:cNvPr id="15" name="Text 13"/>
-          <p:cNvSpPr/>
-          <p:nvPr/>
-        </p:nvSpPr>
-        <p:spPr>
-          <a:xfrm>
-            <a:off x="6446520" y="3931920"/>
-            <a:ext cx="640080" cy="411480"/>
-          </a:xfrm>
-          <a:prstGeom prst="rect">
-            <a:avLst/>
-          </a:prstGeom>
-          <a:noFill/>
-          <a:ln/>
-        </p:spPr>
-        <p:txBody>
-          <a:bodyPr wrap="square" lIns="0" tIns="0" rIns="0" bIns="0" rtlCol="0" anchor="ctr"/>
-          <a:lstStyle/>
-          <a:p>
-            <a:pPr indent="0" marL="0">
-              <a:buNone/>
-            </a:pPr>
-            <a:r>
-              <a:rPr lang="en-US" sz="2500" b="1" dirty="0">
-                <a:solidFill>
-                  <a:srgbClr val="0078D4"/>
-                </a:solidFill>
-                <a:latin typeface="Segoe UI" pitchFamily="34" charset="0"/>
-                <a:ea typeface="Segoe UI" pitchFamily="34" charset="-122"/>
-                <a:cs typeface="Segoe UI" pitchFamily="34" charset="-120"/>
-              </a:rPr>
-              <a:t>04</a:t>
-            </a:r>
-            <a:endParaRPr lang="en-US" sz="2500" dirty="0"/>
-          </a:p>
-        </p:txBody>
-      </p:sp>
-      <p:sp>
-        <p:nvSpPr>
-          <p:cNvPr id="16" name="Text 14"/>
-          <p:cNvSpPr/>
-          <p:nvPr/>
-        </p:nvSpPr>
-        <p:spPr>
-          <a:xfrm>
-            <a:off x="7178040" y="3931920"/>
-            <a:ext cx="4114800" cy="1051560"/>
-          </a:xfrm>
-          <a:prstGeom prst="rect">
-            <a:avLst/>
-          </a:prstGeom>
-          <a:noFill/>
-          <a:ln/>
-        </p:spPr>
-        <p:txBody>
-          <a:bodyPr wrap="square" lIns="0" tIns="0" rIns="0" bIns="0" rtlCol="0" anchor="ctr"/>
-          <a:lstStyle/>
-          <a:p>
-            <a:pPr indent="0" marL="0">
-              <a:buNone/>
-            </a:pPr>
-            <a:r>
-              <a:rPr lang="en-US" sz="2100" b="1" dirty="0">
-                <a:solidFill>
-                  <a:srgbClr val="183449"/>
-                </a:solidFill>
-                <a:latin typeface="Segoe UI" pitchFamily="34" charset="0"/>
-                <a:ea typeface="Segoe UI" pitchFamily="34" charset="-122"/>
-                <a:cs typeface="Segoe UI" pitchFamily="34" charset="-120"/>
-              </a:rPr>
-              <a:t>Journal concordant; auto-approbation refusée</a:t>
-            </a:r>
-            <a:endParaRPr lang="en-US" sz="2100" dirty="0"/>
-          </a:p>
-        </p:txBody>
       </p:sp>
       <p:sp>
         <p:nvSpPr>
@@ -17135,7 +16712,7 @@
                 <a:ea typeface="Segoe UI" pitchFamily="34" charset="-122"/>
                 <a:cs typeface="Segoe UI" pitchFamily="34" charset="-120"/>
               </a:rPr>
-              <a:t>29 / 35</a:t>
+              <a:t>29 / 37</a:t>
             </a:r>
             <a:endParaRPr lang="en-US" sz="1000" dirty="0"/>
           </a:p>
@@ -17771,7 +17348,7 @@
                 <a:ea typeface="Segoe UI" pitchFamily="34" charset="-122"/>
                 <a:cs typeface="Segoe UI" pitchFamily="34" charset="-120"/>
               </a:rPr>
-              <a:t>3 / 35</a:t>
+              <a:t>3 / 37</a:t>
             </a:r>
             <a:endParaRPr lang="en-US" sz="1000" dirty="0"/>
           </a:p>
@@ -17908,7 +17485,7 @@
                 <a:ea typeface="Segoe UI" pitchFamily="34" charset="-122"/>
                 <a:cs typeface="Segoe UI" pitchFamily="34" charset="-120"/>
               </a:rPr>
-              <a:t>La trajectoire exige une preuve réelle</a:t>
+              <a:t>Dépenser pour des preuves utiles</a:t>
             </a:r>
             <a:endParaRPr lang="en-US" sz="2700" dirty="0"/>
           </a:p>
@@ -17986,7 +17563,7 @@
                 <a:ea typeface="Segoe UI" pitchFamily="34" charset="-122"/>
                 <a:cs typeface="Segoe UI" pitchFamily="34" charset="-120"/>
               </a:rPr>
-              <a:t>Qualité finale et processus correct sont des questions différentes.</a:t>
+              <a:t>Contrats locaux et golden gate avant les juges payants.</a:t>
             </a:r>
             <a:endParaRPr lang="en-US" sz="2000" dirty="0"/>
           </a:p>
@@ -18087,7 +17664,7 @@
                 <a:ea typeface="Segoe UI" pitchFamily="34" charset="-122"/>
                 <a:cs typeface="Segoe UI" pitchFamily="34" charset="-120"/>
               </a:rPr>
-              <a:t>Choix/arguments outils exigent des traces réelles compatibles.</a:t>
+              <a:t>Pilote : 5 cas × 2 langues × 1 essai × 3 métriques = 30 jugements.</a:t>
             </a:r>
             <a:endParaRPr lang="en-US" sz="2000" dirty="0"/>
           </a:p>
@@ -18188,7 +17765,7 @@
                 <a:ea typeface="Segoe UI" pitchFamily="34" charset="-122"/>
                 <a:cs typeface="Segoe UI" pitchFamily="34" charset="-120"/>
               </a:rPr>
-              <a:t>Vraies étapes : INTAKE, REFERENCE_LOOKUP, COMPOSITION.</a:t>
+              <a:t>Répétitions, longs contextes et relances augmentent le coût.</a:t>
             </a:r>
             <a:endParaRPr lang="en-US" sz="2000" dirty="0"/>
           </a:p>
@@ -18289,7 +17866,7 @@
                 <a:ea typeface="Segoe UI" pitchFamily="34" charset="-122"/>
                 <a:cs typeface="Segoe UI" pitchFamily="34" charset="-120"/>
               </a:rPr>
-              <a:t>ID demandé ou texte final ne prouvent pas l’ingestion.</a:t>
+              <a:t>Réutiliser les captures; borner concurrence et budget.</a:t>
             </a:r>
             <a:endParaRPr lang="en-US" sz="2000" dirty="0"/>
           </a:p>
@@ -18399,7 +17976,7 @@
                 <a:ea typeface="Segoe UI" pitchFamily="34" charset="-122"/>
                 <a:cs typeface="Segoe UI" pitchFamily="34" charset="-120"/>
               </a:rPr>
-              <a:t>30 / 35</a:t>
+              <a:t>30 / 37</a:t>
             </a:r>
             <a:endParaRPr lang="en-US" sz="1000" dirty="0"/>
           </a:p>
@@ -18536,7 +18113,7 @@
                 <a:ea typeface="Segoe UI" pitchFamily="34" charset="-122"/>
                 <a:cs typeface="Segoe UI" pitchFamily="34" charset="-120"/>
               </a:rPr>
-              <a:t>Exploiter plusieurs tableaux distincts</a:t>
+              <a:t>Régression avec état : le parcours de révision</a:t>
             </a:r>
             <a:endParaRPr lang="en-US" sz="2700" dirty="0"/>
           </a:p>
@@ -18544,98 +18121,22 @@
       </p:sp>
       <p:sp>
         <p:nvSpPr>
-          <p:cNvPr id="5" name="Text 3"/>
-          <p:cNvSpPr/>
-          <p:nvPr/>
-        </p:nvSpPr>
-        <p:spPr>
-          <a:xfrm>
-            <a:off x="594360" y="1828800"/>
-            <a:ext cx="640080" cy="594360"/>
-          </a:xfrm>
-          <a:prstGeom prst="rect">
-            <a:avLst/>
-          </a:prstGeom>
-          <a:noFill/>
-          <a:ln/>
-        </p:spPr>
-        <p:txBody>
-          <a:bodyPr wrap="square" lIns="0" tIns="0" rIns="0" bIns="0" rtlCol="0" anchor="ctr"/>
-          <a:lstStyle/>
-          <a:p>
-            <a:pPr indent="0" marL="0">
-              <a:buNone/>
-            </a:pPr>
-            <a:r>
-              <a:rPr lang="en-US" sz="1700" b="1" dirty="0">
-                <a:solidFill>
-                  <a:srgbClr val="0078D4"/>
-                </a:solidFill>
-                <a:latin typeface="Segoe UI" pitchFamily="34" charset="0"/>
-                <a:ea typeface="Segoe UI" pitchFamily="34" charset="-122"/>
-                <a:cs typeface="Segoe UI" pitchFamily="34" charset="-120"/>
-              </a:rPr>
-              <a:t>01</a:t>
-            </a:r>
-            <a:endParaRPr lang="en-US" sz="1700" dirty="0"/>
-          </a:p>
-        </p:txBody>
-      </p:sp>
-      <p:sp>
-        <p:nvSpPr>
-          <p:cNvPr id="6" name="Text 4"/>
-          <p:cNvSpPr/>
-          <p:nvPr/>
-        </p:nvSpPr>
-        <p:spPr>
-          <a:xfrm>
-            <a:off x="1325880" y="1828800"/>
-            <a:ext cx="10195560" cy="731520"/>
-          </a:xfrm>
-          <a:prstGeom prst="rect">
-            <a:avLst/>
-          </a:prstGeom>
-          <a:noFill/>
-          <a:ln/>
-        </p:spPr>
-        <p:txBody>
-          <a:bodyPr wrap="square" lIns="0" tIns="0" rIns="0" bIns="0" rtlCol="0" anchor="ctr"/>
-          <a:lstStyle/>
-          <a:p>
-            <a:pPr indent="0" marL="0">
-              <a:buNone/>
-            </a:pPr>
-            <a:r>
-              <a:rPr lang="en-US" sz="2000" dirty="0">
-                <a:solidFill>
-                  <a:srgbClr val="183449"/>
-                </a:solidFill>
-                <a:latin typeface="Segoe UI" pitchFamily="34" charset="0"/>
-                <a:ea typeface="Segoe UI" pitchFamily="34" charset="-122"/>
-                <a:cs typeface="Segoe UI" pitchFamily="34" charset="-120"/>
-              </a:rPr>
-              <a:t>Service : disponibilité, latence, 401/403, quota, délais, coût.</a:t>
-            </a:r>
-            <a:endParaRPr lang="en-US" sz="2000" dirty="0"/>
-          </a:p>
-        </p:txBody>
-      </p:sp>
-      <p:sp>
-        <p:nvSpPr>
-          <p:cNvPr id="7" name="Shape 5"/>
-          <p:cNvSpPr/>
-          <p:nvPr/>
-        </p:nvSpPr>
-        <p:spPr>
-          <a:xfrm>
-            <a:off x="1325880" y="2660904"/>
-            <a:ext cx="10149840" cy="0"/>
-          </a:xfrm>
-          <a:prstGeom prst="line">
-            <a:avLst/>
-          </a:prstGeom>
-          <a:noFill/>
-          <a:ln w="6350">
+          <p:cNvPr id="5" name="Shape 3"/>
+          <p:cNvSpPr/>
+          <p:nvPr/>
+        </p:nvSpPr>
+        <p:spPr>
+          <a:xfrm>
+            <a:off x="548640" y="1920240"/>
+            <a:ext cx="5394960" cy="1417320"/>
+          </a:xfrm>
+          <a:prstGeom prst="rect">
+            <a:avLst/>
+          </a:prstGeom>
+          <a:solidFill>
+            <a:srgbClr val="EDF4FA"/>
+          </a:solidFill>
+          <a:ln w="12700">
             <a:solidFill>
               <a:srgbClr val="DCE5ED"/>
             </a:solidFill>
@@ -18645,30 +18146,30 @@
       </p:sp>
       <p:sp>
         <p:nvSpPr>
-          <p:cNvPr id="8" name="Text 6"/>
-          <p:cNvSpPr/>
-          <p:nvPr/>
-        </p:nvSpPr>
-        <p:spPr>
-          <a:xfrm>
-            <a:off x="594360" y="2770632"/>
-            <a:ext cx="640080" cy="594360"/>
-          </a:xfrm>
-          <a:prstGeom prst="rect">
-            <a:avLst/>
-          </a:prstGeom>
-          <a:noFill/>
-          <a:ln/>
-        </p:spPr>
-        <p:txBody>
-          <a:bodyPr wrap="square" lIns="0" tIns="0" rIns="0" bIns="0" rtlCol="0" anchor="ctr"/>
-          <a:lstStyle/>
-          <a:p>
-            <a:pPr indent="0" marL="0">
-              <a:buNone/>
-            </a:pPr>
-            <a:r>
-              <a:rPr lang="en-US" sz="1700" b="1" dirty="0">
+          <p:cNvPr id="6" name="Text 4"/>
+          <p:cNvSpPr/>
+          <p:nvPr/>
+        </p:nvSpPr>
+        <p:spPr>
+          <a:xfrm>
+            <a:off x="777240" y="2103120"/>
+            <a:ext cx="640080" cy="411480"/>
+          </a:xfrm>
+          <a:prstGeom prst="rect">
+            <a:avLst/>
+          </a:prstGeom>
+          <a:noFill/>
+          <a:ln/>
+        </p:spPr>
+        <p:txBody>
+          <a:bodyPr wrap="square" lIns="0" tIns="0" rIns="0" bIns="0" rtlCol="0" anchor="ctr"/>
+          <a:lstStyle/>
+          <a:p>
+            <a:pPr indent="0" marL="0">
+              <a:buNone/>
+            </a:pPr>
+            <a:r>
+              <a:rPr lang="en-US" sz="2500" b="1" dirty="0">
                 <a:solidFill>
                   <a:srgbClr val="0078D4"/>
                 </a:solidFill>
@@ -18676,38 +18177,38 @@
                 <a:ea typeface="Segoe UI" pitchFamily="34" charset="-122"/>
                 <a:cs typeface="Segoe UI" pitchFamily="34" charset="-120"/>
               </a:rPr>
-              <a:t>02</a:t>
-            </a:r>
-            <a:endParaRPr lang="en-US" sz="1700" dirty="0"/>
-          </a:p>
-        </p:txBody>
-      </p:sp>
-      <p:sp>
-        <p:nvSpPr>
-          <p:cNvPr id="9" name="Text 7"/>
-          <p:cNvSpPr/>
-          <p:nvPr/>
-        </p:nvSpPr>
-        <p:spPr>
-          <a:xfrm>
-            <a:off x="1325880" y="2770632"/>
-            <a:ext cx="10195560" cy="731520"/>
-          </a:xfrm>
-          <a:prstGeom prst="rect">
-            <a:avLst/>
-          </a:prstGeom>
-          <a:noFill/>
-          <a:ln/>
-        </p:spPr>
-        <p:txBody>
-          <a:bodyPr wrap="square" lIns="0" tIns="0" rIns="0" bIns="0" rtlCol="0" anchor="ctr"/>
-          <a:lstStyle/>
-          <a:p>
-            <a:pPr indent="0" marL="0">
-              <a:buNone/>
-            </a:pPr>
-            <a:r>
-              <a:rPr lang="en-US" sz="2000" dirty="0">
+              <a:t>01</a:t>
+            </a:r>
+            <a:endParaRPr lang="en-US" sz="2500" dirty="0"/>
+          </a:p>
+        </p:txBody>
+      </p:sp>
+      <p:sp>
+        <p:nvSpPr>
+          <p:cNvPr id="7" name="Text 5"/>
+          <p:cNvSpPr/>
+          <p:nvPr/>
+        </p:nvSpPr>
+        <p:spPr>
+          <a:xfrm>
+            <a:off x="1508760" y="2103120"/>
+            <a:ext cx="4114800" cy="1051560"/>
+          </a:xfrm>
+          <a:prstGeom prst="rect">
+            <a:avLst/>
+          </a:prstGeom>
+          <a:noFill/>
+          <a:ln/>
+        </p:spPr>
+        <p:txBody>
+          <a:bodyPr wrap="square" lIns="0" tIns="0" rIns="0" bIns="0" rtlCol="0" anchor="ctr"/>
+          <a:lstStyle/>
+          <a:p>
+            <a:pPr indent="0" marL="0">
+              <a:buNone/>
+            </a:pPr>
+            <a:r>
+              <a:rPr lang="en-US" sz="2100" b="1" dirty="0">
                 <a:solidFill>
                   <a:srgbClr val="183449"/>
                 </a:solidFill>
@@ -18715,28 +18216,30 @@
                 <a:ea typeface="Segoe UI" pitchFamily="34" charset="-122"/>
                 <a:cs typeface="Segoe UI" pitchFamily="34" charset="-120"/>
               </a:rPr>
-              <a:t>Qualité : ancrage, tâche, segments linguistiques, corrections humaines.</a:t>
-            </a:r>
-            <a:endParaRPr lang="en-US" sz="2000" dirty="0"/>
-          </a:p>
-        </p:txBody>
-      </p:sp>
-      <p:sp>
-        <p:nvSpPr>
-          <p:cNvPr id="10" name="Shape 8"/>
-          <p:cNvSpPr/>
-          <p:nvPr/>
-        </p:nvSpPr>
-        <p:spPr>
-          <a:xfrm>
-            <a:off x="1325880" y="3602736"/>
-            <a:ext cx="10149840" cy="0"/>
-          </a:xfrm>
-          <a:prstGeom prst="line">
-            <a:avLst/>
-          </a:prstGeom>
-          <a:noFill/>
-          <a:ln w="6350">
+              <a:t>Retourner en DRAFT révision 2</a:t>
+            </a:r>
+            <a:endParaRPr lang="en-US" sz="2100" dirty="0"/>
+          </a:p>
+        </p:txBody>
+      </p:sp>
+      <p:sp>
+        <p:nvSpPr>
+          <p:cNvPr id="8" name="Shape 6"/>
+          <p:cNvSpPr/>
+          <p:nvPr/>
+        </p:nvSpPr>
+        <p:spPr>
+          <a:xfrm>
+            <a:off x="6217920" y="1920240"/>
+            <a:ext cx="5394960" cy="1417320"/>
+          </a:xfrm>
+          <a:prstGeom prst="rect">
+            <a:avLst/>
+          </a:prstGeom>
+          <a:solidFill>
+            <a:srgbClr val="EDF4FA"/>
+          </a:solidFill>
+          <a:ln w="12700">
             <a:solidFill>
               <a:srgbClr val="DCE5ED"/>
             </a:solidFill>
@@ -18746,30 +18249,30 @@
       </p:sp>
       <p:sp>
         <p:nvSpPr>
-          <p:cNvPr id="11" name="Text 9"/>
-          <p:cNvSpPr/>
-          <p:nvPr/>
-        </p:nvSpPr>
-        <p:spPr>
-          <a:xfrm>
-            <a:off x="594360" y="3712464"/>
-            <a:ext cx="640080" cy="594360"/>
-          </a:xfrm>
-          <a:prstGeom prst="rect">
-            <a:avLst/>
-          </a:prstGeom>
-          <a:noFill/>
-          <a:ln/>
-        </p:spPr>
-        <p:txBody>
-          <a:bodyPr wrap="square" lIns="0" tIns="0" rIns="0" bIns="0" rtlCol="0" anchor="ctr"/>
-          <a:lstStyle/>
-          <a:p>
-            <a:pPr indent="0" marL="0">
-              <a:buNone/>
-            </a:pPr>
-            <a:r>
-              <a:rPr lang="en-US" sz="1700" b="1" dirty="0">
+          <p:cNvPr id="9" name="Text 7"/>
+          <p:cNvSpPr/>
+          <p:nvPr/>
+        </p:nvSpPr>
+        <p:spPr>
+          <a:xfrm>
+            <a:off x="6446520" y="2103120"/>
+            <a:ext cx="640080" cy="411480"/>
+          </a:xfrm>
+          <a:prstGeom prst="rect">
+            <a:avLst/>
+          </a:prstGeom>
+          <a:noFill/>
+          <a:ln/>
+        </p:spPr>
+        <p:txBody>
+          <a:bodyPr wrap="square" lIns="0" tIns="0" rIns="0" bIns="0" rtlCol="0" anchor="ctr"/>
+          <a:lstStyle/>
+          <a:p>
+            <a:pPr indent="0" marL="0">
+              <a:buNone/>
+            </a:pPr>
+            <a:r>
+              <a:rPr lang="en-US" sz="2500" b="1" dirty="0">
                 <a:solidFill>
                   <a:srgbClr val="0078D4"/>
                 </a:solidFill>
@@ -18777,38 +18280,38 @@
                 <a:ea typeface="Segoe UI" pitchFamily="34" charset="-122"/>
                 <a:cs typeface="Segoe UI" pitchFamily="34" charset="-120"/>
               </a:rPr>
-              <a:t>03</a:t>
-            </a:r>
-            <a:endParaRPr lang="en-US" sz="1700" dirty="0"/>
-          </a:p>
-        </p:txBody>
-      </p:sp>
-      <p:sp>
-        <p:nvSpPr>
-          <p:cNvPr id="12" name="Text 10"/>
-          <p:cNvSpPr/>
-          <p:nvPr/>
-        </p:nvSpPr>
-        <p:spPr>
-          <a:xfrm>
-            <a:off x="1325880" y="3712464"/>
-            <a:ext cx="10195560" cy="731520"/>
-          </a:xfrm>
-          <a:prstGeom prst="rect">
-            <a:avLst/>
-          </a:prstGeom>
-          <a:noFill/>
-          <a:ln/>
-        </p:spPr>
-        <p:txBody>
-          <a:bodyPr wrap="square" lIns="0" tIns="0" rIns="0" bIns="0" rtlCol="0" anchor="ctr"/>
-          <a:lstStyle/>
-          <a:p>
-            <a:pPr indent="0" marL="0">
-              <a:buNone/>
-            </a:pPr>
-            <a:r>
-              <a:rPr lang="en-US" sz="2000" dirty="0">
+              <a:t>02</a:t>
+            </a:r>
+            <a:endParaRPr lang="en-US" sz="2500" dirty="0"/>
+          </a:p>
+        </p:txBody>
+      </p:sp>
+      <p:sp>
+        <p:nvSpPr>
+          <p:cNvPr id="10" name="Text 8"/>
+          <p:cNvSpPr/>
+          <p:nvPr/>
+        </p:nvSpPr>
+        <p:spPr>
+          <a:xfrm>
+            <a:off x="7178040" y="2103120"/>
+            <a:ext cx="4114800" cy="1051560"/>
+          </a:xfrm>
+          <a:prstGeom prst="rect">
+            <a:avLst/>
+          </a:prstGeom>
+          <a:noFill/>
+          <a:ln/>
+        </p:spPr>
+        <p:txBody>
+          <a:bodyPr wrap="square" lIns="0" tIns="0" rIns="0" bIns="0" rtlCol="0" anchor="ctr"/>
+          <a:lstStyle/>
+          <a:p>
+            <a:pPr indent="0" marL="0">
+              <a:buNone/>
+            </a:pPr>
+            <a:r>
+              <a:rPr lang="en-US" sz="2100" b="1" dirty="0">
                 <a:solidFill>
                   <a:srgbClr val="183449"/>
                 </a:solidFill>
@@ -18816,28 +18319,30 @@
                 <a:ea typeface="Segoe UI" pitchFamily="34" charset="-122"/>
                 <a:cs typeface="Segoe UI" pitchFamily="34" charset="-120"/>
               </a:rPr>
-              <a:t>Sécurité : violations déterministes et frontières de rôles.</a:t>
-            </a:r>
-            <a:endParaRPr lang="en-US" sz="2000" dirty="0"/>
-          </a:p>
-        </p:txBody>
-      </p:sp>
-      <p:sp>
-        <p:nvSpPr>
-          <p:cNvPr id="13" name="Shape 11"/>
-          <p:cNvSpPr/>
-          <p:nvPr/>
-        </p:nvSpPr>
-        <p:spPr>
-          <a:xfrm>
-            <a:off x="1325880" y="4544568"/>
-            <a:ext cx="10149840" cy="0"/>
-          </a:xfrm>
-          <a:prstGeom prst="line">
-            <a:avLst/>
-          </a:prstGeom>
-          <a:noFill/>
-          <a:ln w="6350">
+              <a:t>Vérifier visibilité actif / DRAFT</a:t>
+            </a:r>
+            <a:endParaRPr lang="en-US" sz="2100" dirty="0"/>
+          </a:p>
+        </p:txBody>
+      </p:sp>
+      <p:sp>
+        <p:nvSpPr>
+          <p:cNvPr id="11" name="Shape 9"/>
+          <p:cNvSpPr/>
+          <p:nvPr/>
+        </p:nvSpPr>
+        <p:spPr>
+          <a:xfrm>
+            <a:off x="548640" y="3749040"/>
+            <a:ext cx="5394960" cy="1417320"/>
+          </a:xfrm>
+          <a:prstGeom prst="rect">
+            <a:avLst/>
+          </a:prstGeom>
+          <a:solidFill>
+            <a:srgbClr val="EDF4FA"/>
+          </a:solidFill>
+          <a:ln w="12700">
             <a:solidFill>
               <a:srgbClr val="DCE5ED"/>
             </a:solidFill>
@@ -18847,30 +18352,30 @@
       </p:sp>
       <p:sp>
         <p:nvSpPr>
-          <p:cNvPr id="14" name="Text 12"/>
-          <p:cNvSpPr/>
-          <p:nvPr/>
-        </p:nvSpPr>
-        <p:spPr>
-          <a:xfrm>
-            <a:off x="594360" y="4654296"/>
-            <a:ext cx="640080" cy="594360"/>
-          </a:xfrm>
-          <a:prstGeom prst="rect">
-            <a:avLst/>
-          </a:prstGeom>
-          <a:noFill/>
-          <a:ln/>
-        </p:spPr>
-        <p:txBody>
-          <a:bodyPr wrap="square" lIns="0" tIns="0" rIns="0" bIns="0" rtlCol="0" anchor="ctr"/>
-          <a:lstStyle/>
-          <a:p>
-            <a:pPr indent="0" marL="0">
-              <a:buNone/>
-            </a:pPr>
-            <a:r>
-              <a:rPr lang="en-US" sz="1700" b="1" dirty="0">
+          <p:cNvPr id="12" name="Text 10"/>
+          <p:cNvSpPr/>
+          <p:nvPr/>
+        </p:nvSpPr>
+        <p:spPr>
+          <a:xfrm>
+            <a:off x="777240" y="3931920"/>
+            <a:ext cx="640080" cy="411480"/>
+          </a:xfrm>
+          <a:prstGeom prst="rect">
+            <a:avLst/>
+          </a:prstGeom>
+          <a:noFill/>
+          <a:ln/>
+        </p:spPr>
+        <p:txBody>
+          <a:bodyPr wrap="square" lIns="0" tIns="0" rIns="0" bIns="0" rtlCol="0" anchor="ctr"/>
+          <a:lstStyle/>
+          <a:p>
+            <a:pPr indent="0" marL="0">
+              <a:buNone/>
+            </a:pPr>
+            <a:r>
+              <a:rPr lang="en-US" sz="2500" b="1" dirty="0">
                 <a:solidFill>
                   <a:srgbClr val="0078D4"/>
                 </a:solidFill>
@@ -18878,38 +18383,38 @@
                 <a:ea typeface="Segoe UI" pitchFamily="34" charset="-122"/>
                 <a:cs typeface="Segoe UI" pitchFamily="34" charset="-120"/>
               </a:rPr>
-              <a:t>04</a:t>
-            </a:r>
-            <a:endParaRPr lang="en-US" sz="1700" dirty="0"/>
-          </a:p>
-        </p:txBody>
-      </p:sp>
-      <p:sp>
-        <p:nvSpPr>
-          <p:cNvPr id="15" name="Text 13"/>
-          <p:cNvSpPr/>
-          <p:nvPr/>
-        </p:nvSpPr>
-        <p:spPr>
-          <a:xfrm>
-            <a:off x="1325880" y="4654296"/>
-            <a:ext cx="10195560" cy="731520"/>
-          </a:xfrm>
-          <a:prstGeom prst="rect">
-            <a:avLst/>
-          </a:prstGeom>
-          <a:noFill/>
-          <a:ln/>
-        </p:spPr>
-        <p:txBody>
-          <a:bodyPr wrap="square" lIns="0" tIns="0" rIns="0" bIns="0" rtlCol="0" anchor="ctr"/>
-          <a:lstStyle/>
-          <a:p>
-            <a:pPr indent="0" marL="0">
-              <a:buNone/>
-            </a:pPr>
-            <a:r>
-              <a:rPr lang="en-US" sz="2000" dirty="0">
+              <a:t>03</a:t>
+            </a:r>
+            <a:endParaRPr lang="en-US" sz="2500" dirty="0"/>
+          </a:p>
+        </p:txBody>
+      </p:sp>
+      <p:sp>
+        <p:nvSpPr>
+          <p:cNvPr id="13" name="Text 11"/>
+          <p:cNvSpPr/>
+          <p:nvPr/>
+        </p:nvSpPr>
+        <p:spPr>
+          <a:xfrm>
+            <a:off x="1508760" y="3931920"/>
+            <a:ext cx="4114800" cy="1051560"/>
+          </a:xfrm>
+          <a:prstGeom prst="rect">
+            <a:avLst/>
+          </a:prstGeom>
+          <a:noFill/>
+          <a:ln/>
+        </p:spPr>
+        <p:txBody>
+          <a:bodyPr wrap="square" lIns="0" tIns="0" rIns="0" bIns="0" rtlCol="0" anchor="ctr"/>
+          <a:lstStyle/>
+          <a:p>
+            <a:pPr indent="0" marL="0">
+              <a:buNone/>
+            </a:pPr>
+            <a:r>
+              <a:rPr lang="en-US" sz="2100" b="1" dirty="0">
                 <a:solidFill>
                   <a:srgbClr val="183449"/>
                 </a:solidFill>
@@ -18917,34 +18422,114 @@
                 <a:ea typeface="Segoe UI" pitchFamily="34" charset="-122"/>
                 <a:cs typeface="Segoe UI" pitchFamily="34" charset="-120"/>
               </a:rPr>
-              <a:t>Revoir la dérive et transformer les incidents vérifiés en tests.</a:t>
-            </a:r>
-            <a:endParaRPr lang="en-US" sz="2000" dirty="0"/>
-          </a:p>
-        </p:txBody>
-      </p:sp>
-      <p:sp>
-        <p:nvSpPr>
-          <p:cNvPr id="16" name="Shape 14"/>
-          <p:cNvSpPr/>
-          <p:nvPr/>
-        </p:nvSpPr>
-        <p:spPr>
-          <a:xfrm>
-            <a:off x="1325880" y="5486400"/>
-            <a:ext cx="10149840" cy="0"/>
-          </a:xfrm>
-          <a:prstGeom prst="line">
-            <a:avLst/>
-          </a:prstGeom>
-          <a:noFill/>
-          <a:ln w="6350">
+              <a:t>Corriger et préparer par l’agent natif</a:t>
+            </a:r>
+            <a:endParaRPr lang="en-US" sz="2100" dirty="0"/>
+          </a:p>
+        </p:txBody>
+      </p:sp>
+      <p:sp>
+        <p:nvSpPr>
+          <p:cNvPr id="14" name="Shape 12"/>
+          <p:cNvSpPr/>
+          <p:nvPr/>
+        </p:nvSpPr>
+        <p:spPr>
+          <a:xfrm>
+            <a:off x="6217920" y="3749040"/>
+            <a:ext cx="5394960" cy="1417320"/>
+          </a:xfrm>
+          <a:prstGeom prst="rect">
+            <a:avLst/>
+          </a:prstGeom>
+          <a:solidFill>
+            <a:srgbClr val="EDF4FA"/>
+          </a:solidFill>
+          <a:ln w="12700">
             <a:solidFill>
               <a:srgbClr val="DCE5ED"/>
             </a:solidFill>
             <a:prstDash val="solid"/>
           </a:ln>
         </p:spPr>
+      </p:sp>
+      <p:sp>
+        <p:nvSpPr>
+          <p:cNvPr id="15" name="Text 13"/>
+          <p:cNvSpPr/>
+          <p:nvPr/>
+        </p:nvSpPr>
+        <p:spPr>
+          <a:xfrm>
+            <a:off x="6446520" y="3931920"/>
+            <a:ext cx="640080" cy="411480"/>
+          </a:xfrm>
+          <a:prstGeom prst="rect">
+            <a:avLst/>
+          </a:prstGeom>
+          <a:noFill/>
+          <a:ln/>
+        </p:spPr>
+        <p:txBody>
+          <a:bodyPr wrap="square" lIns="0" tIns="0" rIns="0" bIns="0" rtlCol="0" anchor="ctr"/>
+          <a:lstStyle/>
+          <a:p>
+            <a:pPr indent="0" marL="0">
+              <a:buNone/>
+            </a:pPr>
+            <a:r>
+              <a:rPr lang="en-US" sz="2500" b="1" dirty="0">
+                <a:solidFill>
+                  <a:srgbClr val="0078D4"/>
+                </a:solidFill>
+                <a:latin typeface="Segoe UI" pitchFamily="34" charset="0"/>
+                <a:ea typeface="Segoe UI" pitchFamily="34" charset="-122"/>
+                <a:cs typeface="Segoe UI" pitchFamily="34" charset="-120"/>
+              </a:rPr>
+              <a:t>04</a:t>
+            </a:r>
+            <a:endParaRPr lang="en-US" sz="2500" dirty="0"/>
+          </a:p>
+        </p:txBody>
+      </p:sp>
+      <p:sp>
+        <p:nvSpPr>
+          <p:cNvPr id="16" name="Text 14"/>
+          <p:cNvSpPr/>
+          <p:nvPr/>
+        </p:nvSpPr>
+        <p:spPr>
+          <a:xfrm>
+            <a:off x="7178040" y="3931920"/>
+            <a:ext cx="4114800" cy="1051560"/>
+          </a:xfrm>
+          <a:prstGeom prst="rect">
+            <a:avLst/>
+          </a:prstGeom>
+          <a:noFill/>
+          <a:ln/>
+        </p:spPr>
+        <p:txBody>
+          <a:bodyPr wrap="square" lIns="0" tIns="0" rIns="0" bIns="0" rtlCol="0" anchor="ctr"/>
+          <a:lstStyle/>
+          <a:p>
+            <a:pPr indent="0" marL="0">
+              <a:buNone/>
+            </a:pPr>
+            <a:r>
+              <a:rPr lang="en-US" sz="2100" b="1" dirty="0">
+                <a:solidFill>
+                  <a:srgbClr val="183449"/>
+                </a:solidFill>
+                <a:latin typeface="Segoe UI" pitchFamily="34" charset="0"/>
+                <a:ea typeface="Segoe UI" pitchFamily="34" charset="-122"/>
+                <a:cs typeface="Segoe UI" pitchFamily="34" charset="-120"/>
+              </a:rPr>
+              <a:t>Journal concordant; auto-approbation refusée</a:t>
+            </a:r>
+            <a:endParaRPr lang="en-US" sz="2100" dirty="0"/>
+          </a:p>
+        </p:txBody>
       </p:sp>
       <p:sp>
         <p:nvSpPr>
@@ -19027,7 +18612,7 @@
                 <a:ea typeface="Segoe UI" pitchFamily="34" charset="-122"/>
                 <a:cs typeface="Segoe UI" pitchFamily="34" charset="-120"/>
               </a:rPr>
-              <a:t>31 / 35</a:t>
+              <a:t>31 / 37</a:t>
             </a:r>
             <a:endParaRPr lang="en-US" sz="1000" dirty="0"/>
           </a:p>
@@ -19164,7 +18749,7 @@
                 <a:ea typeface="Segoe UI" pitchFamily="34" charset="-122"/>
                 <a:cs typeface="Segoe UI" pitchFamily="34" charset="-120"/>
               </a:rPr>
-              <a:t>Votre recommandation de livraison</a:t>
+              <a:t>La trajectoire exige une preuve réelle</a:t>
             </a:r>
             <a:endParaRPr lang="en-US" sz="2700" dirty="0"/>
           </a:p>
@@ -19242,7 +18827,7 @@
                 <a:ea typeface="Segoe UI" pitchFamily="34" charset="-122"/>
                 <a:cs typeface="Segoe UI" pitchFamily="34" charset="-120"/>
               </a:rPr>
-              <a:t>Nommer source, jeu, état, modèle et évaluateur exacts.</a:t>
+              <a:t>Qualité finale et processus correct sont des questions différentes.</a:t>
             </a:r>
             <a:endParaRPr lang="en-US" sz="2000" dirty="0"/>
           </a:p>
@@ -19343,7 +18928,7 @@
                 <a:ea typeface="Segoe UI" pitchFamily="34" charset="-122"/>
                 <a:cs typeface="Segoe UI" pitchFamily="34" charset="-120"/>
               </a:rPr>
-              <a:t>Présenter contrats, complétude, qualité, contrôles et incertitude.</a:t>
+              <a:t>Choix/arguments outils exigent des traces réelles compatibles.</a:t>
             </a:r>
             <a:endParaRPr lang="en-US" sz="2000" dirty="0"/>
           </a:p>
@@ -19444,7 +19029,7 @@
                 <a:ea typeface="Segoe UI" pitchFamily="34" charset="-122"/>
                 <a:cs typeface="Segoe UI" pitchFamily="34" charset="-120"/>
               </a:rPr>
-              <a:t>Lister dimensions non mesurées, coût, pannes et risques.</a:t>
+              <a:t>Vraies étapes : INTAKE, REFERENCE_LOOKUP, COMPOSITION.</a:t>
             </a:r>
             <a:endParaRPr lang="en-US" sz="2000" dirty="0"/>
           </a:p>
@@ -19545,7 +19130,7 @@
                 <a:ea typeface="Segoe UI" pitchFamily="34" charset="-122"/>
                 <a:cs typeface="Segoe UI" pitchFamily="34" charset="-120"/>
               </a:rPr>
-              <a:t>Approuver, bloquer ou demander des preuves avec un responsable.</a:t>
+              <a:t>ID demandé ou texte final ne prouvent pas l’ingestion.</a:t>
             </a:r>
             <a:endParaRPr lang="en-US" sz="2000" dirty="0"/>
           </a:p>
@@ -19655,7 +19240,7 @@
                 <a:ea typeface="Segoe UI" pitchFamily="34" charset="-122"/>
                 <a:cs typeface="Segoe UI" pitchFamily="34" charset="-120"/>
               </a:rPr>
-              <a:t>32 / 35</a:t>
+              <a:t>32 / 37</a:t>
             </a:r>
             <a:endParaRPr lang="en-US" sz="1000" dirty="0"/>
           </a:p>
@@ -19792,7 +19377,7 @@
                 <a:ea typeface="Segoe UI" pitchFamily="34" charset="-122"/>
                 <a:cs typeface="Segoe UI" pitchFamily="34" charset="-120"/>
               </a:rPr>
-              <a:t>Discussion : quel candidat livrer?</a:t>
+              <a:t>Exploiter plusieurs tableaux distincts</a:t>
             </a:r>
             <a:endParaRPr lang="en-US" sz="2700" dirty="0"/>
           </a:p>
@@ -19870,7 +19455,7 @@
                 <a:ea typeface="Segoe UI" pitchFamily="34" charset="-122"/>
                 <a:cs typeface="Segoe UI" pitchFamily="34" charset="-120"/>
               </a:rPr>
-              <a:t>A : juges 100 %, mais auto-approbation possible.</a:t>
+              <a:t>Service : disponibilité, latence, 401/403, quota, délais, coût.</a:t>
             </a:r>
             <a:endParaRPr lang="en-US" sz="2000" dirty="0"/>
           </a:p>
@@ -19971,7 +19556,7 @@
                 <a:ea typeface="Segoe UI" pitchFamily="34" charset="-122"/>
                 <a:cs typeface="Segoe UI" pitchFamily="34" charset="-120"/>
               </a:rPr>
-              <a:t>B : contrats stricts réussis, mais zéro ligne native notée.</a:t>
+              <a:t>Qualité : ancrage, tâche, segments linguistiques, corrections humaines.</a:t>
             </a:r>
             <a:endParaRPr lang="en-US" sz="2000" dirty="0"/>
           </a:p>
@@ -20072,7 +19657,7 @@
                 <a:ea typeface="Segoe UI" pitchFamily="34" charset="-122"/>
                 <a:cs typeface="Segoe UI" pitchFamily="34" charset="-120"/>
               </a:rPr>
-              <a:t>C : résultats complets, une fausse acceptation à haut risque.</a:t>
+              <a:t>Sécurité : violations déterministes et frontières de rôles.</a:t>
             </a:r>
             <a:endParaRPr lang="en-US" sz="2000" dirty="0"/>
           </a:p>
@@ -20173,7 +19758,7 @@
                 <a:ea typeface="Segoe UI" pitchFamily="34" charset="-122"/>
                 <a:cs typeface="Segoe UI" pitchFamily="34" charset="-120"/>
               </a:rPr>
-              <a:t>D : preuves complètes, segments stables, risques revus et approbation.</a:t>
+              <a:t>Revoir la dérive et transformer les incidents vérifiés en tests.</a:t>
             </a:r>
             <a:endParaRPr lang="en-US" sz="2000" dirty="0"/>
           </a:p>
@@ -20283,7 +19868,7 @@
                 <a:ea typeface="Segoe UI" pitchFamily="34" charset="-122"/>
                 <a:cs typeface="Segoe UI" pitchFamily="34" charset="-120"/>
               </a:rPr>
-              <a:t>33 / 35</a:t>
+              <a:t>33 / 37</a:t>
             </a:r>
             <a:endParaRPr lang="en-US" sz="1000" dirty="0"/>
           </a:p>
@@ -20420,7 +20005,7 @@
                 <a:ea typeface="Segoe UI" pitchFamily="34" charset="-122"/>
                 <a:cs typeface="Segoe UI" pitchFamily="34" charset="-120"/>
               </a:rPr>
-              <a:t>Bilan : le vrai sens de non-régression</a:t>
+              <a:t>Votre recommandation de livraison</a:t>
             </a:r>
             <a:endParaRPr lang="en-US" sz="2700" dirty="0"/>
           </a:p>
@@ -20498,7 +20083,7 @@
                 <a:ea typeface="Segoe UI" pitchFamily="34" charset="-122"/>
                 <a:cs typeface="Segoe UI" pitchFamily="34" charset="-120"/>
               </a:rPr>
-              <a:t>Énoncer contrat et conditions mesurés, pas « aucune régression possible ».</a:t>
+              <a:t>Nommer source, jeu, état, modèle et évaluateur exacts.</a:t>
             </a:r>
             <a:endParaRPr lang="en-US" sz="2000" dirty="0"/>
           </a:p>
@@ -20599,7 +20184,7 @@
                 <a:ea typeface="Segoe UI" pitchFamily="34" charset="-122"/>
                 <a:cs typeface="Segoe UI" pitchFamily="34" charset="-120"/>
               </a:rPr>
-              <a:t>Combiner tests exacts et jugements sémantiques.</a:t>
+              <a:t>Présenter contrats, complétude, qualité, contrôles et incertitude.</a:t>
             </a:r>
             <a:endParaRPr lang="en-US" sz="2000" dirty="0"/>
           </a:p>
@@ -20700,7 +20285,7 @@
                 <a:ea typeface="Segoe UI" pitchFamily="34" charset="-122"/>
                 <a:cs typeface="Segoe UI" pitchFamily="34" charset="-120"/>
               </a:rPr>
-              <a:t>Conserver contrôles et tentatives opérationnelles échoués.</a:t>
+              <a:t>Lister dimensions non mesurées, coût, pannes et risques.</a:t>
             </a:r>
             <a:endParaRPr lang="en-US" sz="2000" dirty="0"/>
           </a:p>
@@ -20801,7 +20386,7 @@
                 <a:ea typeface="Segoe UI" pitchFamily="34" charset="-122"/>
                 <a:cs typeface="Segoe UI" pitchFamily="34" charset="-120"/>
               </a:rPr>
-              <a:t>Faire évoluer couverture, calibration et surveillance.</a:t>
+              <a:t>Approuver, bloquer ou demander des preuves avec un responsable.</a:t>
             </a:r>
             <a:endParaRPr lang="en-US" sz="2000" dirty="0"/>
           </a:p>
@@ -20911,7 +20496,7 @@
                 <a:ea typeface="Segoe UI" pitchFamily="34" charset="-122"/>
                 <a:cs typeface="Segoe UI" pitchFamily="34" charset="-120"/>
               </a:rPr>
-              <a:t>34 / 35</a:t>
+              <a:t>34 / 37</a:t>
             </a:r>
             <a:endParaRPr lang="en-US" sz="1000" dirty="0"/>
           </a:p>
@@ -21048,7 +20633,7 @@
                 <a:ea typeface="Segoe UI" pitchFamily="34" charset="-122"/>
                 <a:cs typeface="Segoe UI" pitchFamily="34" charset="-120"/>
               </a:rPr>
-              <a:t>Emporter atelier, guide et preuves</a:t>
+              <a:t>Discussion : quel candidat livrer?</a:t>
             </a:r>
             <a:endParaRPr lang="en-US" sz="2700" dirty="0"/>
           </a:p>
@@ -21126,7 +20711,7 @@
                 <a:ea typeface="Segoe UI" pitchFamily="34" charset="-122"/>
                 <a:cs typeface="Segoe UI" pitchFamily="34" charset="-120"/>
               </a:rPr>
-              <a:t>Atelier 19 : dix exercices progressifs avec commandes exécutables.</a:t>
+              <a:t>A : juges 100 %, mais auto-approbation possible.</a:t>
             </a:r>
             <a:endParaRPr lang="en-US" sz="2000" dirty="0"/>
           </a:p>
@@ -21227,7 +20812,7 @@
                 <a:ea typeface="Segoe UI" pitchFamily="34" charset="-122"/>
                 <a:cs typeface="Segoe UI" pitchFamily="34" charset="-120"/>
               </a:rPr>
-              <a:t>Guide : portail, mappings SDK, politique et diagnostic.</a:t>
+              <a:t>B : contrats stricts réussis, mais zéro ligne native notée.</a:t>
             </a:r>
             <a:endParaRPr lang="en-US" sz="2000" dirty="0"/>
           </a:p>
@@ -21328,7 +20913,7 @@
                 <a:ea typeface="Segoe UI" pitchFamily="34" charset="-122"/>
                 <a:cs typeface="Segoe UI" pitchFamily="34" charset="-120"/>
               </a:rPr>
-              <a:t>Présentation : PowerPoint EN/FR modifiables et notes formateur.</a:t>
+              <a:t>C : résultats complets, une fausse acceptation à haut risque.</a:t>
             </a:r>
             <a:endParaRPr lang="en-US" sz="2000" dirty="0"/>
           </a:p>
@@ -21429,7 +21014,7 @@
                 <a:ea typeface="Segoe UI" pitchFamily="34" charset="-122"/>
                 <a:cs typeface="Segoe UI" pitchFamily="34" charset="-120"/>
               </a:rPr>
-              <a:t>Sources : liens Microsoft Learn officiels dans les notes.</a:t>
+              <a:t>D : preuves complètes, segments stables, risques revus et approbation.</a:t>
             </a:r>
             <a:endParaRPr lang="en-US" sz="2000" dirty="0"/>
           </a:p>
@@ -21539,7 +21124,1263 @@
                 <a:ea typeface="Segoe UI" pitchFamily="34" charset="-122"/>
                 <a:cs typeface="Segoe UI" pitchFamily="34" charset="-120"/>
               </a:rPr>
-              <a:t>35 / 35</a:t>
+              <a:t>35 / 37</a:t>
+            </a:r>
+            <a:endParaRPr lang="en-US" sz="1000" dirty="0"/>
+          </a:p>
+        </p:txBody>
+      </p:sp>
+    </p:spTree>
+  </p:cSld>
+  <p:clrMapOvr>
+    <a:masterClrMapping/>
+  </p:clrMapOvr>
+</p:sld>
+</file>
+
+<file path=ppt/slides/slide36.xml><?xml version="1.0" encoding="utf-8"?>
+<p:sld xmlns:a="http://schemas.openxmlformats.org/drawingml/2006/main" xmlns:r="http://schemas.openxmlformats.org/officeDocument/2006/relationships" xmlns:p="http://schemas.openxmlformats.org/presentationml/2006/main">
+  <p:cSld name="Slide 36">
+    <p:bg>
+      <p:bgPr>
+        <a:solidFill>
+          <a:srgbClr val="FAFBFC"/>
+        </a:solidFill>
+      </p:bgPr>
+    </p:bg>
+    <p:spTree>
+      <p:nvGrpSpPr>
+        <p:cNvPr id="1" name=""/>
+        <p:cNvGrpSpPr/>
+        <p:nvPr/>
+      </p:nvGrpSpPr>
+      <p:grpSpPr>
+        <a:xfrm>
+          <a:off x="0" y="0"/>
+          <a:ext cx="0" cy="0"/>
+          <a:chOff x="0" y="0"/>
+          <a:chExt cx="0" cy="0"/>
+        </a:xfrm>
+      </p:grpSpPr>
+      <p:sp>
+        <p:nvSpPr>
+          <p:cNvPr id="2" name="Shape 0"/>
+          <p:cNvSpPr/>
+          <p:nvPr/>
+        </p:nvSpPr>
+        <p:spPr>
+          <a:xfrm>
+            <a:off x="0" y="0"/>
+            <a:ext cx="12191695" cy="82296"/>
+          </a:xfrm>
+          <a:prstGeom prst="rect">
+            <a:avLst/>
+          </a:prstGeom>
+          <a:solidFill>
+            <a:srgbClr val="0078D4"/>
+          </a:solidFill>
+          <a:ln w="12700">
+            <a:solidFill>
+              <a:srgbClr val="333333">
+                <a:alpha val="0"/>
+              </a:srgbClr>
+            </a:solidFill>
+            <a:prstDash val="solid"/>
+          </a:ln>
+        </p:spPr>
+      </p:sp>
+      <p:sp>
+        <p:nvSpPr>
+          <p:cNvPr id="3" name="Text 1"/>
+          <p:cNvSpPr/>
+          <p:nvPr/>
+        </p:nvSpPr>
+        <p:spPr>
+          <a:xfrm>
+            <a:off x="548640" y="320040"/>
+            <a:ext cx="11064240" cy="274320"/>
+          </a:xfrm>
+          <a:prstGeom prst="rect">
+            <a:avLst/>
+          </a:prstGeom>
+          <a:noFill/>
+          <a:ln/>
+        </p:spPr>
+        <p:txBody>
+          <a:bodyPr wrap="square" lIns="0" tIns="0" rIns="0" bIns="0" rtlCol="0" anchor="ctr"/>
+          <a:lstStyle/>
+          <a:p>
+            <a:pPr indent="0" marL="0">
+              <a:buNone/>
+            </a:pPr>
+            <a:r>
+              <a:rPr lang="en-US" sz="1100" b="1" dirty="0">
+                <a:solidFill>
+                  <a:srgbClr val="0078D4"/>
+                </a:solidFill>
+                <a:latin typeface="Segoe UI" pitchFamily="34" charset="0"/>
+                <a:ea typeface="Segoe UI" pitchFamily="34" charset="-122"/>
+                <a:cs typeface="Segoe UI" pitchFamily="34" charset="-120"/>
+              </a:rPr>
+              <a:t>FOUNDRY / INGÉNIERIE DE L’ÉVALUATION</a:t>
+            </a:r>
+            <a:endParaRPr lang="en-US" sz="1100" dirty="0"/>
+          </a:p>
+        </p:txBody>
+      </p:sp>
+      <p:sp>
+        <p:nvSpPr>
+          <p:cNvPr id="4" name="Text 2"/>
+          <p:cNvSpPr/>
+          <p:nvPr/>
+        </p:nvSpPr>
+        <p:spPr>
+          <a:xfrm>
+            <a:off x="548640" y="777240"/>
+            <a:ext cx="11064240" cy="822960"/>
+          </a:xfrm>
+          <a:prstGeom prst="rect">
+            <a:avLst/>
+          </a:prstGeom>
+          <a:noFill/>
+          <a:ln/>
+        </p:spPr>
+        <p:txBody>
+          <a:bodyPr wrap="square" lIns="0" tIns="0" rIns="0" bIns="0" rtlCol="0" anchor="ctr"/>
+          <a:lstStyle/>
+          <a:p>
+            <a:pPr indent="0" marL="0">
+              <a:buNone/>
+            </a:pPr>
+            <a:r>
+              <a:rPr lang="en-US" sz="2700" b="1" dirty="0">
+                <a:solidFill>
+                  <a:srgbClr val="001B3D"/>
+                </a:solidFill>
+                <a:latin typeface="Segoe UI" pitchFamily="34" charset="0"/>
+                <a:ea typeface="Segoe UI" pitchFamily="34" charset="-122"/>
+                <a:cs typeface="Segoe UI" pitchFamily="34" charset="-120"/>
+              </a:rPr>
+              <a:t>Bilan : le vrai sens de non-régression</a:t>
+            </a:r>
+            <a:endParaRPr lang="en-US" sz="2700" dirty="0"/>
+          </a:p>
+        </p:txBody>
+      </p:sp>
+      <p:sp>
+        <p:nvSpPr>
+          <p:cNvPr id="5" name="Text 3"/>
+          <p:cNvSpPr/>
+          <p:nvPr/>
+        </p:nvSpPr>
+        <p:spPr>
+          <a:xfrm>
+            <a:off x="594360" y="1828800"/>
+            <a:ext cx="640080" cy="594360"/>
+          </a:xfrm>
+          <a:prstGeom prst="rect">
+            <a:avLst/>
+          </a:prstGeom>
+          <a:noFill/>
+          <a:ln/>
+        </p:spPr>
+        <p:txBody>
+          <a:bodyPr wrap="square" lIns="0" tIns="0" rIns="0" bIns="0" rtlCol="0" anchor="ctr"/>
+          <a:lstStyle/>
+          <a:p>
+            <a:pPr indent="0" marL="0">
+              <a:buNone/>
+            </a:pPr>
+            <a:r>
+              <a:rPr lang="en-US" sz="1700" b="1" dirty="0">
+                <a:solidFill>
+                  <a:srgbClr val="0078D4"/>
+                </a:solidFill>
+                <a:latin typeface="Segoe UI" pitchFamily="34" charset="0"/>
+                <a:ea typeface="Segoe UI" pitchFamily="34" charset="-122"/>
+                <a:cs typeface="Segoe UI" pitchFamily="34" charset="-120"/>
+              </a:rPr>
+              <a:t>01</a:t>
+            </a:r>
+            <a:endParaRPr lang="en-US" sz="1700" dirty="0"/>
+          </a:p>
+        </p:txBody>
+      </p:sp>
+      <p:sp>
+        <p:nvSpPr>
+          <p:cNvPr id="6" name="Text 4"/>
+          <p:cNvSpPr/>
+          <p:nvPr/>
+        </p:nvSpPr>
+        <p:spPr>
+          <a:xfrm>
+            <a:off x="1325880" y="1828800"/>
+            <a:ext cx="10195560" cy="731520"/>
+          </a:xfrm>
+          <a:prstGeom prst="rect">
+            <a:avLst/>
+          </a:prstGeom>
+          <a:noFill/>
+          <a:ln/>
+        </p:spPr>
+        <p:txBody>
+          <a:bodyPr wrap="square" lIns="0" tIns="0" rIns="0" bIns="0" rtlCol="0" anchor="ctr"/>
+          <a:lstStyle/>
+          <a:p>
+            <a:pPr indent="0" marL="0">
+              <a:buNone/>
+            </a:pPr>
+            <a:r>
+              <a:rPr lang="en-US" sz="2000" dirty="0">
+                <a:solidFill>
+                  <a:srgbClr val="183449"/>
+                </a:solidFill>
+                <a:latin typeface="Segoe UI" pitchFamily="34" charset="0"/>
+                <a:ea typeface="Segoe UI" pitchFamily="34" charset="-122"/>
+                <a:cs typeface="Segoe UI" pitchFamily="34" charset="-120"/>
+              </a:rPr>
+              <a:t>Énoncer contrat et conditions mesurés, pas « aucune régression possible ».</a:t>
+            </a:r>
+            <a:endParaRPr lang="en-US" sz="2000" dirty="0"/>
+          </a:p>
+        </p:txBody>
+      </p:sp>
+      <p:sp>
+        <p:nvSpPr>
+          <p:cNvPr id="7" name="Shape 5"/>
+          <p:cNvSpPr/>
+          <p:nvPr/>
+        </p:nvSpPr>
+        <p:spPr>
+          <a:xfrm>
+            <a:off x="1325880" y="2660904"/>
+            <a:ext cx="10149840" cy="0"/>
+          </a:xfrm>
+          <a:prstGeom prst="line">
+            <a:avLst/>
+          </a:prstGeom>
+          <a:noFill/>
+          <a:ln w="6350">
+            <a:solidFill>
+              <a:srgbClr val="DCE5ED"/>
+            </a:solidFill>
+            <a:prstDash val="solid"/>
+          </a:ln>
+        </p:spPr>
+      </p:sp>
+      <p:sp>
+        <p:nvSpPr>
+          <p:cNvPr id="8" name="Text 6"/>
+          <p:cNvSpPr/>
+          <p:nvPr/>
+        </p:nvSpPr>
+        <p:spPr>
+          <a:xfrm>
+            <a:off x="594360" y="2770632"/>
+            <a:ext cx="640080" cy="594360"/>
+          </a:xfrm>
+          <a:prstGeom prst="rect">
+            <a:avLst/>
+          </a:prstGeom>
+          <a:noFill/>
+          <a:ln/>
+        </p:spPr>
+        <p:txBody>
+          <a:bodyPr wrap="square" lIns="0" tIns="0" rIns="0" bIns="0" rtlCol="0" anchor="ctr"/>
+          <a:lstStyle/>
+          <a:p>
+            <a:pPr indent="0" marL="0">
+              <a:buNone/>
+            </a:pPr>
+            <a:r>
+              <a:rPr lang="en-US" sz="1700" b="1" dirty="0">
+                <a:solidFill>
+                  <a:srgbClr val="0078D4"/>
+                </a:solidFill>
+                <a:latin typeface="Segoe UI" pitchFamily="34" charset="0"/>
+                <a:ea typeface="Segoe UI" pitchFamily="34" charset="-122"/>
+                <a:cs typeface="Segoe UI" pitchFamily="34" charset="-120"/>
+              </a:rPr>
+              <a:t>02</a:t>
+            </a:r>
+            <a:endParaRPr lang="en-US" sz="1700" dirty="0"/>
+          </a:p>
+        </p:txBody>
+      </p:sp>
+      <p:sp>
+        <p:nvSpPr>
+          <p:cNvPr id="9" name="Text 7"/>
+          <p:cNvSpPr/>
+          <p:nvPr/>
+        </p:nvSpPr>
+        <p:spPr>
+          <a:xfrm>
+            <a:off x="1325880" y="2770632"/>
+            <a:ext cx="10195560" cy="731520"/>
+          </a:xfrm>
+          <a:prstGeom prst="rect">
+            <a:avLst/>
+          </a:prstGeom>
+          <a:noFill/>
+          <a:ln/>
+        </p:spPr>
+        <p:txBody>
+          <a:bodyPr wrap="square" lIns="0" tIns="0" rIns="0" bIns="0" rtlCol="0" anchor="ctr"/>
+          <a:lstStyle/>
+          <a:p>
+            <a:pPr indent="0" marL="0">
+              <a:buNone/>
+            </a:pPr>
+            <a:r>
+              <a:rPr lang="en-US" sz="2000" dirty="0">
+                <a:solidFill>
+                  <a:srgbClr val="183449"/>
+                </a:solidFill>
+                <a:latin typeface="Segoe UI" pitchFamily="34" charset="0"/>
+                <a:ea typeface="Segoe UI" pitchFamily="34" charset="-122"/>
+                <a:cs typeface="Segoe UI" pitchFamily="34" charset="-120"/>
+              </a:rPr>
+              <a:t>Combiner tests exacts et jugements sémantiques.</a:t>
+            </a:r>
+            <a:endParaRPr lang="en-US" sz="2000" dirty="0"/>
+          </a:p>
+        </p:txBody>
+      </p:sp>
+      <p:sp>
+        <p:nvSpPr>
+          <p:cNvPr id="10" name="Shape 8"/>
+          <p:cNvSpPr/>
+          <p:nvPr/>
+        </p:nvSpPr>
+        <p:spPr>
+          <a:xfrm>
+            <a:off x="1325880" y="3602736"/>
+            <a:ext cx="10149840" cy="0"/>
+          </a:xfrm>
+          <a:prstGeom prst="line">
+            <a:avLst/>
+          </a:prstGeom>
+          <a:noFill/>
+          <a:ln w="6350">
+            <a:solidFill>
+              <a:srgbClr val="DCE5ED"/>
+            </a:solidFill>
+            <a:prstDash val="solid"/>
+          </a:ln>
+        </p:spPr>
+      </p:sp>
+      <p:sp>
+        <p:nvSpPr>
+          <p:cNvPr id="11" name="Text 9"/>
+          <p:cNvSpPr/>
+          <p:nvPr/>
+        </p:nvSpPr>
+        <p:spPr>
+          <a:xfrm>
+            <a:off x="594360" y="3712464"/>
+            <a:ext cx="640080" cy="594360"/>
+          </a:xfrm>
+          <a:prstGeom prst="rect">
+            <a:avLst/>
+          </a:prstGeom>
+          <a:noFill/>
+          <a:ln/>
+        </p:spPr>
+        <p:txBody>
+          <a:bodyPr wrap="square" lIns="0" tIns="0" rIns="0" bIns="0" rtlCol="0" anchor="ctr"/>
+          <a:lstStyle/>
+          <a:p>
+            <a:pPr indent="0" marL="0">
+              <a:buNone/>
+            </a:pPr>
+            <a:r>
+              <a:rPr lang="en-US" sz="1700" b="1" dirty="0">
+                <a:solidFill>
+                  <a:srgbClr val="0078D4"/>
+                </a:solidFill>
+                <a:latin typeface="Segoe UI" pitchFamily="34" charset="0"/>
+                <a:ea typeface="Segoe UI" pitchFamily="34" charset="-122"/>
+                <a:cs typeface="Segoe UI" pitchFamily="34" charset="-120"/>
+              </a:rPr>
+              <a:t>03</a:t>
+            </a:r>
+            <a:endParaRPr lang="en-US" sz="1700" dirty="0"/>
+          </a:p>
+        </p:txBody>
+      </p:sp>
+      <p:sp>
+        <p:nvSpPr>
+          <p:cNvPr id="12" name="Text 10"/>
+          <p:cNvSpPr/>
+          <p:nvPr/>
+        </p:nvSpPr>
+        <p:spPr>
+          <a:xfrm>
+            <a:off x="1325880" y="3712464"/>
+            <a:ext cx="10195560" cy="731520"/>
+          </a:xfrm>
+          <a:prstGeom prst="rect">
+            <a:avLst/>
+          </a:prstGeom>
+          <a:noFill/>
+          <a:ln/>
+        </p:spPr>
+        <p:txBody>
+          <a:bodyPr wrap="square" lIns="0" tIns="0" rIns="0" bIns="0" rtlCol="0" anchor="ctr"/>
+          <a:lstStyle/>
+          <a:p>
+            <a:pPr indent="0" marL="0">
+              <a:buNone/>
+            </a:pPr>
+            <a:r>
+              <a:rPr lang="en-US" sz="2000" dirty="0">
+                <a:solidFill>
+                  <a:srgbClr val="183449"/>
+                </a:solidFill>
+                <a:latin typeface="Segoe UI" pitchFamily="34" charset="0"/>
+                <a:ea typeface="Segoe UI" pitchFamily="34" charset="-122"/>
+                <a:cs typeface="Segoe UI" pitchFamily="34" charset="-120"/>
+              </a:rPr>
+              <a:t>Conserver contrôles et tentatives opérationnelles échoués.</a:t>
+            </a:r>
+            <a:endParaRPr lang="en-US" sz="2000" dirty="0"/>
+          </a:p>
+        </p:txBody>
+      </p:sp>
+      <p:sp>
+        <p:nvSpPr>
+          <p:cNvPr id="13" name="Shape 11"/>
+          <p:cNvSpPr/>
+          <p:nvPr/>
+        </p:nvSpPr>
+        <p:spPr>
+          <a:xfrm>
+            <a:off x="1325880" y="4544568"/>
+            <a:ext cx="10149840" cy="0"/>
+          </a:xfrm>
+          <a:prstGeom prst="line">
+            <a:avLst/>
+          </a:prstGeom>
+          <a:noFill/>
+          <a:ln w="6350">
+            <a:solidFill>
+              <a:srgbClr val="DCE5ED"/>
+            </a:solidFill>
+            <a:prstDash val="solid"/>
+          </a:ln>
+        </p:spPr>
+      </p:sp>
+      <p:sp>
+        <p:nvSpPr>
+          <p:cNvPr id="14" name="Text 12"/>
+          <p:cNvSpPr/>
+          <p:nvPr/>
+        </p:nvSpPr>
+        <p:spPr>
+          <a:xfrm>
+            <a:off x="594360" y="4654296"/>
+            <a:ext cx="640080" cy="594360"/>
+          </a:xfrm>
+          <a:prstGeom prst="rect">
+            <a:avLst/>
+          </a:prstGeom>
+          <a:noFill/>
+          <a:ln/>
+        </p:spPr>
+        <p:txBody>
+          <a:bodyPr wrap="square" lIns="0" tIns="0" rIns="0" bIns="0" rtlCol="0" anchor="ctr"/>
+          <a:lstStyle/>
+          <a:p>
+            <a:pPr indent="0" marL="0">
+              <a:buNone/>
+            </a:pPr>
+            <a:r>
+              <a:rPr lang="en-US" sz="1700" b="1" dirty="0">
+                <a:solidFill>
+                  <a:srgbClr val="0078D4"/>
+                </a:solidFill>
+                <a:latin typeface="Segoe UI" pitchFamily="34" charset="0"/>
+                <a:ea typeface="Segoe UI" pitchFamily="34" charset="-122"/>
+                <a:cs typeface="Segoe UI" pitchFamily="34" charset="-120"/>
+              </a:rPr>
+              <a:t>04</a:t>
+            </a:r>
+            <a:endParaRPr lang="en-US" sz="1700" dirty="0"/>
+          </a:p>
+        </p:txBody>
+      </p:sp>
+      <p:sp>
+        <p:nvSpPr>
+          <p:cNvPr id="15" name="Text 13"/>
+          <p:cNvSpPr/>
+          <p:nvPr/>
+        </p:nvSpPr>
+        <p:spPr>
+          <a:xfrm>
+            <a:off x="1325880" y="4654296"/>
+            <a:ext cx="10195560" cy="731520"/>
+          </a:xfrm>
+          <a:prstGeom prst="rect">
+            <a:avLst/>
+          </a:prstGeom>
+          <a:noFill/>
+          <a:ln/>
+        </p:spPr>
+        <p:txBody>
+          <a:bodyPr wrap="square" lIns="0" tIns="0" rIns="0" bIns="0" rtlCol="0" anchor="ctr"/>
+          <a:lstStyle/>
+          <a:p>
+            <a:pPr indent="0" marL="0">
+              <a:buNone/>
+            </a:pPr>
+            <a:r>
+              <a:rPr lang="en-US" sz="2000" dirty="0">
+                <a:solidFill>
+                  <a:srgbClr val="183449"/>
+                </a:solidFill>
+                <a:latin typeface="Segoe UI" pitchFamily="34" charset="0"/>
+                <a:ea typeface="Segoe UI" pitchFamily="34" charset="-122"/>
+                <a:cs typeface="Segoe UI" pitchFamily="34" charset="-120"/>
+              </a:rPr>
+              <a:t>Faire évoluer couverture, calibration et surveillance.</a:t>
+            </a:r>
+            <a:endParaRPr lang="en-US" sz="2000" dirty="0"/>
+          </a:p>
+        </p:txBody>
+      </p:sp>
+      <p:sp>
+        <p:nvSpPr>
+          <p:cNvPr id="16" name="Shape 14"/>
+          <p:cNvSpPr/>
+          <p:nvPr/>
+        </p:nvSpPr>
+        <p:spPr>
+          <a:xfrm>
+            <a:off x="1325880" y="5486400"/>
+            <a:ext cx="10149840" cy="0"/>
+          </a:xfrm>
+          <a:prstGeom prst="line">
+            <a:avLst/>
+          </a:prstGeom>
+          <a:noFill/>
+          <a:ln w="6350">
+            <a:solidFill>
+              <a:srgbClr val="DCE5ED"/>
+            </a:solidFill>
+            <a:prstDash val="solid"/>
+          </a:ln>
+        </p:spPr>
+      </p:sp>
+      <p:sp>
+        <p:nvSpPr>
+          <p:cNvPr id="17" name="Text 15">
+            <a:hlinkClick r:id="rId1" tooltip=""/>
+          </p:cNvPr>
+          <p:cNvSpPr/>
+          <p:nvPr/>
+        </p:nvSpPr>
+        <p:spPr>
+          <a:xfrm>
+            <a:off x="548640" y="6419088"/>
+            <a:ext cx="9784080" cy="210312"/>
+          </a:xfrm>
+          <a:prstGeom prst="rect">
+            <a:avLst/>
+          </a:prstGeom>
+          <a:noFill/>
+          <a:ln/>
+        </p:spPr>
+        <p:txBody>
+          <a:bodyPr wrap="square" lIns="0" tIns="0" rIns="0" bIns="0" rtlCol="0" anchor="ctr"/>
+          <a:lstStyle/>
+          <a:p>
+            <a:pPr indent="0" marL="0">
+              <a:buNone/>
+            </a:pPr>
+            <a:r>
+              <a:rPr lang="en-US" sz="1000" u="sng" dirty="0">
+                <a:solidFill>
+                  <a:srgbClr val="526777"/>
+                </a:solidFill>
+                <a:latin typeface="Segoe UI" pitchFamily="34" charset="0"/>
+                <a:ea typeface="Segoe UI" pitchFamily="34" charset="-122"/>
+                <a:cs typeface="Segoe UI" pitchFamily="34" charset="-120"/>
+                <a:hlinkClick r:id="rId1" invalidUrl="" action="" tgtFrame="" tooltip="" history="1" highlightClick="0" endSnd="0">
+                  <a:extLst>
+                    <a:ext uri="{A12FA001-AC4F-418D-AE19-62706E023703}">
+                      <ahyp:hlinkClr xmlns:ahyp="http://schemas.microsoft.com/office/drawing/2018/hyperlinkcolor" val="tx"/>
+                    </a:ext>
+                  </a:extLst>
+                </a:hlinkClick>
+              </a:rPr>
+              <a:t>Formation synthétique | Guide et Atelier 19</a:t>
+            </a:r>
+            <a:endParaRPr lang="en-US" sz="1000" dirty="0"/>
+          </a:p>
+        </p:txBody>
+      </p:sp>
+      <p:sp>
+        <p:nvSpPr>
+          <p:cNvPr id="18" name="Text 16"/>
+          <p:cNvSpPr/>
+          <p:nvPr/>
+        </p:nvSpPr>
+        <p:spPr>
+          <a:xfrm>
+            <a:off x="10515600" y="6419088"/>
+            <a:ext cx="1097280" cy="210312"/>
+          </a:xfrm>
+          <a:prstGeom prst="rect">
+            <a:avLst/>
+          </a:prstGeom>
+          <a:noFill/>
+          <a:ln/>
+        </p:spPr>
+        <p:txBody>
+          <a:bodyPr wrap="square" lIns="0" tIns="0" rIns="0" bIns="0" rtlCol="0" anchor="ctr"/>
+          <a:lstStyle/>
+          <a:p>
+            <a:pPr algn="r" indent="0" marL="0">
+              <a:buNone/>
+            </a:pPr>
+            <a:r>
+              <a:rPr lang="en-US" sz="1000" dirty="0">
+                <a:solidFill>
+                  <a:srgbClr val="526777"/>
+                </a:solidFill>
+                <a:latin typeface="Segoe UI" pitchFamily="34" charset="0"/>
+                <a:ea typeface="Segoe UI" pitchFamily="34" charset="-122"/>
+                <a:cs typeface="Segoe UI" pitchFamily="34" charset="-120"/>
+              </a:rPr>
+              <a:t>36 / 37</a:t>
+            </a:r>
+            <a:endParaRPr lang="en-US" sz="1000" dirty="0"/>
+          </a:p>
+        </p:txBody>
+      </p:sp>
+    </p:spTree>
+  </p:cSld>
+  <p:clrMapOvr>
+    <a:masterClrMapping/>
+  </p:clrMapOvr>
+</p:sld>
+</file>
+
+<file path=ppt/slides/slide37.xml><?xml version="1.0" encoding="utf-8"?>
+<p:sld xmlns:a="http://schemas.openxmlformats.org/drawingml/2006/main" xmlns:r="http://schemas.openxmlformats.org/officeDocument/2006/relationships" xmlns:p="http://schemas.openxmlformats.org/presentationml/2006/main">
+  <p:cSld name="Slide 37">
+    <p:bg>
+      <p:bgPr>
+        <a:solidFill>
+          <a:srgbClr val="FAFBFC"/>
+        </a:solidFill>
+      </p:bgPr>
+    </p:bg>
+    <p:spTree>
+      <p:nvGrpSpPr>
+        <p:cNvPr id="1" name=""/>
+        <p:cNvGrpSpPr/>
+        <p:nvPr/>
+      </p:nvGrpSpPr>
+      <p:grpSpPr>
+        <a:xfrm>
+          <a:off x="0" y="0"/>
+          <a:ext cx="0" cy="0"/>
+          <a:chOff x="0" y="0"/>
+          <a:chExt cx="0" cy="0"/>
+        </a:xfrm>
+      </p:grpSpPr>
+      <p:sp>
+        <p:nvSpPr>
+          <p:cNvPr id="2" name="Shape 0"/>
+          <p:cNvSpPr/>
+          <p:nvPr/>
+        </p:nvSpPr>
+        <p:spPr>
+          <a:xfrm>
+            <a:off x="0" y="0"/>
+            <a:ext cx="12191695" cy="82296"/>
+          </a:xfrm>
+          <a:prstGeom prst="rect">
+            <a:avLst/>
+          </a:prstGeom>
+          <a:solidFill>
+            <a:srgbClr val="0078D4"/>
+          </a:solidFill>
+          <a:ln w="12700">
+            <a:solidFill>
+              <a:srgbClr val="333333">
+                <a:alpha val="0"/>
+              </a:srgbClr>
+            </a:solidFill>
+            <a:prstDash val="solid"/>
+          </a:ln>
+        </p:spPr>
+      </p:sp>
+      <p:sp>
+        <p:nvSpPr>
+          <p:cNvPr id="3" name="Text 1"/>
+          <p:cNvSpPr/>
+          <p:nvPr/>
+        </p:nvSpPr>
+        <p:spPr>
+          <a:xfrm>
+            <a:off x="548640" y="320040"/>
+            <a:ext cx="11064240" cy="274320"/>
+          </a:xfrm>
+          <a:prstGeom prst="rect">
+            <a:avLst/>
+          </a:prstGeom>
+          <a:noFill/>
+          <a:ln/>
+        </p:spPr>
+        <p:txBody>
+          <a:bodyPr wrap="square" lIns="0" tIns="0" rIns="0" bIns="0" rtlCol="0" anchor="ctr"/>
+          <a:lstStyle/>
+          <a:p>
+            <a:pPr indent="0" marL="0">
+              <a:buNone/>
+            </a:pPr>
+            <a:r>
+              <a:rPr lang="en-US" sz="1100" b="1" dirty="0">
+                <a:solidFill>
+                  <a:srgbClr val="0078D4"/>
+                </a:solidFill>
+                <a:latin typeface="Segoe UI" pitchFamily="34" charset="0"/>
+                <a:ea typeface="Segoe UI" pitchFamily="34" charset="-122"/>
+                <a:cs typeface="Segoe UI" pitchFamily="34" charset="-120"/>
+              </a:rPr>
+              <a:t>FOUNDRY / INGÉNIERIE DE L’ÉVALUATION</a:t>
+            </a:r>
+            <a:endParaRPr lang="en-US" sz="1100" dirty="0"/>
+          </a:p>
+        </p:txBody>
+      </p:sp>
+      <p:sp>
+        <p:nvSpPr>
+          <p:cNvPr id="4" name="Text 2"/>
+          <p:cNvSpPr/>
+          <p:nvPr/>
+        </p:nvSpPr>
+        <p:spPr>
+          <a:xfrm>
+            <a:off x="548640" y="777240"/>
+            <a:ext cx="11064240" cy="822960"/>
+          </a:xfrm>
+          <a:prstGeom prst="rect">
+            <a:avLst/>
+          </a:prstGeom>
+          <a:noFill/>
+          <a:ln/>
+        </p:spPr>
+        <p:txBody>
+          <a:bodyPr wrap="square" lIns="0" tIns="0" rIns="0" bIns="0" rtlCol="0" anchor="ctr"/>
+          <a:lstStyle/>
+          <a:p>
+            <a:pPr indent="0" marL="0">
+              <a:buNone/>
+            </a:pPr>
+            <a:r>
+              <a:rPr lang="en-US" sz="2700" b="1" dirty="0">
+                <a:solidFill>
+                  <a:srgbClr val="001B3D"/>
+                </a:solidFill>
+                <a:latin typeface="Segoe UI" pitchFamily="34" charset="0"/>
+                <a:ea typeface="Segoe UI" pitchFamily="34" charset="-122"/>
+                <a:cs typeface="Segoe UI" pitchFamily="34" charset="-120"/>
+              </a:rPr>
+              <a:t>Emporter atelier, guide et preuves</a:t>
+            </a:r>
+            <a:endParaRPr lang="en-US" sz="2700" dirty="0"/>
+          </a:p>
+        </p:txBody>
+      </p:sp>
+      <p:sp>
+        <p:nvSpPr>
+          <p:cNvPr id="5" name="Text 3"/>
+          <p:cNvSpPr/>
+          <p:nvPr/>
+        </p:nvSpPr>
+        <p:spPr>
+          <a:xfrm>
+            <a:off x="594360" y="1828800"/>
+            <a:ext cx="640080" cy="594360"/>
+          </a:xfrm>
+          <a:prstGeom prst="rect">
+            <a:avLst/>
+          </a:prstGeom>
+          <a:noFill/>
+          <a:ln/>
+        </p:spPr>
+        <p:txBody>
+          <a:bodyPr wrap="square" lIns="0" tIns="0" rIns="0" bIns="0" rtlCol="0" anchor="ctr"/>
+          <a:lstStyle/>
+          <a:p>
+            <a:pPr indent="0" marL="0">
+              <a:buNone/>
+            </a:pPr>
+            <a:r>
+              <a:rPr lang="en-US" sz="1700" b="1" dirty="0">
+                <a:solidFill>
+                  <a:srgbClr val="0078D4"/>
+                </a:solidFill>
+                <a:latin typeface="Segoe UI" pitchFamily="34" charset="0"/>
+                <a:ea typeface="Segoe UI" pitchFamily="34" charset="-122"/>
+                <a:cs typeface="Segoe UI" pitchFamily="34" charset="-120"/>
+              </a:rPr>
+              <a:t>01</a:t>
+            </a:r>
+            <a:endParaRPr lang="en-US" sz="1700" dirty="0"/>
+          </a:p>
+        </p:txBody>
+      </p:sp>
+      <p:sp>
+        <p:nvSpPr>
+          <p:cNvPr id="6" name="Text 4"/>
+          <p:cNvSpPr/>
+          <p:nvPr/>
+        </p:nvSpPr>
+        <p:spPr>
+          <a:xfrm>
+            <a:off x="1325880" y="1828800"/>
+            <a:ext cx="10195560" cy="731520"/>
+          </a:xfrm>
+          <a:prstGeom prst="rect">
+            <a:avLst/>
+          </a:prstGeom>
+          <a:noFill/>
+          <a:ln/>
+        </p:spPr>
+        <p:txBody>
+          <a:bodyPr wrap="square" lIns="0" tIns="0" rIns="0" bIns="0" rtlCol="0" anchor="ctr"/>
+          <a:lstStyle/>
+          <a:p>
+            <a:pPr indent="0" marL="0">
+              <a:buNone/>
+            </a:pPr>
+            <a:r>
+              <a:rPr lang="en-US" sz="2000" dirty="0">
+                <a:solidFill>
+                  <a:srgbClr val="183449"/>
+                </a:solidFill>
+                <a:latin typeface="Segoe UI" pitchFamily="34" charset="0"/>
+                <a:ea typeface="Segoe UI" pitchFamily="34" charset="-122"/>
+                <a:cs typeface="Segoe UI" pitchFamily="34" charset="-120"/>
+              </a:rPr>
+              <a:t>Atelier 19 : dix exercices progressifs avec commandes exécutables.</a:t>
+            </a:r>
+            <a:endParaRPr lang="en-US" sz="2000" dirty="0"/>
+          </a:p>
+        </p:txBody>
+      </p:sp>
+      <p:sp>
+        <p:nvSpPr>
+          <p:cNvPr id="7" name="Shape 5"/>
+          <p:cNvSpPr/>
+          <p:nvPr/>
+        </p:nvSpPr>
+        <p:spPr>
+          <a:xfrm>
+            <a:off x="1325880" y="2660904"/>
+            <a:ext cx="10149840" cy="0"/>
+          </a:xfrm>
+          <a:prstGeom prst="line">
+            <a:avLst/>
+          </a:prstGeom>
+          <a:noFill/>
+          <a:ln w="6350">
+            <a:solidFill>
+              <a:srgbClr val="DCE5ED"/>
+            </a:solidFill>
+            <a:prstDash val="solid"/>
+          </a:ln>
+        </p:spPr>
+      </p:sp>
+      <p:sp>
+        <p:nvSpPr>
+          <p:cNvPr id="8" name="Text 6"/>
+          <p:cNvSpPr/>
+          <p:nvPr/>
+        </p:nvSpPr>
+        <p:spPr>
+          <a:xfrm>
+            <a:off x="594360" y="2770632"/>
+            <a:ext cx="640080" cy="594360"/>
+          </a:xfrm>
+          <a:prstGeom prst="rect">
+            <a:avLst/>
+          </a:prstGeom>
+          <a:noFill/>
+          <a:ln/>
+        </p:spPr>
+        <p:txBody>
+          <a:bodyPr wrap="square" lIns="0" tIns="0" rIns="0" bIns="0" rtlCol="0" anchor="ctr"/>
+          <a:lstStyle/>
+          <a:p>
+            <a:pPr indent="0" marL="0">
+              <a:buNone/>
+            </a:pPr>
+            <a:r>
+              <a:rPr lang="en-US" sz="1700" b="1" dirty="0">
+                <a:solidFill>
+                  <a:srgbClr val="0078D4"/>
+                </a:solidFill>
+                <a:latin typeface="Segoe UI" pitchFamily="34" charset="0"/>
+                <a:ea typeface="Segoe UI" pitchFamily="34" charset="-122"/>
+                <a:cs typeface="Segoe UI" pitchFamily="34" charset="-120"/>
+              </a:rPr>
+              <a:t>02</a:t>
+            </a:r>
+            <a:endParaRPr lang="en-US" sz="1700" dirty="0"/>
+          </a:p>
+        </p:txBody>
+      </p:sp>
+      <p:sp>
+        <p:nvSpPr>
+          <p:cNvPr id="9" name="Text 7"/>
+          <p:cNvSpPr/>
+          <p:nvPr/>
+        </p:nvSpPr>
+        <p:spPr>
+          <a:xfrm>
+            <a:off x="1325880" y="2770632"/>
+            <a:ext cx="10195560" cy="731520"/>
+          </a:xfrm>
+          <a:prstGeom prst="rect">
+            <a:avLst/>
+          </a:prstGeom>
+          <a:noFill/>
+          <a:ln/>
+        </p:spPr>
+        <p:txBody>
+          <a:bodyPr wrap="square" lIns="0" tIns="0" rIns="0" bIns="0" rtlCol="0" anchor="ctr"/>
+          <a:lstStyle/>
+          <a:p>
+            <a:pPr indent="0" marL="0">
+              <a:buNone/>
+            </a:pPr>
+            <a:r>
+              <a:rPr lang="en-US" sz="2000" dirty="0">
+                <a:solidFill>
+                  <a:srgbClr val="183449"/>
+                </a:solidFill>
+                <a:latin typeface="Segoe UI" pitchFamily="34" charset="0"/>
+                <a:ea typeface="Segoe UI" pitchFamily="34" charset="-122"/>
+                <a:cs typeface="Segoe UI" pitchFamily="34" charset="-120"/>
+              </a:rPr>
+              <a:t>Guide : portail, mappings SDK, politique et diagnostic.</a:t>
+            </a:r>
+            <a:endParaRPr lang="en-US" sz="2000" dirty="0"/>
+          </a:p>
+        </p:txBody>
+      </p:sp>
+      <p:sp>
+        <p:nvSpPr>
+          <p:cNvPr id="10" name="Shape 8"/>
+          <p:cNvSpPr/>
+          <p:nvPr/>
+        </p:nvSpPr>
+        <p:spPr>
+          <a:xfrm>
+            <a:off x="1325880" y="3602736"/>
+            <a:ext cx="10149840" cy="0"/>
+          </a:xfrm>
+          <a:prstGeom prst="line">
+            <a:avLst/>
+          </a:prstGeom>
+          <a:noFill/>
+          <a:ln w="6350">
+            <a:solidFill>
+              <a:srgbClr val="DCE5ED"/>
+            </a:solidFill>
+            <a:prstDash val="solid"/>
+          </a:ln>
+        </p:spPr>
+      </p:sp>
+      <p:sp>
+        <p:nvSpPr>
+          <p:cNvPr id="11" name="Text 9"/>
+          <p:cNvSpPr/>
+          <p:nvPr/>
+        </p:nvSpPr>
+        <p:spPr>
+          <a:xfrm>
+            <a:off x="594360" y="3712464"/>
+            <a:ext cx="640080" cy="594360"/>
+          </a:xfrm>
+          <a:prstGeom prst="rect">
+            <a:avLst/>
+          </a:prstGeom>
+          <a:noFill/>
+          <a:ln/>
+        </p:spPr>
+        <p:txBody>
+          <a:bodyPr wrap="square" lIns="0" tIns="0" rIns="0" bIns="0" rtlCol="0" anchor="ctr"/>
+          <a:lstStyle/>
+          <a:p>
+            <a:pPr indent="0" marL="0">
+              <a:buNone/>
+            </a:pPr>
+            <a:r>
+              <a:rPr lang="en-US" sz="1700" b="1" dirty="0">
+                <a:solidFill>
+                  <a:srgbClr val="0078D4"/>
+                </a:solidFill>
+                <a:latin typeface="Segoe UI" pitchFamily="34" charset="0"/>
+                <a:ea typeface="Segoe UI" pitchFamily="34" charset="-122"/>
+                <a:cs typeface="Segoe UI" pitchFamily="34" charset="-120"/>
+              </a:rPr>
+              <a:t>03</a:t>
+            </a:r>
+            <a:endParaRPr lang="en-US" sz="1700" dirty="0"/>
+          </a:p>
+        </p:txBody>
+      </p:sp>
+      <p:sp>
+        <p:nvSpPr>
+          <p:cNvPr id="12" name="Text 10"/>
+          <p:cNvSpPr/>
+          <p:nvPr/>
+        </p:nvSpPr>
+        <p:spPr>
+          <a:xfrm>
+            <a:off x="1325880" y="3712464"/>
+            <a:ext cx="10195560" cy="731520"/>
+          </a:xfrm>
+          <a:prstGeom prst="rect">
+            <a:avLst/>
+          </a:prstGeom>
+          <a:noFill/>
+          <a:ln/>
+        </p:spPr>
+        <p:txBody>
+          <a:bodyPr wrap="square" lIns="0" tIns="0" rIns="0" bIns="0" rtlCol="0" anchor="ctr"/>
+          <a:lstStyle/>
+          <a:p>
+            <a:pPr indent="0" marL="0">
+              <a:buNone/>
+            </a:pPr>
+            <a:r>
+              <a:rPr lang="en-US" sz="2000" dirty="0">
+                <a:solidFill>
+                  <a:srgbClr val="183449"/>
+                </a:solidFill>
+                <a:latin typeface="Segoe UI" pitchFamily="34" charset="0"/>
+                <a:ea typeface="Segoe UI" pitchFamily="34" charset="-122"/>
+                <a:cs typeface="Segoe UI" pitchFamily="34" charset="-120"/>
+              </a:rPr>
+              <a:t>Présentation : PowerPoint EN/FR modifiables et notes formateur.</a:t>
+            </a:r>
+            <a:endParaRPr lang="en-US" sz="2000" dirty="0"/>
+          </a:p>
+        </p:txBody>
+      </p:sp>
+      <p:sp>
+        <p:nvSpPr>
+          <p:cNvPr id="13" name="Shape 11"/>
+          <p:cNvSpPr/>
+          <p:nvPr/>
+        </p:nvSpPr>
+        <p:spPr>
+          <a:xfrm>
+            <a:off x="1325880" y="4544568"/>
+            <a:ext cx="10149840" cy="0"/>
+          </a:xfrm>
+          <a:prstGeom prst="line">
+            <a:avLst/>
+          </a:prstGeom>
+          <a:noFill/>
+          <a:ln w="6350">
+            <a:solidFill>
+              <a:srgbClr val="DCE5ED"/>
+            </a:solidFill>
+            <a:prstDash val="solid"/>
+          </a:ln>
+        </p:spPr>
+      </p:sp>
+      <p:sp>
+        <p:nvSpPr>
+          <p:cNvPr id="14" name="Text 12"/>
+          <p:cNvSpPr/>
+          <p:nvPr/>
+        </p:nvSpPr>
+        <p:spPr>
+          <a:xfrm>
+            <a:off x="594360" y="4654296"/>
+            <a:ext cx="640080" cy="594360"/>
+          </a:xfrm>
+          <a:prstGeom prst="rect">
+            <a:avLst/>
+          </a:prstGeom>
+          <a:noFill/>
+          <a:ln/>
+        </p:spPr>
+        <p:txBody>
+          <a:bodyPr wrap="square" lIns="0" tIns="0" rIns="0" bIns="0" rtlCol="0" anchor="ctr"/>
+          <a:lstStyle/>
+          <a:p>
+            <a:pPr indent="0" marL="0">
+              <a:buNone/>
+            </a:pPr>
+            <a:r>
+              <a:rPr lang="en-US" sz="1700" b="1" dirty="0">
+                <a:solidFill>
+                  <a:srgbClr val="0078D4"/>
+                </a:solidFill>
+                <a:latin typeface="Segoe UI" pitchFamily="34" charset="0"/>
+                <a:ea typeface="Segoe UI" pitchFamily="34" charset="-122"/>
+                <a:cs typeface="Segoe UI" pitchFamily="34" charset="-120"/>
+              </a:rPr>
+              <a:t>04</a:t>
+            </a:r>
+            <a:endParaRPr lang="en-US" sz="1700" dirty="0"/>
+          </a:p>
+        </p:txBody>
+      </p:sp>
+      <p:sp>
+        <p:nvSpPr>
+          <p:cNvPr id="15" name="Text 13"/>
+          <p:cNvSpPr/>
+          <p:nvPr/>
+        </p:nvSpPr>
+        <p:spPr>
+          <a:xfrm>
+            <a:off x="1325880" y="4654296"/>
+            <a:ext cx="10195560" cy="731520"/>
+          </a:xfrm>
+          <a:prstGeom prst="rect">
+            <a:avLst/>
+          </a:prstGeom>
+          <a:noFill/>
+          <a:ln/>
+        </p:spPr>
+        <p:txBody>
+          <a:bodyPr wrap="square" lIns="0" tIns="0" rIns="0" bIns="0" rtlCol="0" anchor="ctr"/>
+          <a:lstStyle/>
+          <a:p>
+            <a:pPr indent="0" marL="0">
+              <a:buNone/>
+            </a:pPr>
+            <a:r>
+              <a:rPr lang="en-US" sz="2000" dirty="0">
+                <a:solidFill>
+                  <a:srgbClr val="183449"/>
+                </a:solidFill>
+                <a:latin typeface="Segoe UI" pitchFamily="34" charset="0"/>
+                <a:ea typeface="Segoe UI" pitchFamily="34" charset="-122"/>
+                <a:cs typeface="Segoe UI" pitchFamily="34" charset="-120"/>
+              </a:rPr>
+              <a:t>Sources : liens Microsoft Learn officiels dans les notes.</a:t>
+            </a:r>
+            <a:endParaRPr lang="en-US" sz="2000" dirty="0"/>
+          </a:p>
+        </p:txBody>
+      </p:sp>
+      <p:sp>
+        <p:nvSpPr>
+          <p:cNvPr id="16" name="Shape 14"/>
+          <p:cNvSpPr/>
+          <p:nvPr/>
+        </p:nvSpPr>
+        <p:spPr>
+          <a:xfrm>
+            <a:off x="1325880" y="5486400"/>
+            <a:ext cx="10149840" cy="0"/>
+          </a:xfrm>
+          <a:prstGeom prst="line">
+            <a:avLst/>
+          </a:prstGeom>
+          <a:noFill/>
+          <a:ln w="6350">
+            <a:solidFill>
+              <a:srgbClr val="DCE5ED"/>
+            </a:solidFill>
+            <a:prstDash val="solid"/>
+          </a:ln>
+        </p:spPr>
+      </p:sp>
+      <p:sp>
+        <p:nvSpPr>
+          <p:cNvPr id="17" name="Text 15">
+            <a:hlinkClick r:id="rId1" tooltip=""/>
+          </p:cNvPr>
+          <p:cNvSpPr/>
+          <p:nvPr/>
+        </p:nvSpPr>
+        <p:spPr>
+          <a:xfrm>
+            <a:off x="548640" y="6419088"/>
+            <a:ext cx="9784080" cy="210312"/>
+          </a:xfrm>
+          <a:prstGeom prst="rect">
+            <a:avLst/>
+          </a:prstGeom>
+          <a:noFill/>
+          <a:ln/>
+        </p:spPr>
+        <p:txBody>
+          <a:bodyPr wrap="square" lIns="0" tIns="0" rIns="0" bIns="0" rtlCol="0" anchor="ctr"/>
+          <a:lstStyle/>
+          <a:p>
+            <a:pPr indent="0" marL="0">
+              <a:buNone/>
+            </a:pPr>
+            <a:r>
+              <a:rPr lang="en-US" sz="1000" u="sng" dirty="0">
+                <a:solidFill>
+                  <a:srgbClr val="526777"/>
+                </a:solidFill>
+                <a:latin typeface="Segoe UI" pitchFamily="34" charset="0"/>
+                <a:ea typeface="Segoe UI" pitchFamily="34" charset="-122"/>
+                <a:cs typeface="Segoe UI" pitchFamily="34" charset="-120"/>
+                <a:hlinkClick r:id="rId1" invalidUrl="" action="" tgtFrame="" tooltip="" history="1" highlightClick="0" endSnd="0">
+                  <a:extLst>
+                    <a:ext uri="{A12FA001-AC4F-418D-AE19-62706E023703}">
+                      <ahyp:hlinkClr xmlns:ahyp="http://schemas.microsoft.com/office/drawing/2018/hyperlinkcolor" val="tx"/>
+                    </a:ext>
+                  </a:extLst>
+                </a:hlinkClick>
+              </a:rPr>
+              <a:t>Formation synthétique | Guide et Atelier 19</a:t>
+            </a:r>
+            <a:endParaRPr lang="en-US" sz="1000" dirty="0"/>
+          </a:p>
+        </p:txBody>
+      </p:sp>
+      <p:sp>
+        <p:nvSpPr>
+          <p:cNvPr id="18" name="Text 16"/>
+          <p:cNvSpPr/>
+          <p:nvPr/>
+        </p:nvSpPr>
+        <p:spPr>
+          <a:xfrm>
+            <a:off x="10515600" y="6419088"/>
+            <a:ext cx="1097280" cy="210312"/>
+          </a:xfrm>
+          <a:prstGeom prst="rect">
+            <a:avLst/>
+          </a:prstGeom>
+          <a:noFill/>
+          <a:ln/>
+        </p:spPr>
+        <p:txBody>
+          <a:bodyPr wrap="square" lIns="0" tIns="0" rIns="0" bIns="0" rtlCol="0" anchor="ctr"/>
+          <a:lstStyle/>
+          <a:p>
+            <a:pPr algn="r" indent="0" marL="0">
+              <a:buNone/>
+            </a:pPr>
+            <a:r>
+              <a:rPr lang="en-US" sz="1000" dirty="0">
+                <a:solidFill>
+                  <a:srgbClr val="526777"/>
+                </a:solidFill>
+                <a:latin typeface="Segoe UI" pitchFamily="34" charset="0"/>
+                <a:ea typeface="Segoe UI" pitchFamily="34" charset="-122"/>
+                <a:cs typeface="Segoe UI" pitchFamily="34" charset="-120"/>
+              </a:rPr>
+              <a:t>37 / 37</a:t>
             </a:r>
             <a:endParaRPr lang="en-US" sz="1000" dirty="0"/>
           </a:p>
@@ -22125,7 +22966,7 @@
                 <a:ea typeface="Segoe UI" pitchFamily="34" charset="-122"/>
                 <a:cs typeface="Segoe UI" pitchFamily="34" charset="-120"/>
               </a:rPr>
-              <a:t>4 / 35</a:t>
+              <a:t>4 / 37</a:t>
             </a:r>
             <a:endParaRPr lang="en-US" sz="1000" dirty="0"/>
           </a:p>
@@ -22753,7 +23594,7 @@
                 <a:ea typeface="Segoe UI" pitchFamily="34" charset="-122"/>
                 <a:cs typeface="Segoe UI" pitchFamily="34" charset="-120"/>
               </a:rPr>
-              <a:t>5 / 35</a:t>
+              <a:t>5 / 37</a:t>
             </a:r>
             <a:endParaRPr lang="en-US" sz="1000" dirty="0"/>
           </a:p>
@@ -23389,7 +24230,7 @@
                 <a:ea typeface="Segoe UI" pitchFamily="34" charset="-122"/>
                 <a:cs typeface="Segoe UI" pitchFamily="34" charset="-120"/>
               </a:rPr>
-              <a:t>6 / 35</a:t>
+              <a:t>6 / 37</a:t>
             </a:r>
             <a:endParaRPr lang="en-US" sz="1000" dirty="0"/>
           </a:p>
@@ -24017,7 +24858,7 @@
                 <a:ea typeface="Segoe UI" pitchFamily="34" charset="-122"/>
                 <a:cs typeface="Segoe UI" pitchFamily="34" charset="-120"/>
               </a:rPr>
-              <a:t>7 / 35</a:t>
+              <a:t>7 / 37</a:t>
             </a:r>
             <a:endParaRPr lang="en-US" sz="1000" dirty="0"/>
           </a:p>
@@ -24645,7 +25486,7 @@
                 <a:ea typeface="Segoe UI" pitchFamily="34" charset="-122"/>
                 <a:cs typeface="Segoe UI" pitchFamily="34" charset="-120"/>
               </a:rPr>
-              <a:t>8 / 35</a:t>
+              <a:t>8 / 37</a:t>
             </a:r>
             <a:endParaRPr lang="en-US" sz="1000" dirty="0"/>
           </a:p>
@@ -25273,7 +26114,7 @@
                 <a:ea typeface="Segoe UI" pitchFamily="34" charset="-122"/>
                 <a:cs typeface="Segoe UI" pitchFamily="34" charset="-120"/>
               </a:rPr>
-              <a:t>9 / 35</a:t>
+              <a:t>9 / 37</a:t>
             </a:r>
             <a:endParaRPr lang="en-US" sz="1000" dirty="0"/>
           </a:p>
